--- a/pptx/Lecture2.pptx
+++ b/pptx/Lecture2.pptx
@@ -5,7 +5,7 @@
     <p:sldMasterId id="2147483648" r:id="rId1"/>
   </p:sldMasterIdLst>
   <p:notesMasterIdLst>
-    <p:notesMasterId r:id="rId32"/>
+    <p:notesMasterId r:id="rId31"/>
   </p:notesMasterIdLst>
   <p:sldIdLst>
     <p:sldId id="256" r:id="rId2"/>
@@ -22,22 +22,21 @@
     <p:sldId id="273" r:id="rId13"/>
     <p:sldId id="300" r:id="rId14"/>
     <p:sldId id="274" r:id="rId15"/>
-    <p:sldId id="301" r:id="rId16"/>
-    <p:sldId id="286" r:id="rId17"/>
-    <p:sldId id="287" r:id="rId18"/>
-    <p:sldId id="288" r:id="rId19"/>
-    <p:sldId id="289" r:id="rId20"/>
+    <p:sldId id="286" r:id="rId16"/>
+    <p:sldId id="287" r:id="rId17"/>
+    <p:sldId id="288" r:id="rId18"/>
+    <p:sldId id="289" r:id="rId19"/>
+    <p:sldId id="292" r:id="rId20"/>
     <p:sldId id="278" r:id="rId21"/>
-    <p:sldId id="281" r:id="rId22"/>
-    <p:sldId id="280" r:id="rId23"/>
-    <p:sldId id="293" r:id="rId24"/>
-    <p:sldId id="282" r:id="rId25"/>
-    <p:sldId id="283" r:id="rId26"/>
-    <p:sldId id="284" r:id="rId27"/>
-    <p:sldId id="294" r:id="rId28"/>
+    <p:sldId id="293" r:id="rId22"/>
+    <p:sldId id="284" r:id="rId23"/>
+    <p:sldId id="282" r:id="rId24"/>
+    <p:sldId id="283" r:id="rId25"/>
+    <p:sldId id="301" r:id="rId26"/>
+    <p:sldId id="281" r:id="rId27"/>
+    <p:sldId id="280" r:id="rId28"/>
     <p:sldId id="291" r:id="rId29"/>
-    <p:sldId id="292" r:id="rId30"/>
-    <p:sldId id="285" r:id="rId31"/>
+    <p:sldId id="285" r:id="rId30"/>
   </p:sldIdLst>
   <p:sldSz cx="12192000" cy="6858000"/>
   <p:notesSz cx="6858000" cy="9144000"/>
@@ -6566,7 +6565,7 @@
           <a:p>
             <a:fld id="{4995A223-E7C9-A243-9A70-FE01E1A1DD65}" type="datetimeFigureOut">
               <a:rPr lang="en-US" smtClean="0"/>
-              <a:t>8/20/26</a:t>
+              <a:t>8/23/26</a:t>
             </a:fld>
             <a:endParaRPr lang="en-US"/>
           </a:p>
@@ -6954,7 +6953,13 @@
   <p:cSld>
     <p:spTree>
       <p:nvGrpSpPr>
-        <p:cNvPr id="1" name=""/>
+        <p:cNvPr id="1" name="">
+          <a:extLst>
+            <a:ext uri="{FF2B5EF4-FFF2-40B4-BE49-F238E27FC236}">
+              <a16:creationId xmlns:a16="http://schemas.microsoft.com/office/drawing/2014/main" id="{0819824E-912C-DDF9-3D68-7365C0A88068}"/>
+            </a:ext>
+          </a:extLst>
+        </p:cNvPr>
         <p:cNvGrpSpPr/>
         <p:nvPr/>
       </p:nvGrpSpPr>
@@ -6968,7 +6973,13 @@
       </p:grpSpPr>
       <p:sp>
         <p:nvSpPr>
-          <p:cNvPr id="2" name="Slide Image Placeholder 1"/>
+          <p:cNvPr id="2" name="Slide Image Placeholder 1">
+            <a:extLst>
+              <a:ext uri="{FF2B5EF4-FFF2-40B4-BE49-F238E27FC236}">
+                <a16:creationId xmlns:a16="http://schemas.microsoft.com/office/drawing/2014/main" id="{DB9A5BD0-99D6-37BA-74FD-C644C27CA81B}"/>
+              </a:ext>
+            </a:extLst>
+          </p:cNvPr>
           <p:cNvSpPr>
             <a:spLocks noGrp="1" noRot="1" noChangeAspect="1"/>
           </p:cNvSpPr>
@@ -6980,7 +6991,13 @@
       </p:sp>
       <p:sp>
         <p:nvSpPr>
-          <p:cNvPr id="3" name="Notes Placeholder 2"/>
+          <p:cNvPr id="3" name="Notes Placeholder 2">
+            <a:extLst>
+              <a:ext uri="{FF2B5EF4-FFF2-40B4-BE49-F238E27FC236}">
+                <a16:creationId xmlns:a16="http://schemas.microsoft.com/office/drawing/2014/main" id="{D5438432-4124-3B40-4588-C4080AD43971}"/>
+              </a:ext>
+            </a:extLst>
+          </p:cNvPr>
           <p:cNvSpPr>
             <a:spLocks noGrp="1"/>
           </p:cNvSpPr>
@@ -6993,40 +7010,22 @@
           <a:bodyPr/>
           <a:lstStyle/>
           <a:p>
-            <a:pPr marL="0" marR="0" lvl="0" indent="0" algn="l" defTabSz="914400" rtl="0" eaLnBrk="1" fontAlgn="auto" latinLnBrk="0" hangingPunct="1">
-              <a:lnSpc>
-                <a:spcPct val="100000"/>
-              </a:lnSpc>
-              <a:spcBef>
-                <a:spcPts val="0"/>
-              </a:spcBef>
-              <a:spcAft>
-                <a:spcPts val="0"/>
-              </a:spcAft>
-              <a:buClrTx/>
-              <a:buSzTx/>
-              <a:buFontTx/>
-              <a:buNone/>
-              <a:tabLst/>
-              <a:defRPr/>
-            </a:pPr>
-            <a:r>
-              <a:rPr lang="en-GB" dirty="0"/>
-              <a:t>Sports analytics is not defined by how complicated the method is. It is defined by whether data are being used thoughtfully to understand a problem and support a decision. Sometimes that requires a predictive model. </a:t>
-            </a:r>
-            <a:r>
-              <a:rPr lang="en-GB"/>
-              <a:t>Often, it requires accurate reporting, appropriate context, and clear communication.</a:t>
-            </a:r>
-          </a:p>
-          <a:p>
-            <a:endParaRPr lang="en-US"/>
+            <a:r>
+              <a:rPr lang="en-US" dirty="0"/>
+              <a:t>EXPLAIN</a:t>
+            </a:r>
           </a:p>
         </p:txBody>
       </p:sp>
       <p:sp>
         <p:nvSpPr>
-          <p:cNvPr id="4" name="Slide Number Placeholder 3"/>
+          <p:cNvPr id="4" name="Slide Number Placeholder 3">
+            <a:extLst>
+              <a:ext uri="{FF2B5EF4-FFF2-40B4-BE49-F238E27FC236}">
+                <a16:creationId xmlns:a16="http://schemas.microsoft.com/office/drawing/2014/main" id="{5C00A71E-B712-7EBC-E168-3A3405E9C4E4}"/>
+              </a:ext>
+            </a:extLst>
+          </p:cNvPr>
           <p:cNvSpPr>
             <a:spLocks noGrp="1"/>
           </p:cNvSpPr>
@@ -7041,7 +7040,7 @@
           <a:p>
             <a:fld id="{117D17FD-8842-8E4F-8C3E-EC8B634B2D5A}" type="slidenum">
               <a:rPr lang="en-US" smtClean="0"/>
-              <a:t>26</a:t>
+              <a:t>19</a:t>
             </a:fld>
             <a:endParaRPr lang="en-US"/>
           </a:p>
@@ -7050,7 +7049,7 @@
     </p:spTree>
     <p:extLst>
       <p:ext uri="{BB962C8B-B14F-4D97-AF65-F5344CB8AC3E}">
-        <p14:creationId xmlns:p14="http://schemas.microsoft.com/office/powerpoint/2010/main" val="1782973083"/>
+        <p14:creationId xmlns:p14="http://schemas.microsoft.com/office/powerpoint/2010/main" val="359992081"/>
       </p:ext>
     </p:extLst>
   </p:cSld>
@@ -7104,10 +7103,34 @@
           <a:bodyPr/>
           <a:lstStyle/>
           <a:p>
-            <a:r>
-              <a:rPr lang="en-US" dirty="0"/>
-              <a:t>EXPLAIN</a:t>
-            </a:r>
+            <a:pPr marL="0" marR="0" lvl="0" indent="0" algn="l" defTabSz="914400" rtl="0" eaLnBrk="1" fontAlgn="auto" latinLnBrk="0" hangingPunct="1">
+              <a:lnSpc>
+                <a:spcPct val="100000"/>
+              </a:lnSpc>
+              <a:spcBef>
+                <a:spcPts val="0"/>
+              </a:spcBef>
+              <a:spcAft>
+                <a:spcPts val="0"/>
+              </a:spcAft>
+              <a:buClrTx/>
+              <a:buSzTx/>
+              <a:buFontTx/>
+              <a:buNone/>
+              <a:tabLst/>
+              <a:defRPr/>
+            </a:pPr>
+            <a:r>
+              <a:rPr lang="en-GB" dirty="0"/>
+              <a:t>Sports analytics is not defined by how complicated the method is. It is defined by whether data are being used thoughtfully to understand a problem and support a decision. Sometimes that requires a predictive model. </a:t>
+            </a:r>
+            <a:r>
+              <a:rPr lang="en-GB"/>
+              <a:t>Often, it requires accurate reporting, appropriate context, and clear communication.</a:t>
+            </a:r>
+          </a:p>
+          <a:p>
+            <a:endParaRPr lang="en-US"/>
           </a:p>
         </p:txBody>
       </p:sp>
@@ -7128,7 +7151,7 @@
           <a:p>
             <a:fld id="{117D17FD-8842-8E4F-8C3E-EC8B634B2D5A}" type="slidenum">
               <a:rPr lang="en-US" smtClean="0"/>
-              <a:t>28</a:t>
+              <a:t>22</a:t>
             </a:fld>
             <a:endParaRPr lang="en-US"/>
           </a:p>
@@ -7137,7 +7160,7 @@
     </p:spTree>
     <p:extLst>
       <p:ext uri="{BB962C8B-B14F-4D97-AF65-F5344CB8AC3E}">
-        <p14:creationId xmlns:p14="http://schemas.microsoft.com/office/powerpoint/2010/main" val="492396201"/>
+        <p14:creationId xmlns:p14="http://schemas.microsoft.com/office/powerpoint/2010/main" val="1782973083"/>
       </p:ext>
     </p:extLst>
   </p:cSld>
@@ -7152,13 +7175,7 @@
   <p:cSld>
     <p:spTree>
       <p:nvGrpSpPr>
-        <p:cNvPr id="1" name="">
-          <a:extLst>
-            <a:ext uri="{FF2B5EF4-FFF2-40B4-BE49-F238E27FC236}">
-              <a16:creationId xmlns:a16="http://schemas.microsoft.com/office/drawing/2014/main" id="{0819824E-912C-DDF9-3D68-7365C0A88068}"/>
-            </a:ext>
-          </a:extLst>
-        </p:cNvPr>
+        <p:cNvPr id="1" name=""/>
         <p:cNvGrpSpPr/>
         <p:nvPr/>
       </p:nvGrpSpPr>
@@ -7172,13 +7189,7 @@
       </p:grpSpPr>
       <p:sp>
         <p:nvSpPr>
-          <p:cNvPr id="2" name="Slide Image Placeholder 1">
-            <a:extLst>
-              <a:ext uri="{FF2B5EF4-FFF2-40B4-BE49-F238E27FC236}">
-                <a16:creationId xmlns:a16="http://schemas.microsoft.com/office/drawing/2014/main" id="{DB9A5BD0-99D6-37BA-74FD-C644C27CA81B}"/>
-              </a:ext>
-            </a:extLst>
-          </p:cNvPr>
+          <p:cNvPr id="2" name="Slide Image Placeholder 1"/>
           <p:cNvSpPr>
             <a:spLocks noGrp="1" noRot="1" noChangeAspect="1"/>
           </p:cNvSpPr>
@@ -7190,13 +7201,7 @@
       </p:sp>
       <p:sp>
         <p:nvSpPr>
-          <p:cNvPr id="3" name="Notes Placeholder 2">
-            <a:extLst>
-              <a:ext uri="{FF2B5EF4-FFF2-40B4-BE49-F238E27FC236}">
-                <a16:creationId xmlns:a16="http://schemas.microsoft.com/office/drawing/2014/main" id="{D5438432-4124-3B40-4588-C4080AD43971}"/>
-              </a:ext>
-            </a:extLst>
-          </p:cNvPr>
+          <p:cNvPr id="3" name="Notes Placeholder 2"/>
           <p:cNvSpPr>
             <a:spLocks noGrp="1"/>
           </p:cNvSpPr>
@@ -7218,13 +7223,7 @@
       </p:sp>
       <p:sp>
         <p:nvSpPr>
-          <p:cNvPr id="4" name="Slide Number Placeholder 3">
-            <a:extLst>
-              <a:ext uri="{FF2B5EF4-FFF2-40B4-BE49-F238E27FC236}">
-                <a16:creationId xmlns:a16="http://schemas.microsoft.com/office/drawing/2014/main" id="{5C00A71E-B712-7EBC-E168-3A3405E9C4E4}"/>
-              </a:ext>
-            </a:extLst>
-          </p:cNvPr>
+          <p:cNvPr id="4" name="Slide Number Placeholder 3"/>
           <p:cNvSpPr>
             <a:spLocks noGrp="1"/>
           </p:cNvSpPr>
@@ -7239,7 +7238,7 @@
           <a:p>
             <a:fld id="{117D17FD-8842-8E4F-8C3E-EC8B634B2D5A}" type="slidenum">
               <a:rPr lang="en-US" smtClean="0"/>
-              <a:t>29</a:t>
+              <a:t>28</a:t>
             </a:fld>
             <a:endParaRPr lang="en-US"/>
           </a:p>
@@ -7248,7 +7247,7 @@
     </p:spTree>
     <p:extLst>
       <p:ext uri="{BB962C8B-B14F-4D97-AF65-F5344CB8AC3E}">
-        <p14:creationId xmlns:p14="http://schemas.microsoft.com/office/powerpoint/2010/main" val="359992081"/>
+        <p14:creationId xmlns:p14="http://schemas.microsoft.com/office/powerpoint/2010/main" val="492396201"/>
       </p:ext>
     </p:extLst>
   </p:cSld>
@@ -7415,7 +7414,7 @@
           <a:p>
             <a:fld id="{1BF61C71-767E-B84C-BFB3-7B18856D27F4}" type="datetimeFigureOut">
               <a:rPr lang="en-US" smtClean="0"/>
-              <a:t>8/20/26</a:t>
+              <a:t>8/23/26</a:t>
             </a:fld>
             <a:endParaRPr lang="en-US"/>
           </a:p>
@@ -7623,7 +7622,7 @@
           <a:p>
             <a:fld id="{1BF61C71-767E-B84C-BFB3-7B18856D27F4}" type="datetimeFigureOut">
               <a:rPr lang="en-US" smtClean="0"/>
-              <a:t>8/20/26</a:t>
+              <a:t>8/23/26</a:t>
             </a:fld>
             <a:endParaRPr lang="en-US"/>
           </a:p>
@@ -7841,7 +7840,7 @@
           <a:p>
             <a:fld id="{1BF61C71-767E-B84C-BFB3-7B18856D27F4}" type="datetimeFigureOut">
               <a:rPr lang="en-US" smtClean="0"/>
-              <a:t>8/20/26</a:t>
+              <a:t>8/23/26</a:t>
             </a:fld>
             <a:endParaRPr lang="en-US"/>
           </a:p>
@@ -8049,7 +8048,7 @@
           <a:p>
             <a:fld id="{1BF61C71-767E-B84C-BFB3-7B18856D27F4}" type="datetimeFigureOut">
               <a:rPr lang="en-US" smtClean="0"/>
-              <a:t>8/20/26</a:t>
+              <a:t>8/23/26</a:t>
             </a:fld>
             <a:endParaRPr lang="en-US"/>
           </a:p>
@@ -8333,7 +8332,7 @@
           <a:p>
             <a:fld id="{1BF61C71-767E-B84C-BFB3-7B18856D27F4}" type="datetimeFigureOut">
               <a:rPr lang="en-US" smtClean="0"/>
-              <a:t>8/20/26</a:t>
+              <a:t>8/23/26</a:t>
             </a:fld>
             <a:endParaRPr lang="en-US"/>
           </a:p>
@@ -8609,7 +8608,7 @@
           <a:p>
             <a:fld id="{1BF61C71-767E-B84C-BFB3-7B18856D27F4}" type="datetimeFigureOut">
               <a:rPr lang="en-US" smtClean="0"/>
-              <a:t>8/20/26</a:t>
+              <a:t>8/23/26</a:t>
             </a:fld>
             <a:endParaRPr lang="en-US"/>
           </a:p>
@@ -9032,7 +9031,7 @@
           <a:p>
             <a:fld id="{1BF61C71-767E-B84C-BFB3-7B18856D27F4}" type="datetimeFigureOut">
               <a:rPr lang="en-US" smtClean="0"/>
-              <a:t>8/20/26</a:t>
+              <a:t>8/23/26</a:t>
             </a:fld>
             <a:endParaRPr lang="en-US"/>
           </a:p>
@@ -9182,7 +9181,7 @@
           <a:p>
             <a:fld id="{1BF61C71-767E-B84C-BFB3-7B18856D27F4}" type="datetimeFigureOut">
               <a:rPr lang="en-US" smtClean="0"/>
-              <a:t>8/20/26</a:t>
+              <a:t>8/23/26</a:t>
             </a:fld>
             <a:endParaRPr lang="en-US"/>
           </a:p>
@@ -9303,7 +9302,7 @@
           <a:p>
             <a:fld id="{1BF61C71-767E-B84C-BFB3-7B18856D27F4}" type="datetimeFigureOut">
               <a:rPr lang="en-US" smtClean="0"/>
-              <a:t>8/20/26</a:t>
+              <a:t>8/23/26</a:t>
             </a:fld>
             <a:endParaRPr lang="en-US"/>
           </a:p>
@@ -9624,7 +9623,7 @@
           <a:p>
             <a:fld id="{1BF61C71-767E-B84C-BFB3-7B18856D27F4}" type="datetimeFigureOut">
               <a:rPr lang="en-US" smtClean="0"/>
-              <a:t>8/20/26</a:t>
+              <a:t>8/23/26</a:t>
             </a:fld>
             <a:endParaRPr lang="en-US"/>
           </a:p>
@@ -9921,7 +9920,7 @@
           <a:p>
             <a:fld id="{1BF61C71-767E-B84C-BFB3-7B18856D27F4}" type="datetimeFigureOut">
               <a:rPr lang="en-US" smtClean="0"/>
-              <a:t>8/20/26</a:t>
+              <a:t>8/23/26</a:t>
             </a:fld>
             <a:endParaRPr lang="en-US"/>
           </a:p>
@@ -10175,7 +10174,7 @@
           <a:p>
             <a:fld id="{1BF61C71-767E-B84C-BFB3-7B18856D27F4}" type="datetimeFigureOut">
               <a:rPr lang="en-US" smtClean="0"/>
-              <a:t>8/20/26</a:t>
+              <a:t>8/23/26</a:t>
             </a:fld>
             <a:endParaRPr lang="en-US"/>
           </a:p>
@@ -11284,7 +11283,10 @@
           <a:bodyPr/>
           <a:lstStyle/>
           <a:p>
-            <a:endParaRPr lang="en-US"/>
+            <a:r>
+              <a:rPr lang="en-US" dirty="0"/>
+              <a:t>Developing an Analytical Question</a:t>
+            </a:r>
           </a:p>
         </p:txBody>
       </p:sp>
@@ -11308,20 +11310,6 @@
         <p:txBody>
           <a:bodyPr/>
           <a:lstStyle/>
-          <a:p>
-            <a:r>
-              <a:rPr lang="en-GB" dirty="0"/>
-              <a:t>“</a:t>
-            </a:r>
-            <a:r>
-              <a:rPr lang="en-GB" dirty="0" err="1"/>
-              <a:t>Analyze</a:t>
-            </a:r>
-            <a:r>
-              <a:rPr lang="en-GB" dirty="0"/>
-              <a:t> athlete tracking data” is a topic, not an analytical question.</a:t>
-            </a:r>
-          </a:p>
           <a:p>
             <a:r>
               <a:rPr lang="en-GB" dirty="0"/>
@@ -11562,86 +11550,6 @@
           <p:cNvPr id="2" name="Title 1">
             <a:extLst>
               <a:ext uri="{FF2B5EF4-FFF2-40B4-BE49-F238E27FC236}">
-                <a16:creationId xmlns:a16="http://schemas.microsoft.com/office/drawing/2014/main" id="{7B30F3A1-AF1F-90E3-4F88-E6C496367B75}"/>
-              </a:ext>
-            </a:extLst>
-          </p:cNvPr>
-          <p:cNvSpPr>
-            <a:spLocks noGrp="1"/>
-          </p:cNvSpPr>
-          <p:nvPr>
-            <p:ph type="title"/>
-          </p:nvPr>
-        </p:nvSpPr>
-        <p:spPr/>
-        <p:txBody>
-          <a:bodyPr/>
-          <a:lstStyle/>
-          <a:p>
-            <a:endParaRPr lang="en-US"/>
-          </a:p>
-        </p:txBody>
-      </p:sp>
-      <p:sp>
-        <p:nvSpPr>
-          <p:cNvPr id="3" name="Content Placeholder 2">
-            <a:extLst>
-              <a:ext uri="{FF2B5EF4-FFF2-40B4-BE49-F238E27FC236}">
-                <a16:creationId xmlns:a16="http://schemas.microsoft.com/office/drawing/2014/main" id="{8E5F28C5-769D-5A20-4EA5-2B62C608BEE0}"/>
-              </a:ext>
-            </a:extLst>
-          </p:cNvPr>
-          <p:cNvSpPr>
-            <a:spLocks noGrp="1"/>
-          </p:cNvSpPr>
-          <p:nvPr>
-            <p:ph idx="1"/>
-          </p:nvPr>
-        </p:nvSpPr>
-        <p:spPr/>
-        <p:txBody>
-          <a:bodyPr/>
-          <a:lstStyle/>
-          <a:p>
-            <a:endParaRPr lang="en-US"/>
-          </a:p>
-        </p:txBody>
-      </p:sp>
-    </p:spTree>
-    <p:extLst>
-      <p:ext uri="{BB962C8B-B14F-4D97-AF65-F5344CB8AC3E}">
-        <p14:creationId xmlns:p14="http://schemas.microsoft.com/office/powerpoint/2010/main" val="525598496"/>
-      </p:ext>
-    </p:extLst>
-  </p:cSld>
-  <p:clrMapOvr>
-    <a:masterClrMapping/>
-  </p:clrMapOvr>
-</p:sld>
-</file>
-
-<file path=ppt/slides/slide16.xml><?xml version="1.0" encoding="utf-8"?>
-<p:sld xmlns:a="http://schemas.openxmlformats.org/drawingml/2006/main" xmlns:r="http://schemas.openxmlformats.org/officeDocument/2006/relationships" xmlns:p="http://schemas.openxmlformats.org/presentationml/2006/main">
-  <p:cSld>
-    <p:spTree>
-      <p:nvGrpSpPr>
-        <p:cNvPr id="1" name=""/>
-        <p:cNvGrpSpPr/>
-        <p:nvPr/>
-      </p:nvGrpSpPr>
-      <p:grpSpPr>
-        <a:xfrm>
-          <a:off x="0" y="0"/>
-          <a:ext cx="0" cy="0"/>
-          <a:chOff x="0" y="0"/>
-          <a:chExt cx="0" cy="0"/>
-        </a:xfrm>
-      </p:grpSpPr>
-      <p:sp>
-        <p:nvSpPr>
-          <p:cNvPr id="2" name="Title 1">
-            <a:extLst>
-              <a:ext uri="{FF2B5EF4-FFF2-40B4-BE49-F238E27FC236}">
                 <a16:creationId xmlns:a16="http://schemas.microsoft.com/office/drawing/2014/main" id="{489EC1E5-3253-BE3B-A177-555F6256FD6E}"/>
               </a:ext>
             </a:extLst>
@@ -11751,7 +11659,7 @@
 </p:sld>
 </file>
 
-<file path=ppt/slides/slide17.xml><?xml version="1.0" encoding="utf-8"?>
+<file path=ppt/slides/slide16.xml><?xml version="1.0" encoding="utf-8"?>
 <p:sld xmlns:a="http://schemas.openxmlformats.org/drawingml/2006/main" xmlns:r="http://schemas.openxmlformats.org/officeDocument/2006/relationships" xmlns:p="http://schemas.openxmlformats.org/presentationml/2006/main">
   <p:cSld>
     <p:spTree>
@@ -11906,7 +11814,7 @@
 </p:sld>
 </file>
 
-<file path=ppt/slides/slide18.xml><?xml version="1.0" encoding="utf-8"?>
+<file path=ppt/slides/slide17.xml><?xml version="1.0" encoding="utf-8"?>
 <p:sld xmlns:a="http://schemas.openxmlformats.org/drawingml/2006/main" xmlns:r="http://schemas.openxmlformats.org/officeDocument/2006/relationships" xmlns:p="http://schemas.openxmlformats.org/presentationml/2006/main">
   <p:cSld>
     <p:spTree>
@@ -12039,7 +11947,7 @@
 </p:sld>
 </file>
 
-<file path=ppt/slides/slide19.xml><?xml version="1.0" encoding="utf-8"?>
+<file path=ppt/slides/slide18.xml><?xml version="1.0" encoding="utf-8"?>
 <p:sld xmlns:a="http://schemas.openxmlformats.org/drawingml/2006/main" xmlns:r="http://schemas.openxmlformats.org/officeDocument/2006/relationships" xmlns:p="http://schemas.openxmlformats.org/presentationml/2006/main">
   <p:cSld>
     <p:spTree>
@@ -12172,6 +12080,160 @@
     <p:extLst>
       <p:ext uri="{BB962C8B-B14F-4D97-AF65-F5344CB8AC3E}">
         <p14:creationId xmlns:p14="http://schemas.microsoft.com/office/powerpoint/2010/main" val="721161968"/>
+      </p:ext>
+    </p:extLst>
+  </p:cSld>
+  <p:clrMapOvr>
+    <a:masterClrMapping/>
+  </p:clrMapOvr>
+</p:sld>
+</file>
+
+<file path=ppt/slides/slide19.xml><?xml version="1.0" encoding="utf-8"?>
+<p:sld xmlns:a="http://schemas.openxmlformats.org/drawingml/2006/main" xmlns:r="http://schemas.openxmlformats.org/officeDocument/2006/relationships" xmlns:p="http://schemas.openxmlformats.org/presentationml/2006/main" show="0">
+  <p:cSld>
+    <p:spTree>
+      <p:nvGrpSpPr>
+        <p:cNvPr id="1" name="">
+          <a:extLst>
+            <a:ext uri="{FF2B5EF4-FFF2-40B4-BE49-F238E27FC236}">
+              <a16:creationId xmlns:a16="http://schemas.microsoft.com/office/drawing/2014/main" id="{E922E2CF-A80A-AF59-D558-526F3B121E48}"/>
+            </a:ext>
+          </a:extLst>
+        </p:cNvPr>
+        <p:cNvGrpSpPr/>
+        <p:nvPr/>
+      </p:nvGrpSpPr>
+      <p:grpSpPr>
+        <a:xfrm>
+          <a:off x="0" y="0"/>
+          <a:ext cx="0" cy="0"/>
+          <a:chOff x="0" y="0"/>
+          <a:chExt cx="0" cy="0"/>
+        </a:xfrm>
+      </p:grpSpPr>
+      <p:sp>
+        <p:nvSpPr>
+          <p:cNvPr id="2" name="Title 1">
+            <a:extLst>
+              <a:ext uri="{FF2B5EF4-FFF2-40B4-BE49-F238E27FC236}">
+                <a16:creationId xmlns:a16="http://schemas.microsoft.com/office/drawing/2014/main" id="{1D2580D1-4049-1628-7F57-F500A7F6380D}"/>
+              </a:ext>
+            </a:extLst>
+          </p:cNvPr>
+          <p:cNvSpPr>
+            <a:spLocks noGrp="1"/>
+          </p:cNvSpPr>
+          <p:nvPr>
+            <p:ph type="title"/>
+          </p:nvPr>
+        </p:nvSpPr>
+        <p:spPr/>
+        <p:txBody>
+          <a:bodyPr>
+            <a:noAutofit/>
+          </a:bodyPr>
+          <a:lstStyle/>
+          <a:p>
+            <a:r>
+              <a:rPr lang="en-US" sz="4000" dirty="0"/>
+              <a:t>“What is going on??”</a:t>
+            </a:r>
+          </a:p>
+        </p:txBody>
+      </p:sp>
+      <p:sp>
+        <p:nvSpPr>
+          <p:cNvPr id="3" name="Content Placeholder 2">
+            <a:extLst>
+              <a:ext uri="{FF2B5EF4-FFF2-40B4-BE49-F238E27FC236}">
+                <a16:creationId xmlns:a16="http://schemas.microsoft.com/office/drawing/2014/main" id="{87AACD65-58A7-C8D7-2F7D-E8AD7B05383E}"/>
+              </a:ext>
+            </a:extLst>
+          </p:cNvPr>
+          <p:cNvSpPr>
+            <a:spLocks noGrp="1"/>
+          </p:cNvSpPr>
+          <p:nvPr>
+            <p:ph idx="1"/>
+          </p:nvPr>
+        </p:nvSpPr>
+        <p:spPr/>
+        <p:txBody>
+          <a:bodyPr/>
+          <a:lstStyle/>
+          <a:p>
+            <a:r>
+              <a:rPr lang="en-US" dirty="0"/>
+              <a:t>Things we need to figure out:</a:t>
+            </a:r>
+          </a:p>
+          <a:p>
+            <a:pPr marL="914400" lvl="1" indent="-457200">
+              <a:buFont typeface="+mj-lt"/>
+              <a:buAutoNum type="arabicPeriod"/>
+            </a:pPr>
+            <a:r>
+              <a:rPr lang="en-GB" dirty="0"/>
+              <a:t>What should the team change before the next game?</a:t>
+            </a:r>
+          </a:p>
+          <a:p>
+            <a:pPr marL="914400" lvl="1" indent="-457200">
+              <a:buFont typeface="+mj-lt"/>
+              <a:buAutoNum type="arabicPeriod"/>
+            </a:pPr>
+            <a:r>
+              <a:rPr lang="en-GB" dirty="0"/>
+              <a:t>What factors may be contributing to the losses?</a:t>
+            </a:r>
+          </a:p>
+          <a:p>
+            <a:pPr marL="914400" lvl="1" indent="-457200">
+              <a:buFont typeface="+mj-lt"/>
+              <a:buAutoNum type="arabicPeriod"/>
+            </a:pPr>
+            <a:r>
+              <a:rPr lang="en-GB" dirty="0"/>
+              <a:t>What has changed during the last five games?</a:t>
+            </a:r>
+          </a:p>
+          <a:p>
+            <a:pPr marL="914400" lvl="1" indent="-457200">
+              <a:buFont typeface="+mj-lt"/>
+              <a:buAutoNum type="arabicPeriod"/>
+            </a:pPr>
+            <a:r>
+              <a:rPr lang="en-GB" dirty="0"/>
+              <a:t>What is likely to happen if the current pattern continues?</a:t>
+            </a:r>
+          </a:p>
+          <a:p>
+            <a:pPr marL="914400" lvl="1" indent="-457200">
+              <a:buFont typeface="+mj-lt"/>
+              <a:buAutoNum type="arabicPeriod"/>
+            </a:pPr>
+            <a:endParaRPr lang="en-GB" dirty="0"/>
+          </a:p>
+          <a:p>
+            <a:r>
+              <a:rPr lang="en-GB" dirty="0"/>
+              <a:t>Which domain of sports analytics are we in?</a:t>
+            </a:r>
+          </a:p>
+          <a:p>
+            <a:r>
+              <a:rPr lang="en-GB" dirty="0"/>
+              <a:t>Put these questions in the order you think they should be addressed.</a:t>
+            </a:r>
+            <a:endParaRPr lang="en-US" dirty="0"/>
+          </a:p>
+        </p:txBody>
+      </p:sp>
+    </p:spTree>
+    <p:extLst>
+      <p:ext uri="{BB962C8B-B14F-4D97-AF65-F5344CB8AC3E}">
+        <p14:creationId xmlns:p14="http://schemas.microsoft.com/office/powerpoint/2010/main" val="3429352342"/>
       </p:ext>
     </p:extLst>
   </p:cSld>
@@ -12428,254 +12490,6 @@
 </file>
 
 <file path=ppt/slides/slide21.xml><?xml version="1.0" encoding="utf-8"?>
-<p:sld xmlns:a="http://schemas.openxmlformats.org/drawingml/2006/main" xmlns:r="http://schemas.openxmlformats.org/officeDocument/2006/relationships" xmlns:p="http://schemas.openxmlformats.org/presentationml/2006/main">
-  <p:cSld>
-    <p:spTree>
-      <p:nvGrpSpPr>
-        <p:cNvPr id="1" name=""/>
-        <p:cNvGrpSpPr/>
-        <p:nvPr/>
-      </p:nvGrpSpPr>
-      <p:grpSpPr>
-        <a:xfrm>
-          <a:off x="0" y="0"/>
-          <a:ext cx="0" cy="0"/>
-          <a:chOff x="0" y="0"/>
-          <a:chExt cx="0" cy="0"/>
-        </a:xfrm>
-      </p:grpSpPr>
-      <p:sp>
-        <p:nvSpPr>
-          <p:cNvPr id="2" name="Title 1">
-            <a:extLst>
-              <a:ext uri="{FF2B5EF4-FFF2-40B4-BE49-F238E27FC236}">
-                <a16:creationId xmlns:a16="http://schemas.microsoft.com/office/drawing/2014/main" id="{93D610FF-6703-8068-7ABF-ED20489ECABF}"/>
-              </a:ext>
-            </a:extLst>
-          </p:cNvPr>
-          <p:cNvSpPr>
-            <a:spLocks noGrp="1"/>
-          </p:cNvSpPr>
-          <p:nvPr>
-            <p:ph type="title"/>
-          </p:nvPr>
-        </p:nvSpPr>
-        <p:spPr/>
-        <p:txBody>
-          <a:bodyPr/>
-          <a:lstStyle/>
-          <a:p>
-            <a:r>
-              <a:rPr lang="en-US" dirty="0"/>
-              <a:t>Scenarios </a:t>
-            </a:r>
-          </a:p>
-        </p:txBody>
-      </p:sp>
-      <p:sp>
-        <p:nvSpPr>
-          <p:cNvPr id="3" name="Content Placeholder 2">
-            <a:extLst>
-              <a:ext uri="{FF2B5EF4-FFF2-40B4-BE49-F238E27FC236}">
-                <a16:creationId xmlns:a16="http://schemas.microsoft.com/office/drawing/2014/main" id="{63906137-364A-DE22-57E2-CF9CEDECC6B1}"/>
-              </a:ext>
-            </a:extLst>
-          </p:cNvPr>
-          <p:cNvSpPr>
-            <a:spLocks noGrp="1"/>
-          </p:cNvSpPr>
-          <p:nvPr>
-            <p:ph idx="1"/>
-          </p:nvPr>
-        </p:nvSpPr>
-        <p:spPr/>
-        <p:txBody>
-          <a:bodyPr>
-            <a:normAutofit/>
-          </a:bodyPr>
-          <a:lstStyle/>
-          <a:p>
-            <a:r>
-              <a:rPr lang="en-GB" dirty="0"/>
-              <a:t>A basketball player completed considerably more high-intensity work than usual during the previous three days. The player needs to be ready for a game tomorrow.</a:t>
-            </a:r>
-          </a:p>
-          <a:p>
-            <a:r>
-              <a:rPr lang="en-GB" dirty="0"/>
-              <a:t>A basketball prospect scores 22 points per game. Your team is deciding whether to select the player in the first round of the draft.</a:t>
-            </a:r>
-          </a:p>
-          <a:p>
-            <a:r>
-              <a:rPr lang="en-GB" dirty="0"/>
-              <a:t>A soccer team has allowed five goals during its last four matches. How should the team prepare to play their next opponent.</a:t>
-            </a:r>
-            <a:endParaRPr lang="en-US" dirty="0"/>
-          </a:p>
-        </p:txBody>
-      </p:sp>
-    </p:spTree>
-    <p:extLst>
-      <p:ext uri="{BB962C8B-B14F-4D97-AF65-F5344CB8AC3E}">
-        <p14:creationId xmlns:p14="http://schemas.microsoft.com/office/powerpoint/2010/main" val="1267012885"/>
-      </p:ext>
-    </p:extLst>
-  </p:cSld>
-  <p:clrMapOvr>
-    <a:masterClrMapping/>
-  </p:clrMapOvr>
-</p:sld>
-</file>
-
-<file path=ppt/slides/slide22.xml><?xml version="1.0" encoding="utf-8"?>
-<p:sld xmlns:a="http://schemas.openxmlformats.org/drawingml/2006/main" xmlns:r="http://schemas.openxmlformats.org/officeDocument/2006/relationships" xmlns:p="http://schemas.openxmlformats.org/presentationml/2006/main">
-  <p:cSld>
-    <p:spTree>
-      <p:nvGrpSpPr>
-        <p:cNvPr id="1" name=""/>
-        <p:cNvGrpSpPr/>
-        <p:nvPr/>
-      </p:nvGrpSpPr>
-      <p:grpSpPr>
-        <a:xfrm>
-          <a:off x="0" y="0"/>
-          <a:ext cx="0" cy="0"/>
-          <a:chOff x="0" y="0"/>
-          <a:chExt cx="0" cy="0"/>
-        </a:xfrm>
-      </p:grpSpPr>
-      <p:sp>
-        <p:nvSpPr>
-          <p:cNvPr id="2" name="Title 1">
-            <a:extLst>
-              <a:ext uri="{FF2B5EF4-FFF2-40B4-BE49-F238E27FC236}">
-                <a16:creationId xmlns:a16="http://schemas.microsoft.com/office/drawing/2014/main" id="{403F4149-77C5-51D6-6364-A5DC1666CA69}"/>
-              </a:ext>
-            </a:extLst>
-          </p:cNvPr>
-          <p:cNvSpPr>
-            <a:spLocks noGrp="1"/>
-          </p:cNvSpPr>
-          <p:nvPr>
-            <p:ph type="title"/>
-          </p:nvPr>
-        </p:nvSpPr>
-        <p:spPr/>
-        <p:txBody>
-          <a:bodyPr/>
-          <a:lstStyle/>
-          <a:p>
-            <a:r>
-              <a:rPr lang="en-US" dirty="0"/>
-              <a:t>Example </a:t>
-            </a:r>
-          </a:p>
-        </p:txBody>
-      </p:sp>
-      <p:sp>
-        <p:nvSpPr>
-          <p:cNvPr id="3" name="Content Placeholder 2">
-            <a:extLst>
-              <a:ext uri="{FF2B5EF4-FFF2-40B4-BE49-F238E27FC236}">
-                <a16:creationId xmlns:a16="http://schemas.microsoft.com/office/drawing/2014/main" id="{F4AC8398-083C-ED0D-65C7-FA16DBE6BCED}"/>
-              </a:ext>
-            </a:extLst>
-          </p:cNvPr>
-          <p:cNvSpPr>
-            <a:spLocks noGrp="1"/>
-          </p:cNvSpPr>
-          <p:nvPr>
-            <p:ph idx="1"/>
-          </p:nvPr>
-        </p:nvSpPr>
-        <p:spPr/>
-        <p:txBody>
-          <a:bodyPr/>
-          <a:lstStyle/>
-          <a:p>
-            <a:r>
-              <a:rPr lang="en-GB" b="1" dirty="0"/>
-              <a:t>Domain:</a:t>
-            </a:r>
-            <a:r>
-              <a:rPr lang="en-GB" dirty="0"/>
-              <a:t> Athlete monitoring</a:t>
-            </a:r>
-          </a:p>
-          <a:p>
-            <a:r>
-              <a:rPr lang="en-GB" b="1" dirty="0"/>
-              <a:t>Decision:</a:t>
-            </a:r>
-            <a:r>
-              <a:rPr lang="en-GB" dirty="0"/>
-              <a:t> Should a player’s training load be reduced today?</a:t>
-            </a:r>
-          </a:p>
-          <a:p>
-            <a:pPr lvl="1"/>
-            <a:r>
-              <a:rPr lang="en-GB" b="1" dirty="0"/>
-              <a:t>Descriptive:</a:t>
-            </a:r>
-            <a:r>
-              <a:rPr lang="en-GB" dirty="0"/>
-              <a:t> The player completed substantially more high-intensity work than usual during the previous three days. </a:t>
-            </a:r>
-          </a:p>
-          <a:p>
-            <a:pPr lvl="1"/>
-            <a:r>
-              <a:rPr lang="en-GB" b="1" dirty="0"/>
-              <a:t>Diagnostic:</a:t>
-            </a:r>
-            <a:r>
-              <a:rPr lang="en-GB" dirty="0"/>
-              <a:t> The increase resulted from additional drill repetitions and reduced recovery time. </a:t>
-            </a:r>
-          </a:p>
-          <a:p>
-            <a:pPr lvl="1"/>
-            <a:r>
-              <a:rPr lang="en-GB" b="1" dirty="0"/>
-              <a:t>Predictive:</a:t>
-            </a:r>
-            <a:r>
-              <a:rPr lang="en-GB" dirty="0"/>
-              <a:t> Maintaining the planned load may increase the probability of poor performance or incomplete recovery tomorrow. </a:t>
-            </a:r>
-          </a:p>
-          <a:p>
-            <a:pPr lvl="1"/>
-            <a:r>
-              <a:rPr lang="en-GB" b="1" dirty="0"/>
-              <a:t>Prescriptive:</a:t>
-            </a:r>
-            <a:r>
-              <a:rPr lang="en-GB" dirty="0"/>
-              <a:t> Reduce today’s high-intensity volume while maintaining lower-intensity tactical participation.</a:t>
-            </a:r>
-          </a:p>
-          <a:p>
-            <a:endParaRPr lang="en-US" dirty="0"/>
-          </a:p>
-        </p:txBody>
-      </p:sp>
-    </p:spTree>
-    <p:extLst>
-      <p:ext uri="{BB962C8B-B14F-4D97-AF65-F5344CB8AC3E}">
-        <p14:creationId xmlns:p14="http://schemas.microsoft.com/office/powerpoint/2010/main" val="1069047801"/>
-      </p:ext>
-    </p:extLst>
-  </p:cSld>
-  <p:clrMapOvr>
-    <a:masterClrMapping/>
-  </p:clrMapOvr>
-</p:sld>
-</file>
-
-<file path=ppt/slides/slide23.xml><?xml version="1.0" encoding="utf-8"?>
 <p:sld xmlns:a="http://schemas.openxmlformats.org/drawingml/2006/main" xmlns:r="http://schemas.openxmlformats.org/officeDocument/2006/relationships" xmlns:p="http://schemas.openxmlformats.org/presentationml/2006/main">
   <p:cSld>
     <p:spTree>
@@ -13154,7 +12968,151 @@
 </p:sld>
 </file>
 
-<file path=ppt/slides/slide24.xml><?xml version="1.0" encoding="utf-8"?>
+<file path=ppt/slides/slide22.xml><?xml version="1.0" encoding="utf-8"?>
+<p:sld xmlns:a="http://schemas.openxmlformats.org/drawingml/2006/main" xmlns:r="http://schemas.openxmlformats.org/officeDocument/2006/relationships" xmlns:p="http://schemas.openxmlformats.org/presentationml/2006/main">
+  <p:cSld>
+    <p:spTree>
+      <p:nvGrpSpPr>
+        <p:cNvPr id="1" name="">
+          <a:extLst>
+            <a:ext uri="{FF2B5EF4-FFF2-40B4-BE49-F238E27FC236}">
+              <a16:creationId xmlns:a16="http://schemas.microsoft.com/office/drawing/2014/main" id="{339BC448-0E80-7EFF-4754-8229B404CAC0}"/>
+            </a:ext>
+          </a:extLst>
+        </p:cNvPr>
+        <p:cNvGrpSpPr/>
+        <p:nvPr/>
+      </p:nvGrpSpPr>
+      <p:grpSpPr>
+        <a:xfrm>
+          <a:off x="0" y="0"/>
+          <a:ext cx="0" cy="0"/>
+          <a:chOff x="0" y="0"/>
+          <a:chExt cx="0" cy="0"/>
+        </a:xfrm>
+      </p:grpSpPr>
+      <p:sp>
+        <p:nvSpPr>
+          <p:cNvPr id="2" name="Title 1">
+            <a:extLst>
+              <a:ext uri="{FF2B5EF4-FFF2-40B4-BE49-F238E27FC236}">
+                <a16:creationId xmlns:a16="http://schemas.microsoft.com/office/drawing/2014/main" id="{3B416AE1-4E7C-4C41-76FF-F2538718C69D}"/>
+              </a:ext>
+            </a:extLst>
+          </p:cNvPr>
+          <p:cNvSpPr>
+            <a:spLocks noGrp="1"/>
+          </p:cNvSpPr>
+          <p:nvPr>
+            <p:ph type="title"/>
+          </p:nvPr>
+        </p:nvSpPr>
+        <p:spPr/>
+        <p:txBody>
+          <a:bodyPr>
+            <a:normAutofit fontScale="90000"/>
+          </a:bodyPr>
+          <a:lstStyle/>
+          <a:p>
+            <a:r>
+              <a:rPr lang="en-GB" dirty="0"/>
+              <a:t>More Advanced Does Not Mean More Valuable</a:t>
+            </a:r>
+            <a:endParaRPr lang="en-US" dirty="0"/>
+          </a:p>
+        </p:txBody>
+      </p:sp>
+      <p:sp>
+        <p:nvSpPr>
+          <p:cNvPr id="3" name="Content Placeholder 2">
+            <a:extLst>
+              <a:ext uri="{FF2B5EF4-FFF2-40B4-BE49-F238E27FC236}">
+                <a16:creationId xmlns:a16="http://schemas.microsoft.com/office/drawing/2014/main" id="{7FFAA4CE-A3EC-AB3B-0675-93654EC1B928}"/>
+              </a:ext>
+            </a:extLst>
+          </p:cNvPr>
+          <p:cNvSpPr>
+            <a:spLocks noGrp="1"/>
+          </p:cNvSpPr>
+          <p:nvPr>
+            <p:ph idx="1"/>
+          </p:nvPr>
+        </p:nvSpPr>
+        <p:spPr/>
+        <p:txBody>
+          <a:bodyPr>
+            <a:normAutofit lnSpcReduction="10000"/>
+          </a:bodyPr>
+          <a:lstStyle/>
+          <a:p>
+            <a:r>
+              <a:rPr lang="en-GB" dirty="0"/>
+              <a:t>Much of the daily work in sports analytics is descriptive and diagnostic:</a:t>
+            </a:r>
+          </a:p>
+          <a:p>
+            <a:pPr lvl="1"/>
+            <a:r>
+              <a:rPr lang="en-GB" dirty="0"/>
+              <a:t>Collecting, cleaning, and organizing data</a:t>
+            </a:r>
+          </a:p>
+          <a:p>
+            <a:pPr lvl="1"/>
+            <a:r>
+              <a:rPr lang="en-GB" dirty="0"/>
+              <a:t>Defining metrics consistently</a:t>
+            </a:r>
+          </a:p>
+          <a:p>
+            <a:pPr lvl="1"/>
+            <a:r>
+              <a:rPr lang="en-GB" dirty="0"/>
+              <a:t>Monitoring recent performance and workload</a:t>
+            </a:r>
+          </a:p>
+          <a:p>
+            <a:pPr lvl="1"/>
+            <a:r>
+              <a:rPr lang="en-GB" dirty="0"/>
+              <a:t>Identifying meaningful changes or patterns</a:t>
+            </a:r>
+          </a:p>
+          <a:p>
+            <a:pPr lvl="1"/>
+            <a:r>
+              <a:rPr lang="en-GB" dirty="0"/>
+              <a:t>Communicating findings to coaches, athletes, and decision-makers</a:t>
+            </a:r>
+          </a:p>
+          <a:p>
+            <a:r>
+              <a:rPr lang="en-GB" dirty="0"/>
+              <a:t>Predictive models can be valuable, but only when they address a real decision and are supported by reliable foundational work.</a:t>
+            </a:r>
+          </a:p>
+          <a:p>
+            <a:r>
+              <a:rPr lang="en-GB" dirty="0"/>
+              <a:t>The best analysis is not necessarily the most complicated analysis. It is the analysis that helps someone make a better decision.</a:t>
+            </a:r>
+          </a:p>
+        </p:txBody>
+      </p:sp>
+    </p:spTree>
+    <p:extLst>
+      <p:ext uri="{BB962C8B-B14F-4D97-AF65-F5344CB8AC3E}">
+        <p14:creationId xmlns:p14="http://schemas.microsoft.com/office/powerpoint/2010/main" val="2329336833"/>
+      </p:ext>
+    </p:extLst>
+  </p:cSld>
+  <p:clrMapOvr>
+    <a:masterClrMapping/>
+  </p:clrMapOvr>
+</p:sld>
+</file>
+
+<file path=ppt/slides/slide23.xml><?xml version="1.0" encoding="utf-8"?>
 <p:sld xmlns:a="http://schemas.openxmlformats.org/drawingml/2006/main" xmlns:r="http://schemas.openxmlformats.org/officeDocument/2006/relationships" xmlns:p="http://schemas.openxmlformats.org/presentationml/2006/main">
   <p:cSld>
     <p:spTree>
@@ -13572,7 +13530,7 @@
 </p:sld>
 </file>
 
-<file path=ppt/slides/slide25.xml><?xml version="1.0" encoding="utf-8"?>
+<file path=ppt/slides/slide24.xml><?xml version="1.0" encoding="utf-8"?>
 <p:sld xmlns:a="http://schemas.openxmlformats.org/drawingml/2006/main" xmlns:r="http://schemas.openxmlformats.org/officeDocument/2006/relationships" xmlns:p="http://schemas.openxmlformats.org/presentationml/2006/main">
   <p:cSld>
     <p:spTree>
@@ -14299,151 +14257,7 @@
 </p:sld>
 </file>
 
-<file path=ppt/slides/slide26.xml><?xml version="1.0" encoding="utf-8"?>
-<p:sld xmlns:a="http://schemas.openxmlformats.org/drawingml/2006/main" xmlns:r="http://schemas.openxmlformats.org/officeDocument/2006/relationships" xmlns:p="http://schemas.openxmlformats.org/presentationml/2006/main">
-  <p:cSld>
-    <p:spTree>
-      <p:nvGrpSpPr>
-        <p:cNvPr id="1" name="">
-          <a:extLst>
-            <a:ext uri="{FF2B5EF4-FFF2-40B4-BE49-F238E27FC236}">
-              <a16:creationId xmlns:a16="http://schemas.microsoft.com/office/drawing/2014/main" id="{339BC448-0E80-7EFF-4754-8229B404CAC0}"/>
-            </a:ext>
-          </a:extLst>
-        </p:cNvPr>
-        <p:cNvGrpSpPr/>
-        <p:nvPr/>
-      </p:nvGrpSpPr>
-      <p:grpSpPr>
-        <a:xfrm>
-          <a:off x="0" y="0"/>
-          <a:ext cx="0" cy="0"/>
-          <a:chOff x="0" y="0"/>
-          <a:chExt cx="0" cy="0"/>
-        </a:xfrm>
-      </p:grpSpPr>
-      <p:sp>
-        <p:nvSpPr>
-          <p:cNvPr id="2" name="Title 1">
-            <a:extLst>
-              <a:ext uri="{FF2B5EF4-FFF2-40B4-BE49-F238E27FC236}">
-                <a16:creationId xmlns:a16="http://schemas.microsoft.com/office/drawing/2014/main" id="{3B416AE1-4E7C-4C41-76FF-F2538718C69D}"/>
-              </a:ext>
-            </a:extLst>
-          </p:cNvPr>
-          <p:cNvSpPr>
-            <a:spLocks noGrp="1"/>
-          </p:cNvSpPr>
-          <p:nvPr>
-            <p:ph type="title"/>
-          </p:nvPr>
-        </p:nvSpPr>
-        <p:spPr/>
-        <p:txBody>
-          <a:bodyPr>
-            <a:normAutofit fontScale="90000"/>
-          </a:bodyPr>
-          <a:lstStyle/>
-          <a:p>
-            <a:r>
-              <a:rPr lang="en-GB" dirty="0"/>
-              <a:t>More Advanced Does Not Mean More Valuable</a:t>
-            </a:r>
-            <a:endParaRPr lang="en-US" dirty="0"/>
-          </a:p>
-        </p:txBody>
-      </p:sp>
-      <p:sp>
-        <p:nvSpPr>
-          <p:cNvPr id="3" name="Content Placeholder 2">
-            <a:extLst>
-              <a:ext uri="{FF2B5EF4-FFF2-40B4-BE49-F238E27FC236}">
-                <a16:creationId xmlns:a16="http://schemas.microsoft.com/office/drawing/2014/main" id="{7FFAA4CE-A3EC-AB3B-0675-93654EC1B928}"/>
-              </a:ext>
-            </a:extLst>
-          </p:cNvPr>
-          <p:cNvSpPr>
-            <a:spLocks noGrp="1"/>
-          </p:cNvSpPr>
-          <p:nvPr>
-            <p:ph idx="1"/>
-          </p:nvPr>
-        </p:nvSpPr>
-        <p:spPr/>
-        <p:txBody>
-          <a:bodyPr>
-            <a:normAutofit lnSpcReduction="10000"/>
-          </a:bodyPr>
-          <a:lstStyle/>
-          <a:p>
-            <a:r>
-              <a:rPr lang="en-GB" dirty="0"/>
-              <a:t>Much of the daily work in sports analytics is descriptive and diagnostic:</a:t>
-            </a:r>
-          </a:p>
-          <a:p>
-            <a:pPr lvl="1"/>
-            <a:r>
-              <a:rPr lang="en-GB" dirty="0"/>
-              <a:t>Collecting, cleaning, and organizing data</a:t>
-            </a:r>
-          </a:p>
-          <a:p>
-            <a:pPr lvl="1"/>
-            <a:r>
-              <a:rPr lang="en-GB" dirty="0"/>
-              <a:t>Defining metrics consistently</a:t>
-            </a:r>
-          </a:p>
-          <a:p>
-            <a:pPr lvl="1"/>
-            <a:r>
-              <a:rPr lang="en-GB" dirty="0"/>
-              <a:t>Monitoring recent performance and workload</a:t>
-            </a:r>
-          </a:p>
-          <a:p>
-            <a:pPr lvl="1"/>
-            <a:r>
-              <a:rPr lang="en-GB" dirty="0"/>
-              <a:t>Identifying meaningful changes or patterns</a:t>
-            </a:r>
-          </a:p>
-          <a:p>
-            <a:pPr lvl="1"/>
-            <a:r>
-              <a:rPr lang="en-GB" dirty="0"/>
-              <a:t>Communicating findings to coaches, athletes, and decision-makers</a:t>
-            </a:r>
-          </a:p>
-          <a:p>
-            <a:r>
-              <a:rPr lang="en-GB" dirty="0"/>
-              <a:t>Predictive models can be valuable, but only when they address a real decision and are supported by reliable foundational work.</a:t>
-            </a:r>
-          </a:p>
-          <a:p>
-            <a:r>
-              <a:rPr lang="en-GB" dirty="0"/>
-              <a:t>The best analysis is not necessarily the most complicated analysis. It is the analysis that helps someone make a better decision.</a:t>
-            </a:r>
-          </a:p>
-        </p:txBody>
-      </p:sp>
-    </p:spTree>
-    <p:extLst>
-      <p:ext uri="{BB962C8B-B14F-4D97-AF65-F5344CB8AC3E}">
-        <p14:creationId xmlns:p14="http://schemas.microsoft.com/office/powerpoint/2010/main" val="2329336833"/>
-      </p:ext>
-    </p:extLst>
-  </p:cSld>
-  <p:clrMapOvr>
-    <a:masterClrMapping/>
-  </p:clrMapOvr>
-</p:sld>
-</file>
-
-<file path=ppt/slides/slide27.xml><?xml version="1.0" encoding="utf-8"?>
+<file path=ppt/slides/slide25.xml><?xml version="1.0" encoding="utf-8"?>
 <p:sld xmlns:a="http://schemas.openxmlformats.org/drawingml/2006/main" xmlns:r="http://schemas.openxmlformats.org/officeDocument/2006/relationships" xmlns:p="http://schemas.openxmlformats.org/presentationml/2006/main">
   <p:cSld>
     <p:spTree>
@@ -14512,14 +14326,290 @@
           <a:bodyPr/>
           <a:lstStyle/>
           <a:p>
-            <a:endParaRPr lang="en-US"/>
+            <a:r>
+              <a:rPr lang="en-US" dirty="0"/>
+              <a:t>The three domains describe where sport analytics is applied.</a:t>
+            </a:r>
+          </a:p>
+          <a:p>
+            <a:r>
+              <a:rPr lang="en-US" dirty="0"/>
+              <a:t>Descriptive, diagnostic, predictive, and prescriptive questions describe what the analysis is intended to accomplish.</a:t>
+            </a:r>
+          </a:p>
+          <a:p>
+            <a:pPr lvl="1"/>
+            <a:r>
+              <a:rPr lang="en-US" dirty="0"/>
+              <a:t>These purposes are connected, but not every analysis requires all four.</a:t>
+            </a:r>
+          </a:p>
+          <a:p>
+            <a:r>
+              <a:rPr lang="en-US" dirty="0"/>
+              <a:t>The most valuable analysis is the one that provides credible evidence for a meaningful decision.</a:t>
+            </a:r>
+          </a:p>
+          <a:p>
+            <a:r>
+              <a:rPr lang="en-US" dirty="0"/>
+              <a:t>Next: Turning practitioner concerns into clear, testable analytical questions</a:t>
+            </a:r>
           </a:p>
         </p:txBody>
       </p:sp>
     </p:spTree>
     <p:extLst>
       <p:ext uri="{BB962C8B-B14F-4D97-AF65-F5344CB8AC3E}">
-        <p14:creationId xmlns:p14="http://schemas.microsoft.com/office/powerpoint/2010/main" val="2732086937"/>
+        <p14:creationId xmlns:p14="http://schemas.microsoft.com/office/powerpoint/2010/main" val="2206692154"/>
+      </p:ext>
+    </p:extLst>
+  </p:cSld>
+  <p:clrMapOvr>
+    <a:masterClrMapping/>
+  </p:clrMapOvr>
+</p:sld>
+</file>
+
+<file path=ppt/slides/slide26.xml><?xml version="1.0" encoding="utf-8"?>
+<p:sld xmlns:a="http://schemas.openxmlformats.org/drawingml/2006/main" xmlns:r="http://schemas.openxmlformats.org/officeDocument/2006/relationships" xmlns:p="http://schemas.openxmlformats.org/presentationml/2006/main" show="0">
+  <p:cSld>
+    <p:spTree>
+      <p:nvGrpSpPr>
+        <p:cNvPr id="1" name=""/>
+        <p:cNvGrpSpPr/>
+        <p:nvPr/>
+      </p:nvGrpSpPr>
+      <p:grpSpPr>
+        <a:xfrm>
+          <a:off x="0" y="0"/>
+          <a:ext cx="0" cy="0"/>
+          <a:chOff x="0" y="0"/>
+          <a:chExt cx="0" cy="0"/>
+        </a:xfrm>
+      </p:grpSpPr>
+      <p:sp>
+        <p:nvSpPr>
+          <p:cNvPr id="2" name="Title 1">
+            <a:extLst>
+              <a:ext uri="{FF2B5EF4-FFF2-40B4-BE49-F238E27FC236}">
+                <a16:creationId xmlns:a16="http://schemas.microsoft.com/office/drawing/2014/main" id="{93D610FF-6703-8068-7ABF-ED20489ECABF}"/>
+              </a:ext>
+            </a:extLst>
+          </p:cNvPr>
+          <p:cNvSpPr>
+            <a:spLocks noGrp="1"/>
+          </p:cNvSpPr>
+          <p:nvPr>
+            <p:ph type="title"/>
+          </p:nvPr>
+        </p:nvSpPr>
+        <p:spPr/>
+        <p:txBody>
+          <a:bodyPr/>
+          <a:lstStyle/>
+          <a:p>
+            <a:r>
+              <a:rPr lang="en-US" dirty="0"/>
+              <a:t>Scenarios </a:t>
+            </a:r>
+          </a:p>
+        </p:txBody>
+      </p:sp>
+      <p:sp>
+        <p:nvSpPr>
+          <p:cNvPr id="3" name="Content Placeholder 2">
+            <a:extLst>
+              <a:ext uri="{FF2B5EF4-FFF2-40B4-BE49-F238E27FC236}">
+                <a16:creationId xmlns:a16="http://schemas.microsoft.com/office/drawing/2014/main" id="{63906137-364A-DE22-57E2-CF9CEDECC6B1}"/>
+              </a:ext>
+            </a:extLst>
+          </p:cNvPr>
+          <p:cNvSpPr>
+            <a:spLocks noGrp="1"/>
+          </p:cNvSpPr>
+          <p:nvPr>
+            <p:ph idx="1"/>
+          </p:nvPr>
+        </p:nvSpPr>
+        <p:spPr/>
+        <p:txBody>
+          <a:bodyPr>
+            <a:normAutofit/>
+          </a:bodyPr>
+          <a:lstStyle/>
+          <a:p>
+            <a:r>
+              <a:rPr lang="en-GB" dirty="0"/>
+              <a:t>A basketball player completed considerably more high-intensity work than usual during the previous three days. The player needs to be ready for a game tomorrow.</a:t>
+            </a:r>
+          </a:p>
+          <a:p>
+            <a:r>
+              <a:rPr lang="en-GB" dirty="0"/>
+              <a:t>A basketball prospect scores 22 points per game. Your team is deciding whether to select the player in the first round of the draft.</a:t>
+            </a:r>
+          </a:p>
+          <a:p>
+            <a:r>
+              <a:rPr lang="en-GB" dirty="0"/>
+              <a:t>A soccer team has allowed five goals during its last four matches. How should the team prepare to play their next opponent.</a:t>
+            </a:r>
+            <a:endParaRPr lang="en-US" dirty="0"/>
+          </a:p>
+        </p:txBody>
+      </p:sp>
+    </p:spTree>
+    <p:extLst>
+      <p:ext uri="{BB962C8B-B14F-4D97-AF65-F5344CB8AC3E}">
+        <p14:creationId xmlns:p14="http://schemas.microsoft.com/office/powerpoint/2010/main" val="1267012885"/>
+      </p:ext>
+    </p:extLst>
+  </p:cSld>
+  <p:clrMapOvr>
+    <a:masterClrMapping/>
+  </p:clrMapOvr>
+</p:sld>
+</file>
+
+<file path=ppt/slides/slide27.xml><?xml version="1.0" encoding="utf-8"?>
+<p:sld xmlns:a="http://schemas.openxmlformats.org/drawingml/2006/main" xmlns:r="http://schemas.openxmlformats.org/officeDocument/2006/relationships" xmlns:p="http://schemas.openxmlformats.org/presentationml/2006/main" show="0">
+  <p:cSld>
+    <p:spTree>
+      <p:nvGrpSpPr>
+        <p:cNvPr id="1" name=""/>
+        <p:cNvGrpSpPr/>
+        <p:nvPr/>
+      </p:nvGrpSpPr>
+      <p:grpSpPr>
+        <a:xfrm>
+          <a:off x="0" y="0"/>
+          <a:ext cx="0" cy="0"/>
+          <a:chOff x="0" y="0"/>
+          <a:chExt cx="0" cy="0"/>
+        </a:xfrm>
+      </p:grpSpPr>
+      <p:sp>
+        <p:nvSpPr>
+          <p:cNvPr id="2" name="Title 1">
+            <a:extLst>
+              <a:ext uri="{FF2B5EF4-FFF2-40B4-BE49-F238E27FC236}">
+                <a16:creationId xmlns:a16="http://schemas.microsoft.com/office/drawing/2014/main" id="{403F4149-77C5-51D6-6364-A5DC1666CA69}"/>
+              </a:ext>
+            </a:extLst>
+          </p:cNvPr>
+          <p:cNvSpPr>
+            <a:spLocks noGrp="1"/>
+          </p:cNvSpPr>
+          <p:nvPr>
+            <p:ph type="title"/>
+          </p:nvPr>
+        </p:nvSpPr>
+        <p:spPr/>
+        <p:txBody>
+          <a:bodyPr/>
+          <a:lstStyle/>
+          <a:p>
+            <a:r>
+              <a:rPr lang="en-US" dirty="0"/>
+              <a:t>Example </a:t>
+            </a:r>
+          </a:p>
+        </p:txBody>
+      </p:sp>
+      <p:sp>
+        <p:nvSpPr>
+          <p:cNvPr id="3" name="Content Placeholder 2">
+            <a:extLst>
+              <a:ext uri="{FF2B5EF4-FFF2-40B4-BE49-F238E27FC236}">
+                <a16:creationId xmlns:a16="http://schemas.microsoft.com/office/drawing/2014/main" id="{F4AC8398-083C-ED0D-65C7-FA16DBE6BCED}"/>
+              </a:ext>
+            </a:extLst>
+          </p:cNvPr>
+          <p:cNvSpPr>
+            <a:spLocks noGrp="1"/>
+          </p:cNvSpPr>
+          <p:nvPr>
+            <p:ph idx="1"/>
+          </p:nvPr>
+        </p:nvSpPr>
+        <p:spPr/>
+        <p:txBody>
+          <a:bodyPr/>
+          <a:lstStyle/>
+          <a:p>
+            <a:r>
+              <a:rPr lang="en-GB" b="1" dirty="0"/>
+              <a:t>Domain:</a:t>
+            </a:r>
+            <a:r>
+              <a:rPr lang="en-GB" dirty="0"/>
+              <a:t> Athlete monitoring</a:t>
+            </a:r>
+          </a:p>
+          <a:p>
+            <a:r>
+              <a:rPr lang="en-GB" b="1" dirty="0"/>
+              <a:t>Decision:</a:t>
+            </a:r>
+            <a:r>
+              <a:rPr lang="en-GB" dirty="0"/>
+              <a:t> Should a player’s training load be reduced today?</a:t>
+            </a:r>
+          </a:p>
+          <a:p>
+            <a:pPr lvl="1"/>
+            <a:r>
+              <a:rPr lang="en-GB" b="1" dirty="0"/>
+              <a:t>Descriptive:</a:t>
+            </a:r>
+            <a:r>
+              <a:rPr lang="en-GB" dirty="0"/>
+              <a:t> The player completed substantially more high-intensity work than usual during the previous three days. </a:t>
+            </a:r>
+          </a:p>
+          <a:p>
+            <a:pPr lvl="1"/>
+            <a:r>
+              <a:rPr lang="en-GB" b="1" dirty="0"/>
+              <a:t>Diagnostic:</a:t>
+            </a:r>
+            <a:r>
+              <a:rPr lang="en-GB" dirty="0"/>
+              <a:t> The increase resulted from additional drill repetitions and reduced recovery time. </a:t>
+            </a:r>
+          </a:p>
+          <a:p>
+            <a:pPr lvl="1"/>
+            <a:r>
+              <a:rPr lang="en-GB" b="1" dirty="0"/>
+              <a:t>Predictive:</a:t>
+            </a:r>
+            <a:r>
+              <a:rPr lang="en-GB" dirty="0"/>
+              <a:t> Maintaining the planned load may increase the probability of poor performance or incomplete recovery tomorrow. </a:t>
+            </a:r>
+          </a:p>
+          <a:p>
+            <a:pPr lvl="1"/>
+            <a:r>
+              <a:rPr lang="en-GB" b="1" dirty="0"/>
+              <a:t>Prescriptive:</a:t>
+            </a:r>
+            <a:r>
+              <a:rPr lang="en-GB" dirty="0"/>
+              <a:t> Reduce today’s high-intensity volume while maintaining lower-intensity tactical participation.</a:t>
+            </a:r>
+          </a:p>
+          <a:p>
+            <a:endParaRPr lang="en-US" dirty="0"/>
+          </a:p>
+        </p:txBody>
+      </p:sp>
+    </p:spTree>
+    <p:extLst>
+      <p:ext uri="{BB962C8B-B14F-4D97-AF65-F5344CB8AC3E}">
+        <p14:creationId xmlns:p14="http://schemas.microsoft.com/office/powerpoint/2010/main" val="1069047801"/>
       </p:ext>
     </p:extLst>
   </p:cSld>
@@ -14629,7 +14719,7 @@
         <p:cNvPr id="1" name="">
           <a:extLst>
             <a:ext uri="{FF2B5EF4-FFF2-40B4-BE49-F238E27FC236}">
-              <a16:creationId xmlns:a16="http://schemas.microsoft.com/office/drawing/2014/main" id="{E922E2CF-A80A-AF59-D558-526F3B121E48}"/>
+              <a16:creationId xmlns:a16="http://schemas.microsoft.com/office/drawing/2014/main" id="{40AF3649-84EF-73B3-DB78-3A8C58E5C26C}"/>
             </a:ext>
           </a:extLst>
         </p:cNvPr>
@@ -14649,7 +14739,7 @@
           <p:cNvPr id="2" name="Title 1">
             <a:extLst>
               <a:ext uri="{FF2B5EF4-FFF2-40B4-BE49-F238E27FC236}">
-                <a16:creationId xmlns:a16="http://schemas.microsoft.com/office/drawing/2014/main" id="{1D2580D1-4049-1628-7F57-F500A7F6380D}"/>
+                <a16:creationId xmlns:a16="http://schemas.microsoft.com/office/drawing/2014/main" id="{14013837-791B-5F03-753D-2E5EA52C17EF}"/>
               </a:ext>
             </a:extLst>
           </p:cNvPr>
@@ -14662,14 +14752,12 @@
         </p:nvSpPr>
         <p:spPr/>
         <p:txBody>
-          <a:bodyPr>
-            <a:noAutofit/>
-          </a:bodyPr>
+          <a:bodyPr/>
           <a:lstStyle/>
           <a:p>
             <a:r>
-              <a:rPr lang="en-US" sz="4000" dirty="0"/>
-              <a:t>“What is going on??”</a:t>
+              <a:rPr lang="en-US" dirty="0"/>
+              <a:t>Scenarios </a:t>
             </a:r>
           </a:p>
         </p:txBody>
@@ -14679,7 +14767,7 @@
           <p:cNvPr id="3" name="Content Placeholder 2">
             <a:extLst>
               <a:ext uri="{FF2B5EF4-FFF2-40B4-BE49-F238E27FC236}">
-                <a16:creationId xmlns:a16="http://schemas.microsoft.com/office/drawing/2014/main" id="{87AACD65-58A7-C8D7-2F7D-E8AD7B05383E}"/>
+                <a16:creationId xmlns:a16="http://schemas.microsoft.com/office/drawing/2014/main" id="{B4D682D1-FE5C-EC9F-1DA5-C852D5D53B85}"/>
               </a:ext>
             </a:extLst>
           </p:cNvPr>
@@ -14692,71 +14780,26 @@
         </p:nvSpPr>
         <p:spPr/>
         <p:txBody>
-          <a:bodyPr/>
+          <a:bodyPr>
+            <a:normAutofit fontScale="92500" lnSpcReduction="10000"/>
+          </a:bodyPr>
           <a:lstStyle/>
           <a:p>
             <a:r>
-              <a:rPr lang="en-US" dirty="0"/>
-              <a:t>Things we need to figure out:</a:t>
-            </a:r>
-          </a:p>
-          <a:p>
-            <a:pPr marL="914400" lvl="1" indent="-457200">
-              <a:buFont typeface="+mj-lt"/>
-              <a:buAutoNum type="arabicPeriod"/>
-            </a:pPr>
-            <a:r>
               <a:rPr lang="en-GB" dirty="0"/>
-              <a:t>What should the team change before the next game?</a:t>
-            </a:r>
-          </a:p>
-          <a:p>
-            <a:pPr marL="914400" lvl="1" indent="-457200">
-              <a:buFont typeface="+mj-lt"/>
-              <a:buAutoNum type="arabicPeriod"/>
-            </a:pPr>
+              <a:t>A basketball player completed considerably more high-intensity work than usual during the previous three days. The coaching staff added extra drill repetitions and shortened the recovery periods between drills. The player has an important game tomorrow.</a:t>
+            </a:r>
+          </a:p>
+          <a:p>
             <a:r>
               <a:rPr lang="en-GB" dirty="0"/>
-              <a:t>What factors may be contributing to the losses?</a:t>
-            </a:r>
-          </a:p>
-          <a:p>
-            <a:pPr marL="914400" lvl="1" indent="-457200">
-              <a:buFont typeface="+mj-lt"/>
-              <a:buAutoNum type="arabicPeriod"/>
-            </a:pPr>
+              <a:t>A basketball prospect scores 22 points per game, but most of those points come against weaker opponents. Against highly ranked teams, the player’s scoring efficiency and assists decrease while turnovers increase. Your team is deciding whether to select the player in the first round of the draft.</a:t>
+            </a:r>
+          </a:p>
+          <a:p>
             <a:r>
               <a:rPr lang="en-GB" dirty="0"/>
-              <a:t>What has changed during the last five games?</a:t>
-            </a:r>
-          </a:p>
-          <a:p>
-            <a:pPr marL="914400" lvl="1" indent="-457200">
-              <a:buFont typeface="+mj-lt"/>
-              <a:buAutoNum type="arabicPeriod"/>
-            </a:pPr>
-            <a:r>
-              <a:rPr lang="en-GB" dirty="0"/>
-              <a:t>What is likely to happen if the current pattern continues?</a:t>
-            </a:r>
-          </a:p>
-          <a:p>
-            <a:pPr marL="914400" lvl="1" indent="-457200">
-              <a:buFont typeface="+mj-lt"/>
-              <a:buAutoNum type="arabicPeriod"/>
-            </a:pPr>
-            <a:endParaRPr lang="en-GB" dirty="0"/>
-          </a:p>
-          <a:p>
-            <a:r>
-              <a:rPr lang="en-GB" dirty="0"/>
-              <a:t>Which domain of sports analytics are we in?</a:t>
-            </a:r>
-          </a:p>
-          <a:p>
-            <a:r>
-              <a:rPr lang="en-GB" dirty="0"/>
-              <a:t>Put these questions in the order you think they should be addressed.</a:t>
+              <a:t>A soccer team has allowed five goals during its last four matches. Four of the goals occurred after the team lost possession while its fullbacks were positioned high up the field. The team is preparing to play an opponent with fast attacking players.</a:t>
             </a:r>
             <a:endParaRPr lang="en-US" dirty="0"/>
           </a:p>
@@ -14765,7 +14808,7 @@
     </p:spTree>
     <p:extLst>
       <p:ext uri="{BB962C8B-B14F-4D97-AF65-F5344CB8AC3E}">
-        <p14:creationId xmlns:p14="http://schemas.microsoft.com/office/powerpoint/2010/main" val="3429352342"/>
+        <p14:creationId xmlns:p14="http://schemas.microsoft.com/office/powerpoint/2010/main" val="2264337334"/>
       </p:ext>
     </p:extLst>
   </p:cSld>
@@ -14988,113 +15031,6 @@
     <p:extLst>
       <p:ext uri="{BB962C8B-B14F-4D97-AF65-F5344CB8AC3E}">
         <p14:creationId xmlns:p14="http://schemas.microsoft.com/office/powerpoint/2010/main" val="2347356229"/>
-      </p:ext>
-    </p:extLst>
-  </p:cSld>
-  <p:clrMapOvr>
-    <a:masterClrMapping/>
-  </p:clrMapOvr>
-</p:sld>
-</file>
-
-<file path=ppt/slides/slide30.xml><?xml version="1.0" encoding="utf-8"?>
-<p:sld xmlns:a="http://schemas.openxmlformats.org/drawingml/2006/main" xmlns:r="http://schemas.openxmlformats.org/officeDocument/2006/relationships" xmlns:p="http://schemas.openxmlformats.org/presentationml/2006/main" show="0">
-  <p:cSld>
-    <p:spTree>
-      <p:nvGrpSpPr>
-        <p:cNvPr id="1" name="">
-          <a:extLst>
-            <a:ext uri="{FF2B5EF4-FFF2-40B4-BE49-F238E27FC236}">
-              <a16:creationId xmlns:a16="http://schemas.microsoft.com/office/drawing/2014/main" id="{40AF3649-84EF-73B3-DB78-3A8C58E5C26C}"/>
-            </a:ext>
-          </a:extLst>
-        </p:cNvPr>
-        <p:cNvGrpSpPr/>
-        <p:nvPr/>
-      </p:nvGrpSpPr>
-      <p:grpSpPr>
-        <a:xfrm>
-          <a:off x="0" y="0"/>
-          <a:ext cx="0" cy="0"/>
-          <a:chOff x="0" y="0"/>
-          <a:chExt cx="0" cy="0"/>
-        </a:xfrm>
-      </p:grpSpPr>
-      <p:sp>
-        <p:nvSpPr>
-          <p:cNvPr id="2" name="Title 1">
-            <a:extLst>
-              <a:ext uri="{FF2B5EF4-FFF2-40B4-BE49-F238E27FC236}">
-                <a16:creationId xmlns:a16="http://schemas.microsoft.com/office/drawing/2014/main" id="{14013837-791B-5F03-753D-2E5EA52C17EF}"/>
-              </a:ext>
-            </a:extLst>
-          </p:cNvPr>
-          <p:cNvSpPr>
-            <a:spLocks noGrp="1"/>
-          </p:cNvSpPr>
-          <p:nvPr>
-            <p:ph type="title"/>
-          </p:nvPr>
-        </p:nvSpPr>
-        <p:spPr/>
-        <p:txBody>
-          <a:bodyPr/>
-          <a:lstStyle/>
-          <a:p>
-            <a:r>
-              <a:rPr lang="en-US" dirty="0"/>
-              <a:t>Scenarios </a:t>
-            </a:r>
-          </a:p>
-        </p:txBody>
-      </p:sp>
-      <p:sp>
-        <p:nvSpPr>
-          <p:cNvPr id="3" name="Content Placeholder 2">
-            <a:extLst>
-              <a:ext uri="{FF2B5EF4-FFF2-40B4-BE49-F238E27FC236}">
-                <a16:creationId xmlns:a16="http://schemas.microsoft.com/office/drawing/2014/main" id="{B4D682D1-FE5C-EC9F-1DA5-C852D5D53B85}"/>
-              </a:ext>
-            </a:extLst>
-          </p:cNvPr>
-          <p:cNvSpPr>
-            <a:spLocks noGrp="1"/>
-          </p:cNvSpPr>
-          <p:nvPr>
-            <p:ph idx="1"/>
-          </p:nvPr>
-        </p:nvSpPr>
-        <p:spPr/>
-        <p:txBody>
-          <a:bodyPr>
-            <a:normAutofit fontScale="92500" lnSpcReduction="10000"/>
-          </a:bodyPr>
-          <a:lstStyle/>
-          <a:p>
-            <a:r>
-              <a:rPr lang="en-GB" dirty="0"/>
-              <a:t>A basketball player completed considerably more high-intensity work than usual during the previous three days. The coaching staff added extra drill repetitions and shortened the recovery periods between drills. The player has an important game tomorrow.</a:t>
-            </a:r>
-          </a:p>
-          <a:p>
-            <a:r>
-              <a:rPr lang="en-GB" dirty="0"/>
-              <a:t>A basketball prospect scores 22 points per game, but most of those points come against weaker opponents. Against highly ranked teams, the player’s scoring efficiency and assists decrease while turnovers increase. Your team is deciding whether to select the player in the first round of the draft.</a:t>
-            </a:r>
-          </a:p>
-          <a:p>
-            <a:r>
-              <a:rPr lang="en-GB" dirty="0"/>
-              <a:t>A soccer team has allowed five goals during its last four matches. Four of the goals occurred after the team lost possession while its fullbacks were positioned high up the field. The team is preparing to play an opponent with fast attacking players.</a:t>
-            </a:r>
-            <a:endParaRPr lang="en-US" dirty="0"/>
-          </a:p>
-        </p:txBody>
-      </p:sp>
-    </p:spTree>
-    <p:extLst>
-      <p:ext uri="{BB962C8B-B14F-4D97-AF65-F5344CB8AC3E}">
-        <p14:creationId xmlns:p14="http://schemas.microsoft.com/office/powerpoint/2010/main" val="2264337334"/>
       </p:ext>
     </p:extLst>
   </p:cSld>

--- a/pptx/Lecture2.pptx
+++ b/pptx/Lecture2.pptx
@@ -5,38 +5,42 @@
     <p:sldMasterId id="2147483648" r:id="rId1"/>
   </p:sldMasterIdLst>
   <p:notesMasterIdLst>
-    <p:notesMasterId r:id="rId31"/>
+    <p:notesMasterId r:id="rId35"/>
   </p:notesMasterIdLst>
   <p:sldIdLst>
     <p:sldId id="256" r:id="rId2"/>
-    <p:sldId id="270" r:id="rId3"/>
-    <p:sldId id="295" r:id="rId4"/>
-    <p:sldId id="296" r:id="rId5"/>
-    <p:sldId id="271" r:id="rId6"/>
-    <p:sldId id="297" r:id="rId7"/>
-    <p:sldId id="298" r:id="rId8"/>
-    <p:sldId id="272" r:id="rId9"/>
-    <p:sldId id="276" r:id="rId10"/>
-    <p:sldId id="299" r:id="rId11"/>
-    <p:sldId id="277" r:id="rId12"/>
-    <p:sldId id="273" r:id="rId13"/>
-    <p:sldId id="300" r:id="rId14"/>
-    <p:sldId id="274" r:id="rId15"/>
-    <p:sldId id="286" r:id="rId16"/>
-    <p:sldId id="287" r:id="rId17"/>
-    <p:sldId id="288" r:id="rId18"/>
-    <p:sldId id="289" r:id="rId19"/>
-    <p:sldId id="292" r:id="rId20"/>
-    <p:sldId id="278" r:id="rId21"/>
-    <p:sldId id="293" r:id="rId22"/>
-    <p:sldId id="284" r:id="rId23"/>
-    <p:sldId id="282" r:id="rId24"/>
-    <p:sldId id="283" r:id="rId25"/>
-    <p:sldId id="301" r:id="rId26"/>
-    <p:sldId id="281" r:id="rId27"/>
-    <p:sldId id="280" r:id="rId28"/>
-    <p:sldId id="291" r:id="rId29"/>
-    <p:sldId id="285" r:id="rId30"/>
+    <p:sldId id="303" r:id="rId3"/>
+    <p:sldId id="270" r:id="rId4"/>
+    <p:sldId id="295" r:id="rId5"/>
+    <p:sldId id="296" r:id="rId6"/>
+    <p:sldId id="271" r:id="rId7"/>
+    <p:sldId id="297" r:id="rId8"/>
+    <p:sldId id="298" r:id="rId9"/>
+    <p:sldId id="272" r:id="rId10"/>
+    <p:sldId id="276" r:id="rId11"/>
+    <p:sldId id="299" r:id="rId12"/>
+    <p:sldId id="277" r:id="rId13"/>
+    <p:sldId id="273" r:id="rId14"/>
+    <p:sldId id="304" r:id="rId15"/>
+    <p:sldId id="302" r:id="rId16"/>
+    <p:sldId id="300" r:id="rId17"/>
+    <p:sldId id="274" r:id="rId18"/>
+    <p:sldId id="286" r:id="rId19"/>
+    <p:sldId id="287" r:id="rId20"/>
+    <p:sldId id="305" r:id="rId21"/>
+    <p:sldId id="288" r:id="rId22"/>
+    <p:sldId id="289" r:id="rId23"/>
+    <p:sldId id="292" r:id="rId24"/>
+    <p:sldId id="293" r:id="rId25"/>
+    <p:sldId id="282" r:id="rId26"/>
+    <p:sldId id="283" r:id="rId27"/>
+    <p:sldId id="284" r:id="rId28"/>
+    <p:sldId id="301" r:id="rId29"/>
+    <p:sldId id="281" r:id="rId30"/>
+    <p:sldId id="278" r:id="rId31"/>
+    <p:sldId id="280" r:id="rId32"/>
+    <p:sldId id="291" r:id="rId33"/>
+    <p:sldId id="285" r:id="rId34"/>
   </p:sldIdLst>
   <p:sldSz cx="12192000" cy="6858000"/>
   <p:notesSz cx="6858000" cy="9144000"/>
@@ -1920,7 +1924,7 @@
           </a:pPr>
           <a:r>
             <a:rPr lang="en-GB" sz="2000" dirty="0"/>
-            <a:t>Athlete Tracking (Physical &amp; Spatial)</a:t>
+            <a:t>Athlete Tracking</a:t>
           </a:r>
           <a:endParaRPr lang="en-US" sz="2000" dirty="0"/>
         </a:p>
@@ -3113,7 +3117,7 @@
           </a:pPr>
           <a:r>
             <a:rPr lang="en-GB" sz="2000" kern="1200" dirty="0"/>
-            <a:t>Athlete Tracking (Physical &amp; Spatial)</a:t>
+            <a:t>Athlete Tracking</a:t>
           </a:r>
           <a:endParaRPr lang="en-US" sz="2000" kern="1200" dirty="0"/>
         </a:p>
@@ -6565,7 +6569,7 @@
           <a:p>
             <a:fld id="{4995A223-E7C9-A243-9A70-FE01E1A1DD65}" type="datetimeFigureOut">
               <a:rPr lang="en-US" smtClean="0"/>
-              <a:t>8/23/26</a:t>
+              <a:t>8/31/26</a:t>
             </a:fld>
             <a:endParaRPr lang="en-US"/>
           </a:p>
@@ -6948,18 +6952,12 @@
 </p:notes>
 </file>
 
-<file path=ppt/notesSlides/notesSlide2.xml><?xml version="1.0" encoding="utf-8"?>
+<file path=ppt/notesSlides/notesSlide10.xml><?xml version="1.0" encoding="utf-8"?>
 <p:notes xmlns:a="http://schemas.openxmlformats.org/drawingml/2006/main" xmlns:r="http://schemas.openxmlformats.org/officeDocument/2006/relationships" xmlns:p="http://schemas.openxmlformats.org/presentationml/2006/main">
   <p:cSld>
     <p:spTree>
       <p:nvGrpSpPr>
-        <p:cNvPr id="1" name="">
-          <a:extLst>
-            <a:ext uri="{FF2B5EF4-FFF2-40B4-BE49-F238E27FC236}">
-              <a16:creationId xmlns:a16="http://schemas.microsoft.com/office/drawing/2014/main" id="{0819824E-912C-DDF9-3D68-7365C0A88068}"/>
-            </a:ext>
-          </a:extLst>
-        </p:cNvPr>
+        <p:cNvPr id="1" name=""/>
         <p:cNvGrpSpPr/>
         <p:nvPr/>
       </p:nvGrpSpPr>
@@ -6973,13 +6971,7 @@
       </p:grpSpPr>
       <p:sp>
         <p:nvSpPr>
-          <p:cNvPr id="2" name="Slide Image Placeholder 1">
-            <a:extLst>
-              <a:ext uri="{FF2B5EF4-FFF2-40B4-BE49-F238E27FC236}">
-                <a16:creationId xmlns:a16="http://schemas.microsoft.com/office/drawing/2014/main" id="{DB9A5BD0-99D6-37BA-74FD-C644C27CA81B}"/>
-              </a:ext>
-            </a:extLst>
-          </p:cNvPr>
+          <p:cNvPr id="2" name="Slide Image Placeholder 1"/>
           <p:cNvSpPr>
             <a:spLocks noGrp="1" noRot="1" noChangeAspect="1"/>
           </p:cNvSpPr>
@@ -6991,13 +6983,7 @@
       </p:sp>
       <p:sp>
         <p:nvSpPr>
-          <p:cNvPr id="3" name="Notes Placeholder 2">
-            <a:extLst>
-              <a:ext uri="{FF2B5EF4-FFF2-40B4-BE49-F238E27FC236}">
-                <a16:creationId xmlns:a16="http://schemas.microsoft.com/office/drawing/2014/main" id="{D5438432-4124-3B40-4588-C4080AD43971}"/>
-              </a:ext>
-            </a:extLst>
-          </p:cNvPr>
+          <p:cNvPr id="3" name="Notes Placeholder 2"/>
           <p:cNvSpPr>
             <a:spLocks noGrp="1"/>
           </p:cNvSpPr>
@@ -7019,13 +7005,7 @@
       </p:sp>
       <p:sp>
         <p:nvSpPr>
-          <p:cNvPr id="4" name="Slide Number Placeholder 3">
-            <a:extLst>
-              <a:ext uri="{FF2B5EF4-FFF2-40B4-BE49-F238E27FC236}">
-                <a16:creationId xmlns:a16="http://schemas.microsoft.com/office/drawing/2014/main" id="{5C00A71E-B712-7EBC-E168-3A3405E9C4E4}"/>
-              </a:ext>
-            </a:extLst>
-          </p:cNvPr>
+          <p:cNvPr id="4" name="Slide Number Placeholder 3"/>
           <p:cNvSpPr>
             <a:spLocks noGrp="1"/>
           </p:cNvSpPr>
@@ -7040,7 +7020,7 @@
           <a:p>
             <a:fld id="{117D17FD-8842-8E4F-8C3E-EC8B634B2D5A}" type="slidenum">
               <a:rPr lang="en-US" smtClean="0"/>
-              <a:t>19</a:t>
+              <a:t>32</a:t>
             </a:fld>
             <a:endParaRPr lang="en-US"/>
           </a:p>
@@ -7049,7 +7029,131 @@
     </p:spTree>
     <p:extLst>
       <p:ext uri="{BB962C8B-B14F-4D97-AF65-F5344CB8AC3E}">
-        <p14:creationId xmlns:p14="http://schemas.microsoft.com/office/powerpoint/2010/main" val="359992081"/>
+        <p14:creationId xmlns:p14="http://schemas.microsoft.com/office/powerpoint/2010/main" val="492396201"/>
+      </p:ext>
+    </p:extLst>
+  </p:cSld>
+  <p:clrMapOvr>
+    <a:masterClrMapping/>
+  </p:clrMapOvr>
+</p:notes>
+</file>
+
+<file path=ppt/notesSlides/notesSlide2.xml><?xml version="1.0" encoding="utf-8"?>
+<p:notes xmlns:a="http://schemas.openxmlformats.org/drawingml/2006/main" xmlns:r="http://schemas.openxmlformats.org/officeDocument/2006/relationships" xmlns:p="http://schemas.openxmlformats.org/presentationml/2006/main">
+  <p:cSld>
+    <p:spTree>
+      <p:nvGrpSpPr>
+        <p:cNvPr id="1" name=""/>
+        <p:cNvGrpSpPr/>
+        <p:nvPr/>
+      </p:nvGrpSpPr>
+      <p:grpSpPr>
+        <a:xfrm>
+          <a:off x="0" y="0"/>
+          <a:ext cx="0" cy="0"/>
+          <a:chOff x="0" y="0"/>
+          <a:chExt cx="0" cy="0"/>
+        </a:xfrm>
+      </p:grpSpPr>
+      <p:sp>
+        <p:nvSpPr>
+          <p:cNvPr id="2" name="Slide Image Placeholder 1"/>
+          <p:cNvSpPr>
+            <a:spLocks noGrp="1" noRot="1" noChangeAspect="1"/>
+          </p:cNvSpPr>
+          <p:nvPr>
+            <p:ph type="sldImg"/>
+          </p:nvPr>
+        </p:nvSpPr>
+        <p:spPr/>
+      </p:sp>
+      <p:sp>
+        <p:nvSpPr>
+          <p:cNvPr id="3" name="Notes Placeholder 2"/>
+          <p:cNvSpPr>
+            <a:spLocks noGrp="1"/>
+          </p:cNvSpPr>
+          <p:nvPr>
+            <p:ph type="body" idx="1"/>
+          </p:nvPr>
+        </p:nvSpPr>
+        <p:spPr/>
+        <p:txBody>
+          <a:bodyPr/>
+          <a:lstStyle/>
+          <a:p>
+            <a:r>
+              <a:rPr lang="en-US" dirty="0"/>
+              <a:t>STUDENTS SHOULD BE ABLE TO IDENTIFY WHICH DOMAIN THEIR QUESTION IS IN</a:t>
+            </a:r>
+          </a:p>
+          <a:p>
+            <a:pPr marL="171450" indent="-171450">
+              <a:buFontTx/>
+              <a:buChar char="-"/>
+            </a:pPr>
+            <a:r>
+              <a:rPr lang="en-US" dirty="0"/>
+              <a:t>Is it about signing talent?</a:t>
+            </a:r>
+          </a:p>
+          <a:p>
+            <a:pPr marL="171450" indent="-171450">
+              <a:buFontTx/>
+              <a:buChar char="-"/>
+            </a:pPr>
+            <a:r>
+              <a:rPr lang="en-US" dirty="0"/>
+              <a:t>Is it about athlete’s training?</a:t>
+            </a:r>
+          </a:p>
+          <a:p>
+            <a:pPr marL="171450" indent="-171450">
+              <a:buFontTx/>
+              <a:buChar char="-"/>
+            </a:pPr>
+            <a:r>
+              <a:rPr lang="en-US" dirty="0"/>
+              <a:t>Is it about how we play the game?</a:t>
+            </a:r>
+          </a:p>
+          <a:p>
+            <a:pPr marL="171450" indent="-171450">
+              <a:buFontTx/>
+              <a:buChar char="-"/>
+            </a:pPr>
+            <a:endParaRPr lang="en-US" dirty="0"/>
+          </a:p>
+        </p:txBody>
+      </p:sp>
+      <p:sp>
+        <p:nvSpPr>
+          <p:cNvPr id="4" name="Slide Number Placeholder 3"/>
+          <p:cNvSpPr>
+            <a:spLocks noGrp="1"/>
+          </p:cNvSpPr>
+          <p:nvPr>
+            <p:ph type="sldNum" sz="quarter" idx="5"/>
+          </p:nvPr>
+        </p:nvSpPr>
+        <p:spPr/>
+        <p:txBody>
+          <a:bodyPr/>
+          <a:lstStyle/>
+          <a:p>
+            <a:fld id="{117D17FD-8842-8E4F-8C3E-EC8B634B2D5A}" type="slidenum">
+              <a:rPr lang="en-US" smtClean="0"/>
+              <a:t>4</a:t>
+            </a:fld>
+            <a:endParaRPr lang="en-US"/>
+          </a:p>
+        </p:txBody>
+      </p:sp>
+    </p:spTree>
+    <p:extLst>
+      <p:ext uri="{BB962C8B-B14F-4D97-AF65-F5344CB8AC3E}">
+        <p14:creationId xmlns:p14="http://schemas.microsoft.com/office/powerpoint/2010/main" val="1153706077"/>
       </p:ext>
     </p:extLst>
   </p:cSld>
@@ -7103,34 +7207,10 @@
           <a:bodyPr/>
           <a:lstStyle/>
           <a:p>
-            <a:pPr marL="0" marR="0" lvl="0" indent="0" algn="l" defTabSz="914400" rtl="0" eaLnBrk="1" fontAlgn="auto" latinLnBrk="0" hangingPunct="1">
-              <a:lnSpc>
-                <a:spcPct val="100000"/>
-              </a:lnSpc>
-              <a:spcBef>
-                <a:spcPts val="0"/>
-              </a:spcBef>
-              <a:spcAft>
-                <a:spcPts val="0"/>
-              </a:spcAft>
-              <a:buClrTx/>
-              <a:buSzTx/>
-              <a:buFontTx/>
-              <a:buNone/>
-              <a:tabLst/>
-              <a:defRPr/>
-            </a:pPr>
-            <a:r>
-              <a:rPr lang="en-GB" dirty="0"/>
-              <a:t>Sports analytics is not defined by how complicated the method is. It is defined by whether data are being used thoughtfully to understand a problem and support a decision. Sometimes that requires a predictive model. </a:t>
-            </a:r>
-            <a:r>
-              <a:rPr lang="en-GB"/>
-              <a:t>Often, it requires accurate reporting, appropriate context, and clear communication.</a:t>
-            </a:r>
-          </a:p>
-          <a:p>
-            <a:endParaRPr lang="en-US"/>
+            <a:r>
+              <a:rPr lang="en-US" dirty="0"/>
+              <a:t>One of the things to consider when investigating scouting domain</a:t>
+            </a:r>
           </a:p>
         </p:txBody>
       </p:sp>
@@ -7151,7 +7231,7 @@
           <a:p>
             <a:fld id="{117D17FD-8842-8E4F-8C3E-EC8B634B2D5A}" type="slidenum">
               <a:rPr lang="en-US" smtClean="0"/>
-              <a:t>22</a:t>
+              <a:t>7</a:t>
             </a:fld>
             <a:endParaRPr lang="en-US"/>
           </a:p>
@@ -7160,7 +7240,7 @@
     </p:spTree>
     <p:extLst>
       <p:ext uri="{BB962C8B-B14F-4D97-AF65-F5344CB8AC3E}">
-        <p14:creationId xmlns:p14="http://schemas.microsoft.com/office/powerpoint/2010/main" val="1782973083"/>
+        <p14:creationId xmlns:p14="http://schemas.microsoft.com/office/powerpoint/2010/main" val="3475043042"/>
       </p:ext>
     </p:extLst>
   </p:cSld>
@@ -7216,7 +7296,48 @@
           <a:p>
             <a:r>
               <a:rPr lang="en-US" dirty="0"/>
-              <a:t>EXPLAIN</a:t>
+              <a:t>Often times scouting does not rely on a single data point (it may in your project)</a:t>
+            </a:r>
+          </a:p>
+          <a:p>
+            <a:endParaRPr lang="en-US" dirty="0"/>
+          </a:p>
+          <a:p>
+            <a:pPr marL="0" marR="0" lvl="0" indent="0" algn="l" defTabSz="914400" rtl="0" eaLnBrk="1" fontAlgn="auto" latinLnBrk="0" hangingPunct="1">
+              <a:lnSpc>
+                <a:spcPct val="100000"/>
+              </a:lnSpc>
+              <a:spcBef>
+                <a:spcPts val="0"/>
+              </a:spcBef>
+              <a:spcAft>
+                <a:spcPts val="0"/>
+              </a:spcAft>
+              <a:buClrTx/>
+              <a:buSzTx/>
+              <a:buFontTx/>
+              <a:buNone/>
+              <a:tabLst/>
+              <a:defRPr/>
+            </a:pPr>
+            <a:r>
+              <a:rPr lang="en-GB" dirty="0">
+                <a:solidFill>
+                  <a:srgbClr val="FF0000"/>
+                </a:solidFill>
+              </a:rPr>
+              <a:t>Which source would you trust most?</a:t>
+            </a:r>
+            <a:endParaRPr lang="en-US" dirty="0">
+              <a:solidFill>
+                <a:srgbClr val="FF0000"/>
+              </a:solidFill>
+            </a:endParaRPr>
+          </a:p>
+          <a:p>
+            <a:r>
+              <a:rPr lang="en-US" dirty="0"/>
+              <a:t> and why?</a:t>
             </a:r>
           </a:p>
         </p:txBody>
@@ -7238,7 +7359,7 @@
           <a:p>
             <a:fld id="{117D17FD-8842-8E4F-8C3E-EC8B634B2D5A}" type="slidenum">
               <a:rPr lang="en-US" smtClean="0"/>
-              <a:t>28</a:t>
+              <a:t>8</a:t>
             </a:fld>
             <a:endParaRPr lang="en-US"/>
           </a:p>
@@ -7247,7 +7368,515 @@
     </p:spTree>
     <p:extLst>
       <p:ext uri="{BB962C8B-B14F-4D97-AF65-F5344CB8AC3E}">
-        <p14:creationId xmlns:p14="http://schemas.microsoft.com/office/powerpoint/2010/main" val="492396201"/>
+        <p14:creationId xmlns:p14="http://schemas.microsoft.com/office/powerpoint/2010/main" val="1371583128"/>
+      </p:ext>
+    </p:extLst>
+  </p:cSld>
+  <p:clrMapOvr>
+    <a:masterClrMapping/>
+  </p:clrMapOvr>
+</p:notes>
+</file>
+
+<file path=ppt/notesSlides/notesSlide5.xml><?xml version="1.0" encoding="utf-8"?>
+<p:notes xmlns:a="http://schemas.openxmlformats.org/drawingml/2006/main" xmlns:r="http://schemas.openxmlformats.org/officeDocument/2006/relationships" xmlns:p="http://schemas.openxmlformats.org/presentationml/2006/main">
+  <p:cSld>
+    <p:spTree>
+      <p:nvGrpSpPr>
+        <p:cNvPr id="1" name=""/>
+        <p:cNvGrpSpPr/>
+        <p:nvPr/>
+      </p:nvGrpSpPr>
+      <p:grpSpPr>
+        <a:xfrm>
+          <a:off x="0" y="0"/>
+          <a:ext cx="0" cy="0"/>
+          <a:chOff x="0" y="0"/>
+          <a:chExt cx="0" cy="0"/>
+        </a:xfrm>
+      </p:grpSpPr>
+      <p:sp>
+        <p:nvSpPr>
+          <p:cNvPr id="2" name="Slide Image Placeholder 1"/>
+          <p:cNvSpPr>
+            <a:spLocks noGrp="1" noRot="1" noChangeAspect="1"/>
+          </p:cNvSpPr>
+          <p:nvPr>
+            <p:ph type="sldImg"/>
+          </p:nvPr>
+        </p:nvSpPr>
+        <p:spPr/>
+      </p:sp>
+      <p:sp>
+        <p:nvSpPr>
+          <p:cNvPr id="3" name="Notes Placeholder 2"/>
+          <p:cNvSpPr>
+            <a:spLocks noGrp="1"/>
+          </p:cNvSpPr>
+          <p:nvPr>
+            <p:ph type="body" idx="1"/>
+          </p:nvPr>
+        </p:nvSpPr>
+        <p:spPr/>
+        <p:txBody>
+          <a:bodyPr/>
+          <a:lstStyle/>
+          <a:p>
+            <a:r>
+              <a:rPr lang="en-US" dirty="0"/>
+              <a:t>What is the context here?</a:t>
+            </a:r>
+          </a:p>
+        </p:txBody>
+      </p:sp>
+      <p:sp>
+        <p:nvSpPr>
+          <p:cNvPr id="4" name="Slide Number Placeholder 3"/>
+          <p:cNvSpPr>
+            <a:spLocks noGrp="1"/>
+          </p:cNvSpPr>
+          <p:nvPr>
+            <p:ph type="sldNum" sz="quarter" idx="5"/>
+          </p:nvPr>
+        </p:nvSpPr>
+        <p:spPr/>
+        <p:txBody>
+          <a:bodyPr/>
+          <a:lstStyle/>
+          <a:p>
+            <a:fld id="{117D17FD-8842-8E4F-8C3E-EC8B634B2D5A}" type="slidenum">
+              <a:rPr lang="en-US" smtClean="0"/>
+              <a:t>11</a:t>
+            </a:fld>
+            <a:endParaRPr lang="en-US"/>
+          </a:p>
+        </p:txBody>
+      </p:sp>
+    </p:spTree>
+    <p:extLst>
+      <p:ext uri="{BB962C8B-B14F-4D97-AF65-F5344CB8AC3E}">
+        <p14:creationId xmlns:p14="http://schemas.microsoft.com/office/powerpoint/2010/main" val="3278033118"/>
+      </p:ext>
+    </p:extLst>
+  </p:cSld>
+  <p:clrMapOvr>
+    <a:masterClrMapping/>
+  </p:clrMapOvr>
+</p:notes>
+</file>
+
+<file path=ppt/notesSlides/notesSlide6.xml><?xml version="1.0" encoding="utf-8"?>
+<p:notes xmlns:a="http://schemas.openxmlformats.org/drawingml/2006/main" xmlns:r="http://schemas.openxmlformats.org/officeDocument/2006/relationships" xmlns:p="http://schemas.openxmlformats.org/presentationml/2006/main">
+  <p:cSld>
+    <p:spTree>
+      <p:nvGrpSpPr>
+        <p:cNvPr id="1" name=""/>
+        <p:cNvGrpSpPr/>
+        <p:nvPr/>
+      </p:nvGrpSpPr>
+      <p:grpSpPr>
+        <a:xfrm>
+          <a:off x="0" y="0"/>
+          <a:ext cx="0" cy="0"/>
+          <a:chOff x="0" y="0"/>
+          <a:chExt cx="0" cy="0"/>
+        </a:xfrm>
+      </p:grpSpPr>
+      <p:sp>
+        <p:nvSpPr>
+          <p:cNvPr id="2" name="Slide Image Placeholder 1"/>
+          <p:cNvSpPr>
+            <a:spLocks noGrp="1" noRot="1" noChangeAspect="1"/>
+          </p:cNvSpPr>
+          <p:nvPr>
+            <p:ph type="sldImg"/>
+          </p:nvPr>
+        </p:nvSpPr>
+        <p:spPr/>
+      </p:sp>
+      <p:sp>
+        <p:nvSpPr>
+          <p:cNvPr id="3" name="Notes Placeholder 2"/>
+          <p:cNvSpPr>
+            <a:spLocks noGrp="1"/>
+          </p:cNvSpPr>
+          <p:nvPr>
+            <p:ph type="body" idx="1"/>
+          </p:nvPr>
+        </p:nvSpPr>
+        <p:spPr/>
+        <p:txBody>
+          <a:bodyPr/>
+          <a:lstStyle/>
+          <a:p>
+            <a:r>
+              <a:rPr lang="en-GB" dirty="0"/>
+              <a:t>The domain tells us </a:t>
+            </a:r>
+            <a:r>
+              <a:rPr lang="en-GB" b="1" dirty="0"/>
+              <a:t>where the problem lives</a:t>
+            </a:r>
+            <a:r>
+              <a:rPr lang="en-GB" dirty="0"/>
+              <a:t>. </a:t>
+            </a:r>
+          </a:p>
+          <a:p>
+            <a:r>
+              <a:rPr lang="en-GB" dirty="0"/>
+              <a:t>It does not tell us </a:t>
+            </a:r>
+            <a:r>
+              <a:rPr lang="en-GB" b="1" dirty="0"/>
+              <a:t>what the analysis needs to accomplish</a:t>
+            </a:r>
+            <a:r>
+              <a:rPr lang="en-GB" dirty="0"/>
+              <a:t>.</a:t>
+            </a:r>
+          </a:p>
+          <a:p>
+            <a:r>
+              <a:rPr lang="en-GB" dirty="0"/>
+              <a:t>Within any domain, we might describe, diagnose, predict, or prescribe.</a:t>
+            </a:r>
+            <a:endParaRPr lang="en-US" dirty="0"/>
+          </a:p>
+        </p:txBody>
+      </p:sp>
+      <p:sp>
+        <p:nvSpPr>
+          <p:cNvPr id="4" name="Slide Number Placeholder 3"/>
+          <p:cNvSpPr>
+            <a:spLocks noGrp="1"/>
+          </p:cNvSpPr>
+          <p:nvPr>
+            <p:ph type="sldNum" sz="quarter" idx="5"/>
+          </p:nvPr>
+        </p:nvSpPr>
+        <p:spPr/>
+        <p:txBody>
+          <a:bodyPr/>
+          <a:lstStyle/>
+          <a:p>
+            <a:fld id="{117D17FD-8842-8E4F-8C3E-EC8B634B2D5A}" type="slidenum">
+              <a:rPr lang="en-US" smtClean="0"/>
+              <a:t>14</a:t>
+            </a:fld>
+            <a:endParaRPr lang="en-US"/>
+          </a:p>
+        </p:txBody>
+      </p:sp>
+    </p:spTree>
+    <p:extLst>
+      <p:ext uri="{BB962C8B-B14F-4D97-AF65-F5344CB8AC3E}">
+        <p14:creationId xmlns:p14="http://schemas.microsoft.com/office/powerpoint/2010/main" val="3295558138"/>
+      </p:ext>
+    </p:extLst>
+  </p:cSld>
+  <p:clrMapOvr>
+    <a:masterClrMapping/>
+  </p:clrMapOvr>
+</p:notes>
+</file>
+
+<file path=ppt/notesSlides/notesSlide7.xml><?xml version="1.0" encoding="utf-8"?>
+<p:notes xmlns:a="http://schemas.openxmlformats.org/drawingml/2006/main" xmlns:r="http://schemas.openxmlformats.org/officeDocument/2006/relationships" xmlns:p="http://schemas.openxmlformats.org/presentationml/2006/main">
+  <p:cSld>
+    <p:spTree>
+      <p:nvGrpSpPr>
+        <p:cNvPr id="1" name=""/>
+        <p:cNvGrpSpPr/>
+        <p:nvPr/>
+      </p:nvGrpSpPr>
+      <p:grpSpPr>
+        <a:xfrm>
+          <a:off x="0" y="0"/>
+          <a:ext cx="0" cy="0"/>
+          <a:chOff x="0" y="0"/>
+          <a:chExt cx="0" cy="0"/>
+        </a:xfrm>
+      </p:grpSpPr>
+      <p:sp>
+        <p:nvSpPr>
+          <p:cNvPr id="2" name="Slide Image Placeholder 1"/>
+          <p:cNvSpPr>
+            <a:spLocks noGrp="1" noRot="1" noChangeAspect="1"/>
+          </p:cNvSpPr>
+          <p:nvPr>
+            <p:ph type="sldImg"/>
+          </p:nvPr>
+        </p:nvSpPr>
+        <p:spPr/>
+      </p:sp>
+      <p:sp>
+        <p:nvSpPr>
+          <p:cNvPr id="3" name="Notes Placeholder 2"/>
+          <p:cNvSpPr>
+            <a:spLocks noGrp="1"/>
+          </p:cNvSpPr>
+          <p:nvPr>
+            <p:ph type="body" idx="1"/>
+          </p:nvPr>
+        </p:nvSpPr>
+        <p:spPr/>
+        <p:txBody>
+          <a:bodyPr/>
+          <a:lstStyle/>
+          <a:p>
+            <a:r>
+              <a:rPr lang="en-US" dirty="0"/>
+              <a:t>Very important, we will come back to this later</a:t>
+            </a:r>
+          </a:p>
+        </p:txBody>
+      </p:sp>
+      <p:sp>
+        <p:nvSpPr>
+          <p:cNvPr id="4" name="Slide Number Placeholder 3"/>
+          <p:cNvSpPr>
+            <a:spLocks noGrp="1"/>
+          </p:cNvSpPr>
+          <p:nvPr>
+            <p:ph type="sldNum" sz="quarter" idx="5"/>
+          </p:nvPr>
+        </p:nvSpPr>
+        <p:spPr/>
+        <p:txBody>
+          <a:bodyPr/>
+          <a:lstStyle/>
+          <a:p>
+            <a:fld id="{117D17FD-8842-8E4F-8C3E-EC8B634B2D5A}" type="slidenum">
+              <a:rPr lang="en-US" smtClean="0"/>
+              <a:t>20</a:t>
+            </a:fld>
+            <a:endParaRPr lang="en-US"/>
+          </a:p>
+        </p:txBody>
+      </p:sp>
+    </p:spTree>
+    <p:extLst>
+      <p:ext uri="{BB962C8B-B14F-4D97-AF65-F5344CB8AC3E}">
+        <p14:creationId xmlns:p14="http://schemas.microsoft.com/office/powerpoint/2010/main" val="1379439289"/>
+      </p:ext>
+    </p:extLst>
+  </p:cSld>
+  <p:clrMapOvr>
+    <a:masterClrMapping/>
+  </p:clrMapOvr>
+</p:notes>
+</file>
+
+<file path=ppt/notesSlides/notesSlide8.xml><?xml version="1.0" encoding="utf-8"?>
+<p:notes xmlns:a="http://schemas.openxmlformats.org/drawingml/2006/main" xmlns:r="http://schemas.openxmlformats.org/officeDocument/2006/relationships" xmlns:p="http://schemas.openxmlformats.org/presentationml/2006/main">
+  <p:cSld>
+    <p:spTree>
+      <p:nvGrpSpPr>
+        <p:cNvPr id="1" name="">
+          <a:extLst>
+            <a:ext uri="{FF2B5EF4-FFF2-40B4-BE49-F238E27FC236}">
+              <a16:creationId xmlns:a16="http://schemas.microsoft.com/office/drawing/2014/main" id="{0819824E-912C-DDF9-3D68-7365C0A88068}"/>
+            </a:ext>
+          </a:extLst>
+        </p:cNvPr>
+        <p:cNvGrpSpPr/>
+        <p:nvPr/>
+      </p:nvGrpSpPr>
+      <p:grpSpPr>
+        <a:xfrm>
+          <a:off x="0" y="0"/>
+          <a:ext cx="0" cy="0"/>
+          <a:chOff x="0" y="0"/>
+          <a:chExt cx="0" cy="0"/>
+        </a:xfrm>
+      </p:grpSpPr>
+      <p:sp>
+        <p:nvSpPr>
+          <p:cNvPr id="2" name="Slide Image Placeholder 1">
+            <a:extLst>
+              <a:ext uri="{FF2B5EF4-FFF2-40B4-BE49-F238E27FC236}">
+                <a16:creationId xmlns:a16="http://schemas.microsoft.com/office/drawing/2014/main" id="{DB9A5BD0-99D6-37BA-74FD-C644C27CA81B}"/>
+              </a:ext>
+            </a:extLst>
+          </p:cNvPr>
+          <p:cNvSpPr>
+            <a:spLocks noGrp="1" noRot="1" noChangeAspect="1"/>
+          </p:cNvSpPr>
+          <p:nvPr>
+            <p:ph type="sldImg"/>
+          </p:nvPr>
+        </p:nvSpPr>
+        <p:spPr/>
+      </p:sp>
+      <p:sp>
+        <p:nvSpPr>
+          <p:cNvPr id="3" name="Notes Placeholder 2">
+            <a:extLst>
+              <a:ext uri="{FF2B5EF4-FFF2-40B4-BE49-F238E27FC236}">
+                <a16:creationId xmlns:a16="http://schemas.microsoft.com/office/drawing/2014/main" id="{D5438432-4124-3B40-4588-C4080AD43971}"/>
+              </a:ext>
+            </a:extLst>
+          </p:cNvPr>
+          <p:cNvSpPr>
+            <a:spLocks noGrp="1"/>
+          </p:cNvSpPr>
+          <p:nvPr>
+            <p:ph type="body" idx="1"/>
+          </p:nvPr>
+        </p:nvSpPr>
+        <p:spPr/>
+        <p:txBody>
+          <a:bodyPr/>
+          <a:lstStyle/>
+          <a:p>
+            <a:r>
+              <a:rPr lang="en-US" dirty="0"/>
+              <a:t>EXPLAIN</a:t>
+            </a:r>
+          </a:p>
+        </p:txBody>
+      </p:sp>
+      <p:sp>
+        <p:nvSpPr>
+          <p:cNvPr id="4" name="Slide Number Placeholder 3">
+            <a:extLst>
+              <a:ext uri="{FF2B5EF4-FFF2-40B4-BE49-F238E27FC236}">
+                <a16:creationId xmlns:a16="http://schemas.microsoft.com/office/drawing/2014/main" id="{5C00A71E-B712-7EBC-E168-3A3405E9C4E4}"/>
+              </a:ext>
+            </a:extLst>
+          </p:cNvPr>
+          <p:cNvSpPr>
+            <a:spLocks noGrp="1"/>
+          </p:cNvSpPr>
+          <p:nvPr>
+            <p:ph type="sldNum" sz="quarter" idx="5"/>
+          </p:nvPr>
+        </p:nvSpPr>
+        <p:spPr/>
+        <p:txBody>
+          <a:bodyPr/>
+          <a:lstStyle/>
+          <a:p>
+            <a:fld id="{117D17FD-8842-8E4F-8C3E-EC8B634B2D5A}" type="slidenum">
+              <a:rPr lang="en-US" smtClean="0"/>
+              <a:t>23</a:t>
+            </a:fld>
+            <a:endParaRPr lang="en-US"/>
+          </a:p>
+        </p:txBody>
+      </p:sp>
+    </p:spTree>
+    <p:extLst>
+      <p:ext uri="{BB962C8B-B14F-4D97-AF65-F5344CB8AC3E}">
+        <p14:creationId xmlns:p14="http://schemas.microsoft.com/office/powerpoint/2010/main" val="359992081"/>
+      </p:ext>
+    </p:extLst>
+  </p:cSld>
+  <p:clrMapOvr>
+    <a:masterClrMapping/>
+  </p:clrMapOvr>
+</p:notes>
+</file>
+
+<file path=ppt/notesSlides/notesSlide9.xml><?xml version="1.0" encoding="utf-8"?>
+<p:notes xmlns:a="http://schemas.openxmlformats.org/drawingml/2006/main" xmlns:r="http://schemas.openxmlformats.org/officeDocument/2006/relationships" xmlns:p="http://schemas.openxmlformats.org/presentationml/2006/main">
+  <p:cSld>
+    <p:spTree>
+      <p:nvGrpSpPr>
+        <p:cNvPr id="1" name=""/>
+        <p:cNvGrpSpPr/>
+        <p:nvPr/>
+      </p:nvGrpSpPr>
+      <p:grpSpPr>
+        <a:xfrm>
+          <a:off x="0" y="0"/>
+          <a:ext cx="0" cy="0"/>
+          <a:chOff x="0" y="0"/>
+          <a:chExt cx="0" cy="0"/>
+        </a:xfrm>
+      </p:grpSpPr>
+      <p:sp>
+        <p:nvSpPr>
+          <p:cNvPr id="2" name="Slide Image Placeholder 1"/>
+          <p:cNvSpPr>
+            <a:spLocks noGrp="1" noRot="1" noChangeAspect="1"/>
+          </p:cNvSpPr>
+          <p:nvPr>
+            <p:ph type="sldImg"/>
+          </p:nvPr>
+        </p:nvSpPr>
+        <p:spPr/>
+      </p:sp>
+      <p:sp>
+        <p:nvSpPr>
+          <p:cNvPr id="3" name="Notes Placeholder 2"/>
+          <p:cNvSpPr>
+            <a:spLocks noGrp="1"/>
+          </p:cNvSpPr>
+          <p:nvPr>
+            <p:ph type="body" idx="1"/>
+          </p:nvPr>
+        </p:nvSpPr>
+        <p:spPr/>
+        <p:txBody>
+          <a:bodyPr/>
+          <a:lstStyle/>
+          <a:p>
+            <a:pPr marL="0" marR="0" lvl="0" indent="0" algn="l" defTabSz="914400" rtl="0" eaLnBrk="1" fontAlgn="auto" latinLnBrk="0" hangingPunct="1">
+              <a:lnSpc>
+                <a:spcPct val="100000"/>
+              </a:lnSpc>
+              <a:spcBef>
+                <a:spcPts val="0"/>
+              </a:spcBef>
+              <a:spcAft>
+                <a:spcPts val="0"/>
+              </a:spcAft>
+              <a:buClrTx/>
+              <a:buSzTx/>
+              <a:buFontTx/>
+              <a:buNone/>
+              <a:tabLst/>
+              <a:defRPr/>
+            </a:pPr>
+            <a:r>
+              <a:rPr lang="en-GB" dirty="0"/>
+              <a:t>Sports analytics is not defined by how complicated the method is. It is defined by whether data are being used thoughtfully to understand a problem and support a decision. Sometimes that requires a predictive model. Often, it requires accurate reporting, appropriate context, and clear communication.</a:t>
+            </a:r>
+          </a:p>
+          <a:p>
+            <a:endParaRPr lang="en-US" dirty="0"/>
+          </a:p>
+        </p:txBody>
+      </p:sp>
+      <p:sp>
+        <p:nvSpPr>
+          <p:cNvPr id="4" name="Slide Number Placeholder 3"/>
+          <p:cNvSpPr>
+            <a:spLocks noGrp="1"/>
+          </p:cNvSpPr>
+          <p:nvPr>
+            <p:ph type="sldNum" sz="quarter" idx="5"/>
+          </p:nvPr>
+        </p:nvSpPr>
+        <p:spPr/>
+        <p:txBody>
+          <a:bodyPr/>
+          <a:lstStyle/>
+          <a:p>
+            <a:fld id="{117D17FD-8842-8E4F-8C3E-EC8B634B2D5A}" type="slidenum">
+              <a:rPr lang="en-US" smtClean="0"/>
+              <a:t>27</a:t>
+            </a:fld>
+            <a:endParaRPr lang="en-US"/>
+          </a:p>
+        </p:txBody>
+      </p:sp>
+    </p:spTree>
+    <p:extLst>
+      <p:ext uri="{BB962C8B-B14F-4D97-AF65-F5344CB8AC3E}">
+        <p14:creationId xmlns:p14="http://schemas.microsoft.com/office/powerpoint/2010/main" val="1782973083"/>
       </p:ext>
     </p:extLst>
   </p:cSld>
@@ -7414,7 +8043,7 @@
           <a:p>
             <a:fld id="{1BF61C71-767E-B84C-BFB3-7B18856D27F4}" type="datetimeFigureOut">
               <a:rPr lang="en-US" smtClean="0"/>
-              <a:t>8/23/26</a:t>
+              <a:t>8/31/26</a:t>
             </a:fld>
             <a:endParaRPr lang="en-US"/>
           </a:p>
@@ -7622,7 +8251,7 @@
           <a:p>
             <a:fld id="{1BF61C71-767E-B84C-BFB3-7B18856D27F4}" type="datetimeFigureOut">
               <a:rPr lang="en-US" smtClean="0"/>
-              <a:t>8/23/26</a:t>
+              <a:t>8/31/26</a:t>
             </a:fld>
             <a:endParaRPr lang="en-US"/>
           </a:p>
@@ -7840,7 +8469,7 @@
           <a:p>
             <a:fld id="{1BF61C71-767E-B84C-BFB3-7B18856D27F4}" type="datetimeFigureOut">
               <a:rPr lang="en-US" smtClean="0"/>
-              <a:t>8/23/26</a:t>
+              <a:t>8/31/26</a:t>
             </a:fld>
             <a:endParaRPr lang="en-US"/>
           </a:p>
@@ -8048,7 +8677,7 @@
           <a:p>
             <a:fld id="{1BF61C71-767E-B84C-BFB3-7B18856D27F4}" type="datetimeFigureOut">
               <a:rPr lang="en-US" smtClean="0"/>
-              <a:t>8/23/26</a:t>
+              <a:t>8/31/26</a:t>
             </a:fld>
             <a:endParaRPr lang="en-US"/>
           </a:p>
@@ -8332,7 +8961,7 @@
           <a:p>
             <a:fld id="{1BF61C71-767E-B84C-BFB3-7B18856D27F4}" type="datetimeFigureOut">
               <a:rPr lang="en-US" smtClean="0"/>
-              <a:t>8/23/26</a:t>
+              <a:t>8/31/26</a:t>
             </a:fld>
             <a:endParaRPr lang="en-US"/>
           </a:p>
@@ -8608,7 +9237,7 @@
           <a:p>
             <a:fld id="{1BF61C71-767E-B84C-BFB3-7B18856D27F4}" type="datetimeFigureOut">
               <a:rPr lang="en-US" smtClean="0"/>
-              <a:t>8/23/26</a:t>
+              <a:t>8/31/26</a:t>
             </a:fld>
             <a:endParaRPr lang="en-US"/>
           </a:p>
@@ -9031,7 +9660,7 @@
           <a:p>
             <a:fld id="{1BF61C71-767E-B84C-BFB3-7B18856D27F4}" type="datetimeFigureOut">
               <a:rPr lang="en-US" smtClean="0"/>
-              <a:t>8/23/26</a:t>
+              <a:t>8/31/26</a:t>
             </a:fld>
             <a:endParaRPr lang="en-US"/>
           </a:p>
@@ -9181,7 +9810,7 @@
           <a:p>
             <a:fld id="{1BF61C71-767E-B84C-BFB3-7B18856D27F4}" type="datetimeFigureOut">
               <a:rPr lang="en-US" smtClean="0"/>
-              <a:t>8/23/26</a:t>
+              <a:t>8/31/26</a:t>
             </a:fld>
             <a:endParaRPr lang="en-US"/>
           </a:p>
@@ -9302,7 +9931,7 @@
           <a:p>
             <a:fld id="{1BF61C71-767E-B84C-BFB3-7B18856D27F4}" type="datetimeFigureOut">
               <a:rPr lang="en-US" smtClean="0"/>
-              <a:t>8/23/26</a:t>
+              <a:t>8/31/26</a:t>
             </a:fld>
             <a:endParaRPr lang="en-US"/>
           </a:p>
@@ -9623,7 +10252,7 @@
           <a:p>
             <a:fld id="{1BF61C71-767E-B84C-BFB3-7B18856D27F4}" type="datetimeFigureOut">
               <a:rPr lang="en-US" smtClean="0"/>
-              <a:t>8/23/26</a:t>
+              <a:t>8/31/26</a:t>
             </a:fld>
             <a:endParaRPr lang="en-US"/>
           </a:p>
@@ -9920,7 +10549,7 @@
           <a:p>
             <a:fld id="{1BF61C71-767E-B84C-BFB3-7B18856D27F4}" type="datetimeFigureOut">
               <a:rPr lang="en-US" smtClean="0"/>
-              <a:t>8/23/26</a:t>
+              <a:t>8/31/26</a:t>
             </a:fld>
             <a:endParaRPr lang="en-US"/>
           </a:p>
@@ -10174,7 +10803,7 @@
           <a:p>
             <a:fld id="{1BF61C71-767E-B84C-BFB3-7B18856D27F4}" type="datetimeFigureOut">
               <a:rPr lang="en-US" smtClean="0"/>
-              <a:t>8/23/26</a:t>
+              <a:t>8/31/26</a:t>
             </a:fld>
             <a:endParaRPr lang="en-US"/>
           </a:p>
@@ -10623,8 +11252,8 @@
           <a:lstStyle/>
           <a:p>
             <a:r>
-              <a:rPr lang="en-GB" b="1" dirty="0"/>
-              <a:t>The Three Domains: Tracking, Scouting, and Strategy</a:t>
+              <a:rPr lang="en-GB" dirty="0"/>
+              <a:t>The Three Domains: Scouting, Tracking, and Strategy</a:t>
             </a:r>
           </a:p>
         </p:txBody>
@@ -10681,6 +11310,198 @@
   <p:cSld>
     <p:spTree>
       <p:nvGrpSpPr>
+        <p:cNvPr id="1" name="">
+          <a:extLst>
+            <a:ext uri="{FF2B5EF4-FFF2-40B4-BE49-F238E27FC236}">
+              <a16:creationId xmlns:a16="http://schemas.microsoft.com/office/drawing/2014/main" id="{62620C65-AACC-AC0A-76CE-4647060FAA99}"/>
+            </a:ext>
+          </a:extLst>
+        </p:cNvPr>
+        <p:cNvGrpSpPr/>
+        <p:nvPr/>
+      </p:nvGrpSpPr>
+      <p:grpSpPr>
+        <a:xfrm>
+          <a:off x="0" y="0"/>
+          <a:ext cx="0" cy="0"/>
+          <a:chOff x="0" y="0"/>
+          <a:chExt cx="0" cy="0"/>
+        </a:xfrm>
+      </p:grpSpPr>
+      <p:sp>
+        <p:nvSpPr>
+          <p:cNvPr id="2" name="Title 1">
+            <a:extLst>
+              <a:ext uri="{FF2B5EF4-FFF2-40B4-BE49-F238E27FC236}">
+                <a16:creationId xmlns:a16="http://schemas.microsoft.com/office/drawing/2014/main" id="{ED51E9B5-E8BC-BC83-E6EF-9F91BC10D46E}"/>
+              </a:ext>
+            </a:extLst>
+          </p:cNvPr>
+          <p:cNvSpPr>
+            <a:spLocks noGrp="1"/>
+          </p:cNvSpPr>
+          <p:nvPr>
+            <p:ph type="title"/>
+          </p:nvPr>
+        </p:nvSpPr>
+        <p:spPr>
+          <a:xfrm>
+            <a:off x="838200" y="365126"/>
+            <a:ext cx="10515600" cy="1311274"/>
+          </a:xfrm>
+        </p:spPr>
+        <p:txBody>
+          <a:bodyPr>
+            <a:normAutofit/>
+          </a:bodyPr>
+          <a:lstStyle/>
+          <a:p>
+            <a:r>
+              <a:rPr lang="en-GB" dirty="0"/>
+              <a:t>Tracking Connects the Training Plan, Completed Work, and Athlete Response</a:t>
+            </a:r>
+            <a:endParaRPr lang="en-US" dirty="0"/>
+          </a:p>
+        </p:txBody>
+      </p:sp>
+      <p:sp>
+        <p:nvSpPr>
+          <p:cNvPr id="3" name="Content Placeholder 2">
+            <a:extLst>
+              <a:ext uri="{FF2B5EF4-FFF2-40B4-BE49-F238E27FC236}">
+                <a16:creationId xmlns:a16="http://schemas.microsoft.com/office/drawing/2014/main" id="{E2888A1B-7759-ED77-C7D4-03E0BC0B381C}"/>
+              </a:ext>
+            </a:extLst>
+          </p:cNvPr>
+          <p:cNvSpPr>
+            <a:spLocks noGrp="1"/>
+          </p:cNvSpPr>
+          <p:nvPr>
+            <p:ph idx="1"/>
+          </p:nvPr>
+        </p:nvSpPr>
+        <p:spPr>
+          <a:xfrm>
+            <a:off x="838200" y="1828800"/>
+            <a:ext cx="10515600" cy="4348163"/>
+          </a:xfrm>
+        </p:spPr>
+        <p:txBody>
+          <a:bodyPr>
+            <a:normAutofit/>
+          </a:bodyPr>
+          <a:lstStyle/>
+          <a:p>
+            <a:pPr lvl="0"/>
+            <a:r>
+              <a:rPr lang="en-GB" dirty="0"/>
+              <a:t>What was prescribed?</a:t>
+            </a:r>
+          </a:p>
+          <a:p>
+            <a:pPr lvl="1"/>
+            <a:r>
+              <a:rPr lang="en-GB" dirty="0"/>
+              <a:t>The planned training or competition demand</a:t>
+            </a:r>
+          </a:p>
+          <a:p>
+            <a:pPr lvl="1"/>
+            <a:endParaRPr lang="en-GB" dirty="0"/>
+          </a:p>
+          <a:p>
+            <a:pPr lvl="0"/>
+            <a:r>
+              <a:rPr lang="en-GB" dirty="0"/>
+              <a:t>What did the athlete complete?</a:t>
+            </a:r>
+          </a:p>
+          <a:p>
+            <a:pPr lvl="1"/>
+            <a:r>
+              <a:rPr lang="en-GB" dirty="0"/>
+              <a:t>Duration, distance, accelerations, impacts, repetitions</a:t>
+            </a:r>
+          </a:p>
+          <a:p>
+            <a:pPr lvl="1"/>
+            <a:endParaRPr lang="en-GB" dirty="0"/>
+          </a:p>
+          <a:p>
+            <a:pPr lvl="0"/>
+            <a:r>
+              <a:rPr lang="en-GB" dirty="0"/>
+              <a:t>How did the athlete respond?</a:t>
+            </a:r>
+          </a:p>
+          <a:p>
+            <a:pPr lvl="1"/>
+            <a:r>
+              <a:rPr lang="en-GB" dirty="0"/>
+              <a:t>Heart rate, RPE, soreness, wellness, performance changes</a:t>
+            </a:r>
+          </a:p>
+        </p:txBody>
+      </p:sp>
+      <p:sp>
+        <p:nvSpPr>
+          <p:cNvPr id="4" name="TextBox 3">
+            <a:extLst>
+              <a:ext uri="{FF2B5EF4-FFF2-40B4-BE49-F238E27FC236}">
+                <a16:creationId xmlns:a16="http://schemas.microsoft.com/office/drawing/2014/main" id="{1C475B5E-C7BA-FAD6-E9CD-CB2AB1EB4ACE}"/>
+              </a:ext>
+            </a:extLst>
+          </p:cNvPr>
+          <p:cNvSpPr txBox="1"/>
+          <p:nvPr/>
+        </p:nvSpPr>
+        <p:spPr>
+          <a:xfrm>
+            <a:off x="1572491" y="5960031"/>
+            <a:ext cx="9047018" cy="369332"/>
+          </a:xfrm>
+          <a:prstGeom prst="rect">
+            <a:avLst/>
+          </a:prstGeom>
+          <a:noFill/>
+        </p:spPr>
+        <p:txBody>
+          <a:bodyPr wrap="square">
+            <a:spAutoFit/>
+          </a:bodyPr>
+          <a:lstStyle/>
+          <a:p>
+            <a:pPr lvl="1" algn="ctr"/>
+            <a:r>
+              <a:rPr lang="en-GB" dirty="0"/>
+              <a:t>Workload has meaning only when interpreted in context.</a:t>
+            </a:r>
+            <a:endParaRPr lang="en-GB" sz="2400" b="1" dirty="0">
+              <a:solidFill>
+                <a:srgbClr val="FF0000"/>
+              </a:solidFill>
+            </a:endParaRPr>
+          </a:p>
+        </p:txBody>
+      </p:sp>
+    </p:spTree>
+    <p:extLst>
+      <p:ext uri="{BB962C8B-B14F-4D97-AF65-F5344CB8AC3E}">
+        <p14:creationId xmlns:p14="http://schemas.microsoft.com/office/powerpoint/2010/main" val="3326346195"/>
+      </p:ext>
+    </p:extLst>
+  </p:cSld>
+  <p:clrMapOvr>
+    <a:masterClrMapping/>
+  </p:clrMapOvr>
+</p:sld>
+</file>
+
+<file path=ppt/slides/slide11.xml><?xml version="1.0" encoding="utf-8"?>
+<p:sld xmlns:a="http://schemas.openxmlformats.org/drawingml/2006/main" xmlns:r="http://schemas.openxmlformats.org/officeDocument/2006/relationships" xmlns:p="http://schemas.openxmlformats.org/presentationml/2006/main">
+  <p:cSld>
+    <p:spTree>
+      <p:nvGrpSpPr>
         <p:cNvPr id="1" name=""/>
         <p:cNvGrpSpPr/>
         <p:nvPr/>
@@ -10712,13 +11533,13 @@
         <p:spPr/>
         <p:txBody>
           <a:bodyPr>
-            <a:normAutofit fontScale="90000"/>
+            <a:normAutofit/>
           </a:bodyPr>
           <a:lstStyle/>
           <a:p>
             <a:r>
               <a:rPr lang="en-GB" dirty="0"/>
-              <a:t>Load Monitoring Does Not Automatically Prevent Injury</a:t>
+              <a:t>Monitoring Data Requires Interpretation</a:t>
             </a:r>
             <a:endParaRPr lang="en-US" dirty="0"/>
           </a:p>
@@ -10742,55 +11563,54 @@
         </p:nvSpPr>
         <p:spPr/>
         <p:txBody>
-          <a:bodyPr/>
+          <a:bodyPr>
+            <a:normAutofit/>
+          </a:bodyPr>
           <a:lstStyle/>
           <a:p>
             <a:pPr lvl="0"/>
             <a:r>
               <a:rPr lang="en-GB" dirty="0"/>
-              <a:t>Athlete data can identify unusual patterns and support better conversations.</a:t>
-            </a:r>
+              <a:t>Athlete monitoring data can identify unusual patterns or changes. </a:t>
+            </a:r>
+          </a:p>
+          <a:p>
+            <a:pPr lvl="1"/>
+            <a:endParaRPr lang="en-GB" dirty="0"/>
           </a:p>
           <a:p>
             <a:pPr lvl="0"/>
             <a:r>
               <a:rPr lang="en-GB" dirty="0"/>
-              <a:t>A flag indicates that something may deserve attention; it does not diagnose a problem.</a:t>
+              <a:t>A flag indicates that something may deserve </a:t>
+            </a:r>
+            <a:r>
+              <a:rPr lang="en-GB" b="1" dirty="0"/>
+              <a:t>attention </a:t>
+            </a:r>
+            <a:r>
+              <a:rPr lang="en-GB" dirty="0"/>
+              <a:t>but does not diagnose a problem. </a:t>
             </a:r>
           </a:p>
           <a:p>
             <a:pPr lvl="0"/>
+            <a:endParaRPr lang="en-GB" dirty="0"/>
+          </a:p>
+          <a:p>
+            <a:pPr lvl="0"/>
             <a:r>
               <a:rPr lang="en-GB" dirty="0"/>
-              <a:t>Injury and performance are affected by many interacting factors.</a:t>
-            </a:r>
-          </a:p>
-          <a:p>
-            <a:pPr lvl="0"/>
+              <a:t>Coaches and practitioners must interpret the information within the athlete’s broader </a:t>
+            </a:r>
+            <a:r>
+              <a:rPr lang="en-GB" b="1" dirty="0"/>
+              <a:t>context</a:t>
+            </a:r>
             <a:r>
               <a:rPr lang="en-GB" dirty="0"/>
-              <a:t>The practitioner still has to interpret the evidence and decide what to do.</a:t>
-            </a:r>
-          </a:p>
-          <a:p>
-            <a:r>
-              <a:rPr lang="en-GB" dirty="0"/>
-              <a:t>Measurement supports judgment but it does not remove uncertainty.</a:t>
-            </a:r>
-          </a:p>
-          <a:p>
-            <a:pPr lvl="1"/>
-            <a:r>
-              <a:rPr lang="en-GB" dirty="0"/>
-              <a:t>Injury prediction is </a:t>
-            </a:r>
-            <a:r>
-              <a:rPr lang="en-GB" b="1" i="1" dirty="0"/>
-              <a:t>multimodal</a:t>
-            </a:r>
-          </a:p>
-          <a:p>
-            <a:endParaRPr lang="en-US" dirty="0"/>
+              <a:t>.</a:t>
+            </a:r>
           </a:p>
         </p:txBody>
       </p:sp>
@@ -10807,7 +11627,7 @@
 </p:sld>
 </file>
 
-<file path=ppt/slides/slide11.xml><?xml version="1.0" encoding="utf-8"?>
+<file path=ppt/slides/slide12.xml><?xml version="1.0" encoding="utf-8"?>
 <p:sld xmlns:a="http://schemas.openxmlformats.org/drawingml/2006/main" xmlns:r="http://schemas.openxmlformats.org/officeDocument/2006/relationships" xmlns:p="http://schemas.openxmlformats.org/presentationml/2006/main">
   <p:cSld>
     <p:spTree>
@@ -10855,7 +11675,7 @@
           <a:p>
             <a:r>
               <a:rPr lang="en-GB" dirty="0"/>
-              <a:t>Domain 3: Strategy &amp; Tactical Optimization</a:t>
+              <a:t>Domain 3: Strategy &amp; Tactical Analysis</a:t>
             </a:r>
             <a:endParaRPr lang="en-US" dirty="0"/>
           </a:p>
@@ -11021,7 +11841,7 @@
           <a:p>
             <a:r>
               <a:rPr lang="en-GB" sz="2400" b="1" dirty="0"/>
-              <a:t>Common decision</a:t>
+              <a:t>Common decisions</a:t>
             </a:r>
           </a:p>
           <a:p>
@@ -11070,172 +11890,6 @@
     <p:extLst>
       <p:ext uri="{BB962C8B-B14F-4D97-AF65-F5344CB8AC3E}">
         <p14:creationId xmlns:p14="http://schemas.microsoft.com/office/powerpoint/2010/main" val="4233146101"/>
-      </p:ext>
-    </p:extLst>
-  </p:cSld>
-  <p:clrMapOvr>
-    <a:masterClrMapping/>
-  </p:clrMapOvr>
-</p:sld>
-</file>
-
-<file path=ppt/slides/slide12.xml><?xml version="1.0" encoding="utf-8"?>
-<p:sld xmlns:a="http://schemas.openxmlformats.org/drawingml/2006/main" xmlns:r="http://schemas.openxmlformats.org/officeDocument/2006/relationships" xmlns:p="http://schemas.openxmlformats.org/presentationml/2006/main">
-  <p:cSld>
-    <p:spTree>
-      <p:nvGrpSpPr>
-        <p:cNvPr id="1" name=""/>
-        <p:cNvGrpSpPr/>
-        <p:nvPr/>
-      </p:nvGrpSpPr>
-      <p:grpSpPr>
-        <a:xfrm>
-          <a:off x="0" y="0"/>
-          <a:ext cx="0" cy="0"/>
-          <a:chOff x="0" y="0"/>
-          <a:chExt cx="0" cy="0"/>
-        </a:xfrm>
-      </p:grpSpPr>
-      <p:sp>
-        <p:nvSpPr>
-          <p:cNvPr id="2" name="Title 1">
-            <a:extLst>
-              <a:ext uri="{FF2B5EF4-FFF2-40B4-BE49-F238E27FC236}">
-                <a16:creationId xmlns:a16="http://schemas.microsoft.com/office/drawing/2014/main" id="{83700091-86A6-44ED-8B85-AF5B811FD243}"/>
-              </a:ext>
-            </a:extLst>
-          </p:cNvPr>
-          <p:cNvSpPr>
-            <a:spLocks noGrp="1"/>
-          </p:cNvSpPr>
-          <p:nvPr>
-            <p:ph type="title"/>
-          </p:nvPr>
-        </p:nvSpPr>
-        <p:spPr/>
-        <p:txBody>
-          <a:bodyPr>
-            <a:normAutofit fontScale="90000"/>
-          </a:bodyPr>
-          <a:lstStyle/>
-          <a:p>
-            <a:r>
-              <a:rPr lang="en-GB" dirty="0"/>
-              <a:t>Context Changes the Meaning of a Game Event	</a:t>
-            </a:r>
-          </a:p>
-        </p:txBody>
-      </p:sp>
-      <p:sp>
-        <p:nvSpPr>
-          <p:cNvPr id="3" name="Content Placeholder 2">
-            <a:extLst>
-              <a:ext uri="{FF2B5EF4-FFF2-40B4-BE49-F238E27FC236}">
-                <a16:creationId xmlns:a16="http://schemas.microsoft.com/office/drawing/2014/main" id="{70846D2A-36B4-B854-420B-C54066EF71E3}"/>
-              </a:ext>
-            </a:extLst>
-          </p:cNvPr>
-          <p:cNvSpPr>
-            <a:spLocks noGrp="1"/>
-          </p:cNvSpPr>
-          <p:nvPr>
-            <p:ph idx="1"/>
-          </p:nvPr>
-        </p:nvSpPr>
-        <p:spPr/>
-        <p:txBody>
-          <a:bodyPr>
-            <a:normAutofit/>
-          </a:bodyPr>
-          <a:lstStyle/>
-          <a:p>
-            <a:r>
-              <a:rPr lang="en-GB" dirty="0"/>
-              <a:t>The same shot, pass, or play can have different value depending on:</a:t>
-            </a:r>
-          </a:p>
-          <a:p>
-            <a:pPr lvl="1"/>
-            <a:r>
-              <a:rPr lang="en-GB" dirty="0"/>
-              <a:t>Score and time remaining</a:t>
-            </a:r>
-          </a:p>
-          <a:p>
-            <a:pPr lvl="1"/>
-            <a:r>
-              <a:rPr lang="en-GB" dirty="0"/>
-              <a:t>Opponent and matchup</a:t>
-            </a:r>
-          </a:p>
-          <a:p>
-            <a:pPr lvl="1"/>
-            <a:r>
-              <a:rPr lang="en-GB" dirty="0"/>
-              <a:t>Player location and defensive pressure</a:t>
-            </a:r>
-          </a:p>
-          <a:p>
-            <a:pPr lvl="1"/>
-            <a:r>
-              <a:rPr lang="en-GB" dirty="0"/>
-              <a:t>Teammates on the court or field</a:t>
-            </a:r>
-          </a:p>
-          <a:p>
-            <a:pPr lvl="1"/>
-            <a:r>
-              <a:rPr lang="en-GB" dirty="0"/>
-              <a:t>The sequence of events leading to it</a:t>
-            </a:r>
-          </a:p>
-        </p:txBody>
-      </p:sp>
-      <p:sp>
-        <p:nvSpPr>
-          <p:cNvPr id="4" name="TextBox 3">
-            <a:extLst>
-              <a:ext uri="{FF2B5EF4-FFF2-40B4-BE49-F238E27FC236}">
-                <a16:creationId xmlns:a16="http://schemas.microsoft.com/office/drawing/2014/main" id="{A846A89B-06FB-BADD-6211-2E10A63ADC10}"/>
-              </a:ext>
-            </a:extLst>
-          </p:cNvPr>
-          <p:cNvSpPr txBox="1"/>
-          <p:nvPr/>
-        </p:nvSpPr>
-        <p:spPr>
-          <a:xfrm>
-            <a:off x="1572491" y="5185229"/>
-            <a:ext cx="9047018" cy="369332"/>
-          </a:xfrm>
-          <a:prstGeom prst="rect">
-            <a:avLst/>
-          </a:prstGeom>
-          <a:noFill/>
-        </p:spPr>
-        <p:txBody>
-          <a:bodyPr wrap="square">
-            <a:spAutoFit/>
-          </a:bodyPr>
-          <a:lstStyle/>
-          <a:p>
-            <a:pPr lvl="1" algn="ctr"/>
-            <a:r>
-              <a:rPr lang="en-GB" dirty="0"/>
-              <a:t>Strategy analysis asks not only what happened, but when, where, and against whom.</a:t>
-            </a:r>
-            <a:endParaRPr lang="en-GB" sz="2400" b="1" dirty="0">
-              <a:solidFill>
-                <a:srgbClr val="FF0000"/>
-              </a:solidFill>
-            </a:endParaRPr>
-          </a:p>
-        </p:txBody>
-      </p:sp>
-    </p:spTree>
-    <p:extLst>
-      <p:ext uri="{BB962C8B-B14F-4D97-AF65-F5344CB8AC3E}">
-        <p14:creationId xmlns:p14="http://schemas.microsoft.com/office/powerpoint/2010/main" val="1860106273"/>
       </p:ext>
     </p:extLst>
   </p:cSld>
@@ -11267,7 +11921,7 @@
           <p:cNvPr id="2" name="Title 1">
             <a:extLst>
               <a:ext uri="{FF2B5EF4-FFF2-40B4-BE49-F238E27FC236}">
-                <a16:creationId xmlns:a16="http://schemas.microsoft.com/office/drawing/2014/main" id="{AA6BF151-17A3-BE94-563E-EEC74FD042FD}"/>
+                <a16:creationId xmlns:a16="http://schemas.microsoft.com/office/drawing/2014/main" id="{83700091-86A6-44ED-8B85-AF5B811FD243}"/>
               </a:ext>
             </a:extLst>
           </p:cNvPr>
@@ -11280,12 +11934,14 @@
         </p:nvSpPr>
         <p:spPr/>
         <p:txBody>
-          <a:bodyPr/>
+          <a:bodyPr>
+            <a:normAutofit/>
+          </a:bodyPr>
           <a:lstStyle/>
           <a:p>
             <a:r>
-              <a:rPr lang="en-US" dirty="0"/>
-              <a:t>Developing an Analytical Question</a:t>
+              <a:rPr lang="en-GB" dirty="0"/>
+              <a:t>Situational Context and Game Event	</a:t>
             </a:r>
           </a:p>
         </p:txBody>
@@ -11295,7 +11951,7 @@
           <p:cNvPr id="3" name="Content Placeholder 2">
             <a:extLst>
               <a:ext uri="{FF2B5EF4-FFF2-40B4-BE49-F238E27FC236}">
-                <a16:creationId xmlns:a16="http://schemas.microsoft.com/office/drawing/2014/main" id="{13FE2B59-4E9C-1A2A-0D85-1247AFC5E9FD}"/>
+                <a16:creationId xmlns:a16="http://schemas.microsoft.com/office/drawing/2014/main" id="{70846D2A-36B4-B854-420B-C54066EF71E3}"/>
               </a:ext>
             </a:extLst>
           </p:cNvPr>
@@ -11308,51 +11964,111 @@
         </p:nvSpPr>
         <p:spPr/>
         <p:txBody>
-          <a:bodyPr/>
+          <a:bodyPr>
+            <a:normAutofit/>
+          </a:bodyPr>
           <a:lstStyle/>
           <a:p>
             <a:r>
               <a:rPr lang="en-GB" dirty="0"/>
-              <a:t>Within any domain, we might want to:</a:t>
+              <a:t>The value of a shot, pass, or play depends on:</a:t>
             </a:r>
           </a:p>
           <a:p>
             <a:pPr lvl="1"/>
+            <a:endParaRPr lang="en-GB" dirty="0"/>
+          </a:p>
+          <a:p>
+            <a:pPr lvl="1"/>
+            <a:r>
+              <a:rPr lang="en-GB" b="1" dirty="0"/>
+              <a:t>When </a:t>
+            </a:r>
             <a:r>
               <a:rPr lang="en-GB" dirty="0"/>
-              <a:t>Summarize what occurred</a:t>
+              <a:t>it occurred: score, time remaining, and game situation </a:t>
             </a:r>
           </a:p>
           <a:p>
             <a:pPr lvl="1"/>
+            <a:endParaRPr lang="en-GB" dirty="0"/>
+          </a:p>
+          <a:p>
+            <a:pPr lvl="1"/>
+            <a:r>
+              <a:rPr lang="en-GB" b="1" dirty="0"/>
+              <a:t>Where </a:t>
+            </a:r>
             <a:r>
               <a:rPr lang="en-GB" dirty="0"/>
-              <a:t>Investigate why it occurred</a:t>
+              <a:t>it occurred: player location and defensive pressure </a:t>
             </a:r>
           </a:p>
           <a:p>
             <a:pPr lvl="1"/>
+            <a:endParaRPr lang="en-GB" dirty="0"/>
+          </a:p>
+          <a:p>
+            <a:pPr lvl="1"/>
+            <a:r>
+              <a:rPr lang="en-GB" b="1" dirty="0"/>
+              <a:t>Who </a:t>
+            </a:r>
             <a:r>
               <a:rPr lang="en-GB" dirty="0"/>
-              <a:t>Estimate what may occur next</a:t>
-            </a:r>
-          </a:p>
-          <a:p>
-            <a:pPr lvl="1"/>
+              <a:t>was involved: opponent, matchup, and teammates on the court or field</a:t>
+            </a:r>
+          </a:p>
+          <a:p>
+            <a:endParaRPr lang="en-GB" dirty="0"/>
+          </a:p>
+        </p:txBody>
+      </p:sp>
+      <p:sp>
+        <p:nvSpPr>
+          <p:cNvPr id="4" name="TextBox 3">
+            <a:extLst>
+              <a:ext uri="{FF2B5EF4-FFF2-40B4-BE49-F238E27FC236}">
+                <a16:creationId xmlns:a16="http://schemas.microsoft.com/office/drawing/2014/main" id="{A846A89B-06FB-BADD-6211-2E10A63ADC10}"/>
+              </a:ext>
+            </a:extLst>
+          </p:cNvPr>
+          <p:cNvSpPr txBox="1"/>
+          <p:nvPr/>
+        </p:nvSpPr>
+        <p:spPr>
+          <a:xfrm>
+            <a:off x="1572491" y="5185229"/>
+            <a:ext cx="9047018" cy="369332"/>
+          </a:xfrm>
+          <a:prstGeom prst="rect">
+            <a:avLst/>
+          </a:prstGeom>
+          <a:noFill/>
+        </p:spPr>
+        <p:txBody>
+          <a:bodyPr wrap="square">
+            <a:spAutoFit/>
+          </a:bodyPr>
+          <a:lstStyle/>
+          <a:p>
+            <a:pPr lvl="1" algn="ctr"/>
             <a:r>
               <a:rPr lang="en-GB" dirty="0"/>
-              <a:t>Decide what action to take</a:t>
-            </a:r>
-          </a:p>
-          <a:p>
-            <a:endParaRPr lang="en-US" dirty="0"/>
+              <a:t>Strategy analysis asks not only what happened, but when, where, and against whom.</a:t>
+            </a:r>
+            <a:endParaRPr lang="en-GB" sz="2400" b="1" dirty="0">
+              <a:solidFill>
+                <a:srgbClr val="FF0000"/>
+              </a:solidFill>
+            </a:endParaRPr>
           </a:p>
         </p:txBody>
       </p:sp>
     </p:spTree>
     <p:extLst>
       <p:ext uri="{BB962C8B-B14F-4D97-AF65-F5344CB8AC3E}">
-        <p14:creationId xmlns:p14="http://schemas.microsoft.com/office/powerpoint/2010/main" val="2234398774"/>
+        <p14:creationId xmlns:p14="http://schemas.microsoft.com/office/powerpoint/2010/main" val="1860106273"/>
       </p:ext>
     </p:extLst>
   </p:cSld>
@@ -11384,7 +12100,7 @@
           <p:cNvPr id="2" name="Title 1">
             <a:extLst>
               <a:ext uri="{FF2B5EF4-FFF2-40B4-BE49-F238E27FC236}">
-                <a16:creationId xmlns:a16="http://schemas.microsoft.com/office/drawing/2014/main" id="{4A56E687-775F-7437-EDC7-D51CFF5AD815}"/>
+                <a16:creationId xmlns:a16="http://schemas.microsoft.com/office/drawing/2014/main" id="{186D4665-7DBF-8A56-8432-CC0037900FFD}"/>
               </a:ext>
             </a:extLst>
           </p:cNvPr>
@@ -11395,61 +12111,74 @@
             <p:ph type="title"/>
           </p:nvPr>
         </p:nvSpPr>
-        <p:spPr>
-          <a:xfrm>
-            <a:off x="838200" y="365126"/>
-            <a:ext cx="10515600" cy="1366692"/>
-          </a:xfrm>
-        </p:spPr>
-        <p:txBody>
-          <a:bodyPr>
-            <a:normAutofit/>
-          </a:bodyPr>
+        <p:spPr/>
+        <p:txBody>
+          <a:bodyPr/>
           <a:lstStyle/>
           <a:p>
-            <a:r>
-              <a:rPr lang="en-GB" dirty="0"/>
-              <a:t>Four Types of Analytical Questions</a:t>
-            </a:r>
-          </a:p>
-        </p:txBody>
-      </p:sp>
-      <p:graphicFrame>
-        <p:nvGraphicFramePr>
-          <p:cNvPr id="4" name="Content Placeholder 2">
+            <a:endParaRPr lang="en-US" dirty="0"/>
+          </a:p>
+        </p:txBody>
+      </p:sp>
+      <p:sp>
+        <p:nvSpPr>
+          <p:cNvPr id="3" name="Content Placeholder 2">
             <a:extLst>
               <a:ext uri="{FF2B5EF4-FFF2-40B4-BE49-F238E27FC236}">
-                <a16:creationId xmlns:a16="http://schemas.microsoft.com/office/drawing/2014/main" id="{EC7561EA-9584-52D2-BAC5-64D0CEFB10AE}"/>
+                <a16:creationId xmlns:a16="http://schemas.microsoft.com/office/drawing/2014/main" id="{6E10B1F5-5C90-B50C-2694-2E70097DA589}"/>
               </a:ext>
             </a:extLst>
           </p:cNvPr>
-          <p:cNvGraphicFramePr>
-            <a:graphicFrameLocks/>
-          </p:cNvGraphicFramePr>
+          <p:cNvSpPr>
+            <a:spLocks noGrp="1"/>
+          </p:cNvSpPr>
           <p:nvPr>
-            <p:extLst>
-              <p:ext uri="{D42A27DB-BD31-4B8C-83A1-F6EECF244321}">
-                <p14:modId xmlns:p14="http://schemas.microsoft.com/office/powerpoint/2010/main" val="2765187922"/>
-              </p:ext>
-            </p:extLst>
+            <p:ph idx="1"/>
           </p:nvPr>
-        </p:nvGraphicFramePr>
-        <p:xfrm>
-          <a:off x="644056" y="2112580"/>
-          <a:ext cx="10927829" cy="3289154"/>
-        </p:xfrm>
-        <a:graphic>
-          <a:graphicData uri="http://schemas.openxmlformats.org/drawingml/2006/diagram">
-            <dgm:relIds xmlns:dgm="http://schemas.openxmlformats.org/drawingml/2006/diagram" xmlns:r="http://schemas.openxmlformats.org/officeDocument/2006/relationships" r:dm="rId2" r:lo="rId3" r:qs="rId4" r:cs="rId5"/>
-          </a:graphicData>
-        </a:graphic>
-      </p:graphicFrame>
-      <p:sp>
-        <p:nvSpPr>
-          <p:cNvPr id="6" name="TextBox 5">
+        </p:nvSpPr>
+        <p:spPr/>
+        <p:txBody>
+          <a:bodyPr/>
+          <a:lstStyle/>
+          <a:p>
+            <a:r>
+              <a:rPr lang="en-US" dirty="0"/>
+              <a:t>Which domain is your decision or question in?</a:t>
+            </a:r>
+          </a:p>
+          <a:p>
+            <a:pPr lvl="1"/>
+            <a:r>
+              <a:rPr lang="en-GB" dirty="0"/>
+              <a:t>Scouting and talent evaluation </a:t>
+            </a:r>
+          </a:p>
+          <a:p>
+            <a:pPr lvl="1"/>
+            <a:r>
+              <a:rPr lang="en-GB" dirty="0"/>
+              <a:t>Athlete tracking and monitoring </a:t>
+            </a:r>
+          </a:p>
+          <a:p>
+            <a:pPr lvl="1"/>
+            <a:r>
+              <a:rPr lang="en-GB" dirty="0"/>
+              <a:t>Strategy and tactical analysis</a:t>
+            </a:r>
+          </a:p>
+          <a:p>
+            <a:pPr lvl="1"/>
+            <a:endParaRPr lang="en-US" dirty="0"/>
+          </a:p>
+        </p:txBody>
+      </p:sp>
+      <p:sp>
+        <p:nvSpPr>
+          <p:cNvPr id="5" name="TextBox 4">
             <a:extLst>
               <a:ext uri="{FF2B5EF4-FFF2-40B4-BE49-F238E27FC236}">
-                <a16:creationId xmlns:a16="http://schemas.microsoft.com/office/drawing/2014/main" id="{CD501C34-509A-81FF-B053-22366C2BFE5A}"/>
+                <a16:creationId xmlns:a16="http://schemas.microsoft.com/office/drawing/2014/main" id="{045FE3CE-CCD9-81B0-25CC-B7A223ACD2BF}"/>
               </a:ext>
             </a:extLst>
           </p:cNvPr>
@@ -11458,8 +12187,8 @@
         </p:nvSpPr>
         <p:spPr>
           <a:xfrm>
-            <a:off x="3059970" y="5197894"/>
-            <a:ext cx="6096000" cy="369332"/>
+            <a:off x="3048000" y="4186489"/>
+            <a:ext cx="6096000" cy="646331"/>
           </a:xfrm>
           <a:prstGeom prst="rect">
             <a:avLst/>
@@ -11472,45 +12201,18 @@
           </a:bodyPr>
           <a:lstStyle/>
           <a:p>
-            <a:pPr marL="0" indent="0" algn="l">
-              <a:buNone/>
-            </a:pPr>
-            <a:r>
-              <a:rPr lang="en-GB" sz="1800" b="0" i="0" dirty="0">
+            <a:r>
+              <a:rPr lang="en-GB" dirty="0">
                 <a:solidFill>
-                  <a:schemeClr val="tx1"/>
+                  <a:srgbClr val="FF0000"/>
                 </a:solidFill>
-                <a:effectLst/>
-                <a:latin typeface="+mn-lt"/>
               </a:rPr>
-              <a:t>These are different purposes. </a:t>
-            </a:r>
-            <a:r>
-              <a:rPr lang="en-GB" sz="1800" b="1" i="0" dirty="0">
-                <a:solidFill>
-                  <a:schemeClr val="tx1"/>
-                </a:solidFill>
-                <a:effectLst/>
-                <a:latin typeface="+mn-lt"/>
-              </a:rPr>
-              <a:t>Not </a:t>
-            </a:r>
-            <a:r>
-              <a:rPr lang="en-GB" sz="1800" b="0" i="0" dirty="0">
-                <a:solidFill>
-                  <a:schemeClr val="tx1"/>
-                </a:solidFill>
-                <a:effectLst/>
-                <a:latin typeface="+mn-lt"/>
-              </a:rPr>
-              <a:t>a ranking</a:t>
-            </a:r>
-            <a:endParaRPr lang="en-GB" sz="2250" b="0" i="0" dirty="0">
+              <a:t>What information would you want before making that decision?</a:t>
+            </a:r>
+            <a:endParaRPr lang="en-US" dirty="0">
               <a:solidFill>
-                <a:srgbClr val="1A292C"/>
+                <a:srgbClr val="FF0000"/>
               </a:solidFill>
-              <a:effectLst/>
-              <a:latin typeface="Fira Sans" panose="020B0503050000020004" pitchFamily="34" charset="0"/>
             </a:endParaRPr>
           </a:p>
         </p:txBody>
@@ -11518,7 +12220,7 @@
     </p:spTree>
     <p:extLst>
       <p:ext uri="{BB962C8B-B14F-4D97-AF65-F5344CB8AC3E}">
-        <p14:creationId xmlns:p14="http://schemas.microsoft.com/office/powerpoint/2010/main" val="2812742232"/>
+        <p14:creationId xmlns:p14="http://schemas.microsoft.com/office/powerpoint/2010/main" val="3637665828"/>
       </p:ext>
     </p:extLst>
   </p:cSld>
@@ -11550,7 +12252,7 @@
           <p:cNvPr id="2" name="Title 1">
             <a:extLst>
               <a:ext uri="{FF2B5EF4-FFF2-40B4-BE49-F238E27FC236}">
-                <a16:creationId xmlns:a16="http://schemas.microsoft.com/office/drawing/2014/main" id="{489EC1E5-3253-BE3B-A177-555F6256FD6E}"/>
+                <a16:creationId xmlns:a16="http://schemas.microsoft.com/office/drawing/2014/main" id="{14009AD9-21AB-F292-D8DE-189FC1682897}"/>
               </a:ext>
             </a:extLst>
           </p:cNvPr>
@@ -11563,12 +12265,99 @@
         </p:nvSpPr>
         <p:spPr/>
         <p:txBody>
+          <a:bodyPr>
+            <a:normAutofit/>
+          </a:bodyPr>
+          <a:lstStyle/>
+          <a:p>
+            <a:r>
+              <a:rPr lang="en-US" sz="4800" dirty="0"/>
+              <a:t>Developing an Analytical Question</a:t>
+            </a:r>
+          </a:p>
+        </p:txBody>
+      </p:sp>
+      <p:sp>
+        <p:nvSpPr>
+          <p:cNvPr id="3" name="Text Placeholder 2">
+            <a:extLst>
+              <a:ext uri="{FF2B5EF4-FFF2-40B4-BE49-F238E27FC236}">
+                <a16:creationId xmlns:a16="http://schemas.microsoft.com/office/drawing/2014/main" id="{4FFB6CB8-04B0-5CB0-1F16-6718FEDB96DD}"/>
+              </a:ext>
+            </a:extLst>
+          </p:cNvPr>
+          <p:cNvSpPr>
+            <a:spLocks noGrp="1"/>
+          </p:cNvSpPr>
+          <p:nvPr>
+            <p:ph type="body" idx="1"/>
+          </p:nvPr>
+        </p:nvSpPr>
+        <p:spPr/>
+        <p:txBody>
           <a:bodyPr/>
           <a:lstStyle/>
           <a:p>
+            <a:endParaRPr lang="en-US"/>
+          </a:p>
+        </p:txBody>
+      </p:sp>
+    </p:spTree>
+    <p:extLst>
+      <p:ext uri="{BB962C8B-B14F-4D97-AF65-F5344CB8AC3E}">
+        <p14:creationId xmlns:p14="http://schemas.microsoft.com/office/powerpoint/2010/main" val="2930076464"/>
+      </p:ext>
+    </p:extLst>
+  </p:cSld>
+  <p:clrMapOvr>
+    <a:masterClrMapping/>
+  </p:clrMapOvr>
+</p:sld>
+</file>
+
+<file path=ppt/slides/slide16.xml><?xml version="1.0" encoding="utf-8"?>
+<p:sld xmlns:a="http://schemas.openxmlformats.org/drawingml/2006/main" xmlns:r="http://schemas.openxmlformats.org/officeDocument/2006/relationships" xmlns:p="http://schemas.openxmlformats.org/presentationml/2006/main">
+  <p:cSld>
+    <p:spTree>
+      <p:nvGrpSpPr>
+        <p:cNvPr id="1" name=""/>
+        <p:cNvGrpSpPr/>
+        <p:nvPr/>
+      </p:nvGrpSpPr>
+      <p:grpSpPr>
+        <a:xfrm>
+          <a:off x="0" y="0"/>
+          <a:ext cx="0" cy="0"/>
+          <a:chOff x="0" y="0"/>
+          <a:chExt cx="0" cy="0"/>
+        </a:xfrm>
+      </p:grpSpPr>
+      <p:sp>
+        <p:nvSpPr>
+          <p:cNvPr id="2" name="Title 1">
+            <a:extLst>
+              <a:ext uri="{FF2B5EF4-FFF2-40B4-BE49-F238E27FC236}">
+                <a16:creationId xmlns:a16="http://schemas.microsoft.com/office/drawing/2014/main" id="{AA6BF151-17A3-BE94-563E-EEC74FD042FD}"/>
+              </a:ext>
+            </a:extLst>
+          </p:cNvPr>
+          <p:cNvSpPr>
+            <a:spLocks noGrp="1"/>
+          </p:cNvSpPr>
+          <p:nvPr>
+            <p:ph type="title"/>
+          </p:nvPr>
+        </p:nvSpPr>
+        <p:spPr/>
+        <p:txBody>
+          <a:bodyPr>
+            <a:normAutofit fontScale="90000"/>
+          </a:bodyPr>
+          <a:lstStyle/>
+          <a:p>
             <a:r>
               <a:rPr lang="en-GB" dirty="0"/>
-              <a:t>Descriptive Analytics</a:t>
+              <a:t>Analytical Questions Serve Different Purposes</a:t>
             </a:r>
             <a:endParaRPr lang="en-US" dirty="0"/>
           </a:p>
@@ -11579,7 +12368,7 @@
           <p:cNvPr id="3" name="Content Placeholder 2">
             <a:extLst>
               <a:ext uri="{FF2B5EF4-FFF2-40B4-BE49-F238E27FC236}">
-                <a16:creationId xmlns:a16="http://schemas.microsoft.com/office/drawing/2014/main" id="{FFF80534-F617-B253-BAEF-A99C9EDB1A0C}"/>
+                <a16:creationId xmlns:a16="http://schemas.microsoft.com/office/drawing/2014/main" id="{13FE2B59-4E9C-1A2A-0D85-1247AFC5E9FD}"/>
               </a:ext>
             </a:extLst>
           </p:cNvPr>
@@ -11597,6 +12386,325 @@
           <a:p>
             <a:r>
               <a:rPr lang="en-GB" dirty="0"/>
+              <a:t>Within any domain, we might want to:</a:t>
+            </a:r>
+          </a:p>
+          <a:p>
+            <a:pPr lvl="1"/>
+            <a:endParaRPr lang="en-GB" b="1" dirty="0"/>
+          </a:p>
+          <a:p>
+            <a:pPr lvl="1"/>
+            <a:r>
+              <a:rPr lang="en-GB" b="1" dirty="0"/>
+              <a:t>Describe</a:t>
+            </a:r>
+            <a:r>
+              <a:rPr lang="en-GB" dirty="0"/>
+              <a:t> what occurred </a:t>
+            </a:r>
+          </a:p>
+          <a:p>
+            <a:pPr lvl="1"/>
+            <a:endParaRPr lang="en-GB" dirty="0"/>
+          </a:p>
+          <a:p>
+            <a:pPr lvl="1"/>
+            <a:r>
+              <a:rPr lang="en-GB" b="1" dirty="0"/>
+              <a:t>Diagnose</a:t>
+            </a:r>
+            <a:r>
+              <a:rPr lang="en-GB" dirty="0"/>
+              <a:t> why it may have occurred </a:t>
+            </a:r>
+          </a:p>
+          <a:p>
+            <a:pPr lvl="1"/>
+            <a:endParaRPr lang="en-GB" dirty="0"/>
+          </a:p>
+          <a:p>
+            <a:pPr lvl="1"/>
+            <a:r>
+              <a:rPr lang="en-GB" b="1" dirty="0"/>
+              <a:t>Predict</a:t>
+            </a:r>
+            <a:r>
+              <a:rPr lang="en-GB" dirty="0"/>
+              <a:t> what may occur next </a:t>
+            </a:r>
+          </a:p>
+          <a:p>
+            <a:pPr lvl="1"/>
+            <a:endParaRPr lang="en-GB" dirty="0"/>
+          </a:p>
+          <a:p>
+            <a:pPr lvl="1"/>
+            <a:r>
+              <a:rPr lang="en-GB" b="1" dirty="0"/>
+              <a:t>Prescribe</a:t>
+            </a:r>
+            <a:r>
+              <a:rPr lang="en-GB" dirty="0"/>
+              <a:t> what action should be taken</a:t>
+            </a:r>
+          </a:p>
+          <a:p>
+            <a:pPr lvl="1"/>
+            <a:endParaRPr lang="en-US" dirty="0"/>
+          </a:p>
+        </p:txBody>
+      </p:sp>
+    </p:spTree>
+    <p:extLst>
+      <p:ext uri="{BB962C8B-B14F-4D97-AF65-F5344CB8AC3E}">
+        <p14:creationId xmlns:p14="http://schemas.microsoft.com/office/powerpoint/2010/main" val="2234398774"/>
+      </p:ext>
+    </p:extLst>
+  </p:cSld>
+  <p:clrMapOvr>
+    <a:masterClrMapping/>
+  </p:clrMapOvr>
+</p:sld>
+</file>
+
+<file path=ppt/slides/slide17.xml><?xml version="1.0" encoding="utf-8"?>
+<p:sld xmlns:a="http://schemas.openxmlformats.org/drawingml/2006/main" xmlns:r="http://schemas.openxmlformats.org/officeDocument/2006/relationships" xmlns:p="http://schemas.openxmlformats.org/presentationml/2006/main">
+  <p:cSld>
+    <p:spTree>
+      <p:nvGrpSpPr>
+        <p:cNvPr id="1" name=""/>
+        <p:cNvGrpSpPr/>
+        <p:nvPr/>
+      </p:nvGrpSpPr>
+      <p:grpSpPr>
+        <a:xfrm>
+          <a:off x="0" y="0"/>
+          <a:ext cx="0" cy="0"/>
+          <a:chOff x="0" y="0"/>
+          <a:chExt cx="0" cy="0"/>
+        </a:xfrm>
+      </p:grpSpPr>
+      <p:sp>
+        <p:nvSpPr>
+          <p:cNvPr id="2" name="Title 1">
+            <a:extLst>
+              <a:ext uri="{FF2B5EF4-FFF2-40B4-BE49-F238E27FC236}">
+                <a16:creationId xmlns:a16="http://schemas.microsoft.com/office/drawing/2014/main" id="{4A56E687-775F-7437-EDC7-D51CFF5AD815}"/>
+              </a:ext>
+            </a:extLst>
+          </p:cNvPr>
+          <p:cNvSpPr>
+            <a:spLocks noGrp="1"/>
+          </p:cNvSpPr>
+          <p:nvPr>
+            <p:ph type="title"/>
+          </p:nvPr>
+        </p:nvSpPr>
+        <p:spPr>
+          <a:xfrm>
+            <a:off x="838200" y="365126"/>
+            <a:ext cx="10515600" cy="1269710"/>
+          </a:xfrm>
+        </p:spPr>
+        <p:txBody>
+          <a:bodyPr>
+            <a:normAutofit/>
+          </a:bodyPr>
+          <a:lstStyle/>
+          <a:p>
+            <a:r>
+              <a:rPr lang="en-GB" dirty="0"/>
+              <a:t>Four Types of Analytical Questions</a:t>
+            </a:r>
+          </a:p>
+        </p:txBody>
+      </p:sp>
+      <p:graphicFrame>
+        <p:nvGraphicFramePr>
+          <p:cNvPr id="4" name="Content Placeholder 2">
+            <a:extLst>
+              <a:ext uri="{FF2B5EF4-FFF2-40B4-BE49-F238E27FC236}">
+                <a16:creationId xmlns:a16="http://schemas.microsoft.com/office/drawing/2014/main" id="{EC7561EA-9584-52D2-BAC5-64D0CEFB10AE}"/>
+              </a:ext>
+            </a:extLst>
+          </p:cNvPr>
+          <p:cNvGraphicFramePr>
+            <a:graphicFrameLocks/>
+          </p:cNvGraphicFramePr>
+          <p:nvPr>
+            <p:extLst>
+              <p:ext uri="{D42A27DB-BD31-4B8C-83A1-F6EECF244321}">
+                <p14:modId xmlns:p14="http://schemas.microsoft.com/office/powerpoint/2010/main" val="2765187922"/>
+              </p:ext>
+            </p:extLst>
+          </p:nvPr>
+        </p:nvGraphicFramePr>
+        <p:xfrm>
+          <a:off x="644056" y="2112580"/>
+          <a:ext cx="10927829" cy="3289154"/>
+        </p:xfrm>
+        <a:graphic>
+          <a:graphicData uri="http://schemas.openxmlformats.org/drawingml/2006/diagram">
+            <dgm:relIds xmlns:dgm="http://schemas.openxmlformats.org/drawingml/2006/diagram" xmlns:r="http://schemas.openxmlformats.org/officeDocument/2006/relationships" r:dm="rId2" r:lo="rId3" r:qs="rId4" r:cs="rId5"/>
+          </a:graphicData>
+        </a:graphic>
+      </p:graphicFrame>
+      <p:sp>
+        <p:nvSpPr>
+          <p:cNvPr id="6" name="TextBox 5">
+            <a:extLst>
+              <a:ext uri="{FF2B5EF4-FFF2-40B4-BE49-F238E27FC236}">
+                <a16:creationId xmlns:a16="http://schemas.microsoft.com/office/drawing/2014/main" id="{CD501C34-509A-81FF-B053-22366C2BFE5A}"/>
+              </a:ext>
+            </a:extLst>
+          </p:cNvPr>
+          <p:cNvSpPr txBox="1"/>
+          <p:nvPr/>
+        </p:nvSpPr>
+        <p:spPr>
+          <a:xfrm>
+            <a:off x="3059970" y="5197894"/>
+            <a:ext cx="6096000" cy="369332"/>
+          </a:xfrm>
+          <a:prstGeom prst="rect">
+            <a:avLst/>
+          </a:prstGeom>
+          <a:noFill/>
+        </p:spPr>
+        <p:txBody>
+          <a:bodyPr wrap="square">
+            <a:spAutoFit/>
+          </a:bodyPr>
+          <a:lstStyle/>
+          <a:p>
+            <a:pPr marL="0" indent="0" algn="ctr">
+              <a:buNone/>
+            </a:pPr>
+            <a:r>
+              <a:rPr lang="en-GB" sz="1800" b="0" i="0" dirty="0">
+                <a:solidFill>
+                  <a:srgbClr val="FF0000"/>
+                </a:solidFill>
+                <a:effectLst/>
+                <a:latin typeface="+mn-lt"/>
+              </a:rPr>
+              <a:t>These are different purposes. </a:t>
+            </a:r>
+            <a:r>
+              <a:rPr lang="en-GB" sz="1800" b="1" i="0" dirty="0">
+                <a:solidFill>
+                  <a:srgbClr val="FF0000"/>
+                </a:solidFill>
+                <a:effectLst/>
+                <a:latin typeface="+mn-lt"/>
+              </a:rPr>
+              <a:t>Not </a:t>
+            </a:r>
+            <a:r>
+              <a:rPr lang="en-GB" sz="1800" b="0" i="0" dirty="0">
+                <a:solidFill>
+                  <a:srgbClr val="FF0000"/>
+                </a:solidFill>
+                <a:effectLst/>
+                <a:latin typeface="+mn-lt"/>
+              </a:rPr>
+              <a:t>a ranking</a:t>
+            </a:r>
+            <a:endParaRPr lang="en-GB" sz="2250" b="0" i="0" dirty="0">
+              <a:solidFill>
+                <a:srgbClr val="FF0000"/>
+              </a:solidFill>
+              <a:effectLst/>
+              <a:latin typeface="Fira Sans" panose="020B0503050000020004" pitchFamily="34" charset="0"/>
+            </a:endParaRPr>
+          </a:p>
+        </p:txBody>
+      </p:sp>
+    </p:spTree>
+    <p:extLst>
+      <p:ext uri="{BB962C8B-B14F-4D97-AF65-F5344CB8AC3E}">
+        <p14:creationId xmlns:p14="http://schemas.microsoft.com/office/powerpoint/2010/main" val="2812742232"/>
+      </p:ext>
+    </p:extLst>
+  </p:cSld>
+  <p:clrMapOvr>
+    <a:masterClrMapping/>
+  </p:clrMapOvr>
+</p:sld>
+</file>
+
+<file path=ppt/slides/slide18.xml><?xml version="1.0" encoding="utf-8"?>
+<p:sld xmlns:a="http://schemas.openxmlformats.org/drawingml/2006/main" xmlns:r="http://schemas.openxmlformats.org/officeDocument/2006/relationships" xmlns:p="http://schemas.openxmlformats.org/presentationml/2006/main">
+  <p:cSld>
+    <p:spTree>
+      <p:nvGrpSpPr>
+        <p:cNvPr id="1" name=""/>
+        <p:cNvGrpSpPr/>
+        <p:nvPr/>
+      </p:nvGrpSpPr>
+      <p:grpSpPr>
+        <a:xfrm>
+          <a:off x="0" y="0"/>
+          <a:ext cx="0" cy="0"/>
+          <a:chOff x="0" y="0"/>
+          <a:chExt cx="0" cy="0"/>
+        </a:xfrm>
+      </p:grpSpPr>
+      <p:sp>
+        <p:nvSpPr>
+          <p:cNvPr id="2" name="Title 1">
+            <a:extLst>
+              <a:ext uri="{FF2B5EF4-FFF2-40B4-BE49-F238E27FC236}">
+                <a16:creationId xmlns:a16="http://schemas.microsoft.com/office/drawing/2014/main" id="{489EC1E5-3253-BE3B-A177-555F6256FD6E}"/>
+              </a:ext>
+            </a:extLst>
+          </p:cNvPr>
+          <p:cNvSpPr>
+            <a:spLocks noGrp="1"/>
+          </p:cNvSpPr>
+          <p:nvPr>
+            <p:ph type="title"/>
+          </p:nvPr>
+        </p:nvSpPr>
+        <p:spPr/>
+        <p:txBody>
+          <a:bodyPr/>
+          <a:lstStyle/>
+          <a:p>
+            <a:r>
+              <a:rPr lang="en-GB" dirty="0"/>
+              <a:t>Descriptive Analytics</a:t>
+            </a:r>
+            <a:endParaRPr lang="en-US" dirty="0"/>
+          </a:p>
+        </p:txBody>
+      </p:sp>
+      <p:sp>
+        <p:nvSpPr>
+          <p:cNvPr id="3" name="Content Placeholder 2">
+            <a:extLst>
+              <a:ext uri="{FF2B5EF4-FFF2-40B4-BE49-F238E27FC236}">
+                <a16:creationId xmlns:a16="http://schemas.microsoft.com/office/drawing/2014/main" id="{FFF80534-F617-B253-BAEF-A99C9EDB1A0C}"/>
+              </a:ext>
+            </a:extLst>
+          </p:cNvPr>
+          <p:cNvSpPr>
+            <a:spLocks noGrp="1"/>
+          </p:cNvSpPr>
+          <p:nvPr>
+            <p:ph idx="1"/>
+          </p:nvPr>
+        </p:nvSpPr>
+        <p:spPr/>
+        <p:txBody>
+          <a:bodyPr>
+            <a:normAutofit/>
+          </a:bodyPr>
+          <a:lstStyle/>
+          <a:p>
+            <a:r>
+              <a:rPr lang="en-GB" dirty="0"/>
               <a:t>Descriptive analytics summarizes past or current data to show what occurred.</a:t>
             </a:r>
           </a:p>
@@ -11619,30 +12727,39 @@
           <a:p>
             <a:pPr lvl="1"/>
             <a:r>
+              <a:rPr lang="en-GB" b="1" dirty="0"/>
+              <a:t>Tracking:</a:t>
+            </a:r>
+            <a:r>
               <a:rPr lang="en-GB" dirty="0"/>
-              <a:t>How much high-intensity work did an athlete complete?</a:t>
+              <a:t> How much high-intensity work did the athlete complete? </a:t>
             </a:r>
           </a:p>
           <a:p>
             <a:pPr lvl="1"/>
             <a:r>
+              <a:rPr lang="en-GB" b="1" dirty="0"/>
+              <a:t>Scouting:</a:t>
+            </a:r>
+            <a:r>
               <a:rPr lang="en-GB" dirty="0"/>
-              <a:t>Which players created the most scoring opportunities?</a:t>
+              <a:t> What are the prospect’s current performance statistics? </a:t>
             </a:r>
           </a:p>
           <a:p>
             <a:pPr lvl="1"/>
             <a:r>
+              <a:rPr lang="en-GB" b="1" dirty="0"/>
+              <a:t>Strategy:</a:t>
+            </a:r>
+            <a:r>
               <a:rPr lang="en-GB" dirty="0"/>
-              <a:t>How did the team perform during the previous five games?</a:t>
+              <a:t> Which players created the most scoring opportunities?</a:t>
             </a:r>
           </a:p>
           <a:p>
             <a:pPr lvl="1"/>
-            <a:r>
-              <a:rPr lang="en-GB" dirty="0"/>
-              <a:t>What are a prospect’s current performance statistics?</a:t>
-            </a:r>
+            <a:endParaRPr lang="en-GB" dirty="0"/>
           </a:p>
         </p:txBody>
       </p:sp>
@@ -11659,7 +12776,7 @@
 </p:sld>
 </file>
 
-<file path=ppt/slides/slide16.xml><?xml version="1.0" encoding="utf-8"?>
+<file path=ppt/slides/slide19.xml><?xml version="1.0" encoding="utf-8"?>
 <p:sld xmlns:a="http://schemas.openxmlformats.org/drawingml/2006/main" xmlns:r="http://schemas.openxmlformats.org/officeDocument/2006/relationships" xmlns:p="http://schemas.openxmlformats.org/presentationml/2006/main">
   <p:cSld>
     <p:spTree>
@@ -11736,7 +12853,15 @@
           <a:p>
             <a:r>
               <a:rPr lang="en-GB" dirty="0"/>
-              <a:t>Diagnostic analytics uses data and context to investigate the possible reasons behind an outcome.</a:t>
+              <a:t>Diagnostic analytics uses data to investigate the </a:t>
+            </a:r>
+            <a:r>
+              <a:rPr lang="en-GB" b="1" dirty="0"/>
+              <a:t>possible</a:t>
+            </a:r>
+            <a:r>
+              <a:rPr lang="en-GB" dirty="0"/>
+              <a:t> reasons behind an outcome.</a:t>
             </a:r>
           </a:p>
           <a:p>
@@ -11745,7 +12870,7 @@
               <a:t>May identify </a:t>
             </a:r>
             <a:r>
-              <a:rPr lang="en-GB" i="1" u="sng" dirty="0"/>
+              <a:rPr lang="en-GB" b="1" dirty="0"/>
               <a:t>possible</a:t>
             </a:r>
             <a:r>
@@ -11754,16 +12879,19 @@
             </a:r>
             <a:r>
               <a:rPr lang="en-GB" dirty="0"/>
-              <a:t>explanations, but an observed relationship does </a:t>
+              <a:t>explanations, but an observed relationship </a:t>
             </a:r>
             <a:r>
               <a:rPr lang="en-GB" b="1" dirty="0"/>
-              <a:t>not</a:t>
+              <a:t>does not prove </a:t>
             </a:r>
             <a:r>
               <a:rPr lang="en-GB" dirty="0"/>
-              <a:t> prove causation.</a:t>
-            </a:r>
+              <a:t>causation.</a:t>
+            </a:r>
+          </a:p>
+          <a:p>
+            <a:endParaRPr lang="en-GB" dirty="0"/>
           </a:p>
           <a:p>
             <a:r>
@@ -11775,29 +12903,26 @@
             <a:pPr lvl="1"/>
             <a:r>
               <a:rPr lang="en-GB" dirty="0"/>
-              <a:t>Did an athlete’s workload increase because practice was longer or more intense?</a:t>
+              <a:t>Did workload increase because practice was longer or more intense? </a:t>
             </a:r>
           </a:p>
           <a:p>
             <a:pPr lvl="1"/>
             <a:r>
               <a:rPr lang="en-GB" dirty="0"/>
-              <a:t>Did the team allow more shots because of turnovers or poor defensive positioning?</a:t>
+              <a:t>Did the player perform differently against stronger opponents? </a:t>
             </a:r>
           </a:p>
           <a:p>
             <a:pPr lvl="1"/>
             <a:r>
               <a:rPr lang="en-GB" dirty="0"/>
-              <a:t>Did a player perform differently against stronger opponents?</a:t>
+              <a:t>Did turnovers contribute to the team allowing more shots?</a:t>
             </a:r>
           </a:p>
           <a:p>
             <a:pPr lvl="1"/>
-            <a:r>
-              <a:rPr lang="en-GB" dirty="0"/>
-              <a:t>Did performance decline after travel or limited recovery?</a:t>
-            </a:r>
+            <a:endParaRPr lang="en-GB" dirty="0"/>
           </a:p>
         </p:txBody>
       </p:sp>
@@ -11805,435 +12930,6 @@
     <p:extLst>
       <p:ext uri="{BB962C8B-B14F-4D97-AF65-F5344CB8AC3E}">
         <p14:creationId xmlns:p14="http://schemas.microsoft.com/office/powerpoint/2010/main" val="4192651372"/>
-      </p:ext>
-    </p:extLst>
-  </p:cSld>
-  <p:clrMapOvr>
-    <a:masterClrMapping/>
-  </p:clrMapOvr>
-</p:sld>
-</file>
-
-<file path=ppt/slides/slide17.xml><?xml version="1.0" encoding="utf-8"?>
-<p:sld xmlns:a="http://schemas.openxmlformats.org/drawingml/2006/main" xmlns:r="http://schemas.openxmlformats.org/officeDocument/2006/relationships" xmlns:p="http://schemas.openxmlformats.org/presentationml/2006/main">
-  <p:cSld>
-    <p:spTree>
-      <p:nvGrpSpPr>
-        <p:cNvPr id="1" name="">
-          <a:extLst>
-            <a:ext uri="{FF2B5EF4-FFF2-40B4-BE49-F238E27FC236}">
-              <a16:creationId xmlns:a16="http://schemas.microsoft.com/office/drawing/2014/main" id="{410ACC08-6958-F7A2-ACE4-B776B9A5709B}"/>
-            </a:ext>
-          </a:extLst>
-        </p:cNvPr>
-        <p:cNvGrpSpPr/>
-        <p:nvPr/>
-      </p:nvGrpSpPr>
-      <p:grpSpPr>
-        <a:xfrm>
-          <a:off x="0" y="0"/>
-          <a:ext cx="0" cy="0"/>
-          <a:chOff x="0" y="0"/>
-          <a:chExt cx="0" cy="0"/>
-        </a:xfrm>
-      </p:grpSpPr>
-      <p:sp>
-        <p:nvSpPr>
-          <p:cNvPr id="2" name="Title 1">
-            <a:extLst>
-              <a:ext uri="{FF2B5EF4-FFF2-40B4-BE49-F238E27FC236}">
-                <a16:creationId xmlns:a16="http://schemas.microsoft.com/office/drawing/2014/main" id="{7825E0C7-70E6-46DA-F9E1-7120A1519F70}"/>
-              </a:ext>
-            </a:extLst>
-          </p:cNvPr>
-          <p:cNvSpPr>
-            <a:spLocks noGrp="1"/>
-          </p:cNvSpPr>
-          <p:nvPr>
-            <p:ph type="title"/>
-          </p:nvPr>
-        </p:nvSpPr>
-        <p:spPr/>
-        <p:txBody>
-          <a:bodyPr/>
-          <a:lstStyle/>
-          <a:p>
-            <a:r>
-              <a:rPr lang="en-GB" dirty="0"/>
-              <a:t>Predictive Analytics</a:t>
-            </a:r>
-            <a:endParaRPr lang="en-US" dirty="0"/>
-          </a:p>
-        </p:txBody>
-      </p:sp>
-      <p:sp>
-        <p:nvSpPr>
-          <p:cNvPr id="3" name="Content Placeholder 2">
-            <a:extLst>
-              <a:ext uri="{FF2B5EF4-FFF2-40B4-BE49-F238E27FC236}">
-                <a16:creationId xmlns:a16="http://schemas.microsoft.com/office/drawing/2014/main" id="{4A0030B7-F5DE-72F2-FE6B-F9F7C08DA6DE}"/>
-              </a:ext>
-            </a:extLst>
-          </p:cNvPr>
-          <p:cNvSpPr>
-            <a:spLocks noGrp="1"/>
-          </p:cNvSpPr>
-          <p:nvPr>
-            <p:ph idx="1"/>
-          </p:nvPr>
-        </p:nvSpPr>
-        <p:spPr/>
-        <p:txBody>
-          <a:bodyPr/>
-          <a:lstStyle/>
-          <a:p>
-            <a:r>
-              <a:rPr lang="en-GB" dirty="0"/>
-              <a:t>Predictive analytics uses available information to estimate a future or unknown outcome.</a:t>
-            </a:r>
-          </a:p>
-          <a:p>
-            <a:r>
-              <a:rPr lang="en-GB" dirty="0"/>
-              <a:t>Predictions always involve uncertainty and are only as reliable as the data and assumptions behind them.</a:t>
-            </a:r>
-          </a:p>
-          <a:p>
-            <a:r>
-              <a:rPr lang="en-GB" dirty="0"/>
-              <a:t>Examples:</a:t>
-            </a:r>
-          </a:p>
-          <a:p>
-            <a:pPr lvl="1"/>
-            <a:r>
-              <a:rPr lang="en-GB" dirty="0"/>
-              <a:t>How is an athlete likely to perform in the next game?</a:t>
-            </a:r>
-          </a:p>
-          <a:p>
-            <a:pPr lvl="1"/>
-            <a:r>
-              <a:rPr lang="en-GB" dirty="0"/>
-              <a:t>Which prospect is most likely to succeed at the next level?</a:t>
-            </a:r>
-          </a:p>
-          <a:p>
-            <a:pPr lvl="1"/>
-            <a:r>
-              <a:rPr lang="en-GB" dirty="0"/>
-              <a:t>What is the probability that a possession produces a score?</a:t>
-            </a:r>
-          </a:p>
-          <a:p>
-            <a:pPr lvl="1"/>
-            <a:r>
-              <a:rPr lang="en-GB" dirty="0"/>
-              <a:t>Is an athlete likely to be adequately recovered for tomorrow’s practice?</a:t>
-            </a:r>
-          </a:p>
-        </p:txBody>
-      </p:sp>
-    </p:spTree>
-    <p:extLst>
-      <p:ext uri="{BB962C8B-B14F-4D97-AF65-F5344CB8AC3E}">
-        <p14:creationId xmlns:p14="http://schemas.microsoft.com/office/powerpoint/2010/main" val="3275639086"/>
-      </p:ext>
-    </p:extLst>
-  </p:cSld>
-  <p:clrMapOvr>
-    <a:masterClrMapping/>
-  </p:clrMapOvr>
-</p:sld>
-</file>
-
-<file path=ppt/slides/slide18.xml><?xml version="1.0" encoding="utf-8"?>
-<p:sld xmlns:a="http://schemas.openxmlformats.org/drawingml/2006/main" xmlns:r="http://schemas.openxmlformats.org/officeDocument/2006/relationships" xmlns:p="http://schemas.openxmlformats.org/presentationml/2006/main">
-  <p:cSld>
-    <p:spTree>
-      <p:nvGrpSpPr>
-        <p:cNvPr id="1" name="">
-          <a:extLst>
-            <a:ext uri="{FF2B5EF4-FFF2-40B4-BE49-F238E27FC236}">
-              <a16:creationId xmlns:a16="http://schemas.microsoft.com/office/drawing/2014/main" id="{2DAF98FE-CCCB-1001-6CB6-CA9D38D9BF2B}"/>
-            </a:ext>
-          </a:extLst>
-        </p:cNvPr>
-        <p:cNvGrpSpPr/>
-        <p:nvPr/>
-      </p:nvGrpSpPr>
-      <p:grpSpPr>
-        <a:xfrm>
-          <a:off x="0" y="0"/>
-          <a:ext cx="0" cy="0"/>
-          <a:chOff x="0" y="0"/>
-          <a:chExt cx="0" cy="0"/>
-        </a:xfrm>
-      </p:grpSpPr>
-      <p:sp>
-        <p:nvSpPr>
-          <p:cNvPr id="2" name="Title 1">
-            <a:extLst>
-              <a:ext uri="{FF2B5EF4-FFF2-40B4-BE49-F238E27FC236}">
-                <a16:creationId xmlns:a16="http://schemas.microsoft.com/office/drawing/2014/main" id="{0082EED7-BE09-3B77-081C-C5843302AEA0}"/>
-              </a:ext>
-            </a:extLst>
-          </p:cNvPr>
-          <p:cNvSpPr>
-            <a:spLocks noGrp="1"/>
-          </p:cNvSpPr>
-          <p:nvPr>
-            <p:ph type="title"/>
-          </p:nvPr>
-        </p:nvSpPr>
-        <p:spPr/>
-        <p:txBody>
-          <a:bodyPr/>
-          <a:lstStyle/>
-          <a:p>
-            <a:r>
-              <a:rPr lang="en-GB" dirty="0"/>
-              <a:t>Prescriptive Analytics</a:t>
-            </a:r>
-            <a:endParaRPr lang="en-US" dirty="0"/>
-          </a:p>
-        </p:txBody>
-      </p:sp>
-      <p:sp>
-        <p:nvSpPr>
-          <p:cNvPr id="3" name="Content Placeholder 2">
-            <a:extLst>
-              <a:ext uri="{FF2B5EF4-FFF2-40B4-BE49-F238E27FC236}">
-                <a16:creationId xmlns:a16="http://schemas.microsoft.com/office/drawing/2014/main" id="{82C24FAB-9362-0D28-BF87-CA3A0A1FD587}"/>
-              </a:ext>
-            </a:extLst>
-          </p:cNvPr>
-          <p:cNvSpPr>
-            <a:spLocks noGrp="1"/>
-          </p:cNvSpPr>
-          <p:nvPr>
-            <p:ph idx="1"/>
-          </p:nvPr>
-        </p:nvSpPr>
-        <p:spPr/>
-        <p:txBody>
-          <a:bodyPr>
-            <a:normAutofit/>
-          </a:bodyPr>
-          <a:lstStyle/>
-          <a:p>
-            <a:r>
-              <a:rPr lang="en-GB" dirty="0"/>
-              <a:t>Prescriptive analytics uses evidence to recommend an action or decision.</a:t>
-            </a:r>
-          </a:p>
-          <a:p>
-            <a:r>
-              <a:rPr lang="en-GB" dirty="0"/>
-              <a:t>May guide decisions, but the final choice also depends on context, priorities, experience, and human judgment.</a:t>
-            </a:r>
-          </a:p>
-          <a:p>
-            <a:r>
-              <a:rPr lang="en-GB" dirty="0"/>
-              <a:t>Examples:</a:t>
-            </a:r>
-          </a:p>
-          <a:p>
-            <a:pPr lvl="1"/>
-            <a:r>
-              <a:rPr lang="en-GB" dirty="0"/>
-              <a:t>Should an athlete’s training load be modified?</a:t>
-            </a:r>
-          </a:p>
-          <a:p>
-            <a:pPr lvl="1"/>
-            <a:r>
-              <a:rPr lang="en-GB" dirty="0"/>
-              <a:t>Which prospect should the team select?</a:t>
-            </a:r>
-          </a:p>
-          <a:p>
-            <a:pPr lvl="1"/>
-            <a:r>
-              <a:rPr lang="en-GB" dirty="0"/>
-              <a:t>Which lineup should the coach use?</a:t>
-            </a:r>
-          </a:p>
-          <a:p>
-            <a:pPr lvl="1"/>
-            <a:r>
-              <a:rPr lang="en-GB" dirty="0"/>
-              <a:t>Should the team change its defensive strategy?</a:t>
-            </a:r>
-          </a:p>
-          <a:p>
-            <a:pPr lvl="1"/>
-            <a:r>
-              <a:rPr lang="en-GB" dirty="0"/>
-              <a:t>How should limited resources be allocated?</a:t>
-            </a:r>
-          </a:p>
-        </p:txBody>
-      </p:sp>
-    </p:spTree>
-    <p:extLst>
-      <p:ext uri="{BB962C8B-B14F-4D97-AF65-F5344CB8AC3E}">
-        <p14:creationId xmlns:p14="http://schemas.microsoft.com/office/powerpoint/2010/main" val="721161968"/>
-      </p:ext>
-    </p:extLst>
-  </p:cSld>
-  <p:clrMapOvr>
-    <a:masterClrMapping/>
-  </p:clrMapOvr>
-</p:sld>
-</file>
-
-<file path=ppt/slides/slide19.xml><?xml version="1.0" encoding="utf-8"?>
-<p:sld xmlns:a="http://schemas.openxmlformats.org/drawingml/2006/main" xmlns:r="http://schemas.openxmlformats.org/officeDocument/2006/relationships" xmlns:p="http://schemas.openxmlformats.org/presentationml/2006/main" show="0">
-  <p:cSld>
-    <p:spTree>
-      <p:nvGrpSpPr>
-        <p:cNvPr id="1" name="">
-          <a:extLst>
-            <a:ext uri="{FF2B5EF4-FFF2-40B4-BE49-F238E27FC236}">
-              <a16:creationId xmlns:a16="http://schemas.microsoft.com/office/drawing/2014/main" id="{E922E2CF-A80A-AF59-D558-526F3B121E48}"/>
-            </a:ext>
-          </a:extLst>
-        </p:cNvPr>
-        <p:cNvGrpSpPr/>
-        <p:nvPr/>
-      </p:nvGrpSpPr>
-      <p:grpSpPr>
-        <a:xfrm>
-          <a:off x="0" y="0"/>
-          <a:ext cx="0" cy="0"/>
-          <a:chOff x="0" y="0"/>
-          <a:chExt cx="0" cy="0"/>
-        </a:xfrm>
-      </p:grpSpPr>
-      <p:sp>
-        <p:nvSpPr>
-          <p:cNvPr id="2" name="Title 1">
-            <a:extLst>
-              <a:ext uri="{FF2B5EF4-FFF2-40B4-BE49-F238E27FC236}">
-                <a16:creationId xmlns:a16="http://schemas.microsoft.com/office/drawing/2014/main" id="{1D2580D1-4049-1628-7F57-F500A7F6380D}"/>
-              </a:ext>
-            </a:extLst>
-          </p:cNvPr>
-          <p:cNvSpPr>
-            <a:spLocks noGrp="1"/>
-          </p:cNvSpPr>
-          <p:nvPr>
-            <p:ph type="title"/>
-          </p:nvPr>
-        </p:nvSpPr>
-        <p:spPr/>
-        <p:txBody>
-          <a:bodyPr>
-            <a:noAutofit/>
-          </a:bodyPr>
-          <a:lstStyle/>
-          <a:p>
-            <a:r>
-              <a:rPr lang="en-US" sz="4000" dirty="0"/>
-              <a:t>“What is going on??”</a:t>
-            </a:r>
-          </a:p>
-        </p:txBody>
-      </p:sp>
-      <p:sp>
-        <p:nvSpPr>
-          <p:cNvPr id="3" name="Content Placeholder 2">
-            <a:extLst>
-              <a:ext uri="{FF2B5EF4-FFF2-40B4-BE49-F238E27FC236}">
-                <a16:creationId xmlns:a16="http://schemas.microsoft.com/office/drawing/2014/main" id="{87AACD65-58A7-C8D7-2F7D-E8AD7B05383E}"/>
-              </a:ext>
-            </a:extLst>
-          </p:cNvPr>
-          <p:cNvSpPr>
-            <a:spLocks noGrp="1"/>
-          </p:cNvSpPr>
-          <p:nvPr>
-            <p:ph idx="1"/>
-          </p:nvPr>
-        </p:nvSpPr>
-        <p:spPr/>
-        <p:txBody>
-          <a:bodyPr/>
-          <a:lstStyle/>
-          <a:p>
-            <a:r>
-              <a:rPr lang="en-US" dirty="0"/>
-              <a:t>Things we need to figure out:</a:t>
-            </a:r>
-          </a:p>
-          <a:p>
-            <a:pPr marL="914400" lvl="1" indent="-457200">
-              <a:buFont typeface="+mj-lt"/>
-              <a:buAutoNum type="arabicPeriod"/>
-            </a:pPr>
-            <a:r>
-              <a:rPr lang="en-GB" dirty="0"/>
-              <a:t>What should the team change before the next game?</a:t>
-            </a:r>
-          </a:p>
-          <a:p>
-            <a:pPr marL="914400" lvl="1" indent="-457200">
-              <a:buFont typeface="+mj-lt"/>
-              <a:buAutoNum type="arabicPeriod"/>
-            </a:pPr>
-            <a:r>
-              <a:rPr lang="en-GB" dirty="0"/>
-              <a:t>What factors may be contributing to the losses?</a:t>
-            </a:r>
-          </a:p>
-          <a:p>
-            <a:pPr marL="914400" lvl="1" indent="-457200">
-              <a:buFont typeface="+mj-lt"/>
-              <a:buAutoNum type="arabicPeriod"/>
-            </a:pPr>
-            <a:r>
-              <a:rPr lang="en-GB" dirty="0"/>
-              <a:t>What has changed during the last five games?</a:t>
-            </a:r>
-          </a:p>
-          <a:p>
-            <a:pPr marL="914400" lvl="1" indent="-457200">
-              <a:buFont typeface="+mj-lt"/>
-              <a:buAutoNum type="arabicPeriod"/>
-            </a:pPr>
-            <a:r>
-              <a:rPr lang="en-GB" dirty="0"/>
-              <a:t>What is likely to happen if the current pattern continues?</a:t>
-            </a:r>
-          </a:p>
-          <a:p>
-            <a:pPr marL="914400" lvl="1" indent="-457200">
-              <a:buFont typeface="+mj-lt"/>
-              <a:buAutoNum type="arabicPeriod"/>
-            </a:pPr>
-            <a:endParaRPr lang="en-GB" dirty="0"/>
-          </a:p>
-          <a:p>
-            <a:r>
-              <a:rPr lang="en-GB" dirty="0"/>
-              <a:t>Which domain of sports analytics are we in?</a:t>
-            </a:r>
-          </a:p>
-          <a:p>
-            <a:r>
-              <a:rPr lang="en-GB" dirty="0"/>
-              <a:t>Put these questions in the order you think they should be addressed.</a:t>
-            </a:r>
-            <a:endParaRPr lang="en-US" dirty="0"/>
-          </a:p>
-        </p:txBody>
-      </p:sp>
-    </p:spTree>
-    <p:extLst>
-      <p:ext uri="{BB962C8B-B14F-4D97-AF65-F5344CB8AC3E}">
-        <p14:creationId xmlns:p14="http://schemas.microsoft.com/office/powerpoint/2010/main" val="3429352342"/>
       </p:ext>
     </p:extLst>
   </p:cSld>
@@ -12265,7 +12961,7 @@
           <p:cNvPr id="2" name="Title 1">
             <a:extLst>
               <a:ext uri="{FF2B5EF4-FFF2-40B4-BE49-F238E27FC236}">
-                <a16:creationId xmlns:a16="http://schemas.microsoft.com/office/drawing/2014/main" id="{B9892A2B-5817-51A8-D2A2-29D0DEAEF021}"/>
+                <a16:creationId xmlns:a16="http://schemas.microsoft.com/office/drawing/2014/main" id="{FCCAACAD-479A-5540-2B73-60664184C993}"/>
               </a:ext>
             </a:extLst>
           </p:cNvPr>
@@ -12278,16 +12974,10 @@
         </p:nvSpPr>
         <p:spPr/>
         <p:txBody>
-          <a:bodyPr>
-            <a:normAutofit/>
-          </a:bodyPr>
+          <a:bodyPr/>
           <a:lstStyle/>
           <a:p>
-            <a:r>
-              <a:rPr lang="en-GB" dirty="0"/>
-              <a:t>Overview</a:t>
-            </a:r>
-            <a:endParaRPr lang="en-US" dirty="0"/>
+            <a:endParaRPr lang="en-US"/>
           </a:p>
         </p:txBody>
       </p:sp>
@@ -12296,7 +12986,7 @@
           <p:cNvPr id="3" name="Content Placeholder 2">
             <a:extLst>
               <a:ext uri="{FF2B5EF4-FFF2-40B4-BE49-F238E27FC236}">
-                <a16:creationId xmlns:a16="http://schemas.microsoft.com/office/drawing/2014/main" id="{01A1AA7A-7F93-5D7D-958E-1D9C62FF0B50}"/>
+                <a16:creationId xmlns:a16="http://schemas.microsoft.com/office/drawing/2014/main" id="{EC320E6E-FE53-FEB1-D63A-3B7F021626D7}"/>
               </a:ext>
             </a:extLst>
           </p:cNvPr>
@@ -12314,48 +13004,100 @@
           </a:bodyPr>
           <a:lstStyle/>
           <a:p>
-            <a:pPr lvl="0"/>
+            <a:r>
+              <a:rPr lang="en-US" dirty="0"/>
+              <a:t>Write down a question or decision you are interested in analyzing.</a:t>
+            </a:r>
+          </a:p>
+          <a:p>
+            <a:endParaRPr lang="en-US" dirty="0"/>
+          </a:p>
+          <a:p>
+            <a:r>
+              <a:rPr lang="en-US" dirty="0"/>
+              <a:t>If you don’t have one, chose one:</a:t>
+            </a:r>
+          </a:p>
+          <a:p>
+            <a:pPr lvl="1"/>
             <a:r>
               <a:rPr lang="en-GB" dirty="0"/>
-              <a:t>Objective: Understand how each domain transforms raw data into competitive advantages and changes real-world sports decisions.</a:t>
-            </a:r>
-          </a:p>
-        </p:txBody>
-      </p:sp>
-      <p:graphicFrame>
-        <p:nvGraphicFramePr>
-          <p:cNvPr id="4" name="Content Placeholder 2">
+              <a:t>Should we recruit this athlete? </a:t>
+            </a:r>
+          </a:p>
+          <a:p>
+            <a:pPr lvl="1"/>
+            <a:r>
+              <a:rPr lang="en-GB" dirty="0"/>
+              <a:t>Which defensive lineup should we use against our next opponent? </a:t>
+            </a:r>
+          </a:p>
+          <a:p>
+            <a:pPr lvl="1"/>
+            <a:r>
+              <a:rPr lang="en-GB" dirty="0"/>
+              <a:t>Which part of a player’s game should be prioritized for development? </a:t>
+            </a:r>
+          </a:p>
+          <a:p>
+            <a:pPr lvl="1"/>
+            <a:r>
+              <a:rPr lang="en-GB" dirty="0"/>
+              <a:t>Why is the team conceding so many opportunities after losing possession?</a:t>
+            </a:r>
+          </a:p>
+          <a:p>
+            <a:pPr lvl="1"/>
+            <a:endParaRPr lang="en-GB" dirty="0"/>
+          </a:p>
+          <a:p>
+            <a:endParaRPr lang="en-US" dirty="0"/>
+          </a:p>
+        </p:txBody>
+      </p:sp>
+      <p:sp>
+        <p:nvSpPr>
+          <p:cNvPr id="5" name="TextBox 4">
             <a:extLst>
               <a:ext uri="{FF2B5EF4-FFF2-40B4-BE49-F238E27FC236}">
-                <a16:creationId xmlns:a16="http://schemas.microsoft.com/office/drawing/2014/main" id="{81DA72B8-9C87-E1AF-B98A-35BB87112E7F}"/>
+                <a16:creationId xmlns:a16="http://schemas.microsoft.com/office/drawing/2014/main" id="{17A8E1B5-3D72-0E48-63AF-3280E9F9EE60}"/>
               </a:ext>
             </a:extLst>
           </p:cNvPr>
-          <p:cNvGraphicFramePr>
-            <a:graphicFrameLocks/>
-          </p:cNvGraphicFramePr>
-          <p:nvPr>
-            <p:extLst>
-              <p:ext uri="{D42A27DB-BD31-4B8C-83A1-F6EECF244321}">
-                <p14:modId xmlns:p14="http://schemas.microsoft.com/office/powerpoint/2010/main" val="1504352316"/>
-              </p:ext>
-            </p:extLst>
-          </p:nvPr>
-        </p:nvGraphicFramePr>
-        <p:xfrm>
-          <a:off x="838200" y="2921675"/>
-          <a:ext cx="10927829" cy="3255288"/>
-        </p:xfrm>
-        <a:graphic>
-          <a:graphicData uri="http://schemas.openxmlformats.org/drawingml/2006/diagram">
-            <dgm:relIds xmlns:dgm="http://schemas.openxmlformats.org/drawingml/2006/diagram" xmlns:r="http://schemas.openxmlformats.org/officeDocument/2006/relationships" r:dm="rId2" r:lo="rId3" r:qs="rId4" r:cs="rId5"/>
-          </a:graphicData>
-        </a:graphic>
-      </p:graphicFrame>
+          <p:cNvSpPr txBox="1"/>
+          <p:nvPr/>
+        </p:nvSpPr>
+        <p:spPr>
+          <a:xfrm>
+            <a:off x="1101436" y="5154452"/>
+            <a:ext cx="9989127" cy="523220"/>
+          </a:xfrm>
+          <a:prstGeom prst="rect">
+            <a:avLst/>
+          </a:prstGeom>
+          <a:noFill/>
+        </p:spPr>
+        <p:txBody>
+          <a:bodyPr wrap="square">
+            <a:spAutoFit/>
+          </a:bodyPr>
+          <a:lstStyle/>
+          <a:p>
+            <a:r>
+              <a:rPr lang="en-GB" sz="2800" dirty="0">
+                <a:solidFill>
+                  <a:srgbClr val="FF0000"/>
+                </a:solidFill>
+              </a:rPr>
+              <a:t>Think about how today’s lecture applies to your topic of interest</a:t>
+            </a:r>
+          </a:p>
+        </p:txBody>
+      </p:sp>
     </p:spTree>
     <p:extLst>
       <p:ext uri="{BB962C8B-B14F-4D97-AF65-F5344CB8AC3E}">
-        <p14:creationId xmlns:p14="http://schemas.microsoft.com/office/powerpoint/2010/main" val="755555282"/>
+        <p14:creationId xmlns:p14="http://schemas.microsoft.com/office/powerpoint/2010/main" val="3739800625"/>
       </p:ext>
     </p:extLst>
   </p:cSld>
@@ -12387,7 +13129,7 @@
           <p:cNvPr id="2" name="Title 1">
             <a:extLst>
               <a:ext uri="{FF2B5EF4-FFF2-40B4-BE49-F238E27FC236}">
-                <a16:creationId xmlns:a16="http://schemas.microsoft.com/office/drawing/2014/main" id="{0BA75FA4-E434-23A9-7B99-775F67F02828}"/>
+                <a16:creationId xmlns:a16="http://schemas.microsoft.com/office/drawing/2014/main" id="{8C2A467B-B4E5-CEF4-9E7B-8AC4FA62029D}"/>
               </a:ext>
             </a:extLst>
           </p:cNvPr>
@@ -12404,10 +13146,9 @@
           <a:lstStyle/>
           <a:p>
             <a:r>
-              <a:rPr lang="en-GB" dirty="0"/>
-              <a:t>Analytics Chain Group Activity</a:t>
-            </a:r>
-            <a:endParaRPr lang="en-US" dirty="0"/>
+              <a:rPr lang="en-US" dirty="0"/>
+              <a:t>Spurious correlation</a:t>
+            </a:r>
           </a:p>
         </p:txBody>
       </p:sp>
@@ -12416,7 +13157,7 @@
           <p:cNvPr id="3" name="Content Placeholder 2">
             <a:extLst>
               <a:ext uri="{FF2B5EF4-FFF2-40B4-BE49-F238E27FC236}">
-                <a16:creationId xmlns:a16="http://schemas.microsoft.com/office/drawing/2014/main" id="{AA6FD731-E03D-15A3-6104-3691E3E5E0BE}"/>
+                <a16:creationId xmlns:a16="http://schemas.microsoft.com/office/drawing/2014/main" id="{3611D64F-8619-3164-2F4C-D3C09F926A77}"/>
               </a:ext>
             </a:extLst>
           </p:cNvPr>
@@ -12433,53 +13174,57 @@
           <a:lstStyle/>
           <a:p>
             <a:r>
-              <a:rPr lang="en-GB" dirty="0"/>
-              <a:t>Working with your group, read the assigned scenario and create a four-step analytics chain:</a:t>
-            </a:r>
-          </a:p>
-          <a:p>
-            <a:pPr lvl="1"/>
-            <a:r>
-              <a:rPr lang="en-GB" dirty="0"/>
-              <a:t>Descriptive: State what happened.</a:t>
-            </a:r>
-          </a:p>
-          <a:p>
-            <a:pPr lvl="1"/>
-            <a:r>
-              <a:rPr lang="en-GB" dirty="0"/>
-              <a:t>Diagnostic: Identify the most likely reason it happened.</a:t>
-            </a:r>
-          </a:p>
-          <a:p>
-            <a:pPr lvl="1"/>
-            <a:r>
-              <a:rPr lang="en-GB" dirty="0"/>
-              <a:t>Predictive: Explain what could happen next if nothing changes.</a:t>
-            </a:r>
-          </a:p>
-          <a:p>
-            <a:pPr lvl="1"/>
-            <a:r>
-              <a:rPr lang="en-GB" dirty="0"/>
-              <a:t>Prescriptive: Recommend what the team should do.</a:t>
-            </a:r>
-          </a:p>
-          <a:p>
-            <a:r>
-              <a:rPr lang="en-GB" dirty="0"/>
-              <a:t>Write one clear sentence for each step.</a:t>
-            </a:r>
-          </a:p>
-          <a:p>
-            <a:endParaRPr lang="en-US" dirty="0"/>
-          </a:p>
-        </p:txBody>
-      </p:sp>
+              <a:rPr lang="en-US" dirty="0"/>
+              <a:t>Relationship in which two or more events or variables are associated but not causally related</a:t>
+            </a:r>
+          </a:p>
+          <a:p>
+            <a:r>
+              <a:rPr lang="en-US" dirty="0"/>
+              <a:t>Relationship may be driven by coincidence or a </a:t>
+            </a:r>
+            <a:r>
+              <a:rPr lang="en-US" b="1" dirty="0"/>
+              <a:t>confounding variable </a:t>
+            </a:r>
+          </a:p>
+        </p:txBody>
+      </p:sp>
+      <p:pic>
+        <p:nvPicPr>
+          <p:cNvPr id="5" name="Picture 4" descr="Ice cream consumption correlates with The divorce rate in Florida (r=0.92)">
+            <a:extLst>
+              <a:ext uri="{FF2B5EF4-FFF2-40B4-BE49-F238E27FC236}">
+                <a16:creationId xmlns:a16="http://schemas.microsoft.com/office/drawing/2014/main" id="{ADD224F3-D444-44EA-BB69-857B14A8B293}"/>
+              </a:ext>
+            </a:extLst>
+          </p:cNvPr>
+          <p:cNvPicPr>
+            <a:picLocks noChangeAspect="1"/>
+          </p:cNvPicPr>
+          <p:nvPr/>
+        </p:nvPicPr>
+        <p:blipFill>
+          <a:blip r:embed="rId3"/>
+          <a:srcRect b="6910"/>
+          <a:stretch>
+            <a:fillRect/>
+          </a:stretch>
+        </p:blipFill>
+        <p:spPr>
+          <a:xfrm>
+            <a:off x="4105448" y="3270246"/>
+            <a:ext cx="3981104" cy="3222628"/>
+          </a:xfrm>
+          <a:prstGeom prst="rect">
+            <a:avLst/>
+          </a:prstGeom>
+        </p:spPr>
+      </p:pic>
     </p:spTree>
     <p:extLst>
       <p:ext uri="{BB962C8B-B14F-4D97-AF65-F5344CB8AC3E}">
-        <p14:creationId xmlns:p14="http://schemas.microsoft.com/office/powerpoint/2010/main" val="3785304175"/>
+        <p14:creationId xmlns:p14="http://schemas.microsoft.com/office/powerpoint/2010/main" val="2954557868"/>
       </p:ext>
     </p:extLst>
   </p:cSld>
@@ -12490,6 +13235,445 @@
 </file>
 
 <file path=ppt/slides/slide21.xml><?xml version="1.0" encoding="utf-8"?>
+<p:sld xmlns:a="http://schemas.openxmlformats.org/drawingml/2006/main" xmlns:r="http://schemas.openxmlformats.org/officeDocument/2006/relationships" xmlns:p="http://schemas.openxmlformats.org/presentationml/2006/main">
+  <p:cSld>
+    <p:spTree>
+      <p:nvGrpSpPr>
+        <p:cNvPr id="1" name="">
+          <a:extLst>
+            <a:ext uri="{FF2B5EF4-FFF2-40B4-BE49-F238E27FC236}">
+              <a16:creationId xmlns:a16="http://schemas.microsoft.com/office/drawing/2014/main" id="{410ACC08-6958-F7A2-ACE4-B776B9A5709B}"/>
+            </a:ext>
+          </a:extLst>
+        </p:cNvPr>
+        <p:cNvGrpSpPr/>
+        <p:nvPr/>
+      </p:nvGrpSpPr>
+      <p:grpSpPr>
+        <a:xfrm>
+          <a:off x="0" y="0"/>
+          <a:ext cx="0" cy="0"/>
+          <a:chOff x="0" y="0"/>
+          <a:chExt cx="0" cy="0"/>
+        </a:xfrm>
+      </p:grpSpPr>
+      <p:sp>
+        <p:nvSpPr>
+          <p:cNvPr id="2" name="Title 1">
+            <a:extLst>
+              <a:ext uri="{FF2B5EF4-FFF2-40B4-BE49-F238E27FC236}">
+                <a16:creationId xmlns:a16="http://schemas.microsoft.com/office/drawing/2014/main" id="{7825E0C7-70E6-46DA-F9E1-7120A1519F70}"/>
+              </a:ext>
+            </a:extLst>
+          </p:cNvPr>
+          <p:cNvSpPr>
+            <a:spLocks noGrp="1"/>
+          </p:cNvSpPr>
+          <p:nvPr>
+            <p:ph type="title"/>
+          </p:nvPr>
+        </p:nvSpPr>
+        <p:spPr/>
+        <p:txBody>
+          <a:bodyPr/>
+          <a:lstStyle/>
+          <a:p>
+            <a:r>
+              <a:rPr lang="en-GB" dirty="0"/>
+              <a:t>Predictive Analytics</a:t>
+            </a:r>
+            <a:endParaRPr lang="en-US" dirty="0"/>
+          </a:p>
+        </p:txBody>
+      </p:sp>
+      <p:sp>
+        <p:nvSpPr>
+          <p:cNvPr id="3" name="Content Placeholder 2">
+            <a:extLst>
+              <a:ext uri="{FF2B5EF4-FFF2-40B4-BE49-F238E27FC236}">
+                <a16:creationId xmlns:a16="http://schemas.microsoft.com/office/drawing/2014/main" id="{4A0030B7-F5DE-72F2-FE6B-F9F7C08DA6DE}"/>
+              </a:ext>
+            </a:extLst>
+          </p:cNvPr>
+          <p:cNvSpPr>
+            <a:spLocks noGrp="1"/>
+          </p:cNvSpPr>
+          <p:nvPr>
+            <p:ph idx="1"/>
+          </p:nvPr>
+        </p:nvSpPr>
+        <p:spPr/>
+        <p:txBody>
+          <a:bodyPr/>
+          <a:lstStyle/>
+          <a:p>
+            <a:r>
+              <a:rPr lang="en-GB" dirty="0"/>
+              <a:t>Predictive analytics uses available information to estimate an unknown outcome, often in the future.</a:t>
+            </a:r>
+          </a:p>
+          <a:p>
+            <a:r>
+              <a:rPr lang="en-GB" dirty="0"/>
+              <a:t>Predictions are uncertain and depend on the quality of the data and assumptions.</a:t>
+            </a:r>
+          </a:p>
+          <a:p>
+            <a:endParaRPr lang="en-GB" dirty="0"/>
+          </a:p>
+          <a:p>
+            <a:r>
+              <a:rPr lang="en-GB" dirty="0"/>
+              <a:t>Examples:</a:t>
+            </a:r>
+          </a:p>
+          <a:p>
+            <a:pPr lvl="1"/>
+            <a:r>
+              <a:rPr lang="en-GB" dirty="0"/>
+              <a:t>How is the athlete likely to perform in the next game? </a:t>
+            </a:r>
+          </a:p>
+          <a:p>
+            <a:pPr lvl="1"/>
+            <a:r>
+              <a:rPr lang="en-GB" dirty="0"/>
+              <a:t>Which prospect is most likely to succeed at the next level? </a:t>
+            </a:r>
+          </a:p>
+          <a:p>
+            <a:pPr lvl="1"/>
+            <a:r>
+              <a:rPr lang="en-GB" dirty="0"/>
+              <a:t>What is the probability that a possession produces a score?</a:t>
+            </a:r>
+          </a:p>
+          <a:p>
+            <a:pPr lvl="1"/>
+            <a:endParaRPr lang="en-GB" dirty="0"/>
+          </a:p>
+        </p:txBody>
+      </p:sp>
+    </p:spTree>
+    <p:extLst>
+      <p:ext uri="{BB962C8B-B14F-4D97-AF65-F5344CB8AC3E}">
+        <p14:creationId xmlns:p14="http://schemas.microsoft.com/office/powerpoint/2010/main" val="3275639086"/>
+      </p:ext>
+    </p:extLst>
+  </p:cSld>
+  <p:clrMapOvr>
+    <a:masterClrMapping/>
+  </p:clrMapOvr>
+</p:sld>
+</file>
+
+<file path=ppt/slides/slide22.xml><?xml version="1.0" encoding="utf-8"?>
+<p:sld xmlns:a="http://schemas.openxmlformats.org/drawingml/2006/main" xmlns:r="http://schemas.openxmlformats.org/officeDocument/2006/relationships" xmlns:p="http://schemas.openxmlformats.org/presentationml/2006/main">
+  <p:cSld>
+    <p:spTree>
+      <p:nvGrpSpPr>
+        <p:cNvPr id="1" name="">
+          <a:extLst>
+            <a:ext uri="{FF2B5EF4-FFF2-40B4-BE49-F238E27FC236}">
+              <a16:creationId xmlns:a16="http://schemas.microsoft.com/office/drawing/2014/main" id="{2DAF98FE-CCCB-1001-6CB6-CA9D38D9BF2B}"/>
+            </a:ext>
+          </a:extLst>
+        </p:cNvPr>
+        <p:cNvGrpSpPr/>
+        <p:nvPr/>
+      </p:nvGrpSpPr>
+      <p:grpSpPr>
+        <a:xfrm>
+          <a:off x="0" y="0"/>
+          <a:ext cx="0" cy="0"/>
+          <a:chOff x="0" y="0"/>
+          <a:chExt cx="0" cy="0"/>
+        </a:xfrm>
+      </p:grpSpPr>
+      <p:sp>
+        <p:nvSpPr>
+          <p:cNvPr id="2" name="Title 1">
+            <a:extLst>
+              <a:ext uri="{FF2B5EF4-FFF2-40B4-BE49-F238E27FC236}">
+                <a16:creationId xmlns:a16="http://schemas.microsoft.com/office/drawing/2014/main" id="{0082EED7-BE09-3B77-081C-C5843302AEA0}"/>
+              </a:ext>
+            </a:extLst>
+          </p:cNvPr>
+          <p:cNvSpPr>
+            <a:spLocks noGrp="1"/>
+          </p:cNvSpPr>
+          <p:nvPr>
+            <p:ph type="title"/>
+          </p:nvPr>
+        </p:nvSpPr>
+        <p:spPr/>
+        <p:txBody>
+          <a:bodyPr/>
+          <a:lstStyle/>
+          <a:p>
+            <a:r>
+              <a:rPr lang="en-GB" dirty="0"/>
+              <a:t>Prescriptive Analytics</a:t>
+            </a:r>
+            <a:endParaRPr lang="en-US" dirty="0"/>
+          </a:p>
+        </p:txBody>
+      </p:sp>
+      <p:sp>
+        <p:nvSpPr>
+          <p:cNvPr id="3" name="Content Placeholder 2">
+            <a:extLst>
+              <a:ext uri="{FF2B5EF4-FFF2-40B4-BE49-F238E27FC236}">
+                <a16:creationId xmlns:a16="http://schemas.microsoft.com/office/drawing/2014/main" id="{82C24FAB-9362-0D28-BF87-CA3A0A1FD587}"/>
+              </a:ext>
+            </a:extLst>
+          </p:cNvPr>
+          <p:cNvSpPr>
+            <a:spLocks noGrp="1"/>
+          </p:cNvSpPr>
+          <p:nvPr>
+            <p:ph idx="1"/>
+          </p:nvPr>
+        </p:nvSpPr>
+        <p:spPr/>
+        <p:txBody>
+          <a:bodyPr>
+            <a:normAutofit/>
+          </a:bodyPr>
+          <a:lstStyle/>
+          <a:p>
+            <a:r>
+              <a:rPr lang="en-GB" dirty="0"/>
+              <a:t>Prescriptive analytics uses evidence to compare possible actions and recommend what should be done.</a:t>
+            </a:r>
+          </a:p>
+          <a:p>
+            <a:r>
+              <a:rPr lang="en-GB" dirty="0"/>
+              <a:t>May </a:t>
+            </a:r>
+            <a:r>
+              <a:rPr lang="en-GB" b="1" u="sng" dirty="0"/>
+              <a:t>guide</a:t>
+            </a:r>
+            <a:r>
+              <a:rPr lang="en-GB" dirty="0"/>
+              <a:t> decisions, but the final choice also depends on context, priorities, experience, and human judgment.</a:t>
+            </a:r>
+          </a:p>
+          <a:p>
+            <a:endParaRPr lang="en-GB" dirty="0"/>
+          </a:p>
+          <a:p>
+            <a:r>
+              <a:rPr lang="en-GB" dirty="0"/>
+              <a:t>Examples:</a:t>
+            </a:r>
+          </a:p>
+          <a:p>
+            <a:pPr lvl="1"/>
+            <a:r>
+              <a:rPr lang="en-GB" dirty="0"/>
+              <a:t>Should the athlete’s training be modified? </a:t>
+            </a:r>
+          </a:p>
+          <a:p>
+            <a:pPr lvl="1"/>
+            <a:r>
+              <a:rPr lang="en-GB" dirty="0"/>
+              <a:t>Which prospect should the team select? </a:t>
+            </a:r>
+          </a:p>
+          <a:p>
+            <a:pPr lvl="1"/>
+            <a:r>
+              <a:rPr lang="en-GB" dirty="0"/>
+              <a:t>Which defensive strategy should the team use?</a:t>
+            </a:r>
+          </a:p>
+        </p:txBody>
+      </p:sp>
+    </p:spTree>
+    <p:extLst>
+      <p:ext uri="{BB962C8B-B14F-4D97-AF65-F5344CB8AC3E}">
+        <p14:creationId xmlns:p14="http://schemas.microsoft.com/office/powerpoint/2010/main" val="721161968"/>
+      </p:ext>
+    </p:extLst>
+  </p:cSld>
+  <p:clrMapOvr>
+    <a:masterClrMapping/>
+  </p:clrMapOvr>
+</p:sld>
+</file>
+
+<file path=ppt/slides/slide23.xml><?xml version="1.0" encoding="utf-8"?>
+<p:sld xmlns:a="http://schemas.openxmlformats.org/drawingml/2006/main" xmlns:r="http://schemas.openxmlformats.org/officeDocument/2006/relationships" xmlns:p="http://schemas.openxmlformats.org/presentationml/2006/main">
+  <p:cSld>
+    <p:spTree>
+      <p:nvGrpSpPr>
+        <p:cNvPr id="1" name="">
+          <a:extLst>
+            <a:ext uri="{FF2B5EF4-FFF2-40B4-BE49-F238E27FC236}">
+              <a16:creationId xmlns:a16="http://schemas.microsoft.com/office/drawing/2014/main" id="{E922E2CF-A80A-AF59-D558-526F3B121E48}"/>
+            </a:ext>
+          </a:extLst>
+        </p:cNvPr>
+        <p:cNvGrpSpPr/>
+        <p:nvPr/>
+      </p:nvGrpSpPr>
+      <p:grpSpPr>
+        <a:xfrm>
+          <a:off x="0" y="0"/>
+          <a:ext cx="0" cy="0"/>
+          <a:chOff x="0" y="0"/>
+          <a:chExt cx="0" cy="0"/>
+        </a:xfrm>
+      </p:grpSpPr>
+      <p:sp>
+        <p:nvSpPr>
+          <p:cNvPr id="2" name="Title 1">
+            <a:extLst>
+              <a:ext uri="{FF2B5EF4-FFF2-40B4-BE49-F238E27FC236}">
+                <a16:creationId xmlns:a16="http://schemas.microsoft.com/office/drawing/2014/main" id="{1D2580D1-4049-1628-7F57-F500A7F6380D}"/>
+              </a:ext>
+            </a:extLst>
+          </p:cNvPr>
+          <p:cNvSpPr>
+            <a:spLocks noGrp="1"/>
+          </p:cNvSpPr>
+          <p:nvPr>
+            <p:ph type="title"/>
+          </p:nvPr>
+        </p:nvSpPr>
+        <p:spPr/>
+        <p:txBody>
+          <a:bodyPr>
+            <a:noAutofit/>
+          </a:bodyPr>
+          <a:lstStyle/>
+          <a:p>
+            <a:r>
+              <a:rPr lang="en-GB" sz="4000" dirty="0"/>
+              <a:t>Turning a Concern Into Analytical Questions</a:t>
+            </a:r>
+            <a:endParaRPr lang="en-US" sz="4000" dirty="0"/>
+          </a:p>
+        </p:txBody>
+      </p:sp>
+      <p:sp>
+        <p:nvSpPr>
+          <p:cNvPr id="3" name="Content Placeholder 2">
+            <a:extLst>
+              <a:ext uri="{FF2B5EF4-FFF2-40B4-BE49-F238E27FC236}">
+                <a16:creationId xmlns:a16="http://schemas.microsoft.com/office/drawing/2014/main" id="{87AACD65-58A7-C8D7-2F7D-E8AD7B05383E}"/>
+              </a:ext>
+            </a:extLst>
+          </p:cNvPr>
+          <p:cNvSpPr>
+            <a:spLocks noGrp="1"/>
+          </p:cNvSpPr>
+          <p:nvPr>
+            <p:ph idx="1"/>
+          </p:nvPr>
+        </p:nvSpPr>
+        <p:spPr/>
+        <p:txBody>
+          <a:bodyPr>
+            <a:normAutofit/>
+          </a:bodyPr>
+          <a:lstStyle/>
+          <a:p>
+            <a:pPr marL="0" indent="0">
+              <a:buNone/>
+            </a:pPr>
+            <a:r>
+              <a:rPr lang="en-GB" dirty="0"/>
+              <a:t>A basketball team has lost four of its last five games.</a:t>
+            </a:r>
+          </a:p>
+          <a:p>
+            <a:r>
+              <a:rPr lang="en-GB" dirty="0"/>
+              <a:t>The coach asks: “What is going on?”</a:t>
+            </a:r>
+          </a:p>
+          <a:p>
+            <a:pPr marL="914400" lvl="1" indent="-457200">
+              <a:buFont typeface="+mj-lt"/>
+              <a:buAutoNum type="arabicPeriod"/>
+            </a:pPr>
+            <a:endParaRPr lang="en-GB" dirty="0"/>
+          </a:p>
+          <a:p>
+            <a:r>
+              <a:rPr lang="en-GB" dirty="0"/>
+              <a:t>Working with your group:</a:t>
+            </a:r>
+          </a:p>
+          <a:p>
+            <a:pPr lvl="1"/>
+            <a:r>
+              <a:rPr lang="en-GB" dirty="0"/>
+              <a:t>Identify the domain. </a:t>
+            </a:r>
+          </a:p>
+          <a:p>
+            <a:pPr lvl="1"/>
+            <a:r>
+              <a:rPr lang="en-GB" dirty="0"/>
+              <a:t>Write one question for each analytical purpose: </a:t>
+            </a:r>
+          </a:p>
+          <a:p>
+            <a:pPr lvl="2"/>
+            <a:r>
+              <a:rPr lang="en-GB" dirty="0"/>
+              <a:t>Descriptive </a:t>
+            </a:r>
+          </a:p>
+          <a:p>
+            <a:pPr lvl="2"/>
+            <a:r>
+              <a:rPr lang="en-GB" dirty="0"/>
+              <a:t>Diagnostic </a:t>
+            </a:r>
+          </a:p>
+          <a:p>
+            <a:pPr lvl="2"/>
+            <a:r>
+              <a:rPr lang="en-GB" dirty="0"/>
+              <a:t>Predictive </a:t>
+            </a:r>
+          </a:p>
+          <a:p>
+            <a:pPr lvl="2"/>
+            <a:r>
+              <a:rPr lang="en-GB" dirty="0"/>
+              <a:t>Prescriptive</a:t>
+            </a:r>
+          </a:p>
+          <a:p>
+            <a:pPr marL="0" indent="0">
+              <a:buNone/>
+            </a:pPr>
+            <a:endParaRPr lang="en-GB" dirty="0"/>
+          </a:p>
+        </p:txBody>
+      </p:sp>
+    </p:spTree>
+    <p:extLst>
+      <p:ext uri="{BB962C8B-B14F-4D97-AF65-F5344CB8AC3E}">
+        <p14:creationId xmlns:p14="http://schemas.microsoft.com/office/powerpoint/2010/main" val="3429352342"/>
+      </p:ext>
+    </p:extLst>
+  </p:cSld>
+  <p:clrMapOvr>
+    <a:masterClrMapping/>
+  </p:clrMapOvr>
+</p:sld>
+</file>
+
+<file path=ppt/slides/slide24.xml><?xml version="1.0" encoding="utf-8"?>
 <p:sld xmlns:a="http://schemas.openxmlformats.org/drawingml/2006/main" xmlns:r="http://schemas.openxmlformats.org/officeDocument/2006/relationships" xmlns:p="http://schemas.openxmlformats.org/presentationml/2006/main">
   <p:cSld>
     <p:spTree>
@@ -12968,151 +14152,7 @@
 </p:sld>
 </file>
 
-<file path=ppt/slides/slide22.xml><?xml version="1.0" encoding="utf-8"?>
-<p:sld xmlns:a="http://schemas.openxmlformats.org/drawingml/2006/main" xmlns:r="http://schemas.openxmlformats.org/officeDocument/2006/relationships" xmlns:p="http://schemas.openxmlformats.org/presentationml/2006/main">
-  <p:cSld>
-    <p:spTree>
-      <p:nvGrpSpPr>
-        <p:cNvPr id="1" name="">
-          <a:extLst>
-            <a:ext uri="{FF2B5EF4-FFF2-40B4-BE49-F238E27FC236}">
-              <a16:creationId xmlns:a16="http://schemas.microsoft.com/office/drawing/2014/main" id="{339BC448-0E80-7EFF-4754-8229B404CAC0}"/>
-            </a:ext>
-          </a:extLst>
-        </p:cNvPr>
-        <p:cNvGrpSpPr/>
-        <p:nvPr/>
-      </p:nvGrpSpPr>
-      <p:grpSpPr>
-        <a:xfrm>
-          <a:off x="0" y="0"/>
-          <a:ext cx="0" cy="0"/>
-          <a:chOff x="0" y="0"/>
-          <a:chExt cx="0" cy="0"/>
-        </a:xfrm>
-      </p:grpSpPr>
-      <p:sp>
-        <p:nvSpPr>
-          <p:cNvPr id="2" name="Title 1">
-            <a:extLst>
-              <a:ext uri="{FF2B5EF4-FFF2-40B4-BE49-F238E27FC236}">
-                <a16:creationId xmlns:a16="http://schemas.microsoft.com/office/drawing/2014/main" id="{3B416AE1-4E7C-4C41-76FF-F2538718C69D}"/>
-              </a:ext>
-            </a:extLst>
-          </p:cNvPr>
-          <p:cNvSpPr>
-            <a:spLocks noGrp="1"/>
-          </p:cNvSpPr>
-          <p:nvPr>
-            <p:ph type="title"/>
-          </p:nvPr>
-        </p:nvSpPr>
-        <p:spPr/>
-        <p:txBody>
-          <a:bodyPr>
-            <a:normAutofit fontScale="90000"/>
-          </a:bodyPr>
-          <a:lstStyle/>
-          <a:p>
-            <a:r>
-              <a:rPr lang="en-GB" dirty="0"/>
-              <a:t>More Advanced Does Not Mean More Valuable</a:t>
-            </a:r>
-            <a:endParaRPr lang="en-US" dirty="0"/>
-          </a:p>
-        </p:txBody>
-      </p:sp>
-      <p:sp>
-        <p:nvSpPr>
-          <p:cNvPr id="3" name="Content Placeholder 2">
-            <a:extLst>
-              <a:ext uri="{FF2B5EF4-FFF2-40B4-BE49-F238E27FC236}">
-                <a16:creationId xmlns:a16="http://schemas.microsoft.com/office/drawing/2014/main" id="{7FFAA4CE-A3EC-AB3B-0675-93654EC1B928}"/>
-              </a:ext>
-            </a:extLst>
-          </p:cNvPr>
-          <p:cNvSpPr>
-            <a:spLocks noGrp="1"/>
-          </p:cNvSpPr>
-          <p:nvPr>
-            <p:ph idx="1"/>
-          </p:nvPr>
-        </p:nvSpPr>
-        <p:spPr/>
-        <p:txBody>
-          <a:bodyPr>
-            <a:normAutofit lnSpcReduction="10000"/>
-          </a:bodyPr>
-          <a:lstStyle/>
-          <a:p>
-            <a:r>
-              <a:rPr lang="en-GB" dirty="0"/>
-              <a:t>Much of the daily work in sports analytics is descriptive and diagnostic:</a:t>
-            </a:r>
-          </a:p>
-          <a:p>
-            <a:pPr lvl="1"/>
-            <a:r>
-              <a:rPr lang="en-GB" dirty="0"/>
-              <a:t>Collecting, cleaning, and organizing data</a:t>
-            </a:r>
-          </a:p>
-          <a:p>
-            <a:pPr lvl="1"/>
-            <a:r>
-              <a:rPr lang="en-GB" dirty="0"/>
-              <a:t>Defining metrics consistently</a:t>
-            </a:r>
-          </a:p>
-          <a:p>
-            <a:pPr lvl="1"/>
-            <a:r>
-              <a:rPr lang="en-GB" dirty="0"/>
-              <a:t>Monitoring recent performance and workload</a:t>
-            </a:r>
-          </a:p>
-          <a:p>
-            <a:pPr lvl="1"/>
-            <a:r>
-              <a:rPr lang="en-GB" dirty="0"/>
-              <a:t>Identifying meaningful changes or patterns</a:t>
-            </a:r>
-          </a:p>
-          <a:p>
-            <a:pPr lvl="1"/>
-            <a:r>
-              <a:rPr lang="en-GB" dirty="0"/>
-              <a:t>Communicating findings to coaches, athletes, and decision-makers</a:t>
-            </a:r>
-          </a:p>
-          <a:p>
-            <a:r>
-              <a:rPr lang="en-GB" dirty="0"/>
-              <a:t>Predictive models can be valuable, but only when they address a real decision and are supported by reliable foundational work.</a:t>
-            </a:r>
-          </a:p>
-          <a:p>
-            <a:r>
-              <a:rPr lang="en-GB" dirty="0"/>
-              <a:t>The best analysis is not necessarily the most complicated analysis. It is the analysis that helps someone make a better decision.</a:t>
-            </a:r>
-          </a:p>
-        </p:txBody>
-      </p:sp>
-    </p:spTree>
-    <p:extLst>
-      <p:ext uri="{BB962C8B-B14F-4D97-AF65-F5344CB8AC3E}">
-        <p14:creationId xmlns:p14="http://schemas.microsoft.com/office/powerpoint/2010/main" val="2329336833"/>
-      </p:ext>
-    </p:extLst>
-  </p:cSld>
-  <p:clrMapOvr>
-    <a:masterClrMapping/>
-  </p:clrMapOvr>
-</p:sld>
-</file>
-
-<file path=ppt/slides/slide23.xml><?xml version="1.0" encoding="utf-8"?>
+<file path=ppt/slides/slide25.xml><?xml version="1.0" encoding="utf-8"?>
 <p:sld xmlns:a="http://schemas.openxmlformats.org/drawingml/2006/main" xmlns:r="http://schemas.openxmlformats.org/officeDocument/2006/relationships" xmlns:p="http://schemas.openxmlformats.org/presentationml/2006/main">
   <p:cSld>
     <p:spTree>
@@ -13179,7 +14219,11 @@
           <a:bodyPr/>
           <a:lstStyle/>
           <a:p>
-            <a:endParaRPr lang="en-US"/>
+            <a:r>
+              <a:rPr lang="en-GB" dirty="0"/>
+              <a:t>Description can support diagnosis, diagnosis can inform prediction, and all three can contribute to a recommendation.</a:t>
+            </a:r>
+            <a:endParaRPr lang="en-US" dirty="0"/>
           </a:p>
         </p:txBody>
       </p:sp>
@@ -13530,7 +14574,7 @@
 </p:sld>
 </file>
 
-<file path=ppt/slides/slide24.xml><?xml version="1.0" encoding="utf-8"?>
+<file path=ppt/slides/slide26.xml><?xml version="1.0" encoding="utf-8"?>
 <p:sld xmlns:a="http://schemas.openxmlformats.org/drawingml/2006/main" xmlns:r="http://schemas.openxmlformats.org/officeDocument/2006/relationships" xmlns:p="http://schemas.openxmlformats.org/presentationml/2006/main">
   <p:cSld>
     <p:spTree>
@@ -13576,7 +14620,7 @@
           <a:p>
             <a:r>
               <a:rPr lang="en-GB" dirty="0"/>
-              <a:t>Analytics Is a Connected Process</a:t>
+              <a:t>Real Analytical Work Is Rarely Linear</a:t>
             </a:r>
             <a:endParaRPr lang="en-US" dirty="0"/>
           </a:p>
@@ -14257,7 +15301,145 @@
 </p:sld>
 </file>
 
-<file path=ppt/slides/slide25.xml><?xml version="1.0" encoding="utf-8"?>
+<file path=ppt/slides/slide27.xml><?xml version="1.0" encoding="utf-8"?>
+<p:sld xmlns:a="http://schemas.openxmlformats.org/drawingml/2006/main" xmlns:r="http://schemas.openxmlformats.org/officeDocument/2006/relationships" xmlns:p="http://schemas.openxmlformats.org/presentationml/2006/main">
+  <p:cSld>
+    <p:spTree>
+      <p:nvGrpSpPr>
+        <p:cNvPr id="1" name="">
+          <a:extLst>
+            <a:ext uri="{FF2B5EF4-FFF2-40B4-BE49-F238E27FC236}">
+              <a16:creationId xmlns:a16="http://schemas.microsoft.com/office/drawing/2014/main" id="{339BC448-0E80-7EFF-4754-8229B404CAC0}"/>
+            </a:ext>
+          </a:extLst>
+        </p:cNvPr>
+        <p:cNvGrpSpPr/>
+        <p:nvPr/>
+      </p:nvGrpSpPr>
+      <p:grpSpPr>
+        <a:xfrm>
+          <a:off x="0" y="0"/>
+          <a:ext cx="0" cy="0"/>
+          <a:chOff x="0" y="0"/>
+          <a:chExt cx="0" cy="0"/>
+        </a:xfrm>
+      </p:grpSpPr>
+      <p:sp>
+        <p:nvSpPr>
+          <p:cNvPr id="2" name="Title 1">
+            <a:extLst>
+              <a:ext uri="{FF2B5EF4-FFF2-40B4-BE49-F238E27FC236}">
+                <a16:creationId xmlns:a16="http://schemas.microsoft.com/office/drawing/2014/main" id="{3B416AE1-4E7C-4C41-76FF-F2538718C69D}"/>
+              </a:ext>
+            </a:extLst>
+          </p:cNvPr>
+          <p:cNvSpPr>
+            <a:spLocks noGrp="1"/>
+          </p:cNvSpPr>
+          <p:nvPr>
+            <p:ph type="title"/>
+          </p:nvPr>
+        </p:nvSpPr>
+        <p:spPr/>
+        <p:txBody>
+          <a:bodyPr>
+            <a:normAutofit/>
+          </a:bodyPr>
+          <a:lstStyle/>
+          <a:p>
+            <a:r>
+              <a:rPr lang="en-GB" dirty="0"/>
+              <a:t>More Complex ≠ More Valuable</a:t>
+            </a:r>
+            <a:endParaRPr lang="en-US" dirty="0"/>
+          </a:p>
+        </p:txBody>
+      </p:sp>
+      <p:sp>
+        <p:nvSpPr>
+          <p:cNvPr id="3" name="Content Placeholder 2">
+            <a:extLst>
+              <a:ext uri="{FF2B5EF4-FFF2-40B4-BE49-F238E27FC236}">
+                <a16:creationId xmlns:a16="http://schemas.microsoft.com/office/drawing/2014/main" id="{7FFAA4CE-A3EC-AB3B-0675-93654EC1B928}"/>
+              </a:ext>
+            </a:extLst>
+          </p:cNvPr>
+          <p:cNvSpPr>
+            <a:spLocks noGrp="1"/>
+          </p:cNvSpPr>
+          <p:nvPr>
+            <p:ph idx="1"/>
+          </p:nvPr>
+        </p:nvSpPr>
+        <p:spPr/>
+        <p:txBody>
+          <a:bodyPr>
+            <a:normAutofit/>
+          </a:bodyPr>
+          <a:lstStyle/>
+          <a:p>
+            <a:r>
+              <a:rPr lang="en-GB" dirty="0"/>
+              <a:t>Much of the daily work in sport analytics involves:</a:t>
+            </a:r>
+          </a:p>
+          <a:p>
+            <a:pPr lvl="1"/>
+            <a:r>
+              <a:rPr lang="en-GB" dirty="0"/>
+              <a:t>Collecting, cleaning, and organizing data </a:t>
+            </a:r>
+          </a:p>
+          <a:p>
+            <a:pPr lvl="1"/>
+            <a:r>
+              <a:rPr lang="en-GB" dirty="0"/>
+              <a:t>Defining metrics consistently </a:t>
+            </a:r>
+          </a:p>
+          <a:p>
+            <a:pPr lvl="1"/>
+            <a:r>
+              <a:rPr lang="en-GB" dirty="0"/>
+              <a:t>Identifying meaningful changes and patterns </a:t>
+            </a:r>
+          </a:p>
+          <a:p>
+            <a:pPr lvl="1"/>
+            <a:r>
+              <a:rPr lang="en-GB" dirty="0"/>
+              <a:t>Communicating findings to decision-makers </a:t>
+            </a:r>
+          </a:p>
+          <a:p>
+            <a:pPr lvl="1"/>
+            <a:endParaRPr lang="en-GB" dirty="0"/>
+          </a:p>
+          <a:p>
+            <a:pPr marL="0" indent="0">
+              <a:buNone/>
+            </a:pPr>
+            <a:r>
+              <a:rPr lang="en-GB" dirty="0"/>
+              <a:t>Predictive models can be valuable, but only when they address a real decision and are supported by reliable foundational work.</a:t>
+            </a:r>
+          </a:p>
+        </p:txBody>
+      </p:sp>
+    </p:spTree>
+    <p:extLst>
+      <p:ext uri="{BB962C8B-B14F-4D97-AF65-F5344CB8AC3E}">
+        <p14:creationId xmlns:p14="http://schemas.microsoft.com/office/powerpoint/2010/main" val="2329336833"/>
+      </p:ext>
+    </p:extLst>
+  </p:cSld>
+  <p:clrMapOvr>
+    <a:masterClrMapping/>
+  </p:clrMapOvr>
+</p:sld>
+</file>
+
+<file path=ppt/slides/slide28.xml><?xml version="1.0" encoding="utf-8"?>
 <p:sld xmlns:a="http://schemas.openxmlformats.org/drawingml/2006/main" xmlns:r="http://schemas.openxmlformats.org/officeDocument/2006/relationships" xmlns:p="http://schemas.openxmlformats.org/presentationml/2006/main">
   <p:cSld>
     <p:spTree>
@@ -14326,28 +15508,17 @@
           <a:bodyPr/>
           <a:lstStyle/>
           <a:p>
-            <a:r>
-              <a:rPr lang="en-US" dirty="0"/>
-              <a:t>The three domains describe where sport analytics is applied.</a:t>
-            </a:r>
-          </a:p>
-          <a:p>
-            <a:r>
-              <a:rPr lang="en-US" dirty="0"/>
+            <a:pPr lvl="0"/>
+            <a:r>
+              <a:rPr lang="en-GB" dirty="0"/>
+              <a:t>The three domains describe where sport analytics is applied. </a:t>
+            </a:r>
+          </a:p>
+          <a:p>
+            <a:pPr lvl="0"/>
+            <a:r>
+              <a:rPr lang="en-GB" dirty="0"/>
               <a:t>Descriptive, diagnostic, predictive, and prescriptive questions describe what the analysis is intended to accomplish.</a:t>
-            </a:r>
-          </a:p>
-          <a:p>
-            <a:pPr lvl="1"/>
-            <a:r>
-              <a:rPr lang="en-US" dirty="0"/>
-              <a:t>These purposes are connected, but not every analysis requires all four.</a:t>
-            </a:r>
-          </a:p>
-          <a:p>
-            <a:r>
-              <a:rPr lang="en-US" dirty="0"/>
-              <a:t>The most valuable analysis is the one that provides credible evidence for a meaningful decision.</a:t>
             </a:r>
           </a:p>
           <a:p>
@@ -14371,7 +15542,7 @@
 </p:sld>
 </file>
 
-<file path=ppt/slides/slide26.xml><?xml version="1.0" encoding="utf-8"?>
+<file path=ppt/slides/slide29.xml><?xml version="1.0" encoding="utf-8"?>
 <p:sld xmlns:a="http://schemas.openxmlformats.org/drawingml/2006/main" xmlns:r="http://schemas.openxmlformats.org/officeDocument/2006/relationships" xmlns:p="http://schemas.openxmlformats.org/presentationml/2006/main" show="0">
   <p:cSld>
     <p:spTree>
@@ -14463,352 +15634,6 @@
     <p:extLst>
       <p:ext uri="{BB962C8B-B14F-4D97-AF65-F5344CB8AC3E}">
         <p14:creationId xmlns:p14="http://schemas.microsoft.com/office/powerpoint/2010/main" val="1267012885"/>
-      </p:ext>
-    </p:extLst>
-  </p:cSld>
-  <p:clrMapOvr>
-    <a:masterClrMapping/>
-  </p:clrMapOvr>
-</p:sld>
-</file>
-
-<file path=ppt/slides/slide27.xml><?xml version="1.0" encoding="utf-8"?>
-<p:sld xmlns:a="http://schemas.openxmlformats.org/drawingml/2006/main" xmlns:r="http://schemas.openxmlformats.org/officeDocument/2006/relationships" xmlns:p="http://schemas.openxmlformats.org/presentationml/2006/main" show="0">
-  <p:cSld>
-    <p:spTree>
-      <p:nvGrpSpPr>
-        <p:cNvPr id="1" name=""/>
-        <p:cNvGrpSpPr/>
-        <p:nvPr/>
-      </p:nvGrpSpPr>
-      <p:grpSpPr>
-        <a:xfrm>
-          <a:off x="0" y="0"/>
-          <a:ext cx="0" cy="0"/>
-          <a:chOff x="0" y="0"/>
-          <a:chExt cx="0" cy="0"/>
-        </a:xfrm>
-      </p:grpSpPr>
-      <p:sp>
-        <p:nvSpPr>
-          <p:cNvPr id="2" name="Title 1">
-            <a:extLst>
-              <a:ext uri="{FF2B5EF4-FFF2-40B4-BE49-F238E27FC236}">
-                <a16:creationId xmlns:a16="http://schemas.microsoft.com/office/drawing/2014/main" id="{403F4149-77C5-51D6-6364-A5DC1666CA69}"/>
-              </a:ext>
-            </a:extLst>
-          </p:cNvPr>
-          <p:cNvSpPr>
-            <a:spLocks noGrp="1"/>
-          </p:cNvSpPr>
-          <p:nvPr>
-            <p:ph type="title"/>
-          </p:nvPr>
-        </p:nvSpPr>
-        <p:spPr/>
-        <p:txBody>
-          <a:bodyPr/>
-          <a:lstStyle/>
-          <a:p>
-            <a:r>
-              <a:rPr lang="en-US" dirty="0"/>
-              <a:t>Example </a:t>
-            </a:r>
-          </a:p>
-        </p:txBody>
-      </p:sp>
-      <p:sp>
-        <p:nvSpPr>
-          <p:cNvPr id="3" name="Content Placeholder 2">
-            <a:extLst>
-              <a:ext uri="{FF2B5EF4-FFF2-40B4-BE49-F238E27FC236}">
-                <a16:creationId xmlns:a16="http://schemas.microsoft.com/office/drawing/2014/main" id="{F4AC8398-083C-ED0D-65C7-FA16DBE6BCED}"/>
-              </a:ext>
-            </a:extLst>
-          </p:cNvPr>
-          <p:cNvSpPr>
-            <a:spLocks noGrp="1"/>
-          </p:cNvSpPr>
-          <p:nvPr>
-            <p:ph idx="1"/>
-          </p:nvPr>
-        </p:nvSpPr>
-        <p:spPr/>
-        <p:txBody>
-          <a:bodyPr/>
-          <a:lstStyle/>
-          <a:p>
-            <a:r>
-              <a:rPr lang="en-GB" b="1" dirty="0"/>
-              <a:t>Domain:</a:t>
-            </a:r>
-            <a:r>
-              <a:rPr lang="en-GB" dirty="0"/>
-              <a:t> Athlete monitoring</a:t>
-            </a:r>
-          </a:p>
-          <a:p>
-            <a:r>
-              <a:rPr lang="en-GB" b="1" dirty="0"/>
-              <a:t>Decision:</a:t>
-            </a:r>
-            <a:r>
-              <a:rPr lang="en-GB" dirty="0"/>
-              <a:t> Should a player’s training load be reduced today?</a:t>
-            </a:r>
-          </a:p>
-          <a:p>
-            <a:pPr lvl="1"/>
-            <a:r>
-              <a:rPr lang="en-GB" b="1" dirty="0"/>
-              <a:t>Descriptive:</a:t>
-            </a:r>
-            <a:r>
-              <a:rPr lang="en-GB" dirty="0"/>
-              <a:t> The player completed substantially more high-intensity work than usual during the previous three days. </a:t>
-            </a:r>
-          </a:p>
-          <a:p>
-            <a:pPr lvl="1"/>
-            <a:r>
-              <a:rPr lang="en-GB" b="1" dirty="0"/>
-              <a:t>Diagnostic:</a:t>
-            </a:r>
-            <a:r>
-              <a:rPr lang="en-GB" dirty="0"/>
-              <a:t> The increase resulted from additional drill repetitions and reduced recovery time. </a:t>
-            </a:r>
-          </a:p>
-          <a:p>
-            <a:pPr lvl="1"/>
-            <a:r>
-              <a:rPr lang="en-GB" b="1" dirty="0"/>
-              <a:t>Predictive:</a:t>
-            </a:r>
-            <a:r>
-              <a:rPr lang="en-GB" dirty="0"/>
-              <a:t> Maintaining the planned load may increase the probability of poor performance or incomplete recovery tomorrow. </a:t>
-            </a:r>
-          </a:p>
-          <a:p>
-            <a:pPr lvl="1"/>
-            <a:r>
-              <a:rPr lang="en-GB" b="1" dirty="0"/>
-              <a:t>Prescriptive:</a:t>
-            </a:r>
-            <a:r>
-              <a:rPr lang="en-GB" dirty="0"/>
-              <a:t> Reduce today’s high-intensity volume while maintaining lower-intensity tactical participation.</a:t>
-            </a:r>
-          </a:p>
-          <a:p>
-            <a:endParaRPr lang="en-US" dirty="0"/>
-          </a:p>
-        </p:txBody>
-      </p:sp>
-    </p:spTree>
-    <p:extLst>
-      <p:ext uri="{BB962C8B-B14F-4D97-AF65-F5344CB8AC3E}">
-        <p14:creationId xmlns:p14="http://schemas.microsoft.com/office/powerpoint/2010/main" val="1069047801"/>
-      </p:ext>
-    </p:extLst>
-  </p:cSld>
-  <p:clrMapOvr>
-    <a:masterClrMapping/>
-  </p:clrMapOvr>
-</p:sld>
-</file>
-
-<file path=ppt/slides/slide28.xml><?xml version="1.0" encoding="utf-8"?>
-<p:sld xmlns:a="http://schemas.openxmlformats.org/drawingml/2006/main" xmlns:r="http://schemas.openxmlformats.org/officeDocument/2006/relationships" xmlns:p="http://schemas.openxmlformats.org/presentationml/2006/main" show="0">
-  <p:cSld>
-    <p:spTree>
-      <p:nvGrpSpPr>
-        <p:cNvPr id="1" name=""/>
-        <p:cNvGrpSpPr/>
-        <p:nvPr/>
-      </p:nvGrpSpPr>
-      <p:grpSpPr>
-        <a:xfrm>
-          <a:off x="0" y="0"/>
-          <a:ext cx="0" cy="0"/>
-          <a:chOff x="0" y="0"/>
-          <a:chExt cx="0" cy="0"/>
-        </a:xfrm>
-      </p:grpSpPr>
-      <p:sp>
-        <p:nvSpPr>
-          <p:cNvPr id="2" name="Title 1">
-            <a:extLst>
-              <a:ext uri="{FF2B5EF4-FFF2-40B4-BE49-F238E27FC236}">
-                <a16:creationId xmlns:a16="http://schemas.microsoft.com/office/drawing/2014/main" id="{6CE6F538-931D-AD45-9EA7-DADA26B90B42}"/>
-              </a:ext>
-            </a:extLst>
-          </p:cNvPr>
-          <p:cNvSpPr>
-            <a:spLocks noGrp="1"/>
-          </p:cNvSpPr>
-          <p:nvPr>
-            <p:ph type="title"/>
-          </p:nvPr>
-        </p:nvSpPr>
-        <p:spPr/>
-        <p:txBody>
-          <a:bodyPr>
-            <a:noAutofit/>
-          </a:bodyPr>
-          <a:lstStyle/>
-          <a:p>
-            <a:r>
-              <a:rPr lang="en-GB" sz="3600" dirty="0"/>
-              <a:t>A basketball team has lost four of its last five games.</a:t>
-            </a:r>
-            <a:endParaRPr lang="en-US" sz="3600" dirty="0"/>
-          </a:p>
-        </p:txBody>
-      </p:sp>
-      <p:sp>
-        <p:nvSpPr>
-          <p:cNvPr id="3" name="Content Placeholder 2">
-            <a:extLst>
-              <a:ext uri="{FF2B5EF4-FFF2-40B4-BE49-F238E27FC236}">
-                <a16:creationId xmlns:a16="http://schemas.microsoft.com/office/drawing/2014/main" id="{8B9E355C-4F74-80F1-6425-3FB7EAE6B2E6}"/>
-              </a:ext>
-            </a:extLst>
-          </p:cNvPr>
-          <p:cNvSpPr>
-            <a:spLocks noGrp="1"/>
-          </p:cNvSpPr>
-          <p:nvPr>
-            <p:ph idx="1"/>
-          </p:nvPr>
-        </p:nvSpPr>
-        <p:spPr/>
-        <p:txBody>
-          <a:bodyPr/>
-          <a:lstStyle/>
-          <a:p>
-            <a:pPr marL="0" indent="0" algn="ctr">
-              <a:buNone/>
-            </a:pPr>
-            <a:r>
-              <a:rPr lang="en-US" dirty="0"/>
-              <a:t>Coach asks, “what is going on??”. How do we tackle this as the analyst?</a:t>
-            </a:r>
-          </a:p>
-        </p:txBody>
-      </p:sp>
-    </p:spTree>
-    <p:extLst>
-      <p:ext uri="{BB962C8B-B14F-4D97-AF65-F5344CB8AC3E}">
-        <p14:creationId xmlns:p14="http://schemas.microsoft.com/office/powerpoint/2010/main" val="425644854"/>
-      </p:ext>
-    </p:extLst>
-  </p:cSld>
-  <p:clrMapOvr>
-    <a:masterClrMapping/>
-  </p:clrMapOvr>
-</p:sld>
-</file>
-
-<file path=ppt/slides/slide29.xml><?xml version="1.0" encoding="utf-8"?>
-<p:sld xmlns:a="http://schemas.openxmlformats.org/drawingml/2006/main" xmlns:r="http://schemas.openxmlformats.org/officeDocument/2006/relationships" xmlns:p="http://schemas.openxmlformats.org/presentationml/2006/main" show="0">
-  <p:cSld>
-    <p:spTree>
-      <p:nvGrpSpPr>
-        <p:cNvPr id="1" name="">
-          <a:extLst>
-            <a:ext uri="{FF2B5EF4-FFF2-40B4-BE49-F238E27FC236}">
-              <a16:creationId xmlns:a16="http://schemas.microsoft.com/office/drawing/2014/main" id="{40AF3649-84EF-73B3-DB78-3A8C58E5C26C}"/>
-            </a:ext>
-          </a:extLst>
-        </p:cNvPr>
-        <p:cNvGrpSpPr/>
-        <p:nvPr/>
-      </p:nvGrpSpPr>
-      <p:grpSpPr>
-        <a:xfrm>
-          <a:off x="0" y="0"/>
-          <a:ext cx="0" cy="0"/>
-          <a:chOff x="0" y="0"/>
-          <a:chExt cx="0" cy="0"/>
-        </a:xfrm>
-      </p:grpSpPr>
-      <p:sp>
-        <p:nvSpPr>
-          <p:cNvPr id="2" name="Title 1">
-            <a:extLst>
-              <a:ext uri="{FF2B5EF4-FFF2-40B4-BE49-F238E27FC236}">
-                <a16:creationId xmlns:a16="http://schemas.microsoft.com/office/drawing/2014/main" id="{14013837-791B-5F03-753D-2E5EA52C17EF}"/>
-              </a:ext>
-            </a:extLst>
-          </p:cNvPr>
-          <p:cNvSpPr>
-            <a:spLocks noGrp="1"/>
-          </p:cNvSpPr>
-          <p:nvPr>
-            <p:ph type="title"/>
-          </p:nvPr>
-        </p:nvSpPr>
-        <p:spPr/>
-        <p:txBody>
-          <a:bodyPr/>
-          <a:lstStyle/>
-          <a:p>
-            <a:r>
-              <a:rPr lang="en-US" dirty="0"/>
-              <a:t>Scenarios </a:t>
-            </a:r>
-          </a:p>
-        </p:txBody>
-      </p:sp>
-      <p:sp>
-        <p:nvSpPr>
-          <p:cNvPr id="3" name="Content Placeholder 2">
-            <a:extLst>
-              <a:ext uri="{FF2B5EF4-FFF2-40B4-BE49-F238E27FC236}">
-                <a16:creationId xmlns:a16="http://schemas.microsoft.com/office/drawing/2014/main" id="{B4D682D1-FE5C-EC9F-1DA5-C852D5D53B85}"/>
-              </a:ext>
-            </a:extLst>
-          </p:cNvPr>
-          <p:cNvSpPr>
-            <a:spLocks noGrp="1"/>
-          </p:cNvSpPr>
-          <p:nvPr>
-            <p:ph idx="1"/>
-          </p:nvPr>
-        </p:nvSpPr>
-        <p:spPr/>
-        <p:txBody>
-          <a:bodyPr>
-            <a:normAutofit fontScale="92500" lnSpcReduction="10000"/>
-          </a:bodyPr>
-          <a:lstStyle/>
-          <a:p>
-            <a:r>
-              <a:rPr lang="en-GB" dirty="0"/>
-              <a:t>A basketball player completed considerably more high-intensity work than usual during the previous three days. The coaching staff added extra drill repetitions and shortened the recovery periods between drills. The player has an important game tomorrow.</a:t>
-            </a:r>
-          </a:p>
-          <a:p>
-            <a:r>
-              <a:rPr lang="en-GB" dirty="0"/>
-              <a:t>A basketball prospect scores 22 points per game, but most of those points come against weaker opponents. Against highly ranked teams, the player’s scoring efficiency and assists decrease while turnovers increase. Your team is deciding whether to select the player in the first round of the draft.</a:t>
-            </a:r>
-          </a:p>
-          <a:p>
-            <a:r>
-              <a:rPr lang="en-GB" dirty="0"/>
-              <a:t>A soccer team has allowed five goals during its last four matches. Four of the goals occurred after the team lost possession while its fullbacks were positioned high up the field. The team is preparing to play an opponent with fast attacking players.</a:t>
-            </a:r>
-            <a:endParaRPr lang="en-US" dirty="0"/>
-          </a:p>
-        </p:txBody>
-      </p:sp>
-    </p:spTree>
-    <p:extLst>
-      <p:ext uri="{BB962C8B-B14F-4D97-AF65-F5344CB8AC3E}">
-        <p14:creationId xmlns:p14="http://schemas.microsoft.com/office/powerpoint/2010/main" val="2264337334"/>
       </p:ext>
     </p:extLst>
   </p:cSld>
@@ -14840,7 +15665,7 @@
           <p:cNvPr id="2" name="Title 1">
             <a:extLst>
               <a:ext uri="{FF2B5EF4-FFF2-40B4-BE49-F238E27FC236}">
-                <a16:creationId xmlns:a16="http://schemas.microsoft.com/office/drawing/2014/main" id="{4EA8DFB2-CE6D-8D09-7A4F-E5EAB91230AC}"/>
+                <a16:creationId xmlns:a16="http://schemas.microsoft.com/office/drawing/2014/main" id="{B9892A2B-5817-51A8-D2A2-29D0DEAEF021}"/>
               </a:ext>
             </a:extLst>
           </p:cNvPr>
@@ -14860,7 +15685,7 @@
           <a:p>
             <a:r>
               <a:rPr lang="en-GB" dirty="0"/>
-              <a:t>The Three Domains</a:t>
+              <a:t>Overview</a:t>
             </a:r>
             <a:endParaRPr lang="en-US" dirty="0"/>
           </a:p>
@@ -14871,7 +15696,7 @@
           <p:cNvPr id="3" name="Content Placeholder 2">
             <a:extLst>
               <a:ext uri="{FF2B5EF4-FFF2-40B4-BE49-F238E27FC236}">
-                <a16:creationId xmlns:a16="http://schemas.microsoft.com/office/drawing/2014/main" id="{EAD64D41-7567-2E1C-0750-CDA1D99E6696}"/>
+                <a16:creationId xmlns:a16="http://schemas.microsoft.com/office/drawing/2014/main" id="{01A1AA7A-7F93-5D7D-958E-1D9C62FF0B50}"/>
               </a:ext>
             </a:extLst>
           </p:cNvPr>
@@ -14884,153 +15709,523 @@
         </p:nvSpPr>
         <p:spPr/>
         <p:txBody>
-          <a:bodyPr/>
+          <a:bodyPr>
+            <a:normAutofit/>
+          </a:bodyPr>
           <a:lstStyle/>
           <a:p>
             <a:pPr lvl="0"/>
             <a:r>
-              <a:rPr lang="en-GB" b="1" dirty="0"/>
-              <a:t>Scouting and Talent Evaluation</a:t>
-            </a:r>
-            <a:endParaRPr lang="en-GB" dirty="0"/>
-          </a:p>
-          <a:p>
-            <a:pPr lvl="1"/>
-            <a:r>
               <a:rPr lang="en-GB" dirty="0"/>
-              <a:t>Evaluating athletes, projecting future performance, and informing recruitment.</a:t>
-            </a:r>
-          </a:p>
-          <a:p>
-            <a:pPr lvl="0"/>
-            <a:r>
-              <a:rPr lang="en-GB" b="1" dirty="0"/>
-              <a:t>Athlete Tracking and Monitoring</a:t>
-            </a:r>
-            <a:endParaRPr lang="en-GB" dirty="0"/>
-          </a:p>
-          <a:p>
-            <a:pPr lvl="1"/>
-            <a:r>
-              <a:rPr lang="en-GB" dirty="0"/>
-              <a:t>Understanding training, competition demands, and athlete responses over time.</a:t>
-            </a:r>
-          </a:p>
-          <a:p>
-            <a:pPr lvl="0"/>
-            <a:r>
-              <a:rPr lang="en-GB" b="1" dirty="0"/>
-              <a:t>Strategy and Tactical Analysis</a:t>
-            </a:r>
-            <a:endParaRPr lang="en-GB" dirty="0"/>
-          </a:p>
-          <a:p>
-            <a:pPr lvl="1"/>
-            <a:r>
-              <a:rPr lang="en-GB" dirty="0"/>
-              <a:t>Understanding how games unfold and supporting decisions about how to compete.</a:t>
-            </a:r>
-          </a:p>
-          <a:p>
-            <a:endParaRPr lang="en-US" dirty="0"/>
-          </a:p>
-        </p:txBody>
-      </p:sp>
-      <p:sp>
-        <p:nvSpPr>
-          <p:cNvPr id="5" name="TextBox 4">
+              <a:t>Understand where sport performance analytics is applied and how each domain supports real-world decisions.</a:t>
+            </a:r>
+          </a:p>
+        </p:txBody>
+      </p:sp>
+      <p:graphicFrame>
+        <p:nvGraphicFramePr>
+          <p:cNvPr id="4" name="Content Placeholder 2">
             <a:extLst>
               <a:ext uri="{FF2B5EF4-FFF2-40B4-BE49-F238E27FC236}">
-                <a16:creationId xmlns:a16="http://schemas.microsoft.com/office/drawing/2014/main" id="{054ECB83-3DBA-34CE-AFBB-623A4072F058}"/>
+                <a16:creationId xmlns:a16="http://schemas.microsoft.com/office/drawing/2014/main" id="{81DA72B8-9C87-E1AF-B98A-35BB87112E7F}"/>
               </a:ext>
             </a:extLst>
           </p:cNvPr>
-          <p:cNvSpPr txBox="1"/>
-          <p:nvPr/>
-        </p:nvSpPr>
-        <p:spPr>
-          <a:xfrm>
-            <a:off x="2673927" y="5707007"/>
-            <a:ext cx="6844145" cy="369332"/>
-          </a:xfrm>
-          <a:prstGeom prst="rect">
-            <a:avLst/>
-          </a:prstGeom>
-          <a:noFill/>
-        </p:spPr>
-        <p:txBody>
-          <a:bodyPr wrap="square">
-            <a:spAutoFit/>
-          </a:bodyPr>
-          <a:lstStyle/>
-          <a:p>
-            <a:pPr marL="0" indent="0" algn="l">
-              <a:buNone/>
-            </a:pPr>
-            <a:r>
-              <a:rPr lang="en-GB" sz="1800" b="0" i="0" dirty="0">
-                <a:solidFill>
-                  <a:schemeClr val="tx1"/>
-                </a:solidFill>
-                <a:effectLst/>
-                <a:latin typeface="+mn-lt"/>
-              </a:rPr>
-              <a:t>The domains describe </a:t>
-            </a:r>
-            <a:r>
-              <a:rPr lang="en-GB" sz="1800" b="1" i="0" dirty="0">
-                <a:solidFill>
-                  <a:schemeClr val="tx1"/>
-                </a:solidFill>
-                <a:effectLst/>
-                <a:latin typeface="+mn-lt"/>
-              </a:rPr>
-              <a:t>where</a:t>
-            </a:r>
-            <a:r>
-              <a:rPr lang="en-GB" sz="1800" b="0" i="0" dirty="0">
-                <a:solidFill>
-                  <a:schemeClr val="tx1"/>
-                </a:solidFill>
-                <a:effectLst/>
-                <a:latin typeface="+mn-lt"/>
-              </a:rPr>
-              <a:t> and </a:t>
-            </a:r>
-            <a:r>
-              <a:rPr lang="en-GB" sz="1800" b="1" i="0" dirty="0">
-                <a:solidFill>
-                  <a:schemeClr val="tx1"/>
-                </a:solidFill>
-                <a:effectLst/>
-                <a:latin typeface="+mn-lt"/>
-              </a:rPr>
-              <a:t>why</a:t>
-            </a:r>
-            <a:r>
-              <a:rPr lang="en-GB" sz="1800" b="0" i="0" dirty="0">
-                <a:solidFill>
-                  <a:schemeClr val="tx1"/>
-                </a:solidFill>
-                <a:effectLst/>
-                <a:latin typeface="+mn-lt"/>
-              </a:rPr>
-              <a:t> analytics is being used.</a:t>
-            </a:r>
-            <a:endParaRPr lang="en-GB" sz="2250" b="0" i="0" dirty="0">
-              <a:solidFill>
-                <a:srgbClr val="1A292C"/>
-              </a:solidFill>
-              <a:effectLst/>
-              <a:latin typeface="Fira Sans" panose="020B0503050000020004" pitchFamily="34" charset="0"/>
-            </a:endParaRPr>
-          </a:p>
-        </p:txBody>
-      </p:sp>
+          <p:cNvGraphicFramePr>
+            <a:graphicFrameLocks/>
+          </p:cNvGraphicFramePr>
+          <p:nvPr>
+            <p:extLst>
+              <p:ext uri="{D42A27DB-BD31-4B8C-83A1-F6EECF244321}">
+                <p14:modId xmlns:p14="http://schemas.microsoft.com/office/powerpoint/2010/main" val="1750847204"/>
+              </p:ext>
+            </p:extLst>
+          </p:nvPr>
+        </p:nvGraphicFramePr>
+        <p:xfrm>
+          <a:off x="838200" y="2921675"/>
+          <a:ext cx="10927829" cy="3255288"/>
+        </p:xfrm>
+        <a:graphic>
+          <a:graphicData uri="http://schemas.openxmlformats.org/drawingml/2006/diagram">
+            <dgm:relIds xmlns:dgm="http://schemas.openxmlformats.org/drawingml/2006/diagram" xmlns:r="http://schemas.openxmlformats.org/officeDocument/2006/relationships" r:dm="rId2" r:lo="rId3" r:qs="rId4" r:cs="rId5"/>
+          </a:graphicData>
+        </a:graphic>
+      </p:graphicFrame>
     </p:spTree>
     <p:extLst>
       <p:ext uri="{BB962C8B-B14F-4D97-AF65-F5344CB8AC3E}">
-        <p14:creationId xmlns:p14="http://schemas.microsoft.com/office/powerpoint/2010/main" val="2347356229"/>
+        <p14:creationId xmlns:p14="http://schemas.microsoft.com/office/powerpoint/2010/main" val="755555282"/>
+      </p:ext>
+    </p:extLst>
+  </p:cSld>
+  <p:clrMapOvr>
+    <a:masterClrMapping/>
+  </p:clrMapOvr>
+</p:sld>
+</file>
+
+<file path=ppt/slides/slide30.xml><?xml version="1.0" encoding="utf-8"?>
+<p:sld xmlns:a="http://schemas.openxmlformats.org/drawingml/2006/main" xmlns:r="http://schemas.openxmlformats.org/officeDocument/2006/relationships" xmlns:p="http://schemas.openxmlformats.org/presentationml/2006/main" show="0">
+  <p:cSld>
+    <p:spTree>
+      <p:nvGrpSpPr>
+        <p:cNvPr id="1" name=""/>
+        <p:cNvGrpSpPr/>
+        <p:nvPr/>
+      </p:nvGrpSpPr>
+      <p:grpSpPr>
+        <a:xfrm>
+          <a:off x="0" y="0"/>
+          <a:ext cx="0" cy="0"/>
+          <a:chOff x="0" y="0"/>
+          <a:chExt cx="0" cy="0"/>
+        </a:xfrm>
+      </p:grpSpPr>
+      <p:sp>
+        <p:nvSpPr>
+          <p:cNvPr id="2" name="Title 1">
+            <a:extLst>
+              <a:ext uri="{FF2B5EF4-FFF2-40B4-BE49-F238E27FC236}">
+                <a16:creationId xmlns:a16="http://schemas.microsoft.com/office/drawing/2014/main" id="{0BA75FA4-E434-23A9-7B99-775F67F02828}"/>
+              </a:ext>
+            </a:extLst>
+          </p:cNvPr>
+          <p:cNvSpPr>
+            <a:spLocks noGrp="1"/>
+          </p:cNvSpPr>
+          <p:nvPr>
+            <p:ph type="title"/>
+          </p:nvPr>
+        </p:nvSpPr>
+        <p:spPr/>
+        <p:txBody>
+          <a:bodyPr/>
+          <a:lstStyle/>
+          <a:p>
+            <a:r>
+              <a:rPr lang="en-GB" dirty="0"/>
+              <a:t>Analytics Chain Group Activity</a:t>
+            </a:r>
+            <a:endParaRPr lang="en-US" dirty="0"/>
+          </a:p>
+        </p:txBody>
+      </p:sp>
+      <p:sp>
+        <p:nvSpPr>
+          <p:cNvPr id="3" name="Content Placeholder 2">
+            <a:extLst>
+              <a:ext uri="{FF2B5EF4-FFF2-40B4-BE49-F238E27FC236}">
+                <a16:creationId xmlns:a16="http://schemas.microsoft.com/office/drawing/2014/main" id="{AA6FD731-E03D-15A3-6104-3691E3E5E0BE}"/>
+              </a:ext>
+            </a:extLst>
+          </p:cNvPr>
+          <p:cNvSpPr>
+            <a:spLocks noGrp="1"/>
+          </p:cNvSpPr>
+          <p:nvPr>
+            <p:ph idx="1"/>
+          </p:nvPr>
+        </p:nvSpPr>
+        <p:spPr/>
+        <p:txBody>
+          <a:bodyPr/>
+          <a:lstStyle/>
+          <a:p>
+            <a:r>
+              <a:rPr lang="en-GB" dirty="0"/>
+              <a:t>Working with your group, read the assigned scenario and create a four-step analytics chain:</a:t>
+            </a:r>
+          </a:p>
+          <a:p>
+            <a:pPr lvl="1"/>
+            <a:r>
+              <a:rPr lang="en-GB" dirty="0"/>
+              <a:t>Descriptive: State what happened.</a:t>
+            </a:r>
+          </a:p>
+          <a:p>
+            <a:pPr lvl="1"/>
+            <a:r>
+              <a:rPr lang="en-GB" dirty="0"/>
+              <a:t>Diagnostic: Identify the most likely reason it happened.</a:t>
+            </a:r>
+          </a:p>
+          <a:p>
+            <a:pPr lvl="1"/>
+            <a:r>
+              <a:rPr lang="en-GB" dirty="0"/>
+              <a:t>Predictive: Explain what could happen next if nothing changes.</a:t>
+            </a:r>
+          </a:p>
+          <a:p>
+            <a:pPr lvl="1"/>
+            <a:r>
+              <a:rPr lang="en-GB" dirty="0"/>
+              <a:t>Prescriptive: Recommend what the team should do.</a:t>
+            </a:r>
+          </a:p>
+          <a:p>
+            <a:r>
+              <a:rPr lang="en-GB" dirty="0"/>
+              <a:t>Write one clear sentence for each step.</a:t>
+            </a:r>
+          </a:p>
+          <a:p>
+            <a:endParaRPr lang="en-US" dirty="0"/>
+          </a:p>
+        </p:txBody>
+      </p:sp>
+    </p:spTree>
+    <p:extLst>
+      <p:ext uri="{BB962C8B-B14F-4D97-AF65-F5344CB8AC3E}">
+        <p14:creationId xmlns:p14="http://schemas.microsoft.com/office/powerpoint/2010/main" val="3785304175"/>
+      </p:ext>
+    </p:extLst>
+  </p:cSld>
+  <p:clrMapOvr>
+    <a:masterClrMapping/>
+  </p:clrMapOvr>
+</p:sld>
+</file>
+
+<file path=ppt/slides/slide31.xml><?xml version="1.0" encoding="utf-8"?>
+<p:sld xmlns:a="http://schemas.openxmlformats.org/drawingml/2006/main" xmlns:r="http://schemas.openxmlformats.org/officeDocument/2006/relationships" xmlns:p="http://schemas.openxmlformats.org/presentationml/2006/main" show="0">
+  <p:cSld>
+    <p:spTree>
+      <p:nvGrpSpPr>
+        <p:cNvPr id="1" name=""/>
+        <p:cNvGrpSpPr/>
+        <p:nvPr/>
+      </p:nvGrpSpPr>
+      <p:grpSpPr>
+        <a:xfrm>
+          <a:off x="0" y="0"/>
+          <a:ext cx="0" cy="0"/>
+          <a:chOff x="0" y="0"/>
+          <a:chExt cx="0" cy="0"/>
+        </a:xfrm>
+      </p:grpSpPr>
+      <p:sp>
+        <p:nvSpPr>
+          <p:cNvPr id="2" name="Title 1">
+            <a:extLst>
+              <a:ext uri="{FF2B5EF4-FFF2-40B4-BE49-F238E27FC236}">
+                <a16:creationId xmlns:a16="http://schemas.microsoft.com/office/drawing/2014/main" id="{403F4149-77C5-51D6-6364-A5DC1666CA69}"/>
+              </a:ext>
+            </a:extLst>
+          </p:cNvPr>
+          <p:cNvSpPr>
+            <a:spLocks noGrp="1"/>
+          </p:cNvSpPr>
+          <p:nvPr>
+            <p:ph type="title"/>
+          </p:nvPr>
+        </p:nvSpPr>
+        <p:spPr/>
+        <p:txBody>
+          <a:bodyPr/>
+          <a:lstStyle/>
+          <a:p>
+            <a:r>
+              <a:rPr lang="en-US" dirty="0"/>
+              <a:t>Example </a:t>
+            </a:r>
+          </a:p>
+        </p:txBody>
+      </p:sp>
+      <p:sp>
+        <p:nvSpPr>
+          <p:cNvPr id="3" name="Content Placeholder 2">
+            <a:extLst>
+              <a:ext uri="{FF2B5EF4-FFF2-40B4-BE49-F238E27FC236}">
+                <a16:creationId xmlns:a16="http://schemas.microsoft.com/office/drawing/2014/main" id="{F4AC8398-083C-ED0D-65C7-FA16DBE6BCED}"/>
+              </a:ext>
+            </a:extLst>
+          </p:cNvPr>
+          <p:cNvSpPr>
+            <a:spLocks noGrp="1"/>
+          </p:cNvSpPr>
+          <p:nvPr>
+            <p:ph idx="1"/>
+          </p:nvPr>
+        </p:nvSpPr>
+        <p:spPr/>
+        <p:txBody>
+          <a:bodyPr/>
+          <a:lstStyle/>
+          <a:p>
+            <a:r>
+              <a:rPr lang="en-GB" b="1" dirty="0"/>
+              <a:t>Domain:</a:t>
+            </a:r>
+            <a:r>
+              <a:rPr lang="en-GB" dirty="0"/>
+              <a:t> Athlete monitoring</a:t>
+            </a:r>
+          </a:p>
+          <a:p>
+            <a:r>
+              <a:rPr lang="en-GB" b="1" dirty="0"/>
+              <a:t>Decision:</a:t>
+            </a:r>
+            <a:r>
+              <a:rPr lang="en-GB" dirty="0"/>
+              <a:t> Should a player’s training load be reduced today?</a:t>
+            </a:r>
+          </a:p>
+          <a:p>
+            <a:pPr lvl="1"/>
+            <a:r>
+              <a:rPr lang="en-GB" b="1" dirty="0"/>
+              <a:t>Descriptive:</a:t>
+            </a:r>
+            <a:r>
+              <a:rPr lang="en-GB" dirty="0"/>
+              <a:t> The player completed substantially more high-intensity work than usual during the previous three days. </a:t>
+            </a:r>
+          </a:p>
+          <a:p>
+            <a:pPr lvl="1"/>
+            <a:r>
+              <a:rPr lang="en-GB" b="1" dirty="0"/>
+              <a:t>Diagnostic:</a:t>
+            </a:r>
+            <a:r>
+              <a:rPr lang="en-GB" dirty="0"/>
+              <a:t> The increase resulted from additional drill repetitions and reduced recovery time. </a:t>
+            </a:r>
+          </a:p>
+          <a:p>
+            <a:pPr lvl="1"/>
+            <a:r>
+              <a:rPr lang="en-GB" b="1" dirty="0"/>
+              <a:t>Predictive:</a:t>
+            </a:r>
+            <a:r>
+              <a:rPr lang="en-GB" dirty="0"/>
+              <a:t> Maintaining the planned load may increase the probability of poor performance or incomplete recovery tomorrow. </a:t>
+            </a:r>
+          </a:p>
+          <a:p>
+            <a:pPr lvl="1"/>
+            <a:r>
+              <a:rPr lang="en-GB" b="1" dirty="0"/>
+              <a:t>Prescriptive:</a:t>
+            </a:r>
+            <a:r>
+              <a:rPr lang="en-GB" dirty="0"/>
+              <a:t> Reduce today’s high-intensity volume while maintaining lower-intensity tactical participation.</a:t>
+            </a:r>
+          </a:p>
+          <a:p>
+            <a:endParaRPr lang="en-US" dirty="0"/>
+          </a:p>
+        </p:txBody>
+      </p:sp>
+    </p:spTree>
+    <p:extLst>
+      <p:ext uri="{BB962C8B-B14F-4D97-AF65-F5344CB8AC3E}">
+        <p14:creationId xmlns:p14="http://schemas.microsoft.com/office/powerpoint/2010/main" val="1069047801"/>
+      </p:ext>
+    </p:extLst>
+  </p:cSld>
+  <p:clrMapOvr>
+    <a:masterClrMapping/>
+  </p:clrMapOvr>
+</p:sld>
+</file>
+
+<file path=ppt/slides/slide32.xml><?xml version="1.0" encoding="utf-8"?>
+<p:sld xmlns:a="http://schemas.openxmlformats.org/drawingml/2006/main" xmlns:r="http://schemas.openxmlformats.org/officeDocument/2006/relationships" xmlns:p="http://schemas.openxmlformats.org/presentationml/2006/main" show="0">
+  <p:cSld>
+    <p:spTree>
+      <p:nvGrpSpPr>
+        <p:cNvPr id="1" name=""/>
+        <p:cNvGrpSpPr/>
+        <p:nvPr/>
+      </p:nvGrpSpPr>
+      <p:grpSpPr>
+        <a:xfrm>
+          <a:off x="0" y="0"/>
+          <a:ext cx="0" cy="0"/>
+          <a:chOff x="0" y="0"/>
+          <a:chExt cx="0" cy="0"/>
+        </a:xfrm>
+      </p:grpSpPr>
+      <p:sp>
+        <p:nvSpPr>
+          <p:cNvPr id="2" name="Title 1">
+            <a:extLst>
+              <a:ext uri="{FF2B5EF4-FFF2-40B4-BE49-F238E27FC236}">
+                <a16:creationId xmlns:a16="http://schemas.microsoft.com/office/drawing/2014/main" id="{6CE6F538-931D-AD45-9EA7-DADA26B90B42}"/>
+              </a:ext>
+            </a:extLst>
+          </p:cNvPr>
+          <p:cNvSpPr>
+            <a:spLocks noGrp="1"/>
+          </p:cNvSpPr>
+          <p:nvPr>
+            <p:ph type="title"/>
+          </p:nvPr>
+        </p:nvSpPr>
+        <p:spPr/>
+        <p:txBody>
+          <a:bodyPr>
+            <a:noAutofit/>
+          </a:bodyPr>
+          <a:lstStyle/>
+          <a:p>
+            <a:r>
+              <a:rPr lang="en-GB" sz="3600" dirty="0"/>
+              <a:t>A basketball team has lost four of its last five games.</a:t>
+            </a:r>
+            <a:endParaRPr lang="en-US" sz="3600" dirty="0"/>
+          </a:p>
+        </p:txBody>
+      </p:sp>
+      <p:sp>
+        <p:nvSpPr>
+          <p:cNvPr id="3" name="Content Placeholder 2">
+            <a:extLst>
+              <a:ext uri="{FF2B5EF4-FFF2-40B4-BE49-F238E27FC236}">
+                <a16:creationId xmlns:a16="http://schemas.microsoft.com/office/drawing/2014/main" id="{8B9E355C-4F74-80F1-6425-3FB7EAE6B2E6}"/>
+              </a:ext>
+            </a:extLst>
+          </p:cNvPr>
+          <p:cNvSpPr>
+            <a:spLocks noGrp="1"/>
+          </p:cNvSpPr>
+          <p:nvPr>
+            <p:ph idx="1"/>
+          </p:nvPr>
+        </p:nvSpPr>
+        <p:spPr/>
+        <p:txBody>
+          <a:bodyPr/>
+          <a:lstStyle/>
+          <a:p>
+            <a:pPr marL="0" indent="0" algn="ctr">
+              <a:buNone/>
+            </a:pPr>
+            <a:r>
+              <a:rPr lang="en-US" dirty="0"/>
+              <a:t>Coach asks, “what is going on??”. How do we tackle this as the analyst?</a:t>
+            </a:r>
+          </a:p>
+        </p:txBody>
+      </p:sp>
+    </p:spTree>
+    <p:extLst>
+      <p:ext uri="{BB962C8B-B14F-4D97-AF65-F5344CB8AC3E}">
+        <p14:creationId xmlns:p14="http://schemas.microsoft.com/office/powerpoint/2010/main" val="425644854"/>
+      </p:ext>
+    </p:extLst>
+  </p:cSld>
+  <p:clrMapOvr>
+    <a:masterClrMapping/>
+  </p:clrMapOvr>
+</p:sld>
+</file>
+
+<file path=ppt/slides/slide33.xml><?xml version="1.0" encoding="utf-8"?>
+<p:sld xmlns:a="http://schemas.openxmlformats.org/drawingml/2006/main" xmlns:r="http://schemas.openxmlformats.org/officeDocument/2006/relationships" xmlns:p="http://schemas.openxmlformats.org/presentationml/2006/main" show="0">
+  <p:cSld>
+    <p:spTree>
+      <p:nvGrpSpPr>
+        <p:cNvPr id="1" name="">
+          <a:extLst>
+            <a:ext uri="{FF2B5EF4-FFF2-40B4-BE49-F238E27FC236}">
+              <a16:creationId xmlns:a16="http://schemas.microsoft.com/office/drawing/2014/main" id="{40AF3649-84EF-73B3-DB78-3A8C58E5C26C}"/>
+            </a:ext>
+          </a:extLst>
+        </p:cNvPr>
+        <p:cNvGrpSpPr/>
+        <p:nvPr/>
+      </p:nvGrpSpPr>
+      <p:grpSpPr>
+        <a:xfrm>
+          <a:off x="0" y="0"/>
+          <a:ext cx="0" cy="0"/>
+          <a:chOff x="0" y="0"/>
+          <a:chExt cx="0" cy="0"/>
+        </a:xfrm>
+      </p:grpSpPr>
+      <p:sp>
+        <p:nvSpPr>
+          <p:cNvPr id="2" name="Title 1">
+            <a:extLst>
+              <a:ext uri="{FF2B5EF4-FFF2-40B4-BE49-F238E27FC236}">
+                <a16:creationId xmlns:a16="http://schemas.microsoft.com/office/drawing/2014/main" id="{14013837-791B-5F03-753D-2E5EA52C17EF}"/>
+              </a:ext>
+            </a:extLst>
+          </p:cNvPr>
+          <p:cNvSpPr>
+            <a:spLocks noGrp="1"/>
+          </p:cNvSpPr>
+          <p:nvPr>
+            <p:ph type="title"/>
+          </p:nvPr>
+        </p:nvSpPr>
+        <p:spPr/>
+        <p:txBody>
+          <a:bodyPr/>
+          <a:lstStyle/>
+          <a:p>
+            <a:r>
+              <a:rPr lang="en-US" dirty="0"/>
+              <a:t>Scenarios </a:t>
+            </a:r>
+          </a:p>
+        </p:txBody>
+      </p:sp>
+      <p:sp>
+        <p:nvSpPr>
+          <p:cNvPr id="3" name="Content Placeholder 2">
+            <a:extLst>
+              <a:ext uri="{FF2B5EF4-FFF2-40B4-BE49-F238E27FC236}">
+                <a16:creationId xmlns:a16="http://schemas.microsoft.com/office/drawing/2014/main" id="{B4D682D1-FE5C-EC9F-1DA5-C852D5D53B85}"/>
+              </a:ext>
+            </a:extLst>
+          </p:cNvPr>
+          <p:cNvSpPr>
+            <a:spLocks noGrp="1"/>
+          </p:cNvSpPr>
+          <p:nvPr>
+            <p:ph idx="1"/>
+          </p:nvPr>
+        </p:nvSpPr>
+        <p:spPr/>
+        <p:txBody>
+          <a:bodyPr>
+            <a:normAutofit fontScale="92500" lnSpcReduction="10000"/>
+          </a:bodyPr>
+          <a:lstStyle/>
+          <a:p>
+            <a:r>
+              <a:rPr lang="en-GB" dirty="0"/>
+              <a:t>A basketball player completed considerably more high-intensity work than usual during the previous three days. The coaching staff added extra drill repetitions and shortened the recovery periods between drills. The player has an important game tomorrow.</a:t>
+            </a:r>
+          </a:p>
+          <a:p>
+            <a:r>
+              <a:rPr lang="en-GB" dirty="0"/>
+              <a:t>A basketball prospect scores 22 points per game, but most of those points come against weaker opponents. Against highly ranked teams, the player’s scoring efficiency and assists decrease while turnovers increase. Your team is deciding whether to select the player in the first round of the draft.</a:t>
+            </a:r>
+          </a:p>
+          <a:p>
+            <a:r>
+              <a:rPr lang="en-GB" dirty="0"/>
+              <a:t>A soccer team has allowed five goals during its last four matches. Four of the goals occurred after the team lost possession while its fullbacks were positioned high up the field. The team is preparing to play an opponent with fast attacking players.</a:t>
+            </a:r>
+            <a:endParaRPr lang="en-US" dirty="0"/>
+          </a:p>
+        </p:txBody>
+      </p:sp>
+    </p:spTree>
+    <p:extLst>
+      <p:ext uri="{BB962C8B-B14F-4D97-AF65-F5344CB8AC3E}">
+        <p14:creationId xmlns:p14="http://schemas.microsoft.com/office/powerpoint/2010/main" val="2264337334"/>
       </p:ext>
     </p:extLst>
   </p:cSld>
@@ -15062,7 +16257,7 @@
           <p:cNvPr id="2" name="Title 1">
             <a:extLst>
               <a:ext uri="{FF2B5EF4-FFF2-40B4-BE49-F238E27FC236}">
-                <a16:creationId xmlns:a16="http://schemas.microsoft.com/office/drawing/2014/main" id="{E6104B99-C0BE-C514-46EC-CAE531CB329A}"/>
+                <a16:creationId xmlns:a16="http://schemas.microsoft.com/office/drawing/2014/main" id="{4EA8DFB2-CE6D-8D09-7A4F-E5EAB91230AC}"/>
               </a:ext>
             </a:extLst>
           </p:cNvPr>
@@ -15076,13 +16271,13 @@
         <p:spPr/>
         <p:txBody>
           <a:bodyPr>
-            <a:normAutofit/>
+            <a:normAutofit fontScale="90000"/>
           </a:bodyPr>
           <a:lstStyle/>
           <a:p>
             <a:r>
               <a:rPr lang="en-GB" dirty="0"/>
-              <a:t>A Domain Begins With a Decision</a:t>
+              <a:t>Domains and the Different Decision Environments</a:t>
             </a:r>
             <a:endParaRPr lang="en-US" dirty="0"/>
           </a:p>
@@ -15093,7 +16288,7 @@
           <p:cNvPr id="3" name="Content Placeholder 2">
             <a:extLst>
               <a:ext uri="{FF2B5EF4-FFF2-40B4-BE49-F238E27FC236}">
-                <a16:creationId xmlns:a16="http://schemas.microsoft.com/office/drawing/2014/main" id="{35EC063E-392D-93CE-404B-5B2C5A5F6B12}"/>
+                <a16:creationId xmlns:a16="http://schemas.microsoft.com/office/drawing/2014/main" id="{EAD64D41-7567-2E1C-0750-CDA1D99E6696}"/>
               </a:ext>
             </a:extLst>
           </p:cNvPr>
@@ -15109,107 +16304,117 @@
           <a:bodyPr/>
           <a:lstStyle/>
           <a:p>
+            <a:pPr lvl="0"/>
+            <a:r>
+              <a:rPr lang="en-GB" b="1" dirty="0"/>
+              <a:t>Scouting and Talent Evaluation</a:t>
+            </a:r>
+            <a:endParaRPr lang="en-GB" dirty="0"/>
+          </a:p>
+          <a:p>
+            <a:pPr lvl="1"/>
             <a:r>
               <a:rPr lang="en-GB" dirty="0"/>
-              <a:t>For any sport analytics problem, ask:</a:t>
-            </a:r>
+              <a:t>Evaluating athletes, projecting future performance, and informing recruitment.</a:t>
+            </a:r>
+          </a:p>
+          <a:p>
+            <a:pPr lvl="0"/>
+            <a:r>
+              <a:rPr lang="en-GB" b="1" dirty="0"/>
+              <a:t>Athlete Tracking and Monitoring</a:t>
+            </a:r>
+            <a:endParaRPr lang="en-GB" dirty="0"/>
           </a:p>
           <a:p>
             <a:pPr lvl="1"/>
             <a:r>
+              <a:rPr lang="en-GB" dirty="0"/>
+              <a:t>Understanding training, competition demands, and athlete responses over time.</a:t>
+            </a:r>
+          </a:p>
+          <a:p>
+            <a:pPr lvl="0"/>
+            <a:r>
               <a:rPr lang="en-GB" b="1" dirty="0"/>
-              <a:t>Who</a:t>
-            </a:r>
+              <a:t>Strategy and Tactical Analysis</a:t>
+            </a:r>
+            <a:endParaRPr lang="en-GB" dirty="0"/>
+          </a:p>
+          <a:p>
+            <a:pPr lvl="1"/>
             <a:r>
               <a:rPr lang="en-GB" dirty="0"/>
-              <a:t> will use the analysis?</a:t>
-            </a:r>
-          </a:p>
-          <a:p>
-            <a:pPr lvl="1"/>
+              <a:t>Understanding how games unfold and supporting decisions about how to compete.</a:t>
+            </a:r>
+          </a:p>
+          <a:p>
+            <a:endParaRPr lang="en-US" dirty="0"/>
+          </a:p>
+        </p:txBody>
+      </p:sp>
+      <p:sp>
+        <p:nvSpPr>
+          <p:cNvPr id="5" name="TextBox 4">
+            <a:extLst>
+              <a:ext uri="{FF2B5EF4-FFF2-40B4-BE49-F238E27FC236}">
+                <a16:creationId xmlns:a16="http://schemas.microsoft.com/office/drawing/2014/main" id="{054ECB83-3DBA-34CE-AFBB-623A4072F058}"/>
+              </a:ext>
+            </a:extLst>
+          </p:cNvPr>
+          <p:cNvSpPr txBox="1"/>
+          <p:nvPr/>
+        </p:nvSpPr>
+        <p:spPr>
+          <a:xfrm>
+            <a:off x="1600200" y="5707007"/>
+            <a:ext cx="8991600" cy="369332"/>
+          </a:xfrm>
+          <a:prstGeom prst="rect">
+            <a:avLst/>
+          </a:prstGeom>
+          <a:noFill/>
+        </p:spPr>
+        <p:txBody>
+          <a:bodyPr wrap="square">
+            <a:spAutoFit/>
+          </a:bodyPr>
+          <a:lstStyle/>
+          <a:p>
             <a:r>
               <a:rPr lang="en-GB" dirty="0"/>
-              <a:t>What</a:t>
+              <a:t>The domains describe </a:t>
             </a:r>
             <a:r>
               <a:rPr lang="en-GB" b="1" dirty="0"/>
-              <a:t> decision</a:t>
+              <a:t>where</a:t>
             </a:r>
             <a:r>
               <a:rPr lang="en-GB" dirty="0"/>
-              <a:t> are they trying to make?</a:t>
-            </a:r>
-          </a:p>
-          <a:p>
-            <a:pPr lvl="1"/>
+              <a:t> analytics is applied and </a:t>
+            </a:r>
+            <a:r>
+              <a:rPr lang="en-GB" b="1" dirty="0"/>
+              <a:t>which decisions </a:t>
+            </a:r>
             <a:r>
               <a:rPr lang="en-GB" dirty="0"/>
-              <a:t>What</a:t>
-            </a:r>
-            <a:r>
-              <a:rPr lang="en-GB" b="1" dirty="0"/>
-              <a:t> information</a:t>
-            </a:r>
-            <a:r>
-              <a:rPr lang="en-GB" dirty="0"/>
-              <a:t> could improve that </a:t>
-            </a:r>
-            <a:r>
-              <a:rPr lang="en-GB" b="1" dirty="0"/>
-              <a:t>decision</a:t>
-            </a:r>
-            <a:r>
-              <a:rPr lang="en-GB" dirty="0"/>
-              <a:t>?</a:t>
-            </a:r>
-          </a:p>
-          <a:p>
-            <a:pPr lvl="1"/>
-            <a:r>
-              <a:rPr lang="en-GB" dirty="0"/>
-              <a:t>What</a:t>
-            </a:r>
-            <a:r>
-              <a:rPr lang="en-GB" b="1" dirty="0"/>
-              <a:t> data</a:t>
-            </a:r>
-            <a:r>
-              <a:rPr lang="en-GB" dirty="0"/>
-              <a:t> might provide that </a:t>
-            </a:r>
-            <a:r>
-              <a:rPr lang="en-GB" b="1" dirty="0"/>
-              <a:t>information</a:t>
-            </a:r>
-            <a:r>
-              <a:rPr lang="en-GB" dirty="0"/>
-              <a:t>?</a:t>
-            </a:r>
-          </a:p>
-          <a:p>
-            <a:pPr lvl="1"/>
-            <a:r>
-              <a:rPr lang="en-GB" dirty="0"/>
-              <a:t>What are the</a:t>
-            </a:r>
-            <a:r>
-              <a:rPr lang="en-GB" b="1" dirty="0"/>
-              <a:t> consequences</a:t>
-            </a:r>
-            <a:r>
-              <a:rPr lang="en-GB" dirty="0"/>
-              <a:t> of being wrong?</a:t>
-            </a:r>
-          </a:p>
-          <a:p>
-            <a:endParaRPr lang="en-US" dirty="0"/>
+              <a:t>it supports.</a:t>
+            </a:r>
+            <a:endParaRPr lang="en-GB" sz="2250" b="0" i="0" dirty="0">
+              <a:solidFill>
+                <a:srgbClr val="1A292C"/>
+              </a:solidFill>
+              <a:effectLst/>
+              <a:latin typeface="Fira Sans" panose="020B0503050000020004" pitchFamily="34" charset="0"/>
+            </a:endParaRPr>
           </a:p>
         </p:txBody>
       </p:sp>
     </p:spTree>
     <p:extLst>
       <p:ext uri="{BB962C8B-B14F-4D97-AF65-F5344CB8AC3E}">
-        <p14:creationId xmlns:p14="http://schemas.microsoft.com/office/powerpoint/2010/main" val="2477808522"/>
+        <p14:creationId xmlns:p14="http://schemas.microsoft.com/office/powerpoint/2010/main" val="2347356229"/>
       </p:ext>
     </p:extLst>
   </p:cSld>
@@ -15241,7 +16446,7 @@
           <p:cNvPr id="2" name="Title 1">
             <a:extLst>
               <a:ext uri="{FF2B5EF4-FFF2-40B4-BE49-F238E27FC236}">
-                <a16:creationId xmlns:a16="http://schemas.microsoft.com/office/drawing/2014/main" id="{4FB54136-6AB5-567E-BCA2-30F498FB6009}"/>
+                <a16:creationId xmlns:a16="http://schemas.microsoft.com/office/drawing/2014/main" id="{E6104B99-C0BE-C514-46EC-CAE531CB329A}"/>
               </a:ext>
             </a:extLst>
           </p:cNvPr>
@@ -15261,7 +16466,7 @@
           <a:p>
             <a:r>
               <a:rPr lang="en-GB" dirty="0"/>
-              <a:t>Domain 1: Scouting &amp; Talent Evaluation</a:t>
+              <a:t>Sport Analytics Begins With a Decision</a:t>
             </a:r>
             <a:endParaRPr lang="en-US" dirty="0"/>
           </a:p>
@@ -15272,7 +16477,7 @@
           <p:cNvPr id="3" name="Content Placeholder 2">
             <a:extLst>
               <a:ext uri="{FF2B5EF4-FFF2-40B4-BE49-F238E27FC236}">
-                <a16:creationId xmlns:a16="http://schemas.microsoft.com/office/drawing/2014/main" id="{363BB0BD-3051-24B4-5424-4207D8E4259C}"/>
+                <a16:creationId xmlns:a16="http://schemas.microsoft.com/office/drawing/2014/main" id="{35EC063E-392D-93CE-404B-5B2C5A5F6B12}"/>
               </a:ext>
             </a:extLst>
           </p:cNvPr>
@@ -15290,203 +16495,70 @@
           </a:bodyPr>
           <a:lstStyle/>
           <a:p>
-            <a:pPr lvl="0"/>
+            <a:pPr marL="0" indent="0">
+              <a:buNone/>
+            </a:pPr>
             <a:r>
               <a:rPr lang="en-GB" dirty="0"/>
-              <a:t>Evaluate current ability, understand development, and estimate future fit or performance.</a:t>
-            </a:r>
-          </a:p>
-          <a:p>
-            <a:pPr lvl="0"/>
-            <a:endParaRPr lang="en-GB" dirty="0"/>
-          </a:p>
-        </p:txBody>
-      </p:sp>
-      <p:sp>
-        <p:nvSpPr>
-          <p:cNvPr id="4" name="Rounded Rectangle 3">
-            <a:extLst>
-              <a:ext uri="{FF2B5EF4-FFF2-40B4-BE49-F238E27FC236}">
-                <a16:creationId xmlns:a16="http://schemas.microsoft.com/office/drawing/2014/main" id="{76E16221-1AC7-206D-F7E7-4283DB69983B}"/>
-              </a:ext>
-            </a:extLst>
-          </p:cNvPr>
-          <p:cNvSpPr/>
-          <p:nvPr/>
-        </p:nvSpPr>
-        <p:spPr>
-          <a:xfrm>
-            <a:off x="838200" y="2618509"/>
-            <a:ext cx="4828309" cy="3186546"/>
-          </a:xfrm>
-          <a:prstGeom prst="roundRect">
-            <a:avLst/>
-          </a:prstGeom>
-        </p:spPr>
-        <p:style>
-          <a:lnRef idx="1">
-            <a:schemeClr val="accent1"/>
-          </a:lnRef>
-          <a:fillRef idx="2">
-            <a:schemeClr val="accent1"/>
-          </a:fillRef>
-          <a:effectRef idx="1">
-            <a:schemeClr val="accent1"/>
-          </a:effectRef>
-          <a:fontRef idx="minor">
-            <a:schemeClr val="dk1"/>
-          </a:fontRef>
-        </p:style>
-        <p:txBody>
-          <a:bodyPr rtlCol="0" anchor="ctr"/>
-          <a:lstStyle/>
-          <a:p>
-            <a:r>
-              <a:rPr lang="en-GB" sz="2400" b="1" dirty="0"/>
-              <a:t>Common information</a:t>
-            </a:r>
-            <a:endParaRPr lang="en-GB" sz="2400" dirty="0"/>
-          </a:p>
-          <a:p>
-            <a:pPr marL="342900" indent="-342900">
-              <a:buFont typeface="Arial" panose="020B0604020202020204" pitchFamily="34" charset="0"/>
-              <a:buChar char="•"/>
+              <a:t>For any sport analytics problem, ask:</a:t>
+            </a:r>
+          </a:p>
+          <a:p>
+            <a:pPr marL="971550" lvl="1" indent="-514350">
+              <a:buFont typeface="+mj-lt"/>
+              <a:buAutoNum type="arabicPeriod"/>
             </a:pPr>
             <a:r>
-              <a:rPr lang="en-GB" sz="2400" dirty="0"/>
-              <a:t>Performance history</a:t>
-            </a:r>
-          </a:p>
-          <a:p>
-            <a:pPr marL="342900" indent="-342900">
-              <a:buFont typeface="Arial" panose="020B0604020202020204" pitchFamily="34" charset="0"/>
-              <a:buChar char="•"/>
+              <a:rPr lang="en-GB" dirty="0"/>
+              <a:t>Who will use the analysis? </a:t>
+            </a:r>
+          </a:p>
+          <a:p>
+            <a:pPr marL="971550" lvl="1" indent="-514350">
+              <a:buFont typeface="+mj-lt"/>
+              <a:buAutoNum type="arabicPeriod"/>
             </a:pPr>
             <a:r>
-              <a:rPr lang="en-GB" sz="2400" dirty="0"/>
-              <a:t>Physical and technical profile</a:t>
-            </a:r>
-          </a:p>
-          <a:p>
-            <a:pPr marL="342900" indent="-342900">
-              <a:buFont typeface="Arial" panose="020B0604020202020204" pitchFamily="34" charset="0"/>
-              <a:buChar char="•"/>
+              <a:rPr lang="en-GB" dirty="0"/>
+              <a:t>What decision are they trying to make? </a:t>
+            </a:r>
+          </a:p>
+          <a:p>
+            <a:pPr marL="971550" lvl="1" indent="-514350">
+              <a:buFont typeface="+mj-lt"/>
+              <a:buAutoNum type="arabicPeriod"/>
             </a:pPr>
             <a:r>
-              <a:rPr lang="en-GB" sz="2400" dirty="0"/>
-              <a:t>Competition context</a:t>
-            </a:r>
-          </a:p>
-          <a:p>
-            <a:pPr marL="342900" indent="-342900">
-              <a:buFont typeface="Arial" panose="020B0604020202020204" pitchFamily="34" charset="0"/>
-              <a:buChar char="•"/>
+              <a:rPr lang="en-GB" dirty="0"/>
+              <a:t>What information could improve that decision? </a:t>
+            </a:r>
+          </a:p>
+          <a:p>
+            <a:pPr marL="971550" lvl="1" indent="-514350">
+              <a:buFont typeface="+mj-lt"/>
+              <a:buAutoNum type="arabicPeriod"/>
             </a:pPr>
             <a:r>
-              <a:rPr lang="en-GB" sz="2400" dirty="0"/>
-              <a:t>Age and development trajectory</a:t>
-            </a:r>
-          </a:p>
-          <a:p>
-            <a:pPr algn="ctr"/>
-            <a:endParaRPr lang="en-US" sz="2400" dirty="0"/>
-          </a:p>
-        </p:txBody>
-      </p:sp>
-      <p:sp>
-        <p:nvSpPr>
-          <p:cNvPr id="5" name="Rounded Rectangle 4">
-            <a:extLst>
-              <a:ext uri="{FF2B5EF4-FFF2-40B4-BE49-F238E27FC236}">
-                <a16:creationId xmlns:a16="http://schemas.microsoft.com/office/drawing/2014/main" id="{51598009-99A9-1900-5EDE-D2E3B9B9F140}"/>
-              </a:ext>
-            </a:extLst>
-          </p:cNvPr>
-          <p:cNvSpPr/>
-          <p:nvPr/>
-        </p:nvSpPr>
-        <p:spPr>
-          <a:xfrm>
-            <a:off x="6525491" y="2618509"/>
-            <a:ext cx="4828309" cy="3186546"/>
-          </a:xfrm>
-          <a:prstGeom prst="roundRect">
-            <a:avLst/>
-          </a:prstGeom>
-        </p:spPr>
-        <p:style>
-          <a:lnRef idx="1">
-            <a:schemeClr val="accent1"/>
-          </a:lnRef>
-          <a:fillRef idx="2">
-            <a:schemeClr val="accent1"/>
-          </a:fillRef>
-          <a:effectRef idx="1">
-            <a:schemeClr val="accent1"/>
-          </a:effectRef>
-          <a:fontRef idx="minor">
-            <a:schemeClr val="dk1"/>
-          </a:fontRef>
-        </p:style>
-        <p:txBody>
-          <a:bodyPr rtlCol="0" anchor="ctr"/>
-          <a:lstStyle/>
-          <a:p>
-            <a:r>
-              <a:rPr lang="en-GB" sz="2400" b="1" dirty="0"/>
-              <a:t>Common decisions</a:t>
-            </a:r>
-          </a:p>
-          <a:p>
-            <a:pPr marL="342900" indent="-342900">
-              <a:buFont typeface="Arial" panose="020B0604020202020204" pitchFamily="34" charset="0"/>
-              <a:buChar char="•"/>
+              <a:rPr lang="en-GB" dirty="0"/>
+              <a:t>What are the consequences of being wrong? </a:t>
+            </a:r>
+          </a:p>
+          <a:p>
+            <a:pPr marL="971550" lvl="1" indent="-514350">
+              <a:buFont typeface="+mj-lt"/>
+              <a:buAutoNum type="arabicPeriod"/>
             </a:pPr>
             <a:r>
-              <a:rPr lang="en-GB" sz="2400" dirty="0"/>
-              <a:t>Recruit or draft an athlete</a:t>
-            </a:r>
-          </a:p>
-          <a:p>
-            <a:pPr marL="342900" indent="-342900">
-              <a:buFont typeface="Arial" panose="020B0604020202020204" pitchFamily="34" charset="0"/>
-              <a:buChar char="•"/>
-            </a:pPr>
-            <a:r>
-              <a:rPr lang="en-GB" sz="2400" dirty="0"/>
-              <a:t>Compare potential targets</a:t>
-            </a:r>
-          </a:p>
-          <a:p>
-            <a:pPr marL="342900" indent="-342900">
-              <a:buFont typeface="Arial" panose="020B0604020202020204" pitchFamily="34" charset="0"/>
-              <a:buChar char="•"/>
-            </a:pPr>
-            <a:r>
-              <a:rPr lang="en-GB" sz="2400" dirty="0"/>
-              <a:t>Identify development priorities</a:t>
-            </a:r>
-          </a:p>
-          <a:p>
-            <a:pPr marL="342900" indent="-342900">
-              <a:buFont typeface="Arial" panose="020B0604020202020204" pitchFamily="34" charset="0"/>
-              <a:buChar char="•"/>
-            </a:pPr>
-            <a:r>
-              <a:rPr lang="en-GB" sz="2400" dirty="0"/>
-              <a:t>Build or balance a roster</a:t>
-            </a:r>
-          </a:p>
-          <a:p>
-            <a:pPr algn="ctr"/>
-            <a:endParaRPr lang="en-US" sz="2400" b="1" dirty="0"/>
+              <a:rPr lang="en-GB" dirty="0"/>
+              <a:t>What data might provide that information?</a:t>
+            </a:r>
           </a:p>
         </p:txBody>
       </p:sp>
     </p:spTree>
     <p:extLst>
       <p:ext uri="{BB962C8B-B14F-4D97-AF65-F5344CB8AC3E}">
-        <p14:creationId xmlns:p14="http://schemas.microsoft.com/office/powerpoint/2010/main" val="2069912289"/>
+        <p14:creationId xmlns:p14="http://schemas.microsoft.com/office/powerpoint/2010/main" val="2477808522"/>
       </p:ext>
     </p:extLst>
   </p:cSld>
@@ -15518,7 +16590,7 @@
           <p:cNvPr id="2" name="Title 1">
             <a:extLst>
               <a:ext uri="{FF2B5EF4-FFF2-40B4-BE49-F238E27FC236}">
-                <a16:creationId xmlns:a16="http://schemas.microsoft.com/office/drawing/2014/main" id="{A48AAF79-5196-4304-D2BA-8C5841BFF09C}"/>
+                <a16:creationId xmlns:a16="http://schemas.microsoft.com/office/drawing/2014/main" id="{4FB54136-6AB5-567E-BCA2-30F498FB6009}"/>
               </a:ext>
             </a:extLst>
           </p:cNvPr>
@@ -15538,7 +16610,7 @@
           <a:p>
             <a:r>
               <a:rPr lang="en-GB" dirty="0"/>
-              <a:t>Evaluation Depends on the Reference Point</a:t>
+              <a:t>Domain 1: Scouting &amp; Talent Evaluation</a:t>
             </a:r>
             <a:endParaRPr lang="en-US" dirty="0"/>
           </a:p>
@@ -15549,7 +16621,7 @@
           <p:cNvPr id="3" name="Content Placeholder 2">
             <a:extLst>
               <a:ext uri="{FF2B5EF4-FFF2-40B4-BE49-F238E27FC236}">
-                <a16:creationId xmlns:a16="http://schemas.microsoft.com/office/drawing/2014/main" id="{A3888892-CBFC-012B-DD3C-CB4D5B9251CB}"/>
+                <a16:creationId xmlns:a16="http://schemas.microsoft.com/office/drawing/2014/main" id="{363BB0BD-3051-24B4-5424-4207D8E4259C}"/>
               </a:ext>
             </a:extLst>
           </p:cNvPr>
@@ -15562,109 +16634,215 @@
         </p:nvSpPr>
         <p:spPr/>
         <p:txBody>
-          <a:bodyPr/>
+          <a:bodyPr>
+            <a:normAutofit/>
+          </a:bodyPr>
           <a:lstStyle/>
           <a:p>
-            <a:pPr marL="0" indent="0">
-              <a:buNone/>
-            </a:pPr>
+            <a:pPr lvl="0"/>
             <a:r>
               <a:rPr lang="en-GB" dirty="0"/>
-              <a:t>Consider the claim: “This athlete is an excellent shooter.”</a:t>
-            </a:r>
-          </a:p>
-          <a:p>
-            <a:r>
-              <a:rPr lang="en-GB" dirty="0"/>
-              <a:t>Excellent compared with what?</a:t>
-            </a:r>
-          </a:p>
-          <a:p>
-            <a:pPr lvl="1"/>
-            <a:r>
-              <a:rPr lang="en-GB" dirty="0"/>
-              <a:t>Teammates?</a:t>
-            </a:r>
-          </a:p>
-          <a:p>
-            <a:pPr lvl="1"/>
-            <a:r>
-              <a:rPr lang="en-GB" dirty="0"/>
-              <a:t>Athletes at the same position?</a:t>
-            </a:r>
-          </a:p>
-          <a:p>
-            <a:pPr lvl="1"/>
-            <a:r>
-              <a:rPr lang="en-GB" dirty="0"/>
-              <a:t>The current league?</a:t>
-            </a:r>
-          </a:p>
-          <a:p>
-            <a:pPr lvl="1"/>
-            <a:r>
-              <a:rPr lang="en-GB" dirty="0"/>
-              <a:t>Athletes of the same age?</a:t>
-            </a:r>
-          </a:p>
-          <a:p>
-            <a:pPr lvl="1"/>
-            <a:r>
-              <a:rPr lang="en-GB" dirty="0"/>
-              <a:t>The level the athlete is being recruited into?</a:t>
-            </a:r>
-          </a:p>
-          <a:p>
-            <a:endParaRPr lang="en-US" dirty="0"/>
-          </a:p>
-        </p:txBody>
-      </p:sp>
-      <p:sp>
-        <p:nvSpPr>
-          <p:cNvPr id="5" name="TextBox 4">
+              <a:t>Evaluate current ability, understand development, and estimate future fit or performance.</a:t>
+            </a:r>
+          </a:p>
+          <a:p>
+            <a:pPr lvl="0"/>
+            <a:endParaRPr lang="en-GB" dirty="0"/>
+          </a:p>
+        </p:txBody>
+      </p:sp>
+      <p:sp>
+        <p:nvSpPr>
+          <p:cNvPr id="4" name="Rounded Rectangle 3">
             <a:extLst>
               <a:ext uri="{FF2B5EF4-FFF2-40B4-BE49-F238E27FC236}">
-                <a16:creationId xmlns:a16="http://schemas.microsoft.com/office/drawing/2014/main" id="{F6049910-3D7F-B243-1D1A-6A64D459F79B}"/>
+                <a16:creationId xmlns:a16="http://schemas.microsoft.com/office/drawing/2014/main" id="{76E16221-1AC7-206D-F7E7-4283DB69983B}"/>
               </a:ext>
             </a:extLst>
           </p:cNvPr>
-          <p:cNvSpPr txBox="1"/>
+          <p:cNvSpPr/>
           <p:nvPr/>
         </p:nvSpPr>
         <p:spPr>
           <a:xfrm>
-            <a:off x="2126672" y="5046730"/>
-            <a:ext cx="7938655" cy="369332"/>
+            <a:off x="6525491" y="2673927"/>
+            <a:ext cx="4828309" cy="3186546"/>
           </a:xfrm>
-          <a:prstGeom prst="rect">
+          <a:prstGeom prst="roundRect">
             <a:avLst/>
           </a:prstGeom>
-          <a:noFill/>
         </p:spPr>
-        <p:txBody>
-          <a:bodyPr wrap="square">
-            <a:spAutoFit/>
-          </a:bodyPr>
+        <p:style>
+          <a:lnRef idx="1">
+            <a:schemeClr val="accent1"/>
+          </a:lnRef>
+          <a:fillRef idx="2">
+            <a:schemeClr val="accent1"/>
+          </a:fillRef>
+          <a:effectRef idx="1">
+            <a:schemeClr val="accent1"/>
+          </a:effectRef>
+          <a:fontRef idx="minor">
+            <a:schemeClr val="dk1"/>
+          </a:fontRef>
+        </p:style>
+        <p:txBody>
+          <a:bodyPr rtlCol="0" anchor="ctr"/>
           <a:lstStyle/>
           <a:p>
             <a:r>
-              <a:rPr lang="en-GB" sz="1800" b="0" i="0" dirty="0">
-                <a:solidFill>
-                  <a:schemeClr val="tx1"/>
-                </a:solidFill>
-                <a:effectLst/>
-                <a:latin typeface="+mn-lt"/>
-              </a:rPr>
-              <a:t>A number becomes evaluative only when it has a meaningful comparison.</a:t>
-            </a:r>
-            <a:endParaRPr lang="en-US" dirty="0"/>
+              <a:rPr lang="en-GB" sz="2400" b="1" dirty="0"/>
+              <a:t>Common information</a:t>
+            </a:r>
+            <a:endParaRPr lang="en-GB" sz="2400" dirty="0"/>
+          </a:p>
+          <a:p>
+            <a:pPr marL="342900" indent="-342900">
+              <a:buFont typeface="Arial" panose="020B0604020202020204" pitchFamily="34" charset="0"/>
+              <a:buChar char="•"/>
+            </a:pPr>
+            <a:r>
+              <a:rPr lang="en-GB" sz="2000" dirty="0"/>
+              <a:t>Performance history</a:t>
+            </a:r>
+          </a:p>
+          <a:p>
+            <a:pPr marL="342900" indent="-342900">
+              <a:buFont typeface="Arial" panose="020B0604020202020204" pitchFamily="34" charset="0"/>
+              <a:buChar char="•"/>
+            </a:pPr>
+            <a:r>
+              <a:rPr lang="en-GB" sz="2000" dirty="0"/>
+              <a:t>Training history</a:t>
+            </a:r>
+          </a:p>
+          <a:p>
+            <a:pPr marL="342900" indent="-342900">
+              <a:buFont typeface="Arial" panose="020B0604020202020204" pitchFamily="34" charset="0"/>
+              <a:buChar char="•"/>
+            </a:pPr>
+            <a:r>
+              <a:rPr lang="en-GB" sz="2000" dirty="0"/>
+              <a:t>Physical and technical profile</a:t>
+            </a:r>
+          </a:p>
+          <a:p>
+            <a:pPr marL="342900" indent="-342900">
+              <a:buFont typeface="Arial" panose="020B0604020202020204" pitchFamily="34" charset="0"/>
+              <a:buChar char="•"/>
+            </a:pPr>
+            <a:r>
+              <a:rPr lang="en-GB" sz="2000" dirty="0"/>
+              <a:t>Competition context</a:t>
+            </a:r>
+          </a:p>
+          <a:p>
+            <a:pPr marL="342900" indent="-342900">
+              <a:buFont typeface="Arial" panose="020B0604020202020204" pitchFamily="34" charset="0"/>
+              <a:buChar char="•"/>
+            </a:pPr>
+            <a:r>
+              <a:rPr lang="en-GB" sz="2000" dirty="0"/>
+              <a:t>Age</a:t>
+            </a:r>
+            <a:endParaRPr lang="en-US" sz="2000" dirty="0"/>
+          </a:p>
+        </p:txBody>
+      </p:sp>
+      <p:sp>
+        <p:nvSpPr>
+          <p:cNvPr id="5" name="Rounded Rectangle 4">
+            <a:extLst>
+              <a:ext uri="{FF2B5EF4-FFF2-40B4-BE49-F238E27FC236}">
+                <a16:creationId xmlns:a16="http://schemas.microsoft.com/office/drawing/2014/main" id="{51598009-99A9-1900-5EDE-D2E3B9B9F140}"/>
+              </a:ext>
+            </a:extLst>
+          </p:cNvPr>
+          <p:cNvSpPr/>
+          <p:nvPr/>
+        </p:nvSpPr>
+        <p:spPr>
+          <a:xfrm>
+            <a:off x="838200" y="2743200"/>
+            <a:ext cx="4828309" cy="3186546"/>
+          </a:xfrm>
+          <a:prstGeom prst="roundRect">
+            <a:avLst/>
+          </a:prstGeom>
+        </p:spPr>
+        <p:style>
+          <a:lnRef idx="1">
+            <a:schemeClr val="accent1"/>
+          </a:lnRef>
+          <a:fillRef idx="2">
+            <a:schemeClr val="accent1"/>
+          </a:fillRef>
+          <a:effectRef idx="1">
+            <a:schemeClr val="accent1"/>
+          </a:effectRef>
+          <a:fontRef idx="minor">
+            <a:schemeClr val="dk1"/>
+          </a:fontRef>
+        </p:style>
+        <p:txBody>
+          <a:bodyPr rtlCol="0" anchor="ctr"/>
+          <a:lstStyle/>
+          <a:p>
+            <a:r>
+              <a:rPr lang="en-GB" sz="2400" b="1" dirty="0"/>
+              <a:t>Common decisions</a:t>
+            </a:r>
+          </a:p>
+          <a:p>
+            <a:pPr marL="342900" indent="-342900">
+              <a:buFont typeface="Arial" panose="020B0604020202020204" pitchFamily="34" charset="0"/>
+              <a:buChar char="•"/>
+            </a:pPr>
+            <a:r>
+              <a:rPr lang="en-GB" sz="2000" dirty="0"/>
+              <a:t>Recruit or draft an athlete</a:t>
+            </a:r>
+          </a:p>
+          <a:p>
+            <a:pPr marL="342900" indent="-342900">
+              <a:buFont typeface="Arial" panose="020B0604020202020204" pitchFamily="34" charset="0"/>
+              <a:buChar char="•"/>
+            </a:pPr>
+            <a:r>
+              <a:rPr lang="en-GB" sz="2000" dirty="0"/>
+              <a:t>Compare potential prospects</a:t>
+            </a:r>
+          </a:p>
+          <a:p>
+            <a:pPr marL="342900" indent="-342900">
+              <a:buFont typeface="Arial" panose="020B0604020202020204" pitchFamily="34" charset="0"/>
+              <a:buChar char="•"/>
+            </a:pPr>
+            <a:r>
+              <a:rPr lang="en-GB" sz="2000" dirty="0"/>
+              <a:t>Identify development priorities</a:t>
+            </a:r>
+          </a:p>
+          <a:p>
+            <a:pPr marL="342900" indent="-342900">
+              <a:buFont typeface="Arial" panose="020B0604020202020204" pitchFamily="34" charset="0"/>
+              <a:buChar char="•"/>
+            </a:pPr>
+            <a:r>
+              <a:rPr lang="en-GB" sz="2000" dirty="0"/>
+              <a:t>Build a balanced roster</a:t>
+            </a:r>
+          </a:p>
+          <a:p>
+            <a:pPr algn="ctr"/>
+            <a:endParaRPr lang="en-US" sz="2400" b="1" dirty="0"/>
           </a:p>
         </p:txBody>
       </p:sp>
     </p:spTree>
     <p:extLst>
       <p:ext uri="{BB962C8B-B14F-4D97-AF65-F5344CB8AC3E}">
-        <p14:creationId xmlns:p14="http://schemas.microsoft.com/office/powerpoint/2010/main" val="894860486"/>
+        <p14:creationId xmlns:p14="http://schemas.microsoft.com/office/powerpoint/2010/main" val="2069912289"/>
       </p:ext>
     </p:extLst>
   </p:cSld>
@@ -15696,7 +16874,7 @@
           <p:cNvPr id="2" name="Title 1">
             <a:extLst>
               <a:ext uri="{FF2B5EF4-FFF2-40B4-BE49-F238E27FC236}">
-                <a16:creationId xmlns:a16="http://schemas.microsoft.com/office/drawing/2014/main" id="{169011B7-D164-DCF2-8F93-9836E1AD22D4}"/>
+                <a16:creationId xmlns:a16="http://schemas.microsoft.com/office/drawing/2014/main" id="{A48AAF79-5196-4304-D2BA-8C5841BFF09C}"/>
               </a:ext>
             </a:extLst>
           </p:cNvPr>
@@ -15710,13 +16888,13 @@
         <p:spPr/>
         <p:txBody>
           <a:bodyPr>
-            <a:normAutofit fontScale="90000"/>
+            <a:normAutofit/>
           </a:bodyPr>
           <a:lstStyle/>
           <a:p>
             <a:r>
               <a:rPr lang="en-GB" dirty="0"/>
-              <a:t>Scouting Combines Evidence From Different Sources</a:t>
+              <a:t>Evaluation Depends on the Reference Point</a:t>
             </a:r>
             <a:endParaRPr lang="en-US" dirty="0"/>
           </a:p>
@@ -15727,7 +16905,7 @@
           <p:cNvPr id="3" name="Content Placeholder 2">
             <a:extLst>
               <a:ext uri="{FF2B5EF4-FFF2-40B4-BE49-F238E27FC236}">
-                <a16:creationId xmlns:a16="http://schemas.microsoft.com/office/drawing/2014/main" id="{B4A0B40D-236F-2A3B-8951-44CB5B325A31}"/>
+                <a16:creationId xmlns:a16="http://schemas.microsoft.com/office/drawing/2014/main" id="{A3888892-CBFC-012B-DD3C-CB4D5B9251CB}"/>
               </a:ext>
             </a:extLst>
           </p:cNvPr>
@@ -15743,44 +16921,67 @@
           <a:bodyPr/>
           <a:lstStyle/>
           <a:p>
-            <a:pPr lvl="0"/>
+            <a:pPr marL="0" indent="0">
+              <a:buNone/>
+            </a:pPr>
             <a:r>
               <a:rPr lang="en-GB" dirty="0"/>
-              <a:t>Statistical performance: what an athlete has produced.</a:t>
-            </a:r>
-          </a:p>
-          <a:p>
-            <a:pPr lvl="0"/>
+              <a:t>Consider the claim: “This athlete is an excellent shooter.”</a:t>
+            </a:r>
+          </a:p>
+          <a:p>
             <a:r>
               <a:rPr lang="en-GB" dirty="0"/>
-              <a:t>Video and observation: context about how that performance occurred.</a:t>
-            </a:r>
-          </a:p>
-          <a:p>
-            <a:pPr lvl="0"/>
+              <a:t>Excellent compared with what?</a:t>
+            </a:r>
+          </a:p>
+          <a:p>
+            <a:pPr lvl="1"/>
             <a:r>
               <a:rPr lang="en-GB" dirty="0"/>
-              <a:t>Physical testing: specific physical capabilities.</a:t>
-            </a:r>
-          </a:p>
-          <a:p>
-            <a:pPr lvl="0"/>
+              <a:t>Teammates? </a:t>
+            </a:r>
+          </a:p>
+          <a:p>
+            <a:pPr lvl="1"/>
             <a:r>
               <a:rPr lang="en-GB" dirty="0"/>
-              <a:t>Interviews and background: role, experience, and environment.</a:t>
-            </a:r>
-          </a:p>
-          <a:p>
+              <a:t>Players at the same position? </a:t>
+            </a:r>
+          </a:p>
+          <a:p>
+            <a:pPr lvl="1"/>
+            <a:r>
+              <a:rPr lang="en-GB" dirty="0"/>
+              <a:t>Players of the same age? </a:t>
+            </a:r>
+          </a:p>
+          <a:p>
+            <a:pPr lvl="1"/>
+            <a:r>
+              <a:rPr lang="en-GB" dirty="0"/>
+              <a:t>Players in the current league? </a:t>
+            </a:r>
+          </a:p>
+          <a:p>
+            <a:pPr lvl="1"/>
+            <a:r>
+              <a:rPr lang="en-GB" dirty="0"/>
+              <a:t>Players at the level being considered?</a:t>
+            </a:r>
+          </a:p>
+          <a:p>
+            <a:pPr lvl="1"/>
             <a:endParaRPr lang="en-US" dirty="0"/>
           </a:p>
         </p:txBody>
       </p:sp>
       <p:sp>
         <p:nvSpPr>
-          <p:cNvPr id="4" name="TextBox 3">
+          <p:cNvPr id="5" name="TextBox 4">
             <a:extLst>
               <a:ext uri="{FF2B5EF4-FFF2-40B4-BE49-F238E27FC236}">
-                <a16:creationId xmlns:a16="http://schemas.microsoft.com/office/drawing/2014/main" id="{B2B901C3-E3FF-43F3-077E-FDA8B95413BC}"/>
+                <a16:creationId xmlns:a16="http://schemas.microsoft.com/office/drawing/2014/main" id="{F6049910-3D7F-B243-1D1A-6A64D459F79B}"/>
               </a:ext>
             </a:extLst>
           </p:cNvPr>
@@ -15789,8 +16990,8 @@
         </p:nvSpPr>
         <p:spPr>
           <a:xfrm>
-            <a:off x="1655970" y="5231396"/>
-            <a:ext cx="8775351" cy="369332"/>
+            <a:off x="2126672" y="5046730"/>
+            <a:ext cx="7938655" cy="369332"/>
           </a:xfrm>
           <a:prstGeom prst="rect">
             <a:avLst/>
@@ -15798,23 +16999,33 @@
           <a:noFill/>
         </p:spPr>
         <p:txBody>
-          <a:bodyPr wrap="none" rtlCol="0">
+          <a:bodyPr wrap="square">
             <a:spAutoFit/>
           </a:bodyPr>
           <a:lstStyle/>
           <a:p>
             <a:r>
-              <a:rPr lang="en-GB" dirty="0"/>
-              <a:t>The challenge is combining evidence without assuming every source is equally reliable.</a:t>
-            </a:r>
-            <a:endParaRPr lang="en-US" dirty="0"/>
+              <a:rPr lang="en-GB" sz="1800" b="0" i="0" dirty="0">
+                <a:solidFill>
+                  <a:srgbClr val="FF0000"/>
+                </a:solidFill>
+                <a:effectLst/>
+                <a:latin typeface="+mn-lt"/>
+              </a:rPr>
+              <a:t>A number becomes evaluative only when it has a meaningful comparison.</a:t>
+            </a:r>
+            <a:endParaRPr lang="en-US" dirty="0">
+              <a:solidFill>
+                <a:srgbClr val="FF0000"/>
+              </a:solidFill>
+            </a:endParaRPr>
           </a:p>
         </p:txBody>
       </p:sp>
     </p:spTree>
     <p:extLst>
       <p:ext uri="{BB962C8B-B14F-4D97-AF65-F5344CB8AC3E}">
-        <p14:creationId xmlns:p14="http://schemas.microsoft.com/office/powerpoint/2010/main" val="2160927822"/>
+        <p14:creationId xmlns:p14="http://schemas.microsoft.com/office/powerpoint/2010/main" val="894860486"/>
       </p:ext>
     </p:extLst>
   </p:cSld>
@@ -15846,7 +17057,7 @@
           <p:cNvPr id="2" name="Title 1">
             <a:extLst>
               <a:ext uri="{FF2B5EF4-FFF2-40B4-BE49-F238E27FC236}">
-                <a16:creationId xmlns:a16="http://schemas.microsoft.com/office/drawing/2014/main" id="{1688469D-40F7-7830-05F1-2D005D4F89DE}"/>
+                <a16:creationId xmlns:a16="http://schemas.microsoft.com/office/drawing/2014/main" id="{169011B7-D164-DCF2-8F93-9836E1AD22D4}"/>
               </a:ext>
             </a:extLst>
           </p:cNvPr>
@@ -15866,7 +17077,7 @@
           <a:p>
             <a:r>
               <a:rPr lang="en-GB" dirty="0"/>
-              <a:t>Domain 2: Athlete Tracking and Monitoring</a:t>
+              <a:t>Evidence From Different Sources</a:t>
             </a:r>
             <a:endParaRPr lang="en-US" dirty="0"/>
           </a:p>
@@ -15877,7 +17088,7 @@
           <p:cNvPr id="3" name="Content Placeholder 2">
             <a:extLst>
               <a:ext uri="{FF2B5EF4-FFF2-40B4-BE49-F238E27FC236}">
-                <a16:creationId xmlns:a16="http://schemas.microsoft.com/office/drawing/2014/main" id="{6A687C13-1F8F-6A9D-FF31-C0F3288FE451}"/>
+                <a16:creationId xmlns:a16="http://schemas.microsoft.com/office/drawing/2014/main" id="{B4A0B40D-236F-2A3B-8951-44CB5B325A31}"/>
               </a:ext>
             </a:extLst>
           </p:cNvPr>
@@ -15890,25 +17101,183 @@
         </p:nvSpPr>
         <p:spPr/>
         <p:txBody>
-          <a:bodyPr>
-            <a:normAutofit/>
+          <a:bodyPr/>
+          <a:lstStyle/>
+          <a:p>
+            <a:pPr marL="0" lvl="0" indent="0">
+              <a:buNone/>
+            </a:pPr>
+            <a:r>
+              <a:rPr lang="en-GB" dirty="0"/>
+              <a:t>In scouting:</a:t>
+            </a:r>
+          </a:p>
+          <a:p>
+            <a:pPr lvl="0"/>
+            <a:r>
+              <a:rPr lang="en-GB" b="1" dirty="0"/>
+              <a:t>Statistical performance:</a:t>
+            </a:r>
+            <a:r>
+              <a:rPr lang="en-GB" dirty="0"/>
+              <a:t> what the athlete has produced </a:t>
+            </a:r>
+          </a:p>
+          <a:p>
+            <a:pPr lvl="0"/>
+            <a:r>
+              <a:rPr lang="en-GB" b="1" dirty="0"/>
+              <a:t>Video and observation:</a:t>
+            </a:r>
+            <a:r>
+              <a:rPr lang="en-GB" dirty="0"/>
+              <a:t> how that performance occurred </a:t>
+            </a:r>
+          </a:p>
+          <a:p>
+            <a:pPr lvl="0"/>
+            <a:r>
+              <a:rPr lang="en-GB" b="1" dirty="0"/>
+              <a:t>Physical testing:</a:t>
+            </a:r>
+            <a:r>
+              <a:rPr lang="en-GB" dirty="0"/>
+              <a:t> the athlete’s specific capabilities </a:t>
+            </a:r>
+          </a:p>
+          <a:p>
+            <a:pPr lvl="0"/>
+            <a:r>
+              <a:rPr lang="en-GB" b="1" dirty="0"/>
+              <a:t>Interviews and background:</a:t>
+            </a:r>
+            <a:r>
+              <a:rPr lang="en-GB" dirty="0"/>
+              <a:t> the athlete’s role, experience, and environment</a:t>
+            </a:r>
+          </a:p>
+          <a:p>
+            <a:endParaRPr lang="en-US" dirty="0"/>
+          </a:p>
+        </p:txBody>
+      </p:sp>
+      <p:sp>
+        <p:nvSpPr>
+          <p:cNvPr id="4" name="TextBox 3">
+            <a:extLst>
+              <a:ext uri="{FF2B5EF4-FFF2-40B4-BE49-F238E27FC236}">
+                <a16:creationId xmlns:a16="http://schemas.microsoft.com/office/drawing/2014/main" id="{B2B901C3-E3FF-43F3-077E-FDA8B95413BC}"/>
+              </a:ext>
+            </a:extLst>
+          </p:cNvPr>
+          <p:cNvSpPr txBox="1"/>
+          <p:nvPr/>
+        </p:nvSpPr>
+        <p:spPr>
+          <a:xfrm>
+            <a:off x="1653020" y="5530632"/>
+            <a:ext cx="8885960" cy="646331"/>
+          </a:xfrm>
+          <a:prstGeom prst="rect">
+            <a:avLst/>
+          </a:prstGeom>
+          <a:noFill/>
+        </p:spPr>
+        <p:txBody>
+          <a:bodyPr wrap="square" rtlCol="0">
+            <a:spAutoFit/>
           </a:bodyPr>
           <a:lstStyle/>
           <a:p>
-            <a:pPr lvl="0"/>
             <a:r>
               <a:rPr lang="en-GB" dirty="0"/>
-              <a:t>Understand what athletes do and how they respond across training and competition.</a:t>
-            </a:r>
-          </a:p>
-        </p:txBody>
-      </p:sp>
-      <p:sp>
-        <p:nvSpPr>
-          <p:cNvPr id="4" name="Rounded Rectangle 3">
+              <a:t>The challenge is combining evidence when each source measures something different and has different limitations.</a:t>
+            </a:r>
+            <a:endParaRPr lang="en-US" dirty="0"/>
+          </a:p>
+        </p:txBody>
+      </p:sp>
+      <p:sp>
+        <p:nvSpPr>
+          <p:cNvPr id="6" name="TextBox 5">
             <a:extLst>
               <a:ext uri="{FF2B5EF4-FFF2-40B4-BE49-F238E27FC236}">
-                <a16:creationId xmlns:a16="http://schemas.microsoft.com/office/drawing/2014/main" id="{CC26C4C5-D99B-CDA1-7F9C-769BF13A41A9}"/>
+                <a16:creationId xmlns:a16="http://schemas.microsoft.com/office/drawing/2014/main" id="{C58C4524-EF60-14DA-411A-B965D6CA29A3}"/>
+              </a:ext>
+            </a:extLst>
+          </p:cNvPr>
+          <p:cNvSpPr txBox="1"/>
+          <p:nvPr/>
+        </p:nvSpPr>
+        <p:spPr>
+          <a:xfrm>
+            <a:off x="4038600" y="4894573"/>
+            <a:ext cx="4114800" cy="369332"/>
+          </a:xfrm>
+          <a:prstGeom prst="rect">
+            <a:avLst/>
+          </a:prstGeom>
+          <a:noFill/>
+        </p:spPr>
+        <p:txBody>
+          <a:bodyPr wrap="square">
+            <a:spAutoFit/>
+          </a:bodyPr>
+          <a:lstStyle/>
+          <a:p>
+            <a:pPr algn="ctr"/>
+            <a:r>
+              <a:rPr lang="en-GB" dirty="0">
+                <a:solidFill>
+                  <a:srgbClr val="FF0000"/>
+                </a:solidFill>
+              </a:rPr>
+              <a:t>Which source would you trust most?</a:t>
+            </a:r>
+            <a:endParaRPr lang="en-US" dirty="0">
+              <a:solidFill>
+                <a:srgbClr val="FF0000"/>
+              </a:solidFill>
+            </a:endParaRPr>
+          </a:p>
+        </p:txBody>
+      </p:sp>
+    </p:spTree>
+    <p:extLst>
+      <p:ext uri="{BB962C8B-B14F-4D97-AF65-F5344CB8AC3E}">
+        <p14:creationId xmlns:p14="http://schemas.microsoft.com/office/powerpoint/2010/main" val="2160927822"/>
+      </p:ext>
+    </p:extLst>
+  </p:cSld>
+  <p:clrMapOvr>
+    <a:masterClrMapping/>
+  </p:clrMapOvr>
+</p:sld>
+</file>
+
+<file path=ppt/slides/slide9.xml><?xml version="1.0" encoding="utf-8"?>
+<p:sld xmlns:a="http://schemas.openxmlformats.org/drawingml/2006/main" xmlns:r="http://schemas.openxmlformats.org/officeDocument/2006/relationships" xmlns:p="http://schemas.openxmlformats.org/presentationml/2006/main">
+  <p:cSld>
+    <p:spTree>
+      <p:nvGrpSpPr>
+        <p:cNvPr id="1" name=""/>
+        <p:cNvGrpSpPr/>
+        <p:nvPr/>
+      </p:nvGrpSpPr>
+      <p:grpSpPr>
+        <a:xfrm>
+          <a:off x="0" y="0"/>
+          <a:ext cx="0" cy="0"/>
+          <a:chOff x="0" y="0"/>
+          <a:chExt cx="0" cy="0"/>
+        </a:xfrm>
+      </p:grpSpPr>
+      <p:sp>
+        <p:nvSpPr>
+          <p:cNvPr id="5" name="Rounded Rectangle 4">
+            <a:extLst>
+              <a:ext uri="{FF2B5EF4-FFF2-40B4-BE49-F238E27FC236}">
+                <a16:creationId xmlns:a16="http://schemas.microsoft.com/office/drawing/2014/main" id="{BC6C524E-B2B4-7A6C-16BF-529B5D15D21E}"/>
               </a:ext>
             </a:extLst>
           </p:cNvPr>
@@ -15944,9 +17313,8 @@
           <a:p>
             <a:r>
               <a:rPr lang="en-GB" sz="2400" b="1" dirty="0"/>
-              <a:t>Common information</a:t>
-            </a:r>
-            <a:endParaRPr lang="en-GB" sz="2400" dirty="0"/>
+              <a:t>Common decisions</a:t>
+            </a:r>
           </a:p>
           <a:p>
             <a:pPr marL="342900" indent="-342900">
@@ -15954,8 +17322,8 @@
               <a:buChar char="•"/>
             </a:pPr>
             <a:r>
-              <a:rPr lang="en-GB" sz="2400" dirty="0"/>
-              <a:t>External load</a:t>
+              <a:rPr lang="en-GB" sz="2000" dirty="0"/>
+              <a:t>Adjust training</a:t>
             </a:r>
           </a:p>
           <a:p>
@@ -15964,8 +17332,8 @@
               <a:buChar char="•"/>
             </a:pPr>
             <a:r>
-              <a:rPr lang="en-GB" sz="2400" dirty="0"/>
-              <a:t>Internal load</a:t>
+              <a:rPr lang="en-GB" sz="2000" dirty="0"/>
+              <a:t>Plan recovery</a:t>
             </a:r>
           </a:p>
           <a:p>
@@ -15974,8 +17342,8 @@
               <a:buChar char="•"/>
             </a:pPr>
             <a:r>
-              <a:rPr lang="en-GB" sz="2400" dirty="0"/>
-              <a:t>Wellness and readiness</a:t>
+              <a:rPr lang="en-GB" sz="2000" dirty="0"/>
+              <a:t>Prepare for competition demands</a:t>
             </a:r>
           </a:p>
           <a:p>
@@ -15984,19 +17352,80 @@
               <a:buChar char="•"/>
             </a:pPr>
             <a:r>
-              <a:rPr lang="en-GB" sz="2400" dirty="0"/>
-              <a:t>Performance-test results</a:t>
-            </a:r>
-            <a:endParaRPr lang="en-US" sz="2400" dirty="0"/>
-          </a:p>
-        </p:txBody>
-      </p:sp>
-      <p:sp>
-        <p:nvSpPr>
-          <p:cNvPr id="5" name="Rounded Rectangle 4">
+              <a:rPr lang="en-GB" sz="2000" dirty="0"/>
+              <a:t>Evaluate return-to-play progression</a:t>
+            </a:r>
+          </a:p>
+        </p:txBody>
+      </p:sp>
+      <p:sp>
+        <p:nvSpPr>
+          <p:cNvPr id="2" name="Title 1">
             <a:extLst>
               <a:ext uri="{FF2B5EF4-FFF2-40B4-BE49-F238E27FC236}">
-                <a16:creationId xmlns:a16="http://schemas.microsoft.com/office/drawing/2014/main" id="{BC6C524E-B2B4-7A6C-16BF-529B5D15D21E}"/>
+                <a16:creationId xmlns:a16="http://schemas.microsoft.com/office/drawing/2014/main" id="{1688469D-40F7-7830-05F1-2D005D4F89DE}"/>
+              </a:ext>
+            </a:extLst>
+          </p:cNvPr>
+          <p:cNvSpPr>
+            <a:spLocks noGrp="1"/>
+          </p:cNvSpPr>
+          <p:nvPr>
+            <p:ph type="title"/>
+          </p:nvPr>
+        </p:nvSpPr>
+        <p:spPr/>
+        <p:txBody>
+          <a:bodyPr>
+            <a:normAutofit/>
+          </a:bodyPr>
+          <a:lstStyle/>
+          <a:p>
+            <a:r>
+              <a:rPr lang="en-GB" dirty="0"/>
+              <a:t>Domain 2: Athlete Tracking and Monitoring</a:t>
+            </a:r>
+            <a:endParaRPr lang="en-US" dirty="0"/>
+          </a:p>
+        </p:txBody>
+      </p:sp>
+      <p:sp>
+        <p:nvSpPr>
+          <p:cNvPr id="3" name="Content Placeholder 2">
+            <a:extLst>
+              <a:ext uri="{FF2B5EF4-FFF2-40B4-BE49-F238E27FC236}">
+                <a16:creationId xmlns:a16="http://schemas.microsoft.com/office/drawing/2014/main" id="{6A687C13-1F8F-6A9D-FF31-C0F3288FE451}"/>
+              </a:ext>
+            </a:extLst>
+          </p:cNvPr>
+          <p:cNvSpPr>
+            <a:spLocks noGrp="1"/>
+          </p:cNvSpPr>
+          <p:nvPr>
+            <p:ph idx="1"/>
+          </p:nvPr>
+        </p:nvSpPr>
+        <p:spPr/>
+        <p:txBody>
+          <a:bodyPr>
+            <a:normAutofit/>
+          </a:bodyPr>
+          <a:lstStyle/>
+          <a:p>
+            <a:pPr lvl="0"/>
+            <a:r>
+              <a:rPr lang="en-GB" dirty="0"/>
+              <a:t>Understand what athletes do and how they respond across training and competition.</a:t>
+            </a:r>
+          </a:p>
+        </p:txBody>
+      </p:sp>
+      <p:sp>
+        <p:nvSpPr>
+          <p:cNvPr id="4" name="Rounded Rectangle 3">
+            <a:extLst>
+              <a:ext uri="{FF2B5EF4-FFF2-40B4-BE49-F238E27FC236}">
+                <a16:creationId xmlns:a16="http://schemas.microsoft.com/office/drawing/2014/main" id="{CC26C4C5-D99B-CDA1-7F9C-769BF13A41A9}"/>
               </a:ext>
             </a:extLst>
           </p:cNvPr>
@@ -16032,8 +17461,9 @@
           <a:p>
             <a:r>
               <a:rPr lang="en-GB" sz="2400" b="1" dirty="0"/>
-              <a:t>Common decision</a:t>
-            </a:r>
+              <a:t>Common information</a:t>
+            </a:r>
+            <a:endParaRPr lang="en-GB" sz="2400" dirty="0"/>
           </a:p>
           <a:p>
             <a:pPr marL="342900" indent="-342900">
@@ -16041,8 +17471,8 @@
               <a:buChar char="•"/>
             </a:pPr>
             <a:r>
-              <a:rPr lang="en-GB" sz="2400" dirty="0"/>
-              <a:t>Adjust today's training</a:t>
+              <a:rPr lang="en-GB" sz="2000" dirty="0"/>
+              <a:t>External load</a:t>
             </a:r>
           </a:p>
           <a:p>
@@ -16051,8 +17481,8 @@
               <a:buChar char="•"/>
             </a:pPr>
             <a:r>
-              <a:rPr lang="en-GB" sz="2400" dirty="0"/>
-              <a:t>Plan recovery</a:t>
+              <a:rPr lang="en-GB" sz="2000" dirty="0"/>
+              <a:t>Internal load</a:t>
             </a:r>
           </a:p>
           <a:p>
@@ -16061,8 +17491,8 @@
               <a:buChar char="•"/>
             </a:pPr>
             <a:r>
-              <a:rPr lang="en-GB" sz="2400" dirty="0"/>
-              <a:t>Prepare for competition demands</a:t>
+              <a:rPr lang="en-GB" sz="2000" dirty="0"/>
+              <a:t>Wellness and readiness</a:t>
             </a:r>
           </a:p>
           <a:p>
@@ -16071,9 +17501,10 @@
               <a:buChar char="•"/>
             </a:pPr>
             <a:r>
-              <a:rPr lang="en-GB" sz="2400" dirty="0"/>
-              <a:t>Evaluate return-to-play progression</a:t>
-            </a:r>
+              <a:rPr lang="en-GB" sz="2000" dirty="0"/>
+              <a:t>Performance-test results</a:t>
+            </a:r>
+            <a:endParaRPr lang="en-US" sz="2000" dirty="0"/>
           </a:p>
         </p:txBody>
       </p:sp>
@@ -16081,180 +17512,6 @@
     <p:extLst>
       <p:ext uri="{BB962C8B-B14F-4D97-AF65-F5344CB8AC3E}">
         <p14:creationId xmlns:p14="http://schemas.microsoft.com/office/powerpoint/2010/main" val="381452485"/>
-      </p:ext>
-    </p:extLst>
-  </p:cSld>
-  <p:clrMapOvr>
-    <a:masterClrMapping/>
-  </p:clrMapOvr>
-</p:sld>
-</file>
-
-<file path=ppt/slides/slide9.xml><?xml version="1.0" encoding="utf-8"?>
-<p:sld xmlns:a="http://schemas.openxmlformats.org/drawingml/2006/main" xmlns:r="http://schemas.openxmlformats.org/officeDocument/2006/relationships" xmlns:p="http://schemas.openxmlformats.org/presentationml/2006/main">
-  <p:cSld>
-    <p:spTree>
-      <p:nvGrpSpPr>
-        <p:cNvPr id="1" name="">
-          <a:extLst>
-            <a:ext uri="{FF2B5EF4-FFF2-40B4-BE49-F238E27FC236}">
-              <a16:creationId xmlns:a16="http://schemas.microsoft.com/office/drawing/2014/main" id="{62620C65-AACC-AC0A-76CE-4647060FAA99}"/>
-            </a:ext>
-          </a:extLst>
-        </p:cNvPr>
-        <p:cNvGrpSpPr/>
-        <p:nvPr/>
-      </p:nvGrpSpPr>
-      <p:grpSpPr>
-        <a:xfrm>
-          <a:off x="0" y="0"/>
-          <a:ext cx="0" cy="0"/>
-          <a:chOff x="0" y="0"/>
-          <a:chExt cx="0" cy="0"/>
-        </a:xfrm>
-      </p:grpSpPr>
-      <p:sp>
-        <p:nvSpPr>
-          <p:cNvPr id="2" name="Title 1">
-            <a:extLst>
-              <a:ext uri="{FF2B5EF4-FFF2-40B4-BE49-F238E27FC236}">
-                <a16:creationId xmlns:a16="http://schemas.microsoft.com/office/drawing/2014/main" id="{ED51E9B5-E8BC-BC83-E6EF-9F91BC10D46E}"/>
-              </a:ext>
-            </a:extLst>
-          </p:cNvPr>
-          <p:cNvSpPr>
-            <a:spLocks noGrp="1"/>
-          </p:cNvSpPr>
-          <p:nvPr>
-            <p:ph type="title"/>
-          </p:nvPr>
-        </p:nvSpPr>
-        <p:spPr/>
-        <p:txBody>
-          <a:bodyPr>
-            <a:normAutofit/>
-          </a:bodyPr>
-          <a:lstStyle/>
-          <a:p>
-            <a:r>
-              <a:rPr lang="en-GB" dirty="0"/>
-              <a:t>Components of Athlete Tracking</a:t>
-            </a:r>
-            <a:endParaRPr lang="en-US" dirty="0"/>
-          </a:p>
-        </p:txBody>
-      </p:sp>
-      <p:sp>
-        <p:nvSpPr>
-          <p:cNvPr id="3" name="Content Placeholder 2">
-            <a:extLst>
-              <a:ext uri="{FF2B5EF4-FFF2-40B4-BE49-F238E27FC236}">
-                <a16:creationId xmlns:a16="http://schemas.microsoft.com/office/drawing/2014/main" id="{E2888A1B-7759-ED77-C7D4-03E0BC0B381C}"/>
-              </a:ext>
-            </a:extLst>
-          </p:cNvPr>
-          <p:cNvSpPr>
-            <a:spLocks noGrp="1"/>
-          </p:cNvSpPr>
-          <p:nvPr>
-            <p:ph idx="1"/>
-          </p:nvPr>
-        </p:nvSpPr>
-        <p:spPr/>
-        <p:txBody>
-          <a:bodyPr>
-            <a:normAutofit/>
-          </a:bodyPr>
-          <a:lstStyle/>
-          <a:p>
-            <a:pPr lvl="0"/>
-            <a:r>
-              <a:rPr lang="en-GB" dirty="0"/>
-              <a:t>What was prescribed?</a:t>
-            </a:r>
-          </a:p>
-          <a:p>
-            <a:pPr lvl="1"/>
-            <a:r>
-              <a:rPr lang="en-GB" dirty="0"/>
-              <a:t>The planned training or competition demand</a:t>
-            </a:r>
-          </a:p>
-          <a:p>
-            <a:pPr lvl="0"/>
-            <a:r>
-              <a:rPr lang="en-GB" dirty="0"/>
-              <a:t>What did the athlete complete?</a:t>
-            </a:r>
-          </a:p>
-          <a:p>
-            <a:pPr lvl="1"/>
-            <a:r>
-              <a:rPr lang="en-GB" dirty="0"/>
-              <a:t>Duration, distance, accelerations, impacts, repetitions</a:t>
-            </a:r>
-          </a:p>
-          <a:p>
-            <a:pPr lvl="0"/>
-            <a:r>
-              <a:rPr lang="en-GB" dirty="0"/>
-              <a:t>How did the athlete respond?</a:t>
-            </a:r>
-          </a:p>
-          <a:p>
-            <a:pPr lvl="1"/>
-            <a:r>
-              <a:rPr lang="en-GB" dirty="0"/>
-              <a:t>Heart rate, RPE, soreness, wellness, performance changes</a:t>
-            </a:r>
-          </a:p>
-        </p:txBody>
-      </p:sp>
-      <p:sp>
-        <p:nvSpPr>
-          <p:cNvPr id="4" name="TextBox 3">
-            <a:extLst>
-              <a:ext uri="{FF2B5EF4-FFF2-40B4-BE49-F238E27FC236}">
-                <a16:creationId xmlns:a16="http://schemas.microsoft.com/office/drawing/2014/main" id="{1C475B5E-C7BA-FAD6-E9CD-CB2AB1EB4ACE}"/>
-              </a:ext>
-            </a:extLst>
-          </p:cNvPr>
-          <p:cNvSpPr txBox="1"/>
-          <p:nvPr/>
-        </p:nvSpPr>
-        <p:spPr>
-          <a:xfrm>
-            <a:off x="1572491" y="5185229"/>
-            <a:ext cx="9047018" cy="369332"/>
-          </a:xfrm>
-          <a:prstGeom prst="rect">
-            <a:avLst/>
-          </a:prstGeom>
-          <a:noFill/>
-        </p:spPr>
-        <p:txBody>
-          <a:bodyPr wrap="square">
-            <a:spAutoFit/>
-          </a:bodyPr>
-          <a:lstStyle/>
-          <a:p>
-            <a:pPr lvl="1" algn="ctr"/>
-            <a:r>
-              <a:rPr lang="en-GB" dirty="0"/>
-              <a:t>Workload has meaning only when interpreted in context.</a:t>
-            </a:r>
-            <a:endParaRPr lang="en-GB" sz="2400" b="1" dirty="0">
-              <a:solidFill>
-                <a:srgbClr val="FF0000"/>
-              </a:solidFill>
-            </a:endParaRPr>
-          </a:p>
-        </p:txBody>
-      </p:sp>
-    </p:spTree>
-    <p:extLst>
-      <p:ext uri="{BB962C8B-B14F-4D97-AF65-F5344CB8AC3E}">
-        <p14:creationId xmlns:p14="http://schemas.microsoft.com/office/powerpoint/2010/main" val="3326346195"/>
       </p:ext>
     </p:extLst>
   </p:cSld>

--- a/pptx/Lecture2.pptx
+++ b/pptx/Lecture2.pptx
@@ -5,14 +5,14 @@
     <p:sldMasterId id="2147483648" r:id="rId1"/>
   </p:sldMasterIdLst>
   <p:notesMasterIdLst>
-    <p:notesMasterId r:id="rId35"/>
+    <p:notesMasterId r:id="rId30"/>
   </p:notesMasterIdLst>
   <p:sldIdLst>
     <p:sldId id="256" r:id="rId2"/>
-    <p:sldId id="303" r:id="rId3"/>
-    <p:sldId id="270" r:id="rId4"/>
-    <p:sldId id="295" r:id="rId5"/>
-    <p:sldId id="296" r:id="rId6"/>
+    <p:sldId id="296" r:id="rId3"/>
+    <p:sldId id="303" r:id="rId4"/>
+    <p:sldId id="270" r:id="rId5"/>
+    <p:sldId id="295" r:id="rId6"/>
     <p:sldId id="271" r:id="rId7"/>
     <p:sldId id="297" r:id="rId8"/>
     <p:sldId id="298" r:id="rId9"/>
@@ -36,11 +36,6 @@
     <p:sldId id="283" r:id="rId27"/>
     <p:sldId id="284" r:id="rId28"/>
     <p:sldId id="301" r:id="rId29"/>
-    <p:sldId id="281" r:id="rId30"/>
-    <p:sldId id="278" r:id="rId31"/>
-    <p:sldId id="280" r:id="rId32"/>
-    <p:sldId id="291" r:id="rId33"/>
-    <p:sldId id="285" r:id="rId34"/>
   </p:sldIdLst>
   <p:sldSz cx="12192000" cy="6858000"/>
   <p:notesSz cx="6858000" cy="9144000"/>
@@ -2811,9 +2806,9 @@
   </dgm:ptLst>
   <dgm:cxnLst>
     <dgm:cxn modelId="{790FDC00-E3FF-4B63-887A-8ACFB0540A48}" type="presOf" srcId="{136F4BFD-0582-4579-82A5-A95C73D55870}" destId="{CAE12482-5CF7-471D-81B3-93E1D402E333}" srcOrd="0" destOrd="0" presId="urn:microsoft.com/office/officeart/2018/2/layout/IconLabelDescriptionList"/>
+    <dgm:cxn modelId="{1ADAC26C-C21D-4F5E-80D2-8F2BD6A07754}" type="presOf" srcId="{3902D11C-F772-4D98-AD43-68757266B871}" destId="{DF164D61-735C-4C87-8347-8B99FE586313}" srcOrd="0" destOrd="0" presId="urn:microsoft.com/office/officeart/2018/2/layout/IconLabelDescriptionList"/>
     <dgm:cxn modelId="{A4A1FA4D-CC62-41D9-B89B-8C82D955DCA7}" type="presOf" srcId="{BF707721-8F8B-47D7-804D-3109819BE9E5}" destId="{8E6B3E7A-9238-4392-BD23-80F64B24C815}" srcOrd="0" destOrd="0" presId="urn:microsoft.com/office/officeart/2018/2/layout/IconLabelDescriptionList"/>
     <dgm:cxn modelId="{EB4A6A4F-8117-4111-8788-25BAA3A3086B}" type="presOf" srcId="{60FFA69C-7C61-4DA1-AD1E-3AA5351D8F7B}" destId="{146C8532-5FED-4962-B4DE-1032849C3828}" srcOrd="0" destOrd="0" presId="urn:microsoft.com/office/officeart/2018/2/layout/IconLabelDescriptionList"/>
-    <dgm:cxn modelId="{1ADAC26C-C21D-4F5E-80D2-8F2BD6A07754}" type="presOf" srcId="{3902D11C-F772-4D98-AD43-68757266B871}" destId="{DF164D61-735C-4C87-8347-8B99FE586313}" srcOrd="0" destOrd="0" presId="urn:microsoft.com/office/officeart/2018/2/layout/IconLabelDescriptionList"/>
     <dgm:cxn modelId="{29660571-F26F-45B6-8E2C-167DA4BE26D0}" srcId="{136F4BFD-0582-4579-82A5-A95C73D55870}" destId="{3902D11C-F772-4D98-AD43-68757266B871}" srcOrd="0" destOrd="0" parTransId="{604A71A0-6B61-4D71-83AF-2F99DB02191E}" sibTransId="{90F04341-BC2E-414C-B73C-082CA4A032F2}"/>
     <dgm:cxn modelId="{3E5FE871-02BD-482D-BC2F-0212E6353F34}" type="presOf" srcId="{D02B5C5A-D5CF-4981-88F1-9872057F386D}" destId="{336AF011-C230-4B81-BC26-BF1B3B4EA562}" srcOrd="0" destOrd="0" presId="urn:microsoft.com/office/officeart/2018/2/layout/IconLabelDescriptionList"/>
     <dgm:cxn modelId="{B7533276-D027-4A08-AAC4-F4BA9C626469}" srcId="{83BC92FE-39A7-43AA-B371-06FC86F327F9}" destId="{BF707721-8F8B-47D7-804D-3109819BE9E5}" srcOrd="0" destOrd="0" parTransId="{0FC4F028-2679-4C1A-B02A-BBF2B9F63150}" sibTransId="{AD3A7166-8836-435B-B8AE-8C254DF1AADE}"/>
@@ -6569,7 +6564,7 @@
           <a:p>
             <a:fld id="{4995A223-E7C9-A243-9A70-FE01E1A1DD65}" type="datetimeFigureOut">
               <a:rPr lang="en-US" smtClean="0"/>
-              <a:t>8/31/26</a:t>
+              <a:t>9/1/2026</a:t>
             </a:fld>
             <a:endParaRPr lang="en-US"/>
           </a:p>
@@ -6952,93 +6947,6 @@
 </p:notes>
 </file>
 
-<file path=ppt/notesSlides/notesSlide10.xml><?xml version="1.0" encoding="utf-8"?>
-<p:notes xmlns:a="http://schemas.openxmlformats.org/drawingml/2006/main" xmlns:r="http://schemas.openxmlformats.org/officeDocument/2006/relationships" xmlns:p="http://schemas.openxmlformats.org/presentationml/2006/main">
-  <p:cSld>
-    <p:spTree>
-      <p:nvGrpSpPr>
-        <p:cNvPr id="1" name=""/>
-        <p:cNvGrpSpPr/>
-        <p:nvPr/>
-      </p:nvGrpSpPr>
-      <p:grpSpPr>
-        <a:xfrm>
-          <a:off x="0" y="0"/>
-          <a:ext cx="0" cy="0"/>
-          <a:chOff x="0" y="0"/>
-          <a:chExt cx="0" cy="0"/>
-        </a:xfrm>
-      </p:grpSpPr>
-      <p:sp>
-        <p:nvSpPr>
-          <p:cNvPr id="2" name="Slide Image Placeholder 1"/>
-          <p:cNvSpPr>
-            <a:spLocks noGrp="1" noRot="1" noChangeAspect="1"/>
-          </p:cNvSpPr>
-          <p:nvPr>
-            <p:ph type="sldImg"/>
-          </p:nvPr>
-        </p:nvSpPr>
-        <p:spPr/>
-      </p:sp>
-      <p:sp>
-        <p:nvSpPr>
-          <p:cNvPr id="3" name="Notes Placeholder 2"/>
-          <p:cNvSpPr>
-            <a:spLocks noGrp="1"/>
-          </p:cNvSpPr>
-          <p:nvPr>
-            <p:ph type="body" idx="1"/>
-          </p:nvPr>
-        </p:nvSpPr>
-        <p:spPr/>
-        <p:txBody>
-          <a:bodyPr/>
-          <a:lstStyle/>
-          <a:p>
-            <a:r>
-              <a:rPr lang="en-US" dirty="0"/>
-              <a:t>EXPLAIN</a:t>
-            </a:r>
-          </a:p>
-        </p:txBody>
-      </p:sp>
-      <p:sp>
-        <p:nvSpPr>
-          <p:cNvPr id="4" name="Slide Number Placeholder 3"/>
-          <p:cNvSpPr>
-            <a:spLocks noGrp="1"/>
-          </p:cNvSpPr>
-          <p:nvPr>
-            <p:ph type="sldNum" sz="quarter" idx="5"/>
-          </p:nvPr>
-        </p:nvSpPr>
-        <p:spPr/>
-        <p:txBody>
-          <a:bodyPr/>
-          <a:lstStyle/>
-          <a:p>
-            <a:fld id="{117D17FD-8842-8E4F-8C3E-EC8B634B2D5A}" type="slidenum">
-              <a:rPr lang="en-US" smtClean="0"/>
-              <a:t>32</a:t>
-            </a:fld>
-            <a:endParaRPr lang="en-US"/>
-          </a:p>
-        </p:txBody>
-      </p:sp>
-    </p:spTree>
-    <p:extLst>
-      <p:ext uri="{BB962C8B-B14F-4D97-AF65-F5344CB8AC3E}">
-        <p14:creationId xmlns:p14="http://schemas.microsoft.com/office/powerpoint/2010/main" val="492396201"/>
-      </p:ext>
-    </p:extLst>
-  </p:cSld>
-  <p:clrMapOvr>
-    <a:masterClrMapping/>
-  </p:clrMapOvr>
-</p:notes>
-</file>
-
 <file path=ppt/notesSlides/notesSlide2.xml><?xml version="1.0" encoding="utf-8"?>
 <p:notes xmlns:a="http://schemas.openxmlformats.org/drawingml/2006/main" xmlns:r="http://schemas.openxmlformats.org/officeDocument/2006/relationships" xmlns:p="http://schemas.openxmlformats.org/presentationml/2006/main">
   <p:cSld>
@@ -7144,7 +7052,7 @@
           <a:p>
             <a:fld id="{117D17FD-8842-8E4F-8C3E-EC8B634B2D5A}" type="slidenum">
               <a:rPr lang="en-US" smtClean="0"/>
-              <a:t>4</a:t>
+              <a:t>5</a:t>
             </a:fld>
             <a:endParaRPr lang="en-US"/>
           </a:p>
@@ -8043,7 +7951,7 @@
           <a:p>
             <a:fld id="{1BF61C71-767E-B84C-BFB3-7B18856D27F4}" type="datetimeFigureOut">
               <a:rPr lang="en-US" smtClean="0"/>
-              <a:t>8/31/26</a:t>
+              <a:t>9/1/2026</a:t>
             </a:fld>
             <a:endParaRPr lang="en-US"/>
           </a:p>
@@ -8251,7 +8159,7 @@
           <a:p>
             <a:fld id="{1BF61C71-767E-B84C-BFB3-7B18856D27F4}" type="datetimeFigureOut">
               <a:rPr lang="en-US" smtClean="0"/>
-              <a:t>8/31/26</a:t>
+              <a:t>9/1/2026</a:t>
             </a:fld>
             <a:endParaRPr lang="en-US"/>
           </a:p>
@@ -8469,7 +8377,7 @@
           <a:p>
             <a:fld id="{1BF61C71-767E-B84C-BFB3-7B18856D27F4}" type="datetimeFigureOut">
               <a:rPr lang="en-US" smtClean="0"/>
-              <a:t>8/31/26</a:t>
+              <a:t>9/1/2026</a:t>
             </a:fld>
             <a:endParaRPr lang="en-US"/>
           </a:p>
@@ -8677,7 +8585,7 @@
           <a:p>
             <a:fld id="{1BF61C71-767E-B84C-BFB3-7B18856D27F4}" type="datetimeFigureOut">
               <a:rPr lang="en-US" smtClean="0"/>
-              <a:t>8/31/26</a:t>
+              <a:t>9/1/2026</a:t>
             </a:fld>
             <a:endParaRPr lang="en-US"/>
           </a:p>
@@ -8961,7 +8869,7 @@
           <a:p>
             <a:fld id="{1BF61C71-767E-B84C-BFB3-7B18856D27F4}" type="datetimeFigureOut">
               <a:rPr lang="en-US" smtClean="0"/>
-              <a:t>8/31/26</a:t>
+              <a:t>9/1/2026</a:t>
             </a:fld>
             <a:endParaRPr lang="en-US"/>
           </a:p>
@@ -9237,7 +9145,7 @@
           <a:p>
             <a:fld id="{1BF61C71-767E-B84C-BFB3-7B18856D27F4}" type="datetimeFigureOut">
               <a:rPr lang="en-US" smtClean="0"/>
-              <a:t>8/31/26</a:t>
+              <a:t>9/1/2026</a:t>
             </a:fld>
             <a:endParaRPr lang="en-US"/>
           </a:p>
@@ -9660,7 +9568,7 @@
           <a:p>
             <a:fld id="{1BF61C71-767E-B84C-BFB3-7B18856D27F4}" type="datetimeFigureOut">
               <a:rPr lang="en-US" smtClean="0"/>
-              <a:t>8/31/26</a:t>
+              <a:t>9/1/2026</a:t>
             </a:fld>
             <a:endParaRPr lang="en-US"/>
           </a:p>
@@ -9810,7 +9718,7 @@
           <a:p>
             <a:fld id="{1BF61C71-767E-B84C-BFB3-7B18856D27F4}" type="datetimeFigureOut">
               <a:rPr lang="en-US" smtClean="0"/>
-              <a:t>8/31/26</a:t>
+              <a:t>9/1/2026</a:t>
             </a:fld>
             <a:endParaRPr lang="en-US"/>
           </a:p>
@@ -9931,7 +9839,7 @@
           <a:p>
             <a:fld id="{1BF61C71-767E-B84C-BFB3-7B18856D27F4}" type="datetimeFigureOut">
               <a:rPr lang="en-US" smtClean="0"/>
-              <a:t>8/31/26</a:t>
+              <a:t>9/1/2026</a:t>
             </a:fld>
             <a:endParaRPr lang="en-US"/>
           </a:p>
@@ -10252,7 +10160,7 @@
           <a:p>
             <a:fld id="{1BF61C71-767E-B84C-BFB3-7B18856D27F4}" type="datetimeFigureOut">
               <a:rPr lang="en-US" smtClean="0"/>
-              <a:t>8/31/26</a:t>
+              <a:t>9/1/2026</a:t>
             </a:fld>
             <a:endParaRPr lang="en-US"/>
           </a:p>
@@ -10549,7 +10457,7 @@
           <a:p>
             <a:fld id="{1BF61C71-767E-B84C-BFB3-7B18856D27F4}" type="datetimeFigureOut">
               <a:rPr lang="en-US" smtClean="0"/>
-              <a:t>8/31/26</a:t>
+              <a:t>9/1/2026</a:t>
             </a:fld>
             <a:endParaRPr lang="en-US"/>
           </a:p>
@@ -10803,7 +10711,7 @@
           <a:p>
             <a:fld id="{1BF61C71-767E-B84C-BFB3-7B18856D27F4}" type="datetimeFigureOut">
               <a:rPr lang="en-US" smtClean="0"/>
-              <a:t>8/31/26</a:t>
+              <a:t>9/1/2026</a:t>
             </a:fld>
             <a:endParaRPr lang="en-US"/>
           </a:p>
@@ -11494,6 +11402,325 @@
   <p:clrMapOvr>
     <a:masterClrMapping/>
   </p:clrMapOvr>
+  <p:timing>
+    <p:tnLst>
+      <p:par>
+        <p:cTn id="1" dur="indefinite" restart="never" nodeType="tmRoot">
+          <p:childTnLst>
+            <p:seq concurrent="1" nextAc="seek">
+              <p:cTn id="2" dur="indefinite" nodeType="mainSeq">
+                <p:childTnLst>
+                  <p:par>
+                    <p:cTn id="3" fill="hold">
+                      <p:stCondLst>
+                        <p:cond delay="indefinite"/>
+                      </p:stCondLst>
+                      <p:childTnLst>
+                        <p:par>
+                          <p:cTn id="4" fill="hold">
+                            <p:stCondLst>
+                              <p:cond delay="0"/>
+                            </p:stCondLst>
+                            <p:childTnLst>
+                              <p:par>
+                                <p:cTn id="5" presetID="1" presetClass="entr" presetSubtype="0" fill="hold" grpId="0" nodeType="clickEffect">
+                                  <p:stCondLst>
+                                    <p:cond delay="0"/>
+                                  </p:stCondLst>
+                                  <p:childTnLst>
+                                    <p:set>
+                                      <p:cBhvr>
+                                        <p:cTn id="6" dur="1" fill="hold">
+                                          <p:stCondLst>
+                                            <p:cond delay="0"/>
+                                          </p:stCondLst>
+                                        </p:cTn>
+                                        <p:tgtEl>
+                                          <p:spTgt spid="3">
+                                            <p:txEl>
+                                              <p:pRg st="0" end="0"/>
+                                            </p:txEl>
+                                          </p:spTgt>
+                                        </p:tgtEl>
+                                        <p:attrNameLst>
+                                          <p:attrName>style.visibility</p:attrName>
+                                        </p:attrNameLst>
+                                      </p:cBhvr>
+                                      <p:to>
+                                        <p:strVal val="visible"/>
+                                      </p:to>
+                                    </p:set>
+                                  </p:childTnLst>
+                                </p:cTn>
+                              </p:par>
+                              <p:par>
+                                <p:cTn id="7" presetID="1" presetClass="entr" presetSubtype="0" fill="hold" grpId="0" nodeType="withEffect">
+                                  <p:stCondLst>
+                                    <p:cond delay="0"/>
+                                  </p:stCondLst>
+                                  <p:childTnLst>
+                                    <p:set>
+                                      <p:cBhvr>
+                                        <p:cTn id="8" dur="1" fill="hold">
+                                          <p:stCondLst>
+                                            <p:cond delay="0"/>
+                                          </p:stCondLst>
+                                        </p:cTn>
+                                        <p:tgtEl>
+                                          <p:spTgt spid="3">
+                                            <p:txEl>
+                                              <p:pRg st="1" end="1"/>
+                                            </p:txEl>
+                                          </p:spTgt>
+                                        </p:tgtEl>
+                                        <p:attrNameLst>
+                                          <p:attrName>style.visibility</p:attrName>
+                                        </p:attrNameLst>
+                                      </p:cBhvr>
+                                      <p:to>
+                                        <p:strVal val="visible"/>
+                                      </p:to>
+                                    </p:set>
+                                  </p:childTnLst>
+                                </p:cTn>
+                              </p:par>
+                            </p:childTnLst>
+                          </p:cTn>
+                        </p:par>
+                      </p:childTnLst>
+                    </p:cTn>
+                  </p:par>
+                  <p:par>
+                    <p:cTn id="9" fill="hold">
+                      <p:stCondLst>
+                        <p:cond delay="indefinite"/>
+                      </p:stCondLst>
+                      <p:childTnLst>
+                        <p:par>
+                          <p:cTn id="10" fill="hold">
+                            <p:stCondLst>
+                              <p:cond delay="0"/>
+                            </p:stCondLst>
+                            <p:childTnLst>
+                              <p:par>
+                                <p:cTn id="11" presetID="1" presetClass="entr" presetSubtype="0" fill="hold" grpId="0" nodeType="clickEffect">
+                                  <p:stCondLst>
+                                    <p:cond delay="0"/>
+                                  </p:stCondLst>
+                                  <p:childTnLst>
+                                    <p:set>
+                                      <p:cBhvr>
+                                        <p:cTn id="12" dur="1" fill="hold">
+                                          <p:stCondLst>
+                                            <p:cond delay="0"/>
+                                          </p:stCondLst>
+                                        </p:cTn>
+                                        <p:tgtEl>
+                                          <p:spTgt spid="3">
+                                            <p:txEl>
+                                              <p:pRg st="3" end="3"/>
+                                            </p:txEl>
+                                          </p:spTgt>
+                                        </p:tgtEl>
+                                        <p:attrNameLst>
+                                          <p:attrName>style.visibility</p:attrName>
+                                        </p:attrNameLst>
+                                      </p:cBhvr>
+                                      <p:to>
+                                        <p:strVal val="visible"/>
+                                      </p:to>
+                                    </p:set>
+                                  </p:childTnLst>
+                                </p:cTn>
+                              </p:par>
+                              <p:par>
+                                <p:cTn id="13" presetID="1" presetClass="entr" presetSubtype="0" fill="hold" grpId="0" nodeType="withEffect">
+                                  <p:stCondLst>
+                                    <p:cond delay="0"/>
+                                  </p:stCondLst>
+                                  <p:childTnLst>
+                                    <p:set>
+                                      <p:cBhvr>
+                                        <p:cTn id="14" dur="1" fill="hold">
+                                          <p:stCondLst>
+                                            <p:cond delay="0"/>
+                                          </p:stCondLst>
+                                        </p:cTn>
+                                        <p:tgtEl>
+                                          <p:spTgt spid="3">
+                                            <p:txEl>
+                                              <p:pRg st="4" end="4"/>
+                                            </p:txEl>
+                                          </p:spTgt>
+                                        </p:tgtEl>
+                                        <p:attrNameLst>
+                                          <p:attrName>style.visibility</p:attrName>
+                                        </p:attrNameLst>
+                                      </p:cBhvr>
+                                      <p:to>
+                                        <p:strVal val="visible"/>
+                                      </p:to>
+                                    </p:set>
+                                  </p:childTnLst>
+                                </p:cTn>
+                              </p:par>
+                            </p:childTnLst>
+                          </p:cTn>
+                        </p:par>
+                      </p:childTnLst>
+                    </p:cTn>
+                  </p:par>
+                  <p:par>
+                    <p:cTn id="15" fill="hold">
+                      <p:stCondLst>
+                        <p:cond delay="indefinite"/>
+                      </p:stCondLst>
+                      <p:childTnLst>
+                        <p:par>
+                          <p:cTn id="16" fill="hold">
+                            <p:stCondLst>
+                              <p:cond delay="0"/>
+                            </p:stCondLst>
+                            <p:childTnLst>
+                              <p:par>
+                                <p:cTn id="17" presetID="1" presetClass="entr" presetSubtype="0" fill="hold" grpId="0" nodeType="clickEffect">
+                                  <p:stCondLst>
+                                    <p:cond delay="0"/>
+                                  </p:stCondLst>
+                                  <p:childTnLst>
+                                    <p:set>
+                                      <p:cBhvr>
+                                        <p:cTn id="18" dur="1" fill="hold">
+                                          <p:stCondLst>
+                                            <p:cond delay="0"/>
+                                          </p:stCondLst>
+                                        </p:cTn>
+                                        <p:tgtEl>
+                                          <p:spTgt spid="3">
+                                            <p:txEl>
+                                              <p:pRg st="6" end="6"/>
+                                            </p:txEl>
+                                          </p:spTgt>
+                                        </p:tgtEl>
+                                        <p:attrNameLst>
+                                          <p:attrName>style.visibility</p:attrName>
+                                        </p:attrNameLst>
+                                      </p:cBhvr>
+                                      <p:to>
+                                        <p:strVal val="visible"/>
+                                      </p:to>
+                                    </p:set>
+                                  </p:childTnLst>
+                                </p:cTn>
+                              </p:par>
+                              <p:par>
+                                <p:cTn id="19" presetID="1" presetClass="entr" presetSubtype="0" fill="hold" grpId="0" nodeType="withEffect">
+                                  <p:stCondLst>
+                                    <p:cond delay="0"/>
+                                  </p:stCondLst>
+                                  <p:childTnLst>
+                                    <p:set>
+                                      <p:cBhvr>
+                                        <p:cTn id="20" dur="1" fill="hold">
+                                          <p:stCondLst>
+                                            <p:cond delay="0"/>
+                                          </p:stCondLst>
+                                        </p:cTn>
+                                        <p:tgtEl>
+                                          <p:spTgt spid="3">
+                                            <p:txEl>
+                                              <p:pRg st="7" end="7"/>
+                                            </p:txEl>
+                                          </p:spTgt>
+                                        </p:tgtEl>
+                                        <p:attrNameLst>
+                                          <p:attrName>style.visibility</p:attrName>
+                                        </p:attrNameLst>
+                                      </p:cBhvr>
+                                      <p:to>
+                                        <p:strVal val="visible"/>
+                                      </p:to>
+                                    </p:set>
+                                  </p:childTnLst>
+                                </p:cTn>
+                              </p:par>
+                            </p:childTnLst>
+                          </p:cTn>
+                        </p:par>
+                      </p:childTnLst>
+                    </p:cTn>
+                  </p:par>
+                  <p:par>
+                    <p:cTn id="21" fill="hold">
+                      <p:stCondLst>
+                        <p:cond delay="indefinite"/>
+                      </p:stCondLst>
+                      <p:childTnLst>
+                        <p:par>
+                          <p:cTn id="22" fill="hold">
+                            <p:stCondLst>
+                              <p:cond delay="0"/>
+                            </p:stCondLst>
+                            <p:childTnLst>
+                              <p:par>
+                                <p:cTn id="23" presetID="1" presetClass="entr" presetSubtype="0" fill="hold" grpId="0" nodeType="clickEffect">
+                                  <p:stCondLst>
+                                    <p:cond delay="0"/>
+                                  </p:stCondLst>
+                                  <p:childTnLst>
+                                    <p:set>
+                                      <p:cBhvr>
+                                        <p:cTn id="24" dur="1" fill="hold">
+                                          <p:stCondLst>
+                                            <p:cond delay="0"/>
+                                          </p:stCondLst>
+                                        </p:cTn>
+                                        <p:tgtEl>
+                                          <p:spTgt spid="4"/>
+                                        </p:tgtEl>
+                                        <p:attrNameLst>
+                                          <p:attrName>style.visibility</p:attrName>
+                                        </p:attrNameLst>
+                                      </p:cBhvr>
+                                      <p:to>
+                                        <p:strVal val="visible"/>
+                                      </p:to>
+                                    </p:set>
+                                  </p:childTnLst>
+                                </p:cTn>
+                              </p:par>
+                            </p:childTnLst>
+                          </p:cTn>
+                        </p:par>
+                      </p:childTnLst>
+                    </p:cTn>
+                  </p:par>
+                </p:childTnLst>
+              </p:cTn>
+              <p:prevCondLst>
+                <p:cond evt="onPrev" delay="0">
+                  <p:tgtEl>
+                    <p:sldTgt/>
+                  </p:tgtEl>
+                </p:cond>
+              </p:prevCondLst>
+              <p:nextCondLst>
+                <p:cond evt="onNext" delay="0">
+                  <p:tgtEl>
+                    <p:sldTgt/>
+                  </p:tgtEl>
+                </p:cond>
+              </p:nextCondLst>
+            </p:seq>
+          </p:childTnLst>
+        </p:cTn>
+      </p:par>
+    </p:tnLst>
+    <p:bldLst>
+      <p:bldP spid="3" grpId="0" build="p"/>
+      <p:bldP spid="4" grpId="0"/>
+    </p:bldLst>
+  </p:timing>
 </p:sld>
 </file>
 
@@ -11624,6 +11851,186 @@
   <p:clrMapOvr>
     <a:masterClrMapping/>
   </p:clrMapOvr>
+  <p:timing>
+    <p:tnLst>
+      <p:par>
+        <p:cTn id="1" dur="indefinite" restart="never" nodeType="tmRoot">
+          <p:childTnLst>
+            <p:seq concurrent="1" nextAc="seek">
+              <p:cTn id="2" dur="indefinite" nodeType="mainSeq">
+                <p:childTnLst>
+                  <p:par>
+                    <p:cTn id="3" fill="hold">
+                      <p:stCondLst>
+                        <p:cond delay="indefinite"/>
+                      </p:stCondLst>
+                      <p:childTnLst>
+                        <p:par>
+                          <p:cTn id="4" fill="hold">
+                            <p:stCondLst>
+                              <p:cond delay="0"/>
+                            </p:stCondLst>
+                            <p:childTnLst>
+                              <p:par>
+                                <p:cTn id="5" presetID="1" presetClass="entr" presetSubtype="0" fill="hold" grpId="0" nodeType="clickEffect">
+                                  <p:stCondLst>
+                                    <p:cond delay="0"/>
+                                  </p:stCondLst>
+                                  <p:childTnLst>
+                                    <p:set>
+                                      <p:cBhvr>
+                                        <p:cTn id="6" dur="1" fill="hold">
+                                          <p:stCondLst>
+                                            <p:cond delay="0"/>
+                                          </p:stCondLst>
+                                        </p:cTn>
+                                        <p:tgtEl>
+                                          <p:spTgt spid="3">
+                                            <p:txEl>
+                                              <p:pRg st="0" end="0"/>
+                                            </p:txEl>
+                                          </p:spTgt>
+                                        </p:tgtEl>
+                                        <p:attrNameLst>
+                                          <p:attrName>style.visibility</p:attrName>
+                                        </p:attrNameLst>
+                                      </p:cBhvr>
+                                      <p:to>
+                                        <p:strVal val="visible"/>
+                                      </p:to>
+                                    </p:set>
+                                  </p:childTnLst>
+                                </p:cTn>
+                              </p:par>
+                            </p:childTnLst>
+                          </p:cTn>
+                        </p:par>
+                      </p:childTnLst>
+                    </p:cTn>
+                  </p:par>
+                  <p:par>
+                    <p:cTn id="7" fill="hold">
+                      <p:stCondLst>
+                        <p:cond delay="indefinite"/>
+                      </p:stCondLst>
+                      <p:childTnLst>
+                        <p:par>
+                          <p:cTn id="8" fill="hold">
+                            <p:stCondLst>
+                              <p:cond delay="0"/>
+                            </p:stCondLst>
+                            <p:childTnLst>
+                              <p:par>
+                                <p:cTn id="9" presetID="1" presetClass="entr" presetSubtype="0" fill="hold" grpId="0" nodeType="clickEffect">
+                                  <p:stCondLst>
+                                    <p:cond delay="0"/>
+                                  </p:stCondLst>
+                                  <p:childTnLst>
+                                    <p:set>
+                                      <p:cBhvr>
+                                        <p:cTn id="10" dur="1" fill="hold">
+                                          <p:stCondLst>
+                                            <p:cond delay="0"/>
+                                          </p:stCondLst>
+                                        </p:cTn>
+                                        <p:tgtEl>
+                                          <p:spTgt spid="3">
+                                            <p:txEl>
+                                              <p:pRg st="2" end="2"/>
+                                            </p:txEl>
+                                          </p:spTgt>
+                                        </p:tgtEl>
+                                        <p:attrNameLst>
+                                          <p:attrName>style.visibility</p:attrName>
+                                        </p:attrNameLst>
+                                      </p:cBhvr>
+                                      <p:to>
+                                        <p:strVal val="visible"/>
+                                      </p:to>
+                                    </p:set>
+                                  </p:childTnLst>
+                                </p:cTn>
+                              </p:par>
+                            </p:childTnLst>
+                          </p:cTn>
+                        </p:par>
+                      </p:childTnLst>
+                    </p:cTn>
+                  </p:par>
+                  <p:par>
+                    <p:cTn id="11" fill="hold">
+                      <p:stCondLst>
+                        <p:cond delay="indefinite"/>
+                      </p:stCondLst>
+                      <p:childTnLst>
+                        <p:par>
+                          <p:cTn id="12" fill="hold">
+                            <p:stCondLst>
+                              <p:cond delay="0"/>
+                            </p:stCondLst>
+                            <p:childTnLst>
+                              <p:par>
+                                <p:cTn id="13" presetID="1" presetClass="entr" presetSubtype="0" fill="hold" grpId="0" nodeType="clickEffect">
+                                  <p:stCondLst>
+                                    <p:cond delay="0"/>
+                                  </p:stCondLst>
+                                  <p:childTnLst>
+                                    <p:set>
+                                      <p:cBhvr>
+                                        <p:cTn id="14" dur="1" fill="hold">
+                                          <p:stCondLst>
+                                            <p:cond delay="0"/>
+                                          </p:stCondLst>
+                                        </p:cTn>
+                                        <p:tgtEl>
+                                          <p:spTgt spid="3">
+                                            <p:txEl>
+                                              <p:pRg st="4" end="4"/>
+                                            </p:txEl>
+                                          </p:spTgt>
+                                        </p:tgtEl>
+                                        <p:attrNameLst>
+                                          <p:attrName>style.visibility</p:attrName>
+                                        </p:attrNameLst>
+                                      </p:cBhvr>
+                                      <p:to>
+                                        <p:strVal val="visible"/>
+                                      </p:to>
+                                    </p:set>
+                                  </p:childTnLst>
+                                </p:cTn>
+                              </p:par>
+                            </p:childTnLst>
+                          </p:cTn>
+                        </p:par>
+                      </p:childTnLst>
+                    </p:cTn>
+                  </p:par>
+                </p:childTnLst>
+              </p:cTn>
+              <p:prevCondLst>
+                <p:cond evt="onPrev" delay="0">
+                  <p:tgtEl>
+                    <p:sldTgt/>
+                  </p:tgtEl>
+                </p:cond>
+              </p:prevCondLst>
+              <p:nextCondLst>
+                <p:cond evt="onNext" delay="0">
+                  <p:tgtEl>
+                    <p:sldTgt/>
+                  </p:tgtEl>
+                </p:cond>
+              </p:nextCondLst>
+            </p:seq>
+          </p:childTnLst>
+        </p:cTn>
+      </p:par>
+    </p:tnLst>
+    <p:bldLst>
+      <p:bldP spid="3" grpId="0" build="p"/>
+    </p:bldLst>
+  </p:timing>
 </p:sld>
 </file>
 
@@ -11896,6 +12303,130 @@
   <p:clrMapOvr>
     <a:masterClrMapping/>
   </p:clrMapOvr>
+  <p:timing>
+    <p:tnLst>
+      <p:par>
+        <p:cTn id="1" dur="indefinite" restart="never" nodeType="tmRoot">
+          <p:childTnLst>
+            <p:seq concurrent="1" nextAc="seek">
+              <p:cTn id="2" dur="indefinite" nodeType="mainSeq">
+                <p:childTnLst>
+                  <p:par>
+                    <p:cTn id="3" fill="hold">
+                      <p:stCondLst>
+                        <p:cond delay="indefinite"/>
+                      </p:stCondLst>
+                      <p:childTnLst>
+                        <p:par>
+                          <p:cTn id="4" fill="hold">
+                            <p:stCondLst>
+                              <p:cond delay="0"/>
+                            </p:stCondLst>
+                            <p:childTnLst>
+                              <p:par>
+                                <p:cTn id="5" presetID="1" presetClass="entr" presetSubtype="0" fill="hold" grpId="0" nodeType="clickEffect">
+                                  <p:stCondLst>
+                                    <p:cond delay="0"/>
+                                  </p:stCondLst>
+                                  <p:childTnLst>
+                                    <p:set>
+                                      <p:cBhvr>
+                                        <p:cTn id="6" dur="1" fill="hold">
+                                          <p:stCondLst>
+                                            <p:cond delay="0"/>
+                                          </p:stCondLst>
+                                        </p:cTn>
+                                        <p:tgtEl>
+                                          <p:spTgt spid="4"/>
+                                        </p:tgtEl>
+                                        <p:attrNameLst>
+                                          <p:attrName>style.visibility</p:attrName>
+                                        </p:attrNameLst>
+                                      </p:cBhvr>
+                                      <p:to>
+                                        <p:strVal val="visible"/>
+                                      </p:to>
+                                    </p:set>
+                                  </p:childTnLst>
+                                </p:cTn>
+                              </p:par>
+                            </p:childTnLst>
+                          </p:cTn>
+                        </p:par>
+                      </p:childTnLst>
+                    </p:cTn>
+                  </p:par>
+                  <p:par>
+                    <p:cTn id="7" fill="hold">
+                      <p:stCondLst>
+                        <p:cond delay="indefinite"/>
+                      </p:stCondLst>
+                      <p:childTnLst>
+                        <p:par>
+                          <p:cTn id="8" fill="hold">
+                            <p:stCondLst>
+                              <p:cond delay="0"/>
+                            </p:stCondLst>
+                            <p:childTnLst>
+                              <p:par>
+                                <p:cTn id="9" presetID="1" presetClass="entr" presetSubtype="0" fill="hold" grpId="0" nodeType="clickEffect">
+                                  <p:stCondLst>
+                                    <p:cond delay="0"/>
+                                  </p:stCondLst>
+                                  <p:childTnLst>
+                                    <p:set>
+                                      <p:cBhvr>
+                                        <p:cTn id="10" dur="1" fill="hold">
+                                          <p:stCondLst>
+                                            <p:cond delay="0"/>
+                                          </p:stCondLst>
+                                        </p:cTn>
+                                        <p:tgtEl>
+                                          <p:spTgt spid="5"/>
+                                        </p:tgtEl>
+                                        <p:attrNameLst>
+                                          <p:attrName>style.visibility</p:attrName>
+                                        </p:attrNameLst>
+                                      </p:cBhvr>
+                                      <p:to>
+                                        <p:strVal val="visible"/>
+                                      </p:to>
+                                    </p:set>
+                                  </p:childTnLst>
+                                </p:cTn>
+                              </p:par>
+                            </p:childTnLst>
+                          </p:cTn>
+                        </p:par>
+                      </p:childTnLst>
+                    </p:cTn>
+                  </p:par>
+                </p:childTnLst>
+              </p:cTn>
+              <p:prevCondLst>
+                <p:cond evt="onPrev" delay="0">
+                  <p:tgtEl>
+                    <p:sldTgt/>
+                  </p:tgtEl>
+                </p:cond>
+              </p:prevCondLst>
+              <p:nextCondLst>
+                <p:cond evt="onNext" delay="0">
+                  <p:tgtEl>
+                    <p:sldTgt/>
+                  </p:tgtEl>
+                </p:cond>
+              </p:nextCondLst>
+            </p:seq>
+          </p:childTnLst>
+        </p:cTn>
+      </p:par>
+    </p:tnLst>
+    <p:bldLst>
+      <p:bldP spid="4" grpId="0" animBg="1"/>
+      <p:bldP spid="5" grpId="0" animBg="1"/>
+    </p:bldLst>
+  </p:timing>
 </p:sld>
 </file>
 
@@ -12075,6 +12606,245 @@
   <p:clrMapOvr>
     <a:masterClrMapping/>
   </p:clrMapOvr>
+  <p:timing>
+    <p:tnLst>
+      <p:par>
+        <p:cTn id="1" dur="indefinite" restart="never" nodeType="tmRoot">
+          <p:childTnLst>
+            <p:seq concurrent="1" nextAc="seek">
+              <p:cTn id="2" dur="indefinite" nodeType="mainSeq">
+                <p:childTnLst>
+                  <p:par>
+                    <p:cTn id="3" fill="hold">
+                      <p:stCondLst>
+                        <p:cond delay="indefinite"/>
+                      </p:stCondLst>
+                      <p:childTnLst>
+                        <p:par>
+                          <p:cTn id="4" fill="hold">
+                            <p:stCondLst>
+                              <p:cond delay="0"/>
+                            </p:stCondLst>
+                            <p:childTnLst>
+                              <p:par>
+                                <p:cTn id="5" presetID="1" presetClass="entr" presetSubtype="0" fill="hold" grpId="0" nodeType="clickEffect">
+                                  <p:stCondLst>
+                                    <p:cond delay="0"/>
+                                  </p:stCondLst>
+                                  <p:childTnLst>
+                                    <p:set>
+                                      <p:cBhvr>
+                                        <p:cTn id="6" dur="1" fill="hold">
+                                          <p:stCondLst>
+                                            <p:cond delay="0"/>
+                                          </p:stCondLst>
+                                        </p:cTn>
+                                        <p:tgtEl>
+                                          <p:spTgt spid="3">
+                                            <p:txEl>
+                                              <p:pRg st="0" end="0"/>
+                                            </p:txEl>
+                                          </p:spTgt>
+                                        </p:tgtEl>
+                                        <p:attrNameLst>
+                                          <p:attrName>style.visibility</p:attrName>
+                                        </p:attrNameLst>
+                                      </p:cBhvr>
+                                      <p:to>
+                                        <p:strVal val="visible"/>
+                                      </p:to>
+                                    </p:set>
+                                  </p:childTnLst>
+                                </p:cTn>
+                              </p:par>
+                            </p:childTnLst>
+                          </p:cTn>
+                        </p:par>
+                      </p:childTnLst>
+                    </p:cTn>
+                  </p:par>
+                  <p:par>
+                    <p:cTn id="7" fill="hold">
+                      <p:stCondLst>
+                        <p:cond delay="indefinite"/>
+                      </p:stCondLst>
+                      <p:childTnLst>
+                        <p:par>
+                          <p:cTn id="8" fill="hold">
+                            <p:stCondLst>
+                              <p:cond delay="0"/>
+                            </p:stCondLst>
+                            <p:childTnLst>
+                              <p:par>
+                                <p:cTn id="9" presetID="1" presetClass="entr" presetSubtype="0" fill="hold" grpId="0" nodeType="clickEffect">
+                                  <p:stCondLst>
+                                    <p:cond delay="0"/>
+                                  </p:stCondLst>
+                                  <p:childTnLst>
+                                    <p:set>
+                                      <p:cBhvr>
+                                        <p:cTn id="10" dur="1" fill="hold">
+                                          <p:stCondLst>
+                                            <p:cond delay="0"/>
+                                          </p:stCondLst>
+                                        </p:cTn>
+                                        <p:tgtEl>
+                                          <p:spTgt spid="3">
+                                            <p:txEl>
+                                              <p:pRg st="2" end="2"/>
+                                            </p:txEl>
+                                          </p:spTgt>
+                                        </p:tgtEl>
+                                        <p:attrNameLst>
+                                          <p:attrName>style.visibility</p:attrName>
+                                        </p:attrNameLst>
+                                      </p:cBhvr>
+                                      <p:to>
+                                        <p:strVal val="visible"/>
+                                      </p:to>
+                                    </p:set>
+                                  </p:childTnLst>
+                                </p:cTn>
+                              </p:par>
+                              <p:par>
+                                <p:cTn id="11" presetID="1" presetClass="entr" presetSubtype="0" fill="hold" grpId="0" nodeType="withEffect">
+                                  <p:stCondLst>
+                                    <p:cond delay="0"/>
+                                  </p:stCondLst>
+                                  <p:childTnLst>
+                                    <p:set>
+                                      <p:cBhvr>
+                                        <p:cTn id="12" dur="1" fill="hold">
+                                          <p:stCondLst>
+                                            <p:cond delay="0"/>
+                                          </p:stCondLst>
+                                        </p:cTn>
+                                        <p:tgtEl>
+                                          <p:spTgt spid="3">
+                                            <p:txEl>
+                                              <p:pRg st="4" end="4"/>
+                                            </p:txEl>
+                                          </p:spTgt>
+                                        </p:tgtEl>
+                                        <p:attrNameLst>
+                                          <p:attrName>style.visibility</p:attrName>
+                                        </p:attrNameLst>
+                                      </p:cBhvr>
+                                      <p:to>
+                                        <p:strVal val="visible"/>
+                                      </p:to>
+                                    </p:set>
+                                  </p:childTnLst>
+                                </p:cTn>
+                              </p:par>
+                              <p:par>
+                                <p:cTn id="13" presetID="1" presetClass="entr" presetSubtype="0" fill="hold" grpId="0" nodeType="withEffect">
+                                  <p:stCondLst>
+                                    <p:cond delay="0"/>
+                                  </p:stCondLst>
+                                  <p:childTnLst>
+                                    <p:set>
+                                      <p:cBhvr>
+                                        <p:cTn id="14" dur="1" fill="hold">
+                                          <p:stCondLst>
+                                            <p:cond delay="0"/>
+                                          </p:stCondLst>
+                                        </p:cTn>
+                                        <p:tgtEl>
+                                          <p:spTgt spid="3">
+                                            <p:txEl>
+                                              <p:pRg st="6" end="6"/>
+                                            </p:txEl>
+                                          </p:spTgt>
+                                        </p:tgtEl>
+                                        <p:attrNameLst>
+                                          <p:attrName>style.visibility</p:attrName>
+                                        </p:attrNameLst>
+                                      </p:cBhvr>
+                                      <p:to>
+                                        <p:strVal val="visible"/>
+                                      </p:to>
+                                    </p:set>
+                                  </p:childTnLst>
+                                </p:cTn>
+                              </p:par>
+                            </p:childTnLst>
+                          </p:cTn>
+                        </p:par>
+                      </p:childTnLst>
+                    </p:cTn>
+                  </p:par>
+                  <p:par>
+                    <p:cTn id="15" fill="hold">
+                      <p:stCondLst>
+                        <p:cond delay="indefinite"/>
+                      </p:stCondLst>
+                      <p:childTnLst>
+                        <p:par>
+                          <p:cTn id="16" fill="hold">
+                            <p:stCondLst>
+                              <p:cond delay="0"/>
+                            </p:stCondLst>
+                            <p:childTnLst>
+                              <p:par>
+                                <p:cTn id="17" presetID="1" presetClass="entr" presetSubtype="0" fill="hold" grpId="0" nodeType="clickEffect">
+                                  <p:stCondLst>
+                                    <p:cond delay="0"/>
+                                  </p:stCondLst>
+                                  <p:childTnLst>
+                                    <p:set>
+                                      <p:cBhvr>
+                                        <p:cTn id="18" dur="1" fill="hold">
+                                          <p:stCondLst>
+                                            <p:cond delay="0"/>
+                                          </p:stCondLst>
+                                        </p:cTn>
+                                        <p:tgtEl>
+                                          <p:spTgt spid="4"/>
+                                        </p:tgtEl>
+                                        <p:attrNameLst>
+                                          <p:attrName>style.visibility</p:attrName>
+                                        </p:attrNameLst>
+                                      </p:cBhvr>
+                                      <p:to>
+                                        <p:strVal val="visible"/>
+                                      </p:to>
+                                    </p:set>
+                                  </p:childTnLst>
+                                </p:cTn>
+                              </p:par>
+                            </p:childTnLst>
+                          </p:cTn>
+                        </p:par>
+                      </p:childTnLst>
+                    </p:cTn>
+                  </p:par>
+                </p:childTnLst>
+              </p:cTn>
+              <p:prevCondLst>
+                <p:cond evt="onPrev" delay="0">
+                  <p:tgtEl>
+                    <p:sldTgt/>
+                  </p:tgtEl>
+                </p:cond>
+              </p:prevCondLst>
+              <p:nextCondLst>
+                <p:cond evt="onNext" delay="0">
+                  <p:tgtEl>
+                    <p:sldTgt/>
+                  </p:tgtEl>
+                </p:cond>
+              </p:nextCondLst>
+            </p:seq>
+          </p:childTnLst>
+        </p:cTn>
+      </p:par>
+    </p:tnLst>
+    <p:bldLst>
+      <p:bldP spid="3" grpId="0" uiExpand="1" build="p"/>
+      <p:bldP spid="4" grpId="0"/>
+    </p:bldLst>
+  </p:timing>
 </p:sld>
 </file>
 
@@ -12116,7 +12886,10 @@
           <a:bodyPr/>
           <a:lstStyle/>
           <a:p>
-            <a:endParaRPr lang="en-US" dirty="0"/>
+            <a:r>
+              <a:rPr lang="en-US" dirty="0"/>
+              <a:t>Return to your question</a:t>
+            </a:r>
           </a:p>
         </p:txBody>
       </p:sp>
@@ -12168,52 +12941,21 @@
             </a:r>
           </a:p>
           <a:p>
-            <a:pPr lvl="1"/>
-            <a:endParaRPr lang="en-US" dirty="0"/>
-          </a:p>
-        </p:txBody>
-      </p:sp>
-      <p:sp>
-        <p:nvSpPr>
-          <p:cNvPr id="5" name="TextBox 4">
-            <a:extLst>
-              <a:ext uri="{FF2B5EF4-FFF2-40B4-BE49-F238E27FC236}">
-                <a16:creationId xmlns:a16="http://schemas.microsoft.com/office/drawing/2014/main" id="{045FE3CE-CCD9-81B0-25CC-B7A223ACD2BF}"/>
-              </a:ext>
-            </a:extLst>
-          </p:cNvPr>
-          <p:cNvSpPr txBox="1"/>
-          <p:nvPr/>
-        </p:nvSpPr>
-        <p:spPr>
-          <a:xfrm>
-            <a:off x="3048000" y="4186489"/>
-            <a:ext cx="6096000" cy="646331"/>
-          </a:xfrm>
-          <a:prstGeom prst="rect">
-            <a:avLst/>
-          </a:prstGeom>
-          <a:noFill/>
-        </p:spPr>
-        <p:txBody>
-          <a:bodyPr wrap="square">
-            <a:spAutoFit/>
-          </a:bodyPr>
-          <a:lstStyle/>
-          <a:p>
-            <a:r>
-              <a:rPr lang="en-GB" dirty="0">
-                <a:solidFill>
-                  <a:srgbClr val="FF0000"/>
-                </a:solidFill>
-              </a:rPr>
-              <a:t>What information would you want before making that decision?</a:t>
-            </a:r>
-            <a:endParaRPr lang="en-US" dirty="0">
+            <a:endParaRPr lang="en-GB" dirty="0">
               <a:solidFill>
                 <a:srgbClr val="FF0000"/>
               </a:solidFill>
             </a:endParaRPr>
+          </a:p>
+          <a:p>
+            <a:r>
+              <a:rPr lang="en-GB" dirty="0"/>
+              <a:t>What information would you want before making that decision?</a:t>
+            </a:r>
+            <a:endParaRPr lang="en-US" dirty="0"/>
+          </a:p>
+          <a:p>
+            <a:endParaRPr lang="en-US" dirty="0"/>
           </a:p>
         </p:txBody>
       </p:sp>
@@ -12465,6 +13207,235 @@
   <p:clrMapOvr>
     <a:masterClrMapping/>
   </p:clrMapOvr>
+  <p:timing>
+    <p:tnLst>
+      <p:par>
+        <p:cTn id="1" dur="indefinite" restart="never" nodeType="tmRoot">
+          <p:childTnLst>
+            <p:seq concurrent="1" nextAc="seek">
+              <p:cTn id="2" dur="indefinite" nodeType="mainSeq">
+                <p:childTnLst>
+                  <p:par>
+                    <p:cTn id="3" fill="hold">
+                      <p:stCondLst>
+                        <p:cond delay="indefinite"/>
+                      </p:stCondLst>
+                      <p:childTnLst>
+                        <p:par>
+                          <p:cTn id="4" fill="hold">
+                            <p:stCondLst>
+                              <p:cond delay="0"/>
+                            </p:stCondLst>
+                            <p:childTnLst>
+                              <p:par>
+                                <p:cTn id="5" presetID="1" presetClass="entr" presetSubtype="0" fill="hold" grpId="0" nodeType="clickEffect">
+                                  <p:stCondLst>
+                                    <p:cond delay="0"/>
+                                  </p:stCondLst>
+                                  <p:childTnLst>
+                                    <p:set>
+                                      <p:cBhvr>
+                                        <p:cTn id="6" dur="1" fill="hold">
+                                          <p:stCondLst>
+                                            <p:cond delay="0"/>
+                                          </p:stCondLst>
+                                        </p:cTn>
+                                        <p:tgtEl>
+                                          <p:spTgt spid="3">
+                                            <p:txEl>
+                                              <p:pRg st="2" end="2"/>
+                                            </p:txEl>
+                                          </p:spTgt>
+                                        </p:tgtEl>
+                                        <p:attrNameLst>
+                                          <p:attrName>style.visibility</p:attrName>
+                                        </p:attrNameLst>
+                                      </p:cBhvr>
+                                      <p:to>
+                                        <p:strVal val="visible"/>
+                                      </p:to>
+                                    </p:set>
+                                  </p:childTnLst>
+                                </p:cTn>
+                              </p:par>
+                            </p:childTnLst>
+                          </p:cTn>
+                        </p:par>
+                      </p:childTnLst>
+                    </p:cTn>
+                  </p:par>
+                  <p:par>
+                    <p:cTn id="7" fill="hold">
+                      <p:stCondLst>
+                        <p:cond delay="indefinite"/>
+                      </p:stCondLst>
+                      <p:childTnLst>
+                        <p:par>
+                          <p:cTn id="8" fill="hold">
+                            <p:stCondLst>
+                              <p:cond delay="0"/>
+                            </p:stCondLst>
+                            <p:childTnLst>
+                              <p:par>
+                                <p:cTn id="9" presetID="1" presetClass="entr" presetSubtype="0" fill="hold" grpId="0" nodeType="clickEffect">
+                                  <p:stCondLst>
+                                    <p:cond delay="0"/>
+                                  </p:stCondLst>
+                                  <p:childTnLst>
+                                    <p:set>
+                                      <p:cBhvr>
+                                        <p:cTn id="10" dur="1" fill="hold">
+                                          <p:stCondLst>
+                                            <p:cond delay="0"/>
+                                          </p:stCondLst>
+                                        </p:cTn>
+                                        <p:tgtEl>
+                                          <p:spTgt spid="3">
+                                            <p:txEl>
+                                              <p:pRg st="4" end="4"/>
+                                            </p:txEl>
+                                          </p:spTgt>
+                                        </p:tgtEl>
+                                        <p:attrNameLst>
+                                          <p:attrName>style.visibility</p:attrName>
+                                        </p:attrNameLst>
+                                      </p:cBhvr>
+                                      <p:to>
+                                        <p:strVal val="visible"/>
+                                      </p:to>
+                                    </p:set>
+                                  </p:childTnLst>
+                                </p:cTn>
+                              </p:par>
+                            </p:childTnLst>
+                          </p:cTn>
+                        </p:par>
+                      </p:childTnLst>
+                    </p:cTn>
+                  </p:par>
+                  <p:par>
+                    <p:cTn id="11" fill="hold">
+                      <p:stCondLst>
+                        <p:cond delay="indefinite"/>
+                      </p:stCondLst>
+                      <p:childTnLst>
+                        <p:par>
+                          <p:cTn id="12" fill="hold">
+                            <p:stCondLst>
+                              <p:cond delay="0"/>
+                            </p:stCondLst>
+                            <p:childTnLst>
+                              <p:par>
+                                <p:cTn id="13" presetID="1" presetClass="entr" presetSubtype="0" fill="hold" grpId="0" nodeType="clickEffect">
+                                  <p:stCondLst>
+                                    <p:cond delay="0"/>
+                                  </p:stCondLst>
+                                  <p:childTnLst>
+                                    <p:set>
+                                      <p:cBhvr>
+                                        <p:cTn id="14" dur="1" fill="hold">
+                                          <p:stCondLst>
+                                            <p:cond delay="0"/>
+                                          </p:stCondLst>
+                                        </p:cTn>
+                                        <p:tgtEl>
+                                          <p:spTgt spid="3">
+                                            <p:txEl>
+                                              <p:pRg st="6" end="6"/>
+                                            </p:txEl>
+                                          </p:spTgt>
+                                        </p:tgtEl>
+                                        <p:attrNameLst>
+                                          <p:attrName>style.visibility</p:attrName>
+                                        </p:attrNameLst>
+                                      </p:cBhvr>
+                                      <p:to>
+                                        <p:strVal val="visible"/>
+                                      </p:to>
+                                    </p:set>
+                                  </p:childTnLst>
+                                </p:cTn>
+                              </p:par>
+                            </p:childTnLst>
+                          </p:cTn>
+                        </p:par>
+                      </p:childTnLst>
+                    </p:cTn>
+                  </p:par>
+                  <p:par>
+                    <p:cTn id="15" fill="hold">
+                      <p:stCondLst>
+                        <p:cond delay="indefinite"/>
+                      </p:stCondLst>
+                      <p:childTnLst>
+                        <p:par>
+                          <p:cTn id="16" fill="hold">
+                            <p:stCondLst>
+                              <p:cond delay="0"/>
+                            </p:stCondLst>
+                            <p:childTnLst>
+                              <p:par>
+                                <p:cTn id="17" presetID="1" presetClass="entr" presetSubtype="0" fill="hold" grpId="0" nodeType="clickEffect">
+                                  <p:stCondLst>
+                                    <p:cond delay="0"/>
+                                  </p:stCondLst>
+                                  <p:childTnLst>
+                                    <p:set>
+                                      <p:cBhvr>
+                                        <p:cTn id="18" dur="1" fill="hold">
+                                          <p:stCondLst>
+                                            <p:cond delay="0"/>
+                                          </p:stCondLst>
+                                        </p:cTn>
+                                        <p:tgtEl>
+                                          <p:spTgt spid="3">
+                                            <p:txEl>
+                                              <p:pRg st="8" end="8"/>
+                                            </p:txEl>
+                                          </p:spTgt>
+                                        </p:tgtEl>
+                                        <p:attrNameLst>
+                                          <p:attrName>style.visibility</p:attrName>
+                                        </p:attrNameLst>
+                                      </p:cBhvr>
+                                      <p:to>
+                                        <p:strVal val="visible"/>
+                                      </p:to>
+                                    </p:set>
+                                  </p:childTnLst>
+                                </p:cTn>
+                              </p:par>
+                            </p:childTnLst>
+                          </p:cTn>
+                        </p:par>
+                      </p:childTnLst>
+                    </p:cTn>
+                  </p:par>
+                </p:childTnLst>
+              </p:cTn>
+              <p:prevCondLst>
+                <p:cond evt="onPrev" delay="0">
+                  <p:tgtEl>
+                    <p:sldTgt/>
+                  </p:tgtEl>
+                </p:cond>
+              </p:prevCondLst>
+              <p:nextCondLst>
+                <p:cond evt="onNext" delay="0">
+                  <p:tgtEl>
+                    <p:sldTgt/>
+                  </p:tgtEl>
+                </p:cond>
+              </p:nextCondLst>
+            </p:seq>
+          </p:childTnLst>
+        </p:cTn>
+      </p:par>
+    </p:tnLst>
+    <p:bldLst>
+      <p:bldP spid="3" grpId="0" uiExpand="1" build="p"/>
+    </p:bldLst>
+  </p:timing>
 </p:sld>
 </file>
 
@@ -12773,6 +13744,279 @@
   <p:clrMapOvr>
     <a:masterClrMapping/>
   </p:clrMapOvr>
+  <p:timing>
+    <p:tnLst>
+      <p:par>
+        <p:cTn id="1" dur="indefinite" restart="never" nodeType="tmRoot">
+          <p:childTnLst>
+            <p:seq concurrent="1" nextAc="seek">
+              <p:cTn id="2" dur="indefinite" nodeType="mainSeq">
+                <p:childTnLst>
+                  <p:par>
+                    <p:cTn id="3" fill="hold">
+                      <p:stCondLst>
+                        <p:cond delay="indefinite"/>
+                      </p:stCondLst>
+                      <p:childTnLst>
+                        <p:par>
+                          <p:cTn id="4" fill="hold">
+                            <p:stCondLst>
+                              <p:cond delay="0"/>
+                            </p:stCondLst>
+                            <p:childTnLst>
+                              <p:par>
+                                <p:cTn id="5" presetID="1" presetClass="entr" presetSubtype="0" fill="hold" grpId="0" nodeType="clickEffect">
+                                  <p:stCondLst>
+                                    <p:cond delay="0"/>
+                                  </p:stCondLst>
+                                  <p:childTnLst>
+                                    <p:set>
+                                      <p:cBhvr>
+                                        <p:cTn id="6" dur="1" fill="hold">
+                                          <p:stCondLst>
+                                            <p:cond delay="0"/>
+                                          </p:stCondLst>
+                                        </p:cTn>
+                                        <p:tgtEl>
+                                          <p:spTgt spid="3">
+                                            <p:txEl>
+                                              <p:pRg st="0" end="0"/>
+                                            </p:txEl>
+                                          </p:spTgt>
+                                        </p:tgtEl>
+                                        <p:attrNameLst>
+                                          <p:attrName>style.visibility</p:attrName>
+                                        </p:attrNameLst>
+                                      </p:cBhvr>
+                                      <p:to>
+                                        <p:strVal val="visible"/>
+                                      </p:to>
+                                    </p:set>
+                                  </p:childTnLst>
+                                </p:cTn>
+                              </p:par>
+                            </p:childTnLst>
+                          </p:cTn>
+                        </p:par>
+                      </p:childTnLst>
+                    </p:cTn>
+                  </p:par>
+                  <p:par>
+                    <p:cTn id="7" fill="hold">
+                      <p:stCondLst>
+                        <p:cond delay="indefinite"/>
+                      </p:stCondLst>
+                      <p:childTnLst>
+                        <p:par>
+                          <p:cTn id="8" fill="hold">
+                            <p:stCondLst>
+                              <p:cond delay="0"/>
+                            </p:stCondLst>
+                            <p:childTnLst>
+                              <p:par>
+                                <p:cTn id="9" presetID="1" presetClass="entr" presetSubtype="0" fill="hold" grpId="0" nodeType="clickEffect">
+                                  <p:stCondLst>
+                                    <p:cond delay="0"/>
+                                  </p:stCondLst>
+                                  <p:childTnLst>
+                                    <p:set>
+                                      <p:cBhvr>
+                                        <p:cTn id="10" dur="1" fill="hold">
+                                          <p:stCondLst>
+                                            <p:cond delay="0"/>
+                                          </p:stCondLst>
+                                        </p:cTn>
+                                        <p:tgtEl>
+                                          <p:spTgt spid="3">
+                                            <p:txEl>
+                                              <p:pRg st="1" end="1"/>
+                                            </p:txEl>
+                                          </p:spTgt>
+                                        </p:tgtEl>
+                                        <p:attrNameLst>
+                                          <p:attrName>style.visibility</p:attrName>
+                                        </p:attrNameLst>
+                                      </p:cBhvr>
+                                      <p:to>
+                                        <p:strVal val="visible"/>
+                                      </p:to>
+                                    </p:set>
+                                  </p:childTnLst>
+                                </p:cTn>
+                              </p:par>
+                            </p:childTnLst>
+                          </p:cTn>
+                        </p:par>
+                      </p:childTnLst>
+                    </p:cTn>
+                  </p:par>
+                  <p:par>
+                    <p:cTn id="11" fill="hold">
+                      <p:stCondLst>
+                        <p:cond delay="indefinite"/>
+                      </p:stCondLst>
+                      <p:childTnLst>
+                        <p:par>
+                          <p:cTn id="12" fill="hold">
+                            <p:stCondLst>
+                              <p:cond delay="0"/>
+                            </p:stCondLst>
+                            <p:childTnLst>
+                              <p:par>
+                                <p:cTn id="13" presetID="1" presetClass="entr" presetSubtype="0" fill="hold" grpId="0" nodeType="clickEffect">
+                                  <p:stCondLst>
+                                    <p:cond delay="0"/>
+                                  </p:stCondLst>
+                                  <p:childTnLst>
+                                    <p:set>
+                                      <p:cBhvr>
+                                        <p:cTn id="14" dur="1" fill="hold">
+                                          <p:stCondLst>
+                                            <p:cond delay="0"/>
+                                          </p:stCondLst>
+                                        </p:cTn>
+                                        <p:tgtEl>
+                                          <p:spTgt spid="3">
+                                            <p:txEl>
+                                              <p:pRg st="3" end="3"/>
+                                            </p:txEl>
+                                          </p:spTgt>
+                                        </p:tgtEl>
+                                        <p:attrNameLst>
+                                          <p:attrName>style.visibility</p:attrName>
+                                        </p:attrNameLst>
+                                      </p:cBhvr>
+                                      <p:to>
+                                        <p:strVal val="visible"/>
+                                      </p:to>
+                                    </p:set>
+                                  </p:childTnLst>
+                                </p:cTn>
+                              </p:par>
+                              <p:par>
+                                <p:cTn id="15" presetID="1" presetClass="entr" presetSubtype="0" fill="hold" grpId="0" nodeType="withEffect">
+                                  <p:stCondLst>
+                                    <p:cond delay="0"/>
+                                  </p:stCondLst>
+                                  <p:childTnLst>
+                                    <p:set>
+                                      <p:cBhvr>
+                                        <p:cTn id="16" dur="1" fill="hold">
+                                          <p:stCondLst>
+                                            <p:cond delay="0"/>
+                                          </p:stCondLst>
+                                        </p:cTn>
+                                        <p:tgtEl>
+                                          <p:spTgt spid="3">
+                                            <p:txEl>
+                                              <p:pRg st="4" end="4"/>
+                                            </p:txEl>
+                                          </p:spTgt>
+                                        </p:tgtEl>
+                                        <p:attrNameLst>
+                                          <p:attrName>style.visibility</p:attrName>
+                                        </p:attrNameLst>
+                                      </p:cBhvr>
+                                      <p:to>
+                                        <p:strVal val="visible"/>
+                                      </p:to>
+                                    </p:set>
+                                  </p:childTnLst>
+                                </p:cTn>
+                              </p:par>
+                              <p:par>
+                                <p:cTn id="17" presetID="1" presetClass="entr" presetSubtype="0" fill="hold" grpId="0" nodeType="withEffect">
+                                  <p:stCondLst>
+                                    <p:cond delay="0"/>
+                                  </p:stCondLst>
+                                  <p:childTnLst>
+                                    <p:set>
+                                      <p:cBhvr>
+                                        <p:cTn id="18" dur="1" fill="hold">
+                                          <p:stCondLst>
+                                            <p:cond delay="0"/>
+                                          </p:stCondLst>
+                                        </p:cTn>
+                                        <p:tgtEl>
+                                          <p:spTgt spid="3">
+                                            <p:txEl>
+                                              <p:pRg st="5" end="5"/>
+                                            </p:txEl>
+                                          </p:spTgt>
+                                        </p:tgtEl>
+                                        <p:attrNameLst>
+                                          <p:attrName>style.visibility</p:attrName>
+                                        </p:attrNameLst>
+                                      </p:cBhvr>
+                                      <p:to>
+                                        <p:strVal val="visible"/>
+                                      </p:to>
+                                    </p:set>
+                                  </p:childTnLst>
+                                </p:cTn>
+                              </p:par>
+                              <p:par>
+                                <p:cTn id="19" presetID="1" presetClass="entr" presetSubtype="0" fill="hold" grpId="0" nodeType="withEffect">
+                                  <p:stCondLst>
+                                    <p:cond delay="0"/>
+                                  </p:stCondLst>
+                                  <p:childTnLst>
+                                    <p:set>
+                                      <p:cBhvr>
+                                        <p:cTn id="20" dur="1" fill="hold">
+                                          <p:stCondLst>
+                                            <p:cond delay="0"/>
+                                          </p:stCondLst>
+                                        </p:cTn>
+                                        <p:tgtEl>
+                                          <p:spTgt spid="3">
+                                            <p:txEl>
+                                              <p:pRg st="6" end="6"/>
+                                            </p:txEl>
+                                          </p:spTgt>
+                                        </p:tgtEl>
+                                        <p:attrNameLst>
+                                          <p:attrName>style.visibility</p:attrName>
+                                        </p:attrNameLst>
+                                      </p:cBhvr>
+                                      <p:to>
+                                        <p:strVal val="visible"/>
+                                      </p:to>
+                                    </p:set>
+                                  </p:childTnLst>
+                                </p:cTn>
+                              </p:par>
+                            </p:childTnLst>
+                          </p:cTn>
+                        </p:par>
+                      </p:childTnLst>
+                    </p:cTn>
+                  </p:par>
+                </p:childTnLst>
+              </p:cTn>
+              <p:prevCondLst>
+                <p:cond evt="onPrev" delay="0">
+                  <p:tgtEl>
+                    <p:sldTgt/>
+                  </p:tgtEl>
+                </p:cond>
+              </p:prevCondLst>
+              <p:nextCondLst>
+                <p:cond evt="onNext" delay="0">
+                  <p:tgtEl>
+                    <p:sldTgt/>
+                  </p:tgtEl>
+                </p:cond>
+              </p:nextCondLst>
+            </p:seq>
+          </p:childTnLst>
+        </p:cTn>
+      </p:par>
+    </p:tnLst>
+    <p:bldLst>
+      <p:bldP spid="3" grpId="0" build="p"/>
+    </p:bldLst>
+  </p:timing>
 </p:sld>
 </file>
 
@@ -12936,6 +14180,279 @@
   <p:clrMapOvr>
     <a:masterClrMapping/>
   </p:clrMapOvr>
+  <p:timing>
+    <p:tnLst>
+      <p:par>
+        <p:cTn id="1" dur="indefinite" restart="never" nodeType="tmRoot">
+          <p:childTnLst>
+            <p:seq concurrent="1" nextAc="seek">
+              <p:cTn id="2" dur="indefinite" nodeType="mainSeq">
+                <p:childTnLst>
+                  <p:par>
+                    <p:cTn id="3" fill="hold">
+                      <p:stCondLst>
+                        <p:cond delay="indefinite"/>
+                      </p:stCondLst>
+                      <p:childTnLst>
+                        <p:par>
+                          <p:cTn id="4" fill="hold">
+                            <p:stCondLst>
+                              <p:cond delay="0"/>
+                            </p:stCondLst>
+                            <p:childTnLst>
+                              <p:par>
+                                <p:cTn id="5" presetID="1" presetClass="entr" presetSubtype="0" fill="hold" grpId="0" nodeType="clickEffect">
+                                  <p:stCondLst>
+                                    <p:cond delay="0"/>
+                                  </p:stCondLst>
+                                  <p:childTnLst>
+                                    <p:set>
+                                      <p:cBhvr>
+                                        <p:cTn id="6" dur="1" fill="hold">
+                                          <p:stCondLst>
+                                            <p:cond delay="0"/>
+                                          </p:stCondLst>
+                                        </p:cTn>
+                                        <p:tgtEl>
+                                          <p:spTgt spid="3">
+                                            <p:txEl>
+                                              <p:pRg st="0" end="0"/>
+                                            </p:txEl>
+                                          </p:spTgt>
+                                        </p:tgtEl>
+                                        <p:attrNameLst>
+                                          <p:attrName>style.visibility</p:attrName>
+                                        </p:attrNameLst>
+                                      </p:cBhvr>
+                                      <p:to>
+                                        <p:strVal val="visible"/>
+                                      </p:to>
+                                    </p:set>
+                                  </p:childTnLst>
+                                </p:cTn>
+                              </p:par>
+                            </p:childTnLst>
+                          </p:cTn>
+                        </p:par>
+                      </p:childTnLst>
+                    </p:cTn>
+                  </p:par>
+                  <p:par>
+                    <p:cTn id="7" fill="hold">
+                      <p:stCondLst>
+                        <p:cond delay="indefinite"/>
+                      </p:stCondLst>
+                      <p:childTnLst>
+                        <p:par>
+                          <p:cTn id="8" fill="hold">
+                            <p:stCondLst>
+                              <p:cond delay="0"/>
+                            </p:stCondLst>
+                            <p:childTnLst>
+                              <p:par>
+                                <p:cTn id="9" presetID="1" presetClass="entr" presetSubtype="0" fill="hold" grpId="0" nodeType="clickEffect">
+                                  <p:stCondLst>
+                                    <p:cond delay="0"/>
+                                  </p:stCondLst>
+                                  <p:childTnLst>
+                                    <p:set>
+                                      <p:cBhvr>
+                                        <p:cTn id="10" dur="1" fill="hold">
+                                          <p:stCondLst>
+                                            <p:cond delay="0"/>
+                                          </p:stCondLst>
+                                        </p:cTn>
+                                        <p:tgtEl>
+                                          <p:spTgt spid="3">
+                                            <p:txEl>
+                                              <p:pRg st="1" end="1"/>
+                                            </p:txEl>
+                                          </p:spTgt>
+                                        </p:tgtEl>
+                                        <p:attrNameLst>
+                                          <p:attrName>style.visibility</p:attrName>
+                                        </p:attrNameLst>
+                                      </p:cBhvr>
+                                      <p:to>
+                                        <p:strVal val="visible"/>
+                                      </p:to>
+                                    </p:set>
+                                  </p:childTnLst>
+                                </p:cTn>
+                              </p:par>
+                            </p:childTnLst>
+                          </p:cTn>
+                        </p:par>
+                      </p:childTnLst>
+                    </p:cTn>
+                  </p:par>
+                  <p:par>
+                    <p:cTn id="11" fill="hold">
+                      <p:stCondLst>
+                        <p:cond delay="indefinite"/>
+                      </p:stCondLst>
+                      <p:childTnLst>
+                        <p:par>
+                          <p:cTn id="12" fill="hold">
+                            <p:stCondLst>
+                              <p:cond delay="0"/>
+                            </p:stCondLst>
+                            <p:childTnLst>
+                              <p:par>
+                                <p:cTn id="13" presetID="1" presetClass="entr" presetSubtype="0" fill="hold" grpId="0" nodeType="clickEffect">
+                                  <p:stCondLst>
+                                    <p:cond delay="0"/>
+                                  </p:stCondLst>
+                                  <p:childTnLst>
+                                    <p:set>
+                                      <p:cBhvr>
+                                        <p:cTn id="14" dur="1" fill="hold">
+                                          <p:stCondLst>
+                                            <p:cond delay="0"/>
+                                          </p:stCondLst>
+                                        </p:cTn>
+                                        <p:tgtEl>
+                                          <p:spTgt spid="3">
+                                            <p:txEl>
+                                              <p:pRg st="3" end="3"/>
+                                            </p:txEl>
+                                          </p:spTgt>
+                                        </p:tgtEl>
+                                        <p:attrNameLst>
+                                          <p:attrName>style.visibility</p:attrName>
+                                        </p:attrNameLst>
+                                      </p:cBhvr>
+                                      <p:to>
+                                        <p:strVal val="visible"/>
+                                      </p:to>
+                                    </p:set>
+                                  </p:childTnLst>
+                                </p:cTn>
+                              </p:par>
+                              <p:par>
+                                <p:cTn id="15" presetID="1" presetClass="entr" presetSubtype="0" fill="hold" grpId="0" nodeType="withEffect">
+                                  <p:stCondLst>
+                                    <p:cond delay="0"/>
+                                  </p:stCondLst>
+                                  <p:childTnLst>
+                                    <p:set>
+                                      <p:cBhvr>
+                                        <p:cTn id="16" dur="1" fill="hold">
+                                          <p:stCondLst>
+                                            <p:cond delay="0"/>
+                                          </p:stCondLst>
+                                        </p:cTn>
+                                        <p:tgtEl>
+                                          <p:spTgt spid="3">
+                                            <p:txEl>
+                                              <p:pRg st="4" end="4"/>
+                                            </p:txEl>
+                                          </p:spTgt>
+                                        </p:tgtEl>
+                                        <p:attrNameLst>
+                                          <p:attrName>style.visibility</p:attrName>
+                                        </p:attrNameLst>
+                                      </p:cBhvr>
+                                      <p:to>
+                                        <p:strVal val="visible"/>
+                                      </p:to>
+                                    </p:set>
+                                  </p:childTnLst>
+                                </p:cTn>
+                              </p:par>
+                              <p:par>
+                                <p:cTn id="17" presetID="1" presetClass="entr" presetSubtype="0" fill="hold" grpId="0" nodeType="withEffect">
+                                  <p:stCondLst>
+                                    <p:cond delay="0"/>
+                                  </p:stCondLst>
+                                  <p:childTnLst>
+                                    <p:set>
+                                      <p:cBhvr>
+                                        <p:cTn id="18" dur="1" fill="hold">
+                                          <p:stCondLst>
+                                            <p:cond delay="0"/>
+                                          </p:stCondLst>
+                                        </p:cTn>
+                                        <p:tgtEl>
+                                          <p:spTgt spid="3">
+                                            <p:txEl>
+                                              <p:pRg st="5" end="5"/>
+                                            </p:txEl>
+                                          </p:spTgt>
+                                        </p:tgtEl>
+                                        <p:attrNameLst>
+                                          <p:attrName>style.visibility</p:attrName>
+                                        </p:attrNameLst>
+                                      </p:cBhvr>
+                                      <p:to>
+                                        <p:strVal val="visible"/>
+                                      </p:to>
+                                    </p:set>
+                                  </p:childTnLst>
+                                </p:cTn>
+                              </p:par>
+                              <p:par>
+                                <p:cTn id="19" presetID="1" presetClass="entr" presetSubtype="0" fill="hold" grpId="0" nodeType="withEffect">
+                                  <p:stCondLst>
+                                    <p:cond delay="0"/>
+                                  </p:stCondLst>
+                                  <p:childTnLst>
+                                    <p:set>
+                                      <p:cBhvr>
+                                        <p:cTn id="20" dur="1" fill="hold">
+                                          <p:stCondLst>
+                                            <p:cond delay="0"/>
+                                          </p:stCondLst>
+                                        </p:cTn>
+                                        <p:tgtEl>
+                                          <p:spTgt spid="3">
+                                            <p:txEl>
+                                              <p:pRg st="6" end="6"/>
+                                            </p:txEl>
+                                          </p:spTgt>
+                                        </p:tgtEl>
+                                        <p:attrNameLst>
+                                          <p:attrName>style.visibility</p:attrName>
+                                        </p:attrNameLst>
+                                      </p:cBhvr>
+                                      <p:to>
+                                        <p:strVal val="visible"/>
+                                      </p:to>
+                                    </p:set>
+                                  </p:childTnLst>
+                                </p:cTn>
+                              </p:par>
+                            </p:childTnLst>
+                          </p:cTn>
+                        </p:par>
+                      </p:childTnLst>
+                    </p:cTn>
+                  </p:par>
+                </p:childTnLst>
+              </p:cTn>
+              <p:prevCondLst>
+                <p:cond evt="onPrev" delay="0">
+                  <p:tgtEl>
+                    <p:sldTgt/>
+                  </p:tgtEl>
+                </p:cond>
+              </p:prevCondLst>
+              <p:nextCondLst>
+                <p:cond evt="onNext" delay="0">
+                  <p:tgtEl>
+                    <p:sldTgt/>
+                  </p:tgtEl>
+                </p:cond>
+              </p:nextCondLst>
+            </p:seq>
+          </p:childTnLst>
+        </p:cTn>
+      </p:par>
+    </p:tnLst>
+    <p:bldLst>
+      <p:bldP spid="3" grpId="0" build="p"/>
+    </p:bldLst>
+  </p:timing>
 </p:sld>
 </file>
 
@@ -12961,7 +14478,7 @@
           <p:cNvPr id="2" name="Title 1">
             <a:extLst>
               <a:ext uri="{FF2B5EF4-FFF2-40B4-BE49-F238E27FC236}">
-                <a16:creationId xmlns:a16="http://schemas.microsoft.com/office/drawing/2014/main" id="{FCCAACAD-479A-5540-2B73-60664184C993}"/>
+                <a16:creationId xmlns:a16="http://schemas.microsoft.com/office/drawing/2014/main" id="{E6104B99-C0BE-C514-46EC-CAE531CB329A}"/>
               </a:ext>
             </a:extLst>
           </p:cNvPr>
@@ -12974,10 +14491,16 @@
         </p:nvSpPr>
         <p:spPr/>
         <p:txBody>
-          <a:bodyPr/>
+          <a:bodyPr>
+            <a:normAutofit/>
+          </a:bodyPr>
           <a:lstStyle/>
           <a:p>
-            <a:endParaRPr lang="en-US"/>
+            <a:r>
+              <a:rPr lang="en-GB" dirty="0"/>
+              <a:t>Sport Analytics Begins With a Decision</a:t>
+            </a:r>
+            <a:endParaRPr lang="en-US" dirty="0"/>
           </a:p>
         </p:txBody>
       </p:sp>
@@ -12986,7 +14509,7 @@
           <p:cNvPr id="3" name="Content Placeholder 2">
             <a:extLst>
               <a:ext uri="{FF2B5EF4-FFF2-40B4-BE49-F238E27FC236}">
-                <a16:creationId xmlns:a16="http://schemas.microsoft.com/office/drawing/2014/main" id="{EC320E6E-FE53-FEB1-D63A-3B7F021626D7}"/>
+                <a16:creationId xmlns:a16="http://schemas.microsoft.com/office/drawing/2014/main" id="{35EC063E-392D-93CE-404B-5B2C5A5F6B12}"/>
               </a:ext>
             </a:extLst>
           </p:cNvPr>
@@ -13004,92 +14527,62 @@
           </a:bodyPr>
           <a:lstStyle/>
           <a:p>
-            <a:r>
-              <a:rPr lang="en-US" dirty="0"/>
-              <a:t>Write down a question or decision you are interested in analyzing.</a:t>
-            </a:r>
-          </a:p>
-          <a:p>
-            <a:endParaRPr lang="en-US" dirty="0"/>
-          </a:p>
-          <a:p>
-            <a:r>
-              <a:rPr lang="en-US" dirty="0"/>
-              <a:t>If you don’t have one, chose one:</a:t>
-            </a:r>
-          </a:p>
-          <a:p>
-            <a:pPr lvl="1"/>
+            <a:pPr marL="0" indent="0">
+              <a:buNone/>
+            </a:pPr>
             <a:r>
               <a:rPr lang="en-GB" dirty="0"/>
-              <a:t>Should we recruit this athlete? </a:t>
-            </a:r>
-          </a:p>
-          <a:p>
-            <a:pPr lvl="1"/>
+              <a:t>For any sport analytics problem, ask:</a:t>
+            </a:r>
+          </a:p>
+          <a:p>
+            <a:pPr marL="971550" lvl="1" indent="-514350">
+              <a:buFont typeface="+mj-lt"/>
+              <a:buAutoNum type="arabicPeriod"/>
+            </a:pPr>
             <a:r>
               <a:rPr lang="en-GB" dirty="0"/>
-              <a:t>Which defensive lineup should we use against our next opponent? </a:t>
-            </a:r>
-          </a:p>
-          <a:p>
-            <a:pPr lvl="1"/>
+              <a:t>Who will use the analysis? </a:t>
+            </a:r>
+          </a:p>
+          <a:p>
+            <a:pPr marL="971550" lvl="1" indent="-514350">
+              <a:buFont typeface="+mj-lt"/>
+              <a:buAutoNum type="arabicPeriod"/>
+            </a:pPr>
             <a:r>
               <a:rPr lang="en-GB" dirty="0"/>
-              <a:t>Which part of a player’s game should be prioritized for development? </a:t>
-            </a:r>
-          </a:p>
-          <a:p>
-            <a:pPr lvl="1"/>
+              <a:t>What decision are they trying to make? </a:t>
+            </a:r>
+          </a:p>
+          <a:p>
+            <a:pPr marL="971550" lvl="1" indent="-514350">
+              <a:buFont typeface="+mj-lt"/>
+              <a:buAutoNum type="arabicPeriod"/>
+            </a:pPr>
             <a:r>
               <a:rPr lang="en-GB" dirty="0"/>
-              <a:t>Why is the team conceding so many opportunities after losing possession?</a:t>
-            </a:r>
-          </a:p>
-          <a:p>
-            <a:pPr lvl="1"/>
-            <a:endParaRPr lang="en-GB" dirty="0"/>
-          </a:p>
-          <a:p>
-            <a:endParaRPr lang="en-US" dirty="0"/>
-          </a:p>
-        </p:txBody>
-      </p:sp>
-      <p:sp>
-        <p:nvSpPr>
-          <p:cNvPr id="5" name="TextBox 4">
-            <a:extLst>
-              <a:ext uri="{FF2B5EF4-FFF2-40B4-BE49-F238E27FC236}">
-                <a16:creationId xmlns:a16="http://schemas.microsoft.com/office/drawing/2014/main" id="{17A8E1B5-3D72-0E48-63AF-3280E9F9EE60}"/>
-              </a:ext>
-            </a:extLst>
-          </p:cNvPr>
-          <p:cNvSpPr txBox="1"/>
-          <p:nvPr/>
-        </p:nvSpPr>
-        <p:spPr>
-          <a:xfrm>
-            <a:off x="1101436" y="5154452"/>
-            <a:ext cx="9989127" cy="523220"/>
-          </a:xfrm>
-          <a:prstGeom prst="rect">
-            <a:avLst/>
-          </a:prstGeom>
-          <a:noFill/>
-        </p:spPr>
-        <p:txBody>
-          <a:bodyPr wrap="square">
-            <a:spAutoFit/>
-          </a:bodyPr>
-          <a:lstStyle/>
-          <a:p>
-            <a:r>
-              <a:rPr lang="en-GB" sz="2800" dirty="0">
-                <a:solidFill>
-                  <a:srgbClr val="FF0000"/>
-                </a:solidFill>
-              </a:rPr>
-              <a:t>Think about how today’s lecture applies to your topic of interest</a:t>
+              <a:t>What information could improve that decision? </a:t>
+            </a:r>
+          </a:p>
+          <a:p>
+            <a:pPr marL="971550" lvl="1" indent="-514350">
+              <a:buFont typeface="+mj-lt"/>
+              <a:buAutoNum type="arabicPeriod"/>
+            </a:pPr>
+            <a:r>
+              <a:rPr lang="en-GB" dirty="0"/>
+              <a:t>What are the consequences of being wrong? </a:t>
+            </a:r>
+          </a:p>
+          <a:p>
+            <a:pPr marL="971550" lvl="1" indent="-514350">
+              <a:buFont typeface="+mj-lt"/>
+              <a:buAutoNum type="arabicPeriod"/>
+            </a:pPr>
+            <a:r>
+              <a:rPr lang="en-GB" dirty="0"/>
+              <a:t>What data might provide that information?</a:t>
             </a:r>
           </a:p>
         </p:txBody>
@@ -13097,13 +14590,250 @@
     </p:spTree>
     <p:extLst>
       <p:ext uri="{BB962C8B-B14F-4D97-AF65-F5344CB8AC3E}">
-        <p14:creationId xmlns:p14="http://schemas.microsoft.com/office/powerpoint/2010/main" val="3739800625"/>
+        <p14:creationId xmlns:p14="http://schemas.microsoft.com/office/powerpoint/2010/main" val="2477808522"/>
       </p:ext>
     </p:extLst>
   </p:cSld>
   <p:clrMapOvr>
     <a:masterClrMapping/>
   </p:clrMapOvr>
+  <p:timing>
+    <p:tnLst>
+      <p:par>
+        <p:cTn id="1" dur="indefinite" restart="never" nodeType="tmRoot">
+          <p:childTnLst>
+            <p:seq concurrent="1" nextAc="seek">
+              <p:cTn id="2" dur="indefinite" nodeType="mainSeq">
+                <p:childTnLst>
+                  <p:par>
+                    <p:cTn id="3" fill="hold">
+                      <p:stCondLst>
+                        <p:cond delay="indefinite"/>
+                      </p:stCondLst>
+                      <p:childTnLst>
+                        <p:par>
+                          <p:cTn id="4" fill="hold">
+                            <p:stCondLst>
+                              <p:cond delay="0"/>
+                            </p:stCondLst>
+                            <p:childTnLst>
+                              <p:par>
+                                <p:cTn id="5" presetID="1" presetClass="entr" presetSubtype="0" fill="hold" grpId="0" nodeType="clickEffect">
+                                  <p:stCondLst>
+                                    <p:cond delay="0"/>
+                                  </p:stCondLst>
+                                  <p:childTnLst>
+                                    <p:set>
+                                      <p:cBhvr>
+                                        <p:cTn id="6" dur="1" fill="hold">
+                                          <p:stCondLst>
+                                            <p:cond delay="0"/>
+                                          </p:stCondLst>
+                                        </p:cTn>
+                                        <p:tgtEl>
+                                          <p:spTgt spid="3">
+                                            <p:txEl>
+                                              <p:pRg st="0" end="0"/>
+                                            </p:txEl>
+                                          </p:spTgt>
+                                        </p:tgtEl>
+                                        <p:attrNameLst>
+                                          <p:attrName>style.visibility</p:attrName>
+                                        </p:attrNameLst>
+                                      </p:cBhvr>
+                                      <p:to>
+                                        <p:strVal val="visible"/>
+                                      </p:to>
+                                    </p:set>
+                                  </p:childTnLst>
+                                </p:cTn>
+                              </p:par>
+                              <p:par>
+                                <p:cTn id="7" presetID="1" presetClass="entr" presetSubtype="0" fill="hold" grpId="0" nodeType="withEffect">
+                                  <p:stCondLst>
+                                    <p:cond delay="0"/>
+                                  </p:stCondLst>
+                                  <p:childTnLst>
+                                    <p:set>
+                                      <p:cBhvr>
+                                        <p:cTn id="8" dur="1" fill="hold">
+                                          <p:stCondLst>
+                                            <p:cond delay="0"/>
+                                          </p:stCondLst>
+                                        </p:cTn>
+                                        <p:tgtEl>
+                                          <p:spTgt spid="3">
+                                            <p:txEl>
+                                              <p:pRg st="1" end="1"/>
+                                            </p:txEl>
+                                          </p:spTgt>
+                                        </p:tgtEl>
+                                        <p:attrNameLst>
+                                          <p:attrName>style.visibility</p:attrName>
+                                        </p:attrNameLst>
+                                      </p:cBhvr>
+                                      <p:to>
+                                        <p:strVal val="visible"/>
+                                      </p:to>
+                                    </p:set>
+                                  </p:childTnLst>
+                                </p:cTn>
+                              </p:par>
+                              <p:par>
+                                <p:cTn id="9" presetID="1" presetClass="entr" presetSubtype="0" fill="hold" grpId="0" nodeType="withEffect">
+                                  <p:stCondLst>
+                                    <p:cond delay="0"/>
+                                  </p:stCondLst>
+                                  <p:childTnLst>
+                                    <p:set>
+                                      <p:cBhvr>
+                                        <p:cTn id="10" dur="1" fill="hold">
+                                          <p:stCondLst>
+                                            <p:cond delay="0"/>
+                                          </p:stCondLst>
+                                        </p:cTn>
+                                        <p:tgtEl>
+                                          <p:spTgt spid="3">
+                                            <p:txEl>
+                                              <p:pRg st="2" end="2"/>
+                                            </p:txEl>
+                                          </p:spTgt>
+                                        </p:tgtEl>
+                                        <p:attrNameLst>
+                                          <p:attrName>style.visibility</p:attrName>
+                                        </p:attrNameLst>
+                                      </p:cBhvr>
+                                      <p:to>
+                                        <p:strVal val="visible"/>
+                                      </p:to>
+                                    </p:set>
+                                  </p:childTnLst>
+                                </p:cTn>
+                              </p:par>
+                              <p:par>
+                                <p:cTn id="11" presetID="1" presetClass="entr" presetSubtype="0" fill="hold" grpId="0" nodeType="withEffect">
+                                  <p:stCondLst>
+                                    <p:cond delay="0"/>
+                                  </p:stCondLst>
+                                  <p:childTnLst>
+                                    <p:set>
+                                      <p:cBhvr>
+                                        <p:cTn id="12" dur="1" fill="hold">
+                                          <p:stCondLst>
+                                            <p:cond delay="0"/>
+                                          </p:stCondLst>
+                                        </p:cTn>
+                                        <p:tgtEl>
+                                          <p:spTgt spid="3">
+                                            <p:txEl>
+                                              <p:pRg st="3" end="3"/>
+                                            </p:txEl>
+                                          </p:spTgt>
+                                        </p:tgtEl>
+                                        <p:attrNameLst>
+                                          <p:attrName>style.visibility</p:attrName>
+                                        </p:attrNameLst>
+                                      </p:cBhvr>
+                                      <p:to>
+                                        <p:strVal val="visible"/>
+                                      </p:to>
+                                    </p:set>
+                                  </p:childTnLst>
+                                </p:cTn>
+                              </p:par>
+                              <p:par>
+                                <p:cTn id="13" presetID="1" presetClass="entr" presetSubtype="0" fill="hold" grpId="0" nodeType="withEffect">
+                                  <p:stCondLst>
+                                    <p:cond delay="0"/>
+                                  </p:stCondLst>
+                                  <p:childTnLst>
+                                    <p:set>
+                                      <p:cBhvr>
+                                        <p:cTn id="14" dur="1" fill="hold">
+                                          <p:stCondLst>
+                                            <p:cond delay="0"/>
+                                          </p:stCondLst>
+                                        </p:cTn>
+                                        <p:tgtEl>
+                                          <p:spTgt spid="3">
+                                            <p:txEl>
+                                              <p:pRg st="4" end="4"/>
+                                            </p:txEl>
+                                          </p:spTgt>
+                                        </p:tgtEl>
+                                        <p:attrNameLst>
+                                          <p:attrName>style.visibility</p:attrName>
+                                        </p:attrNameLst>
+                                      </p:cBhvr>
+                                      <p:to>
+                                        <p:strVal val="visible"/>
+                                      </p:to>
+                                    </p:set>
+                                  </p:childTnLst>
+                                </p:cTn>
+                              </p:par>
+                              <p:par>
+                                <p:cTn id="15" presetID="1" presetClass="entr" presetSubtype="0" fill="hold" grpId="0" nodeType="withEffect">
+                                  <p:stCondLst>
+                                    <p:cond delay="0"/>
+                                  </p:stCondLst>
+                                  <p:childTnLst>
+                                    <p:set>
+                                      <p:cBhvr>
+                                        <p:cTn id="16" dur="1" fill="hold">
+                                          <p:stCondLst>
+                                            <p:cond delay="0"/>
+                                          </p:stCondLst>
+                                        </p:cTn>
+                                        <p:tgtEl>
+                                          <p:spTgt spid="3">
+                                            <p:txEl>
+                                              <p:pRg st="5" end="5"/>
+                                            </p:txEl>
+                                          </p:spTgt>
+                                        </p:tgtEl>
+                                        <p:attrNameLst>
+                                          <p:attrName>style.visibility</p:attrName>
+                                        </p:attrNameLst>
+                                      </p:cBhvr>
+                                      <p:to>
+                                        <p:strVal val="visible"/>
+                                      </p:to>
+                                    </p:set>
+                                  </p:childTnLst>
+                                </p:cTn>
+                              </p:par>
+                            </p:childTnLst>
+                          </p:cTn>
+                        </p:par>
+                      </p:childTnLst>
+                    </p:cTn>
+                  </p:par>
+                </p:childTnLst>
+              </p:cTn>
+              <p:prevCondLst>
+                <p:cond evt="onPrev" delay="0">
+                  <p:tgtEl>
+                    <p:sldTgt/>
+                  </p:tgtEl>
+                </p:cond>
+              </p:prevCondLst>
+              <p:nextCondLst>
+                <p:cond evt="onNext" delay="0">
+                  <p:tgtEl>
+                    <p:sldTgt/>
+                  </p:tgtEl>
+                </p:cond>
+              </p:nextCondLst>
+            </p:seq>
+          </p:childTnLst>
+        </p:cTn>
+      </p:par>
+    </p:tnLst>
+    <p:bldLst>
+      <p:bldP spid="3" grpId="0" build="p"/>
+    </p:bldLst>
+  </p:timing>
 </p:sld>
 </file>
 
@@ -13147,8 +14877,13 @@
           <a:p>
             <a:r>
               <a:rPr lang="en-US" dirty="0"/>
-              <a:t>Spurious correlation</a:t>
-            </a:r>
+              <a:t>Spurious Correlation in </a:t>
+            </a:r>
+            <a:r>
+              <a:rPr lang="en-GB" dirty="0"/>
+              <a:t>Diagnostic Analytics</a:t>
+            </a:r>
+            <a:endParaRPr lang="en-US" dirty="0"/>
           </a:p>
         </p:txBody>
       </p:sp>
@@ -13192,10 +14927,10 @@
       </p:sp>
       <p:pic>
         <p:nvPicPr>
-          <p:cNvPr id="5" name="Picture 4" descr="Ice cream consumption correlates with The divorce rate in Florida (r=0.92)">
+          <p:cNvPr id="4" name="Picture 3" descr="Ice cream consumption correlates with Robberies in South Carolina (r=0.901)">
             <a:extLst>
               <a:ext uri="{FF2B5EF4-FFF2-40B4-BE49-F238E27FC236}">
-                <a16:creationId xmlns:a16="http://schemas.microsoft.com/office/drawing/2014/main" id="{ADD224F3-D444-44EA-BB69-857B14A8B293}"/>
+                <a16:creationId xmlns:a16="http://schemas.microsoft.com/office/drawing/2014/main" id="{1BE9FF5C-F8E0-913E-17DE-DC8AF2A1795D}"/>
               </a:ext>
             </a:extLst>
           </p:cNvPr>
@@ -13206,15 +14941,14 @@
         </p:nvPicPr>
         <p:blipFill>
           <a:blip r:embed="rId3"/>
-          <a:srcRect b="6910"/>
           <a:stretch>
             <a:fillRect/>
           </a:stretch>
         </p:blipFill>
         <p:spPr>
           <a:xfrm>
-            <a:off x="4105448" y="3270246"/>
-            <a:ext cx="3981104" cy="3222628"/>
+            <a:off x="3870960" y="3010564"/>
+            <a:ext cx="3968879" cy="3451200"/>
           </a:xfrm>
           <a:prstGeom prst="rect">
             <a:avLst/>
@@ -13231,6 +14965,137 @@
   <p:clrMapOvr>
     <a:masterClrMapping/>
   </p:clrMapOvr>
+  <p:timing>
+    <p:tnLst>
+      <p:par>
+        <p:cTn id="1" dur="indefinite" restart="never" nodeType="tmRoot">
+          <p:childTnLst>
+            <p:seq concurrent="1" nextAc="seek">
+              <p:cTn id="2" dur="indefinite" nodeType="mainSeq">
+                <p:childTnLst>
+                  <p:par>
+                    <p:cTn id="3" fill="hold">
+                      <p:stCondLst>
+                        <p:cond delay="indefinite"/>
+                      </p:stCondLst>
+                      <p:childTnLst>
+                        <p:par>
+                          <p:cTn id="4" fill="hold">
+                            <p:stCondLst>
+                              <p:cond delay="0"/>
+                            </p:stCondLst>
+                            <p:childTnLst>
+                              <p:par>
+                                <p:cTn id="5" presetID="1" presetClass="entr" presetSubtype="0" fill="hold" grpId="0" nodeType="clickEffect">
+                                  <p:stCondLst>
+                                    <p:cond delay="0"/>
+                                  </p:stCondLst>
+                                  <p:childTnLst>
+                                    <p:set>
+                                      <p:cBhvr>
+                                        <p:cTn id="6" dur="1" fill="hold">
+                                          <p:stCondLst>
+                                            <p:cond delay="0"/>
+                                          </p:stCondLst>
+                                        </p:cTn>
+                                        <p:tgtEl>
+                                          <p:spTgt spid="3">
+                                            <p:txEl>
+                                              <p:pRg st="0" end="0"/>
+                                            </p:txEl>
+                                          </p:spTgt>
+                                        </p:tgtEl>
+                                        <p:attrNameLst>
+                                          <p:attrName>style.visibility</p:attrName>
+                                        </p:attrNameLst>
+                                      </p:cBhvr>
+                                      <p:to>
+                                        <p:strVal val="visible"/>
+                                      </p:to>
+                                    </p:set>
+                                  </p:childTnLst>
+                                </p:cTn>
+                              </p:par>
+                            </p:childTnLst>
+                          </p:cTn>
+                        </p:par>
+                      </p:childTnLst>
+                    </p:cTn>
+                  </p:par>
+                  <p:par>
+                    <p:cTn id="7" fill="hold">
+                      <p:stCondLst>
+                        <p:cond delay="indefinite"/>
+                      </p:stCondLst>
+                      <p:childTnLst>
+                        <p:par>
+                          <p:cTn id="8" fill="hold">
+                            <p:stCondLst>
+                              <p:cond delay="0"/>
+                            </p:stCondLst>
+                            <p:childTnLst>
+                              <p:par>
+                                <p:cTn id="9" presetID="1" presetClass="entr" presetSubtype="0" fill="hold" grpId="0" nodeType="clickEffect">
+                                  <p:stCondLst>
+                                    <p:cond delay="0"/>
+                                  </p:stCondLst>
+                                  <p:childTnLst>
+                                    <p:set>
+                                      <p:cBhvr>
+                                        <p:cTn id="10" dur="1" fill="hold">
+                                          <p:stCondLst>
+                                            <p:cond delay="0"/>
+                                          </p:stCondLst>
+                                        </p:cTn>
+                                        <p:tgtEl>
+                                          <p:spTgt spid="3">
+                                            <p:txEl>
+                                              <p:pRg st="1" end="1"/>
+                                            </p:txEl>
+                                          </p:spTgt>
+                                        </p:tgtEl>
+                                        <p:attrNameLst>
+                                          <p:attrName>style.visibility</p:attrName>
+                                        </p:attrNameLst>
+                                      </p:cBhvr>
+                                      <p:to>
+                                        <p:strVal val="visible"/>
+                                      </p:to>
+                                    </p:set>
+                                  </p:childTnLst>
+                                </p:cTn>
+                              </p:par>
+                            </p:childTnLst>
+                          </p:cTn>
+                        </p:par>
+                      </p:childTnLst>
+                    </p:cTn>
+                  </p:par>
+                </p:childTnLst>
+              </p:cTn>
+              <p:prevCondLst>
+                <p:cond evt="onPrev" delay="0">
+                  <p:tgtEl>
+                    <p:sldTgt/>
+                  </p:tgtEl>
+                </p:cond>
+              </p:prevCondLst>
+              <p:nextCondLst>
+                <p:cond evt="onNext" delay="0">
+                  <p:tgtEl>
+                    <p:sldTgt/>
+                  </p:tgtEl>
+                </p:cond>
+              </p:nextCondLst>
+            </p:seq>
+          </p:childTnLst>
+        </p:cTn>
+      </p:par>
+    </p:tnLst>
+    <p:bldLst>
+      <p:bldP spid="3" grpId="0" build="p"/>
+    </p:bldLst>
+  </p:timing>
 </p:sld>
 </file>
 
@@ -13364,6 +15229,279 @@
   <p:clrMapOvr>
     <a:masterClrMapping/>
   </p:clrMapOvr>
+  <p:timing>
+    <p:tnLst>
+      <p:par>
+        <p:cTn id="1" dur="indefinite" restart="never" nodeType="tmRoot">
+          <p:childTnLst>
+            <p:seq concurrent="1" nextAc="seek">
+              <p:cTn id="2" dur="indefinite" nodeType="mainSeq">
+                <p:childTnLst>
+                  <p:par>
+                    <p:cTn id="3" fill="hold">
+                      <p:stCondLst>
+                        <p:cond delay="indefinite"/>
+                      </p:stCondLst>
+                      <p:childTnLst>
+                        <p:par>
+                          <p:cTn id="4" fill="hold">
+                            <p:stCondLst>
+                              <p:cond delay="0"/>
+                            </p:stCondLst>
+                            <p:childTnLst>
+                              <p:par>
+                                <p:cTn id="5" presetID="1" presetClass="entr" presetSubtype="0" fill="hold" grpId="0" nodeType="clickEffect">
+                                  <p:stCondLst>
+                                    <p:cond delay="0"/>
+                                  </p:stCondLst>
+                                  <p:childTnLst>
+                                    <p:set>
+                                      <p:cBhvr>
+                                        <p:cTn id="6" dur="1" fill="hold">
+                                          <p:stCondLst>
+                                            <p:cond delay="0"/>
+                                          </p:stCondLst>
+                                        </p:cTn>
+                                        <p:tgtEl>
+                                          <p:spTgt spid="3">
+                                            <p:txEl>
+                                              <p:pRg st="0" end="0"/>
+                                            </p:txEl>
+                                          </p:spTgt>
+                                        </p:tgtEl>
+                                        <p:attrNameLst>
+                                          <p:attrName>style.visibility</p:attrName>
+                                        </p:attrNameLst>
+                                      </p:cBhvr>
+                                      <p:to>
+                                        <p:strVal val="visible"/>
+                                      </p:to>
+                                    </p:set>
+                                  </p:childTnLst>
+                                </p:cTn>
+                              </p:par>
+                            </p:childTnLst>
+                          </p:cTn>
+                        </p:par>
+                      </p:childTnLst>
+                    </p:cTn>
+                  </p:par>
+                  <p:par>
+                    <p:cTn id="7" fill="hold">
+                      <p:stCondLst>
+                        <p:cond delay="indefinite"/>
+                      </p:stCondLst>
+                      <p:childTnLst>
+                        <p:par>
+                          <p:cTn id="8" fill="hold">
+                            <p:stCondLst>
+                              <p:cond delay="0"/>
+                            </p:stCondLst>
+                            <p:childTnLst>
+                              <p:par>
+                                <p:cTn id="9" presetID="1" presetClass="entr" presetSubtype="0" fill="hold" grpId="0" nodeType="clickEffect">
+                                  <p:stCondLst>
+                                    <p:cond delay="0"/>
+                                  </p:stCondLst>
+                                  <p:childTnLst>
+                                    <p:set>
+                                      <p:cBhvr>
+                                        <p:cTn id="10" dur="1" fill="hold">
+                                          <p:stCondLst>
+                                            <p:cond delay="0"/>
+                                          </p:stCondLst>
+                                        </p:cTn>
+                                        <p:tgtEl>
+                                          <p:spTgt spid="3">
+                                            <p:txEl>
+                                              <p:pRg st="1" end="1"/>
+                                            </p:txEl>
+                                          </p:spTgt>
+                                        </p:tgtEl>
+                                        <p:attrNameLst>
+                                          <p:attrName>style.visibility</p:attrName>
+                                        </p:attrNameLst>
+                                      </p:cBhvr>
+                                      <p:to>
+                                        <p:strVal val="visible"/>
+                                      </p:to>
+                                    </p:set>
+                                  </p:childTnLst>
+                                </p:cTn>
+                              </p:par>
+                            </p:childTnLst>
+                          </p:cTn>
+                        </p:par>
+                      </p:childTnLst>
+                    </p:cTn>
+                  </p:par>
+                  <p:par>
+                    <p:cTn id="11" fill="hold">
+                      <p:stCondLst>
+                        <p:cond delay="indefinite"/>
+                      </p:stCondLst>
+                      <p:childTnLst>
+                        <p:par>
+                          <p:cTn id="12" fill="hold">
+                            <p:stCondLst>
+                              <p:cond delay="0"/>
+                            </p:stCondLst>
+                            <p:childTnLst>
+                              <p:par>
+                                <p:cTn id="13" presetID="1" presetClass="entr" presetSubtype="0" fill="hold" grpId="0" nodeType="clickEffect">
+                                  <p:stCondLst>
+                                    <p:cond delay="0"/>
+                                  </p:stCondLst>
+                                  <p:childTnLst>
+                                    <p:set>
+                                      <p:cBhvr>
+                                        <p:cTn id="14" dur="1" fill="hold">
+                                          <p:stCondLst>
+                                            <p:cond delay="0"/>
+                                          </p:stCondLst>
+                                        </p:cTn>
+                                        <p:tgtEl>
+                                          <p:spTgt spid="3">
+                                            <p:txEl>
+                                              <p:pRg st="3" end="3"/>
+                                            </p:txEl>
+                                          </p:spTgt>
+                                        </p:tgtEl>
+                                        <p:attrNameLst>
+                                          <p:attrName>style.visibility</p:attrName>
+                                        </p:attrNameLst>
+                                      </p:cBhvr>
+                                      <p:to>
+                                        <p:strVal val="visible"/>
+                                      </p:to>
+                                    </p:set>
+                                  </p:childTnLst>
+                                </p:cTn>
+                              </p:par>
+                              <p:par>
+                                <p:cTn id="15" presetID="1" presetClass="entr" presetSubtype="0" fill="hold" grpId="0" nodeType="withEffect">
+                                  <p:stCondLst>
+                                    <p:cond delay="0"/>
+                                  </p:stCondLst>
+                                  <p:childTnLst>
+                                    <p:set>
+                                      <p:cBhvr>
+                                        <p:cTn id="16" dur="1" fill="hold">
+                                          <p:stCondLst>
+                                            <p:cond delay="0"/>
+                                          </p:stCondLst>
+                                        </p:cTn>
+                                        <p:tgtEl>
+                                          <p:spTgt spid="3">
+                                            <p:txEl>
+                                              <p:pRg st="4" end="4"/>
+                                            </p:txEl>
+                                          </p:spTgt>
+                                        </p:tgtEl>
+                                        <p:attrNameLst>
+                                          <p:attrName>style.visibility</p:attrName>
+                                        </p:attrNameLst>
+                                      </p:cBhvr>
+                                      <p:to>
+                                        <p:strVal val="visible"/>
+                                      </p:to>
+                                    </p:set>
+                                  </p:childTnLst>
+                                </p:cTn>
+                              </p:par>
+                              <p:par>
+                                <p:cTn id="17" presetID="1" presetClass="entr" presetSubtype="0" fill="hold" grpId="0" nodeType="withEffect">
+                                  <p:stCondLst>
+                                    <p:cond delay="0"/>
+                                  </p:stCondLst>
+                                  <p:childTnLst>
+                                    <p:set>
+                                      <p:cBhvr>
+                                        <p:cTn id="18" dur="1" fill="hold">
+                                          <p:stCondLst>
+                                            <p:cond delay="0"/>
+                                          </p:stCondLst>
+                                        </p:cTn>
+                                        <p:tgtEl>
+                                          <p:spTgt spid="3">
+                                            <p:txEl>
+                                              <p:pRg st="5" end="5"/>
+                                            </p:txEl>
+                                          </p:spTgt>
+                                        </p:tgtEl>
+                                        <p:attrNameLst>
+                                          <p:attrName>style.visibility</p:attrName>
+                                        </p:attrNameLst>
+                                      </p:cBhvr>
+                                      <p:to>
+                                        <p:strVal val="visible"/>
+                                      </p:to>
+                                    </p:set>
+                                  </p:childTnLst>
+                                </p:cTn>
+                              </p:par>
+                              <p:par>
+                                <p:cTn id="19" presetID="1" presetClass="entr" presetSubtype="0" fill="hold" grpId="0" nodeType="withEffect">
+                                  <p:stCondLst>
+                                    <p:cond delay="0"/>
+                                  </p:stCondLst>
+                                  <p:childTnLst>
+                                    <p:set>
+                                      <p:cBhvr>
+                                        <p:cTn id="20" dur="1" fill="hold">
+                                          <p:stCondLst>
+                                            <p:cond delay="0"/>
+                                          </p:stCondLst>
+                                        </p:cTn>
+                                        <p:tgtEl>
+                                          <p:spTgt spid="3">
+                                            <p:txEl>
+                                              <p:pRg st="6" end="6"/>
+                                            </p:txEl>
+                                          </p:spTgt>
+                                        </p:tgtEl>
+                                        <p:attrNameLst>
+                                          <p:attrName>style.visibility</p:attrName>
+                                        </p:attrNameLst>
+                                      </p:cBhvr>
+                                      <p:to>
+                                        <p:strVal val="visible"/>
+                                      </p:to>
+                                    </p:set>
+                                  </p:childTnLst>
+                                </p:cTn>
+                              </p:par>
+                            </p:childTnLst>
+                          </p:cTn>
+                        </p:par>
+                      </p:childTnLst>
+                    </p:cTn>
+                  </p:par>
+                </p:childTnLst>
+              </p:cTn>
+              <p:prevCondLst>
+                <p:cond evt="onPrev" delay="0">
+                  <p:tgtEl>
+                    <p:sldTgt/>
+                  </p:tgtEl>
+                </p:cond>
+              </p:prevCondLst>
+              <p:nextCondLst>
+                <p:cond evt="onNext" delay="0">
+                  <p:tgtEl>
+                    <p:sldTgt/>
+                  </p:tgtEl>
+                </p:cond>
+              </p:nextCondLst>
+            </p:seq>
+          </p:childTnLst>
+        </p:cTn>
+      </p:par>
+    </p:tnLst>
+    <p:bldLst>
+      <p:bldP spid="3" grpId="0" build="p"/>
+    </p:bldLst>
+  </p:timing>
 </p:sld>
 </file>
 
@@ -13503,6 +15641,279 @@
   <p:clrMapOvr>
     <a:masterClrMapping/>
   </p:clrMapOvr>
+  <p:timing>
+    <p:tnLst>
+      <p:par>
+        <p:cTn id="1" dur="indefinite" restart="never" nodeType="tmRoot">
+          <p:childTnLst>
+            <p:seq concurrent="1" nextAc="seek">
+              <p:cTn id="2" dur="indefinite" nodeType="mainSeq">
+                <p:childTnLst>
+                  <p:par>
+                    <p:cTn id="3" fill="hold">
+                      <p:stCondLst>
+                        <p:cond delay="indefinite"/>
+                      </p:stCondLst>
+                      <p:childTnLst>
+                        <p:par>
+                          <p:cTn id="4" fill="hold">
+                            <p:stCondLst>
+                              <p:cond delay="0"/>
+                            </p:stCondLst>
+                            <p:childTnLst>
+                              <p:par>
+                                <p:cTn id="5" presetID="1" presetClass="entr" presetSubtype="0" fill="hold" grpId="0" nodeType="clickEffect">
+                                  <p:stCondLst>
+                                    <p:cond delay="0"/>
+                                  </p:stCondLst>
+                                  <p:childTnLst>
+                                    <p:set>
+                                      <p:cBhvr>
+                                        <p:cTn id="6" dur="1" fill="hold">
+                                          <p:stCondLst>
+                                            <p:cond delay="0"/>
+                                          </p:stCondLst>
+                                        </p:cTn>
+                                        <p:tgtEl>
+                                          <p:spTgt spid="3">
+                                            <p:txEl>
+                                              <p:pRg st="0" end="0"/>
+                                            </p:txEl>
+                                          </p:spTgt>
+                                        </p:tgtEl>
+                                        <p:attrNameLst>
+                                          <p:attrName>style.visibility</p:attrName>
+                                        </p:attrNameLst>
+                                      </p:cBhvr>
+                                      <p:to>
+                                        <p:strVal val="visible"/>
+                                      </p:to>
+                                    </p:set>
+                                  </p:childTnLst>
+                                </p:cTn>
+                              </p:par>
+                            </p:childTnLst>
+                          </p:cTn>
+                        </p:par>
+                      </p:childTnLst>
+                    </p:cTn>
+                  </p:par>
+                  <p:par>
+                    <p:cTn id="7" fill="hold">
+                      <p:stCondLst>
+                        <p:cond delay="indefinite"/>
+                      </p:stCondLst>
+                      <p:childTnLst>
+                        <p:par>
+                          <p:cTn id="8" fill="hold">
+                            <p:stCondLst>
+                              <p:cond delay="0"/>
+                            </p:stCondLst>
+                            <p:childTnLst>
+                              <p:par>
+                                <p:cTn id="9" presetID="1" presetClass="entr" presetSubtype="0" fill="hold" grpId="0" nodeType="clickEffect">
+                                  <p:stCondLst>
+                                    <p:cond delay="0"/>
+                                  </p:stCondLst>
+                                  <p:childTnLst>
+                                    <p:set>
+                                      <p:cBhvr>
+                                        <p:cTn id="10" dur="1" fill="hold">
+                                          <p:stCondLst>
+                                            <p:cond delay="0"/>
+                                          </p:stCondLst>
+                                        </p:cTn>
+                                        <p:tgtEl>
+                                          <p:spTgt spid="3">
+                                            <p:txEl>
+                                              <p:pRg st="1" end="1"/>
+                                            </p:txEl>
+                                          </p:spTgt>
+                                        </p:tgtEl>
+                                        <p:attrNameLst>
+                                          <p:attrName>style.visibility</p:attrName>
+                                        </p:attrNameLst>
+                                      </p:cBhvr>
+                                      <p:to>
+                                        <p:strVal val="visible"/>
+                                      </p:to>
+                                    </p:set>
+                                  </p:childTnLst>
+                                </p:cTn>
+                              </p:par>
+                            </p:childTnLst>
+                          </p:cTn>
+                        </p:par>
+                      </p:childTnLst>
+                    </p:cTn>
+                  </p:par>
+                  <p:par>
+                    <p:cTn id="11" fill="hold">
+                      <p:stCondLst>
+                        <p:cond delay="indefinite"/>
+                      </p:stCondLst>
+                      <p:childTnLst>
+                        <p:par>
+                          <p:cTn id="12" fill="hold">
+                            <p:stCondLst>
+                              <p:cond delay="0"/>
+                            </p:stCondLst>
+                            <p:childTnLst>
+                              <p:par>
+                                <p:cTn id="13" presetID="1" presetClass="entr" presetSubtype="0" fill="hold" grpId="0" nodeType="clickEffect">
+                                  <p:stCondLst>
+                                    <p:cond delay="0"/>
+                                  </p:stCondLst>
+                                  <p:childTnLst>
+                                    <p:set>
+                                      <p:cBhvr>
+                                        <p:cTn id="14" dur="1" fill="hold">
+                                          <p:stCondLst>
+                                            <p:cond delay="0"/>
+                                          </p:stCondLst>
+                                        </p:cTn>
+                                        <p:tgtEl>
+                                          <p:spTgt spid="3">
+                                            <p:txEl>
+                                              <p:pRg st="3" end="3"/>
+                                            </p:txEl>
+                                          </p:spTgt>
+                                        </p:tgtEl>
+                                        <p:attrNameLst>
+                                          <p:attrName>style.visibility</p:attrName>
+                                        </p:attrNameLst>
+                                      </p:cBhvr>
+                                      <p:to>
+                                        <p:strVal val="visible"/>
+                                      </p:to>
+                                    </p:set>
+                                  </p:childTnLst>
+                                </p:cTn>
+                              </p:par>
+                              <p:par>
+                                <p:cTn id="15" presetID="1" presetClass="entr" presetSubtype="0" fill="hold" grpId="0" nodeType="withEffect">
+                                  <p:stCondLst>
+                                    <p:cond delay="0"/>
+                                  </p:stCondLst>
+                                  <p:childTnLst>
+                                    <p:set>
+                                      <p:cBhvr>
+                                        <p:cTn id="16" dur="1" fill="hold">
+                                          <p:stCondLst>
+                                            <p:cond delay="0"/>
+                                          </p:stCondLst>
+                                        </p:cTn>
+                                        <p:tgtEl>
+                                          <p:spTgt spid="3">
+                                            <p:txEl>
+                                              <p:pRg st="4" end="4"/>
+                                            </p:txEl>
+                                          </p:spTgt>
+                                        </p:tgtEl>
+                                        <p:attrNameLst>
+                                          <p:attrName>style.visibility</p:attrName>
+                                        </p:attrNameLst>
+                                      </p:cBhvr>
+                                      <p:to>
+                                        <p:strVal val="visible"/>
+                                      </p:to>
+                                    </p:set>
+                                  </p:childTnLst>
+                                </p:cTn>
+                              </p:par>
+                              <p:par>
+                                <p:cTn id="17" presetID="1" presetClass="entr" presetSubtype="0" fill="hold" grpId="0" nodeType="withEffect">
+                                  <p:stCondLst>
+                                    <p:cond delay="0"/>
+                                  </p:stCondLst>
+                                  <p:childTnLst>
+                                    <p:set>
+                                      <p:cBhvr>
+                                        <p:cTn id="18" dur="1" fill="hold">
+                                          <p:stCondLst>
+                                            <p:cond delay="0"/>
+                                          </p:stCondLst>
+                                        </p:cTn>
+                                        <p:tgtEl>
+                                          <p:spTgt spid="3">
+                                            <p:txEl>
+                                              <p:pRg st="5" end="5"/>
+                                            </p:txEl>
+                                          </p:spTgt>
+                                        </p:tgtEl>
+                                        <p:attrNameLst>
+                                          <p:attrName>style.visibility</p:attrName>
+                                        </p:attrNameLst>
+                                      </p:cBhvr>
+                                      <p:to>
+                                        <p:strVal val="visible"/>
+                                      </p:to>
+                                    </p:set>
+                                  </p:childTnLst>
+                                </p:cTn>
+                              </p:par>
+                              <p:par>
+                                <p:cTn id="19" presetID="1" presetClass="entr" presetSubtype="0" fill="hold" grpId="0" nodeType="withEffect">
+                                  <p:stCondLst>
+                                    <p:cond delay="0"/>
+                                  </p:stCondLst>
+                                  <p:childTnLst>
+                                    <p:set>
+                                      <p:cBhvr>
+                                        <p:cTn id="20" dur="1" fill="hold">
+                                          <p:stCondLst>
+                                            <p:cond delay="0"/>
+                                          </p:stCondLst>
+                                        </p:cTn>
+                                        <p:tgtEl>
+                                          <p:spTgt spid="3">
+                                            <p:txEl>
+                                              <p:pRg st="6" end="6"/>
+                                            </p:txEl>
+                                          </p:spTgt>
+                                        </p:tgtEl>
+                                        <p:attrNameLst>
+                                          <p:attrName>style.visibility</p:attrName>
+                                        </p:attrNameLst>
+                                      </p:cBhvr>
+                                      <p:to>
+                                        <p:strVal val="visible"/>
+                                      </p:to>
+                                    </p:set>
+                                  </p:childTnLst>
+                                </p:cTn>
+                              </p:par>
+                            </p:childTnLst>
+                          </p:cTn>
+                        </p:par>
+                      </p:childTnLst>
+                    </p:cTn>
+                  </p:par>
+                </p:childTnLst>
+              </p:cTn>
+              <p:prevCondLst>
+                <p:cond evt="onPrev" delay="0">
+                  <p:tgtEl>
+                    <p:sldTgt/>
+                  </p:tgtEl>
+                </p:cond>
+              </p:prevCondLst>
+              <p:nextCondLst>
+                <p:cond evt="onNext" delay="0">
+                  <p:tgtEl>
+                    <p:sldTgt/>
+                  </p:tgtEl>
+                </p:cond>
+              </p:nextCondLst>
+            </p:seq>
+          </p:childTnLst>
+        </p:cTn>
+      </p:par>
+    </p:tnLst>
+    <p:bldLst>
+      <p:bldP spid="3" grpId="0" build="p"/>
+    </p:bldLst>
+  </p:timing>
 </p:sld>
 </file>
 
@@ -13670,6 +16081,372 @@
   <p:clrMapOvr>
     <a:masterClrMapping/>
   </p:clrMapOvr>
+  <p:timing>
+    <p:tnLst>
+      <p:par>
+        <p:cTn id="1" dur="indefinite" restart="never" nodeType="tmRoot">
+          <p:childTnLst>
+            <p:seq concurrent="1" nextAc="seek">
+              <p:cTn id="2" dur="indefinite" nodeType="mainSeq">
+                <p:childTnLst>
+                  <p:par>
+                    <p:cTn id="3" fill="hold">
+                      <p:stCondLst>
+                        <p:cond delay="indefinite"/>
+                      </p:stCondLst>
+                      <p:childTnLst>
+                        <p:par>
+                          <p:cTn id="4" fill="hold">
+                            <p:stCondLst>
+                              <p:cond delay="0"/>
+                            </p:stCondLst>
+                            <p:childTnLst>
+                              <p:par>
+                                <p:cTn id="5" presetID="1" presetClass="entr" presetSubtype="0" fill="hold" grpId="0" nodeType="clickEffect">
+                                  <p:stCondLst>
+                                    <p:cond delay="0"/>
+                                  </p:stCondLst>
+                                  <p:childTnLst>
+                                    <p:set>
+                                      <p:cBhvr>
+                                        <p:cTn id="6" dur="1" fill="hold">
+                                          <p:stCondLst>
+                                            <p:cond delay="0"/>
+                                          </p:stCondLst>
+                                        </p:cTn>
+                                        <p:tgtEl>
+                                          <p:spTgt spid="3">
+                                            <p:txEl>
+                                              <p:pRg st="0" end="0"/>
+                                            </p:txEl>
+                                          </p:spTgt>
+                                        </p:tgtEl>
+                                        <p:attrNameLst>
+                                          <p:attrName>style.visibility</p:attrName>
+                                        </p:attrNameLst>
+                                      </p:cBhvr>
+                                      <p:to>
+                                        <p:strVal val="visible"/>
+                                      </p:to>
+                                    </p:set>
+                                  </p:childTnLst>
+                                </p:cTn>
+                              </p:par>
+                            </p:childTnLst>
+                          </p:cTn>
+                        </p:par>
+                      </p:childTnLst>
+                    </p:cTn>
+                  </p:par>
+                  <p:par>
+                    <p:cTn id="7" fill="hold">
+                      <p:stCondLst>
+                        <p:cond delay="indefinite"/>
+                      </p:stCondLst>
+                      <p:childTnLst>
+                        <p:par>
+                          <p:cTn id="8" fill="hold">
+                            <p:stCondLst>
+                              <p:cond delay="0"/>
+                            </p:stCondLst>
+                            <p:childTnLst>
+                              <p:par>
+                                <p:cTn id="9" presetID="1" presetClass="entr" presetSubtype="0" fill="hold" grpId="0" nodeType="clickEffect">
+                                  <p:stCondLst>
+                                    <p:cond delay="0"/>
+                                  </p:stCondLst>
+                                  <p:childTnLst>
+                                    <p:set>
+                                      <p:cBhvr>
+                                        <p:cTn id="10" dur="1" fill="hold">
+                                          <p:stCondLst>
+                                            <p:cond delay="0"/>
+                                          </p:stCondLst>
+                                        </p:cTn>
+                                        <p:tgtEl>
+                                          <p:spTgt spid="3">
+                                            <p:txEl>
+                                              <p:pRg st="1" end="1"/>
+                                            </p:txEl>
+                                          </p:spTgt>
+                                        </p:tgtEl>
+                                        <p:attrNameLst>
+                                          <p:attrName>style.visibility</p:attrName>
+                                        </p:attrNameLst>
+                                      </p:cBhvr>
+                                      <p:to>
+                                        <p:strVal val="visible"/>
+                                      </p:to>
+                                    </p:set>
+                                  </p:childTnLst>
+                                </p:cTn>
+                              </p:par>
+                            </p:childTnLst>
+                          </p:cTn>
+                        </p:par>
+                      </p:childTnLst>
+                    </p:cTn>
+                  </p:par>
+                  <p:par>
+                    <p:cTn id="11" fill="hold">
+                      <p:stCondLst>
+                        <p:cond delay="indefinite"/>
+                      </p:stCondLst>
+                      <p:childTnLst>
+                        <p:par>
+                          <p:cTn id="12" fill="hold">
+                            <p:stCondLst>
+                              <p:cond delay="0"/>
+                            </p:stCondLst>
+                            <p:childTnLst>
+                              <p:par>
+                                <p:cTn id="13" presetID="1" presetClass="entr" presetSubtype="0" fill="hold" grpId="0" nodeType="clickEffect">
+                                  <p:stCondLst>
+                                    <p:cond delay="0"/>
+                                  </p:stCondLst>
+                                  <p:childTnLst>
+                                    <p:set>
+                                      <p:cBhvr>
+                                        <p:cTn id="14" dur="1" fill="hold">
+                                          <p:stCondLst>
+                                            <p:cond delay="0"/>
+                                          </p:stCondLst>
+                                        </p:cTn>
+                                        <p:tgtEl>
+                                          <p:spTgt spid="3">
+                                            <p:txEl>
+                                              <p:pRg st="3" end="3"/>
+                                            </p:txEl>
+                                          </p:spTgt>
+                                        </p:tgtEl>
+                                        <p:attrNameLst>
+                                          <p:attrName>style.visibility</p:attrName>
+                                        </p:attrNameLst>
+                                      </p:cBhvr>
+                                      <p:to>
+                                        <p:strVal val="visible"/>
+                                      </p:to>
+                                    </p:set>
+                                  </p:childTnLst>
+                                </p:cTn>
+                              </p:par>
+                              <p:par>
+                                <p:cTn id="15" presetID="1" presetClass="entr" presetSubtype="0" fill="hold" grpId="0" nodeType="withEffect">
+                                  <p:stCondLst>
+                                    <p:cond delay="0"/>
+                                  </p:stCondLst>
+                                  <p:childTnLst>
+                                    <p:set>
+                                      <p:cBhvr>
+                                        <p:cTn id="16" dur="1" fill="hold">
+                                          <p:stCondLst>
+                                            <p:cond delay="0"/>
+                                          </p:stCondLst>
+                                        </p:cTn>
+                                        <p:tgtEl>
+                                          <p:spTgt spid="3">
+                                            <p:txEl>
+                                              <p:pRg st="4" end="4"/>
+                                            </p:txEl>
+                                          </p:spTgt>
+                                        </p:tgtEl>
+                                        <p:attrNameLst>
+                                          <p:attrName>style.visibility</p:attrName>
+                                        </p:attrNameLst>
+                                      </p:cBhvr>
+                                      <p:to>
+                                        <p:strVal val="visible"/>
+                                      </p:to>
+                                    </p:set>
+                                  </p:childTnLst>
+                                </p:cTn>
+                              </p:par>
+                              <p:par>
+                                <p:cTn id="17" presetID="1" presetClass="entr" presetSubtype="0" fill="hold" grpId="0" nodeType="withEffect">
+                                  <p:stCondLst>
+                                    <p:cond delay="0"/>
+                                  </p:stCondLst>
+                                  <p:childTnLst>
+                                    <p:set>
+                                      <p:cBhvr>
+                                        <p:cTn id="18" dur="1" fill="hold">
+                                          <p:stCondLst>
+                                            <p:cond delay="0"/>
+                                          </p:stCondLst>
+                                        </p:cTn>
+                                        <p:tgtEl>
+                                          <p:spTgt spid="3">
+                                            <p:txEl>
+                                              <p:pRg st="5" end="5"/>
+                                            </p:txEl>
+                                          </p:spTgt>
+                                        </p:tgtEl>
+                                        <p:attrNameLst>
+                                          <p:attrName>style.visibility</p:attrName>
+                                        </p:attrNameLst>
+                                      </p:cBhvr>
+                                      <p:to>
+                                        <p:strVal val="visible"/>
+                                      </p:to>
+                                    </p:set>
+                                  </p:childTnLst>
+                                </p:cTn>
+                              </p:par>
+                              <p:par>
+                                <p:cTn id="19" presetID="1" presetClass="entr" presetSubtype="0" fill="hold" grpId="0" nodeType="withEffect">
+                                  <p:stCondLst>
+                                    <p:cond delay="0"/>
+                                  </p:stCondLst>
+                                  <p:childTnLst>
+                                    <p:set>
+                                      <p:cBhvr>
+                                        <p:cTn id="20" dur="1" fill="hold">
+                                          <p:stCondLst>
+                                            <p:cond delay="0"/>
+                                          </p:stCondLst>
+                                        </p:cTn>
+                                        <p:tgtEl>
+                                          <p:spTgt spid="3">
+                                            <p:txEl>
+                                              <p:pRg st="6" end="6"/>
+                                            </p:txEl>
+                                          </p:spTgt>
+                                        </p:tgtEl>
+                                        <p:attrNameLst>
+                                          <p:attrName>style.visibility</p:attrName>
+                                        </p:attrNameLst>
+                                      </p:cBhvr>
+                                      <p:to>
+                                        <p:strVal val="visible"/>
+                                      </p:to>
+                                    </p:set>
+                                  </p:childTnLst>
+                                </p:cTn>
+                              </p:par>
+                              <p:par>
+                                <p:cTn id="21" presetID="1" presetClass="entr" presetSubtype="0" fill="hold" grpId="0" nodeType="withEffect">
+                                  <p:stCondLst>
+                                    <p:cond delay="0"/>
+                                  </p:stCondLst>
+                                  <p:childTnLst>
+                                    <p:set>
+                                      <p:cBhvr>
+                                        <p:cTn id="22" dur="1" fill="hold">
+                                          <p:stCondLst>
+                                            <p:cond delay="0"/>
+                                          </p:stCondLst>
+                                        </p:cTn>
+                                        <p:tgtEl>
+                                          <p:spTgt spid="3">
+                                            <p:txEl>
+                                              <p:pRg st="7" end="7"/>
+                                            </p:txEl>
+                                          </p:spTgt>
+                                        </p:tgtEl>
+                                        <p:attrNameLst>
+                                          <p:attrName>style.visibility</p:attrName>
+                                        </p:attrNameLst>
+                                      </p:cBhvr>
+                                      <p:to>
+                                        <p:strVal val="visible"/>
+                                      </p:to>
+                                    </p:set>
+                                  </p:childTnLst>
+                                </p:cTn>
+                              </p:par>
+                              <p:par>
+                                <p:cTn id="23" presetID="1" presetClass="entr" presetSubtype="0" fill="hold" grpId="0" nodeType="withEffect">
+                                  <p:stCondLst>
+                                    <p:cond delay="0"/>
+                                  </p:stCondLst>
+                                  <p:childTnLst>
+                                    <p:set>
+                                      <p:cBhvr>
+                                        <p:cTn id="24" dur="1" fill="hold">
+                                          <p:stCondLst>
+                                            <p:cond delay="0"/>
+                                          </p:stCondLst>
+                                        </p:cTn>
+                                        <p:tgtEl>
+                                          <p:spTgt spid="3">
+                                            <p:txEl>
+                                              <p:pRg st="8" end="8"/>
+                                            </p:txEl>
+                                          </p:spTgt>
+                                        </p:tgtEl>
+                                        <p:attrNameLst>
+                                          <p:attrName>style.visibility</p:attrName>
+                                        </p:attrNameLst>
+                                      </p:cBhvr>
+                                      <p:to>
+                                        <p:strVal val="visible"/>
+                                      </p:to>
+                                    </p:set>
+                                  </p:childTnLst>
+                                </p:cTn>
+                              </p:par>
+                              <p:par>
+                                <p:cTn id="25" presetID="1" presetClass="entr" presetSubtype="0" fill="hold" grpId="0" nodeType="withEffect">
+                                  <p:stCondLst>
+                                    <p:cond delay="0"/>
+                                  </p:stCondLst>
+                                  <p:childTnLst>
+                                    <p:set>
+                                      <p:cBhvr>
+                                        <p:cTn id="26" dur="1" fill="hold">
+                                          <p:stCondLst>
+                                            <p:cond delay="0"/>
+                                          </p:stCondLst>
+                                        </p:cTn>
+                                        <p:tgtEl>
+                                          <p:spTgt spid="3">
+                                            <p:txEl>
+                                              <p:pRg st="9" end="9"/>
+                                            </p:txEl>
+                                          </p:spTgt>
+                                        </p:tgtEl>
+                                        <p:attrNameLst>
+                                          <p:attrName>style.visibility</p:attrName>
+                                        </p:attrNameLst>
+                                      </p:cBhvr>
+                                      <p:to>
+                                        <p:strVal val="visible"/>
+                                      </p:to>
+                                    </p:set>
+                                  </p:childTnLst>
+                                </p:cTn>
+                              </p:par>
+                            </p:childTnLst>
+                          </p:cTn>
+                        </p:par>
+                      </p:childTnLst>
+                    </p:cTn>
+                  </p:par>
+                </p:childTnLst>
+              </p:cTn>
+              <p:prevCondLst>
+                <p:cond evt="onPrev" delay="0">
+                  <p:tgtEl>
+                    <p:sldTgt/>
+                  </p:tgtEl>
+                </p:cond>
+              </p:prevCondLst>
+              <p:nextCondLst>
+                <p:cond evt="onNext" delay="0">
+                  <p:tgtEl>
+                    <p:sldTgt/>
+                  </p:tgtEl>
+                </p:cond>
+              </p:nextCondLst>
+            </p:seq>
+          </p:childTnLst>
+        </p:cTn>
+      </p:par>
+    </p:tnLst>
+    <p:bldLst>
+      <p:bldP spid="3" grpId="0" build="p"/>
+    </p:bldLst>
+  </p:timing>
 </p:sld>
 </file>
 
@@ -14628,31 +17405,6 @@
       </p:sp>
       <p:sp>
         <p:nvSpPr>
-          <p:cNvPr id="3" name="Content Placeholder 2">
-            <a:extLst>
-              <a:ext uri="{FF2B5EF4-FFF2-40B4-BE49-F238E27FC236}">
-                <a16:creationId xmlns:a16="http://schemas.microsoft.com/office/drawing/2014/main" id="{1BC90F12-59E9-B91B-B183-BF4016A59BD7}"/>
-              </a:ext>
-            </a:extLst>
-          </p:cNvPr>
-          <p:cNvSpPr>
-            <a:spLocks noGrp="1"/>
-          </p:cNvSpPr>
-          <p:nvPr>
-            <p:ph idx="1"/>
-          </p:nvPr>
-        </p:nvSpPr>
-        <p:spPr/>
-        <p:txBody>
-          <a:bodyPr/>
-          <a:lstStyle/>
-          <a:p>
-            <a:endParaRPr lang="en-US" dirty="0"/>
-          </a:p>
-        </p:txBody>
-      </p:sp>
-      <p:sp>
-        <p:nvSpPr>
           <p:cNvPr id="10" name="Rounded Rectangle 9">
             <a:extLst>
               <a:ext uri="{FF2B5EF4-FFF2-40B4-BE49-F238E27FC236}">
@@ -14713,8 +17465,8 @@
           <p:nvPr/>
         </p:nvSpPr>
         <p:spPr>
-          <a:xfrm rot="3743277">
-            <a:off x="8881700" y="3260213"/>
+          <a:xfrm rot="2872106">
+            <a:off x="9067303" y="3260213"/>
             <a:ext cx="558141" cy="484632"/>
           </a:xfrm>
           <a:prstGeom prst="rightArrow">
@@ -14760,7 +17512,7 @@
         </p:nvSpPr>
         <p:spPr>
           <a:xfrm>
-            <a:off x="3488377" y="3925817"/>
+            <a:off x="2858985" y="2149558"/>
             <a:ext cx="1840675" cy="914400"/>
           </a:xfrm>
           <a:prstGeom prst="roundRect">
@@ -14797,52 +17549,6 @@
       </p:sp>
       <p:sp>
         <p:nvSpPr>
-          <p:cNvPr id="7" name="Right Arrow 6">
-            <a:extLst>
-              <a:ext uri="{FF2B5EF4-FFF2-40B4-BE49-F238E27FC236}">
-                <a16:creationId xmlns:a16="http://schemas.microsoft.com/office/drawing/2014/main" id="{90FB8E53-FB0C-259D-CD09-AFD9C3DD9245}"/>
-              </a:ext>
-            </a:extLst>
-          </p:cNvPr>
-          <p:cNvSpPr/>
-          <p:nvPr/>
-        </p:nvSpPr>
-        <p:spPr>
-          <a:xfrm>
-            <a:off x="5478483" y="4140701"/>
-            <a:ext cx="558141" cy="484632"/>
-          </a:xfrm>
-          <a:prstGeom prst="rightArrow">
-            <a:avLst/>
-          </a:prstGeom>
-        </p:spPr>
-        <p:style>
-          <a:lnRef idx="2">
-            <a:schemeClr val="accent1">
-              <a:shade val="15000"/>
-            </a:schemeClr>
-          </a:lnRef>
-          <a:fillRef idx="1">
-            <a:schemeClr val="accent1"/>
-          </a:fillRef>
-          <a:effectRef idx="0">
-            <a:schemeClr val="accent1"/>
-          </a:effectRef>
-          <a:fontRef idx="minor">
-            <a:schemeClr val="lt1"/>
-          </a:fontRef>
-        </p:style>
-        <p:txBody>
-          <a:bodyPr rtlCol="0" anchor="ctr"/>
-          <a:lstStyle/>
-          <a:p>
-            <a:pPr algn="ctr"/>
-            <a:endParaRPr lang="en-US"/>
-          </a:p>
-        </p:txBody>
-      </p:sp>
-      <p:sp>
-        <p:nvSpPr>
           <p:cNvPr id="8" name="Rounded Rectangle 7">
             <a:extLst>
               <a:ext uri="{FF2B5EF4-FFF2-40B4-BE49-F238E27FC236}">
@@ -14855,7 +17561,7 @@
         </p:nvSpPr>
         <p:spPr>
           <a:xfrm>
-            <a:off x="6186055" y="3928097"/>
+            <a:off x="5286895" y="3925817"/>
             <a:ext cx="1840675" cy="914400"/>
           </a:xfrm>
           <a:prstGeom prst="roundRect">
@@ -14999,7 +17705,7 @@
         </p:nvSpPr>
         <p:spPr>
           <a:xfrm>
-            <a:off x="1467592" y="4240264"/>
+            <a:off x="838200" y="2464005"/>
             <a:ext cx="1163782" cy="410595"/>
           </a:xfrm>
           <a:prstGeom prst="flowChartMagneticDisk">
@@ -15048,7 +17754,7 @@
         </p:nvSpPr>
         <p:spPr>
           <a:xfrm>
-            <a:off x="2780805" y="4202358"/>
+            <a:off x="2151413" y="2426099"/>
             <a:ext cx="558141" cy="484632"/>
           </a:xfrm>
           <a:prstGeom prst="rightArrow">
@@ -15288,6 +17994,239 @@
           </a:p>
         </p:txBody>
       </p:sp>
+      <p:sp>
+        <p:nvSpPr>
+          <p:cNvPr id="6" name="Right Arrow 10">
+            <a:extLst>
+              <a:ext uri="{FF2B5EF4-FFF2-40B4-BE49-F238E27FC236}">
+                <a16:creationId xmlns:a16="http://schemas.microsoft.com/office/drawing/2014/main" id="{F8D00B4E-5019-385A-00F9-88EF7EA66798}"/>
+              </a:ext>
+            </a:extLst>
+          </p:cNvPr>
+          <p:cNvSpPr/>
+          <p:nvPr/>
+        </p:nvSpPr>
+        <p:spPr>
+          <a:xfrm rot="2872106">
+            <a:off x="4685346" y="3260212"/>
+            <a:ext cx="558141" cy="484632"/>
+          </a:xfrm>
+          <a:prstGeom prst="rightArrow">
+            <a:avLst/>
+          </a:prstGeom>
+        </p:spPr>
+        <p:style>
+          <a:lnRef idx="2">
+            <a:schemeClr val="accent1">
+              <a:shade val="15000"/>
+            </a:schemeClr>
+          </a:lnRef>
+          <a:fillRef idx="1">
+            <a:schemeClr val="accent1"/>
+          </a:fillRef>
+          <a:effectRef idx="0">
+            <a:schemeClr val="accent1"/>
+          </a:effectRef>
+          <a:fontRef idx="minor">
+            <a:schemeClr val="lt1"/>
+          </a:fontRef>
+        </p:style>
+        <p:txBody>
+          <a:bodyPr rtlCol="0" anchor="ctr"/>
+          <a:lstStyle/>
+          <a:p>
+            <a:pPr algn="ctr"/>
+            <a:endParaRPr lang="en-US"/>
+          </a:p>
+        </p:txBody>
+      </p:sp>
+      <p:sp>
+        <p:nvSpPr>
+          <p:cNvPr id="14" name="Magnetic Disk 14">
+            <a:extLst>
+              <a:ext uri="{FF2B5EF4-FFF2-40B4-BE49-F238E27FC236}">
+                <a16:creationId xmlns:a16="http://schemas.microsoft.com/office/drawing/2014/main" id="{3A81D705-48DD-03D2-FA63-8DA562319BB9}"/>
+              </a:ext>
+            </a:extLst>
+          </p:cNvPr>
+          <p:cNvSpPr/>
+          <p:nvPr/>
+        </p:nvSpPr>
+        <p:spPr>
+          <a:xfrm>
+            <a:off x="3157525" y="4276163"/>
+            <a:ext cx="1163782" cy="410595"/>
+          </a:xfrm>
+          <a:prstGeom prst="flowChartMagneticDisk">
+            <a:avLst/>
+          </a:prstGeom>
+        </p:spPr>
+        <p:style>
+          <a:lnRef idx="2">
+            <a:schemeClr val="accent1">
+              <a:shade val="15000"/>
+            </a:schemeClr>
+          </a:lnRef>
+          <a:fillRef idx="1">
+            <a:schemeClr val="accent1"/>
+          </a:fillRef>
+          <a:effectRef idx="0">
+            <a:schemeClr val="accent1"/>
+          </a:effectRef>
+          <a:fontRef idx="minor">
+            <a:schemeClr val="lt1"/>
+          </a:fontRef>
+        </p:style>
+        <p:txBody>
+          <a:bodyPr rtlCol="0" anchor="ctr"/>
+          <a:lstStyle/>
+          <a:p>
+            <a:pPr algn="ctr"/>
+            <a:r>
+              <a:rPr lang="en-US" dirty="0"/>
+              <a:t>Data</a:t>
+            </a:r>
+          </a:p>
+        </p:txBody>
+      </p:sp>
+      <p:sp>
+        <p:nvSpPr>
+          <p:cNvPr id="17" name="Right Arrow 17">
+            <a:extLst>
+              <a:ext uri="{FF2B5EF4-FFF2-40B4-BE49-F238E27FC236}">
+                <a16:creationId xmlns:a16="http://schemas.microsoft.com/office/drawing/2014/main" id="{EE119E15-F600-9DEE-D5F2-4173C101A4D3}"/>
+              </a:ext>
+            </a:extLst>
+          </p:cNvPr>
+          <p:cNvSpPr/>
+          <p:nvPr/>
+        </p:nvSpPr>
+        <p:spPr>
+          <a:xfrm>
+            <a:off x="4469774" y="4114267"/>
+            <a:ext cx="558141" cy="484632"/>
+          </a:xfrm>
+          <a:prstGeom prst="rightArrow">
+            <a:avLst/>
+          </a:prstGeom>
+        </p:spPr>
+        <p:style>
+          <a:lnRef idx="2">
+            <a:schemeClr val="accent1">
+              <a:shade val="15000"/>
+            </a:schemeClr>
+          </a:lnRef>
+          <a:fillRef idx="1">
+            <a:schemeClr val="accent1"/>
+          </a:fillRef>
+          <a:effectRef idx="0">
+            <a:schemeClr val="accent1"/>
+          </a:effectRef>
+          <a:fontRef idx="minor">
+            <a:schemeClr val="lt1"/>
+          </a:fontRef>
+        </p:style>
+        <p:txBody>
+          <a:bodyPr rtlCol="0" anchor="ctr"/>
+          <a:lstStyle/>
+          <a:p>
+            <a:pPr algn="ctr"/>
+            <a:endParaRPr lang="en-US"/>
+          </a:p>
+        </p:txBody>
+      </p:sp>
+      <p:sp>
+        <p:nvSpPr>
+          <p:cNvPr id="25" name="Magnetic Disk 14">
+            <a:extLst>
+              <a:ext uri="{FF2B5EF4-FFF2-40B4-BE49-F238E27FC236}">
+                <a16:creationId xmlns:a16="http://schemas.microsoft.com/office/drawing/2014/main" id="{706D57CE-82CD-A455-7EC6-295C78BB5D64}"/>
+              </a:ext>
+            </a:extLst>
+          </p:cNvPr>
+          <p:cNvSpPr/>
+          <p:nvPr/>
+        </p:nvSpPr>
+        <p:spPr>
+          <a:xfrm>
+            <a:off x="3162226" y="3933228"/>
+            <a:ext cx="1163782" cy="410595"/>
+          </a:xfrm>
+          <a:prstGeom prst="flowChartMagneticDisk">
+            <a:avLst/>
+          </a:prstGeom>
+        </p:spPr>
+        <p:style>
+          <a:lnRef idx="2">
+            <a:schemeClr val="accent1">
+              <a:shade val="15000"/>
+            </a:schemeClr>
+          </a:lnRef>
+          <a:fillRef idx="1">
+            <a:schemeClr val="accent1"/>
+          </a:fillRef>
+          <a:effectRef idx="0">
+            <a:schemeClr val="accent1"/>
+          </a:effectRef>
+          <a:fontRef idx="minor">
+            <a:schemeClr val="lt1"/>
+          </a:fontRef>
+        </p:style>
+        <p:txBody>
+          <a:bodyPr rtlCol="0" anchor="ctr"/>
+          <a:lstStyle/>
+          <a:p>
+            <a:pPr algn="ctr"/>
+            <a:endParaRPr lang="en-US" dirty="0"/>
+          </a:p>
+        </p:txBody>
+      </p:sp>
+      <p:sp>
+        <p:nvSpPr>
+          <p:cNvPr id="29" name="Right Arrow 22">
+            <a:extLst>
+              <a:ext uri="{FF2B5EF4-FFF2-40B4-BE49-F238E27FC236}">
+                <a16:creationId xmlns:a16="http://schemas.microsoft.com/office/drawing/2014/main" id="{D840C640-27D1-B0ED-939B-B21E542B9A51}"/>
+              </a:ext>
+            </a:extLst>
+          </p:cNvPr>
+          <p:cNvSpPr/>
+          <p:nvPr/>
+        </p:nvSpPr>
+        <p:spPr>
+          <a:xfrm>
+            <a:off x="7726581" y="4174201"/>
+            <a:ext cx="558141" cy="484632"/>
+          </a:xfrm>
+          <a:prstGeom prst="rightArrow">
+            <a:avLst/>
+          </a:prstGeom>
+        </p:spPr>
+        <p:style>
+          <a:lnRef idx="2">
+            <a:schemeClr val="accent1">
+              <a:shade val="15000"/>
+            </a:schemeClr>
+          </a:lnRef>
+          <a:fillRef idx="1">
+            <a:schemeClr val="accent1"/>
+          </a:fillRef>
+          <a:effectRef idx="0">
+            <a:schemeClr val="accent1"/>
+          </a:effectRef>
+          <a:fontRef idx="minor">
+            <a:schemeClr val="lt1"/>
+          </a:fontRef>
+        </p:style>
+        <p:txBody>
+          <a:bodyPr rtlCol="0" anchor="ctr"/>
+          <a:lstStyle/>
+          <a:p>
+            <a:pPr algn="ctr"/>
+            <a:endParaRPr lang="en-US"/>
+          </a:p>
+        </p:txBody>
+      </p:sp>
     </p:spTree>
     <p:extLst>
       <p:ext uri="{BB962C8B-B14F-4D97-AF65-F5344CB8AC3E}">
@@ -15436,6 +18375,261 @@
   <p:clrMapOvr>
     <a:masterClrMapping/>
   </p:clrMapOvr>
+  <p:timing>
+    <p:tnLst>
+      <p:par>
+        <p:cTn id="1" dur="indefinite" restart="never" nodeType="tmRoot">
+          <p:childTnLst>
+            <p:seq concurrent="1" nextAc="seek">
+              <p:cTn id="2" dur="indefinite" nodeType="mainSeq">
+                <p:childTnLst>
+                  <p:par>
+                    <p:cTn id="3" fill="hold">
+                      <p:stCondLst>
+                        <p:cond delay="indefinite"/>
+                      </p:stCondLst>
+                      <p:childTnLst>
+                        <p:par>
+                          <p:cTn id="4" fill="hold">
+                            <p:stCondLst>
+                              <p:cond delay="0"/>
+                            </p:stCondLst>
+                            <p:childTnLst>
+                              <p:par>
+                                <p:cTn id="5" presetID="1" presetClass="entr" presetSubtype="0" fill="hold" grpId="0" nodeType="clickEffect">
+                                  <p:stCondLst>
+                                    <p:cond delay="0"/>
+                                  </p:stCondLst>
+                                  <p:childTnLst>
+                                    <p:set>
+                                      <p:cBhvr>
+                                        <p:cTn id="6" dur="1" fill="hold">
+                                          <p:stCondLst>
+                                            <p:cond delay="0"/>
+                                          </p:stCondLst>
+                                        </p:cTn>
+                                        <p:tgtEl>
+                                          <p:spTgt spid="3">
+                                            <p:txEl>
+                                              <p:pRg st="0" end="0"/>
+                                            </p:txEl>
+                                          </p:spTgt>
+                                        </p:tgtEl>
+                                        <p:attrNameLst>
+                                          <p:attrName>style.visibility</p:attrName>
+                                        </p:attrNameLst>
+                                      </p:cBhvr>
+                                      <p:to>
+                                        <p:strVal val="visible"/>
+                                      </p:to>
+                                    </p:set>
+                                  </p:childTnLst>
+                                </p:cTn>
+                              </p:par>
+                              <p:par>
+                                <p:cTn id="7" presetID="1" presetClass="entr" presetSubtype="0" fill="hold" grpId="0" nodeType="withEffect">
+                                  <p:stCondLst>
+                                    <p:cond delay="0"/>
+                                  </p:stCondLst>
+                                  <p:childTnLst>
+                                    <p:set>
+                                      <p:cBhvr>
+                                        <p:cTn id="8" dur="1" fill="hold">
+                                          <p:stCondLst>
+                                            <p:cond delay="0"/>
+                                          </p:stCondLst>
+                                        </p:cTn>
+                                        <p:tgtEl>
+                                          <p:spTgt spid="3">
+                                            <p:txEl>
+                                              <p:pRg st="1" end="1"/>
+                                            </p:txEl>
+                                          </p:spTgt>
+                                        </p:tgtEl>
+                                        <p:attrNameLst>
+                                          <p:attrName>style.visibility</p:attrName>
+                                        </p:attrNameLst>
+                                      </p:cBhvr>
+                                      <p:to>
+                                        <p:strVal val="visible"/>
+                                      </p:to>
+                                    </p:set>
+                                  </p:childTnLst>
+                                </p:cTn>
+                              </p:par>
+                              <p:par>
+                                <p:cTn id="9" presetID="1" presetClass="entr" presetSubtype="0" fill="hold" grpId="0" nodeType="withEffect">
+                                  <p:stCondLst>
+                                    <p:cond delay="0"/>
+                                  </p:stCondLst>
+                                  <p:childTnLst>
+                                    <p:set>
+                                      <p:cBhvr>
+                                        <p:cTn id="10" dur="1" fill="hold">
+                                          <p:stCondLst>
+                                            <p:cond delay="0"/>
+                                          </p:stCondLst>
+                                        </p:cTn>
+                                        <p:tgtEl>
+                                          <p:spTgt spid="3">
+                                            <p:txEl>
+                                              <p:pRg st="2" end="2"/>
+                                            </p:txEl>
+                                          </p:spTgt>
+                                        </p:tgtEl>
+                                        <p:attrNameLst>
+                                          <p:attrName>style.visibility</p:attrName>
+                                        </p:attrNameLst>
+                                      </p:cBhvr>
+                                      <p:to>
+                                        <p:strVal val="visible"/>
+                                      </p:to>
+                                    </p:set>
+                                  </p:childTnLst>
+                                </p:cTn>
+                              </p:par>
+                              <p:par>
+                                <p:cTn id="11" presetID="1" presetClass="entr" presetSubtype="0" fill="hold" grpId="0" nodeType="withEffect">
+                                  <p:stCondLst>
+                                    <p:cond delay="0"/>
+                                  </p:stCondLst>
+                                  <p:childTnLst>
+                                    <p:set>
+                                      <p:cBhvr>
+                                        <p:cTn id="12" dur="1" fill="hold">
+                                          <p:stCondLst>
+                                            <p:cond delay="0"/>
+                                          </p:stCondLst>
+                                        </p:cTn>
+                                        <p:tgtEl>
+                                          <p:spTgt spid="3">
+                                            <p:txEl>
+                                              <p:pRg st="3" end="3"/>
+                                            </p:txEl>
+                                          </p:spTgt>
+                                        </p:tgtEl>
+                                        <p:attrNameLst>
+                                          <p:attrName>style.visibility</p:attrName>
+                                        </p:attrNameLst>
+                                      </p:cBhvr>
+                                      <p:to>
+                                        <p:strVal val="visible"/>
+                                      </p:to>
+                                    </p:set>
+                                  </p:childTnLst>
+                                </p:cTn>
+                              </p:par>
+                              <p:par>
+                                <p:cTn id="13" presetID="1" presetClass="entr" presetSubtype="0" fill="hold" grpId="0" nodeType="withEffect">
+                                  <p:stCondLst>
+                                    <p:cond delay="0"/>
+                                  </p:stCondLst>
+                                  <p:childTnLst>
+                                    <p:set>
+                                      <p:cBhvr>
+                                        <p:cTn id="14" dur="1" fill="hold">
+                                          <p:stCondLst>
+                                            <p:cond delay="0"/>
+                                          </p:stCondLst>
+                                        </p:cTn>
+                                        <p:tgtEl>
+                                          <p:spTgt spid="3">
+                                            <p:txEl>
+                                              <p:pRg st="4" end="4"/>
+                                            </p:txEl>
+                                          </p:spTgt>
+                                        </p:tgtEl>
+                                        <p:attrNameLst>
+                                          <p:attrName>style.visibility</p:attrName>
+                                        </p:attrNameLst>
+                                      </p:cBhvr>
+                                      <p:to>
+                                        <p:strVal val="visible"/>
+                                      </p:to>
+                                    </p:set>
+                                  </p:childTnLst>
+                                </p:cTn>
+                              </p:par>
+                            </p:childTnLst>
+                          </p:cTn>
+                        </p:par>
+                      </p:childTnLst>
+                    </p:cTn>
+                  </p:par>
+                  <p:par>
+                    <p:cTn id="15" fill="hold">
+                      <p:stCondLst>
+                        <p:cond delay="indefinite"/>
+                      </p:stCondLst>
+                      <p:childTnLst>
+                        <p:par>
+                          <p:cTn id="16" fill="hold">
+                            <p:stCondLst>
+                              <p:cond delay="0"/>
+                            </p:stCondLst>
+                            <p:childTnLst>
+                              <p:par>
+                                <p:cTn id="17" presetID="1" presetClass="entr" presetSubtype="0" fill="hold" grpId="0" nodeType="clickEffect">
+                                  <p:stCondLst>
+                                    <p:cond delay="0"/>
+                                  </p:stCondLst>
+                                  <p:childTnLst>
+                                    <p:set>
+                                      <p:cBhvr>
+                                        <p:cTn id="18" dur="1" fill="hold">
+                                          <p:stCondLst>
+                                            <p:cond delay="0"/>
+                                          </p:stCondLst>
+                                        </p:cTn>
+                                        <p:tgtEl>
+                                          <p:spTgt spid="3">
+                                            <p:txEl>
+                                              <p:pRg st="6" end="6"/>
+                                            </p:txEl>
+                                          </p:spTgt>
+                                        </p:tgtEl>
+                                        <p:attrNameLst>
+                                          <p:attrName>style.visibility</p:attrName>
+                                        </p:attrNameLst>
+                                      </p:cBhvr>
+                                      <p:to>
+                                        <p:strVal val="visible"/>
+                                      </p:to>
+                                    </p:set>
+                                  </p:childTnLst>
+                                </p:cTn>
+                              </p:par>
+                            </p:childTnLst>
+                          </p:cTn>
+                        </p:par>
+                      </p:childTnLst>
+                    </p:cTn>
+                  </p:par>
+                </p:childTnLst>
+              </p:cTn>
+              <p:prevCondLst>
+                <p:cond evt="onPrev" delay="0">
+                  <p:tgtEl>
+                    <p:sldTgt/>
+                  </p:tgtEl>
+                </p:cond>
+              </p:prevCondLst>
+              <p:nextCondLst>
+                <p:cond evt="onNext" delay="0">
+                  <p:tgtEl>
+                    <p:sldTgt/>
+                  </p:tgtEl>
+                </p:cond>
+              </p:nextCondLst>
+            </p:seq>
+          </p:childTnLst>
+        </p:cTn>
+      </p:par>
+    </p:tnLst>
+    <p:bldLst>
+      <p:bldP spid="3" grpId="0" build="p"/>
+    </p:bldLst>
+  </p:timing>
 </p:sld>
 </file>
 
@@ -15542,8 +18736,8 @@
 </p:sld>
 </file>
 
-<file path=ppt/slides/slide29.xml><?xml version="1.0" encoding="utf-8"?>
-<p:sld xmlns:a="http://schemas.openxmlformats.org/drawingml/2006/main" xmlns:r="http://schemas.openxmlformats.org/officeDocument/2006/relationships" xmlns:p="http://schemas.openxmlformats.org/presentationml/2006/main" show="0">
+<file path=ppt/slides/slide3.xml><?xml version="1.0" encoding="utf-8"?>
+<p:sld xmlns:a="http://schemas.openxmlformats.org/drawingml/2006/main" xmlns:r="http://schemas.openxmlformats.org/officeDocument/2006/relationships" xmlns:p="http://schemas.openxmlformats.org/presentationml/2006/main">
   <p:cSld>
     <p:spTree>
       <p:nvGrpSpPr>
@@ -15564,7 +18758,7 @@
           <p:cNvPr id="2" name="Title 1">
             <a:extLst>
               <a:ext uri="{FF2B5EF4-FFF2-40B4-BE49-F238E27FC236}">
-                <a16:creationId xmlns:a16="http://schemas.microsoft.com/office/drawing/2014/main" id="{93D610FF-6703-8068-7ABF-ED20489ECABF}"/>
+                <a16:creationId xmlns:a16="http://schemas.microsoft.com/office/drawing/2014/main" id="{FCCAACAD-479A-5540-2B73-60664184C993}"/>
               </a:ext>
             </a:extLst>
           </p:cNvPr>
@@ -15582,7 +18776,7 @@
           <a:p>
             <a:r>
               <a:rPr lang="en-US" dirty="0"/>
-              <a:t>Scenarios </a:t>
+              <a:t>Start With a Sport Question or Decision</a:t>
             </a:r>
           </a:p>
         </p:txBody>
@@ -15592,7 +18786,7 @@
           <p:cNvPr id="3" name="Content Placeholder 2">
             <a:extLst>
               <a:ext uri="{FF2B5EF4-FFF2-40B4-BE49-F238E27FC236}">
-                <a16:creationId xmlns:a16="http://schemas.microsoft.com/office/drawing/2014/main" id="{63906137-364A-DE22-57E2-CF9CEDECC6B1}"/>
+                <a16:creationId xmlns:a16="http://schemas.microsoft.com/office/drawing/2014/main" id="{EC320E6E-FE53-FEB1-D63A-3B7F021626D7}"/>
               </a:ext>
             </a:extLst>
           </p:cNvPr>
@@ -15611,39 +18805,410 @@
           <a:lstStyle/>
           <a:p>
             <a:r>
+              <a:rPr lang="en-US" dirty="0"/>
+              <a:t>Write down a question or decision you are interested in analyzing.</a:t>
+            </a:r>
+          </a:p>
+          <a:p>
+            <a:endParaRPr lang="en-US" dirty="0"/>
+          </a:p>
+          <a:p>
+            <a:r>
+              <a:rPr lang="en-US" dirty="0"/>
+              <a:t>If you don’t have one, chose one:</a:t>
+            </a:r>
+          </a:p>
+          <a:p>
+            <a:pPr lvl="1"/>
+            <a:r>
               <a:rPr lang="en-GB" dirty="0"/>
-              <a:t>A basketball player completed considerably more high-intensity work than usual during the previous three days. The player needs to be ready for a game tomorrow.</a:t>
-            </a:r>
-          </a:p>
-          <a:p>
+              <a:t>Should we recruit this athlete? </a:t>
+            </a:r>
+          </a:p>
+          <a:p>
+            <a:pPr lvl="1"/>
             <a:r>
               <a:rPr lang="en-GB" dirty="0"/>
-              <a:t>A basketball prospect scores 22 points per game. Your team is deciding whether to select the player in the first round of the draft.</a:t>
-            </a:r>
-          </a:p>
-          <a:p>
+              <a:t>Which defensive lineup should we use against our next opponent? </a:t>
+            </a:r>
+          </a:p>
+          <a:p>
+            <a:pPr lvl="1"/>
             <a:r>
               <a:rPr lang="en-GB" dirty="0"/>
-              <a:t>A soccer team has allowed five goals during its last four matches. How should the team prepare to play their next opponent.</a:t>
-            </a:r>
+              <a:t>Which part of a player’s game should be prioritized for development? </a:t>
+            </a:r>
+          </a:p>
+          <a:p>
+            <a:pPr lvl="1"/>
+            <a:r>
+              <a:rPr lang="en-GB" dirty="0"/>
+              <a:t>Why is the team conceding so many opportunities after losing possession?</a:t>
+            </a:r>
+          </a:p>
+          <a:p>
+            <a:pPr lvl="1"/>
+            <a:endParaRPr lang="en-GB" dirty="0"/>
+          </a:p>
+          <a:p>
             <a:endParaRPr lang="en-US" dirty="0"/>
+          </a:p>
+        </p:txBody>
+      </p:sp>
+      <p:sp>
+        <p:nvSpPr>
+          <p:cNvPr id="5" name="TextBox 4">
+            <a:extLst>
+              <a:ext uri="{FF2B5EF4-FFF2-40B4-BE49-F238E27FC236}">
+                <a16:creationId xmlns:a16="http://schemas.microsoft.com/office/drawing/2014/main" id="{17A8E1B5-3D72-0E48-63AF-3280E9F9EE60}"/>
+              </a:ext>
+            </a:extLst>
+          </p:cNvPr>
+          <p:cNvSpPr txBox="1"/>
+          <p:nvPr/>
+        </p:nvSpPr>
+        <p:spPr>
+          <a:xfrm>
+            <a:off x="1101436" y="5154452"/>
+            <a:ext cx="9989127" cy="523220"/>
+          </a:xfrm>
+          <a:prstGeom prst="rect">
+            <a:avLst/>
+          </a:prstGeom>
+          <a:noFill/>
+        </p:spPr>
+        <p:txBody>
+          <a:bodyPr wrap="square">
+            <a:spAutoFit/>
+          </a:bodyPr>
+          <a:lstStyle/>
+          <a:p>
+            <a:r>
+              <a:rPr lang="en-GB" sz="2800" dirty="0">
+                <a:solidFill>
+                  <a:srgbClr val="FF0000"/>
+                </a:solidFill>
+              </a:rPr>
+              <a:t>Think about how today’s lecture applies to your topic of interest</a:t>
+            </a:r>
           </a:p>
         </p:txBody>
       </p:sp>
     </p:spTree>
     <p:extLst>
       <p:ext uri="{BB962C8B-B14F-4D97-AF65-F5344CB8AC3E}">
-        <p14:creationId xmlns:p14="http://schemas.microsoft.com/office/powerpoint/2010/main" val="1267012885"/>
+        <p14:creationId xmlns:p14="http://schemas.microsoft.com/office/powerpoint/2010/main" val="3739800625"/>
       </p:ext>
     </p:extLst>
   </p:cSld>
   <p:clrMapOvr>
     <a:masterClrMapping/>
   </p:clrMapOvr>
+  <p:timing>
+    <p:tnLst>
+      <p:par>
+        <p:cTn id="1" dur="indefinite" restart="never" nodeType="tmRoot">
+          <p:childTnLst>
+            <p:seq concurrent="1" nextAc="seek">
+              <p:cTn id="2" dur="indefinite" nodeType="mainSeq">
+                <p:childTnLst>
+                  <p:par>
+                    <p:cTn id="3" fill="hold">
+                      <p:stCondLst>
+                        <p:cond delay="indefinite"/>
+                      </p:stCondLst>
+                      <p:childTnLst>
+                        <p:par>
+                          <p:cTn id="4" fill="hold">
+                            <p:stCondLst>
+                              <p:cond delay="0"/>
+                            </p:stCondLst>
+                            <p:childTnLst>
+                              <p:par>
+                                <p:cTn id="5" presetID="1" presetClass="entr" presetSubtype="0" fill="hold" grpId="0" nodeType="clickEffect">
+                                  <p:stCondLst>
+                                    <p:cond delay="0"/>
+                                  </p:stCondLst>
+                                  <p:childTnLst>
+                                    <p:set>
+                                      <p:cBhvr>
+                                        <p:cTn id="6" dur="1" fill="hold">
+                                          <p:stCondLst>
+                                            <p:cond delay="0"/>
+                                          </p:stCondLst>
+                                        </p:cTn>
+                                        <p:tgtEl>
+                                          <p:spTgt spid="3">
+                                            <p:txEl>
+                                              <p:pRg st="0" end="0"/>
+                                            </p:txEl>
+                                          </p:spTgt>
+                                        </p:tgtEl>
+                                        <p:attrNameLst>
+                                          <p:attrName>style.visibility</p:attrName>
+                                        </p:attrNameLst>
+                                      </p:cBhvr>
+                                      <p:to>
+                                        <p:strVal val="visible"/>
+                                      </p:to>
+                                    </p:set>
+                                  </p:childTnLst>
+                                </p:cTn>
+                              </p:par>
+                            </p:childTnLst>
+                          </p:cTn>
+                        </p:par>
+                      </p:childTnLst>
+                    </p:cTn>
+                  </p:par>
+                  <p:par>
+                    <p:cTn id="7" fill="hold">
+                      <p:stCondLst>
+                        <p:cond delay="indefinite"/>
+                      </p:stCondLst>
+                      <p:childTnLst>
+                        <p:par>
+                          <p:cTn id="8" fill="hold">
+                            <p:stCondLst>
+                              <p:cond delay="0"/>
+                            </p:stCondLst>
+                            <p:childTnLst>
+                              <p:par>
+                                <p:cTn id="9" presetID="1" presetClass="entr" presetSubtype="0" fill="hold" grpId="0" nodeType="clickEffect">
+                                  <p:stCondLst>
+                                    <p:cond delay="0"/>
+                                  </p:stCondLst>
+                                  <p:childTnLst>
+                                    <p:set>
+                                      <p:cBhvr>
+                                        <p:cTn id="10" dur="1" fill="hold">
+                                          <p:stCondLst>
+                                            <p:cond delay="0"/>
+                                          </p:stCondLst>
+                                        </p:cTn>
+                                        <p:tgtEl>
+                                          <p:spTgt spid="3">
+                                            <p:txEl>
+                                              <p:pRg st="2" end="2"/>
+                                            </p:txEl>
+                                          </p:spTgt>
+                                        </p:tgtEl>
+                                        <p:attrNameLst>
+                                          <p:attrName>style.visibility</p:attrName>
+                                        </p:attrNameLst>
+                                      </p:cBhvr>
+                                      <p:to>
+                                        <p:strVal val="visible"/>
+                                      </p:to>
+                                    </p:set>
+                                  </p:childTnLst>
+                                </p:cTn>
+                              </p:par>
+                              <p:par>
+                                <p:cTn id="11" presetID="1" presetClass="entr" presetSubtype="0" fill="hold" grpId="0" nodeType="withEffect">
+                                  <p:stCondLst>
+                                    <p:cond delay="0"/>
+                                  </p:stCondLst>
+                                  <p:childTnLst>
+                                    <p:set>
+                                      <p:cBhvr>
+                                        <p:cTn id="12" dur="1" fill="hold">
+                                          <p:stCondLst>
+                                            <p:cond delay="0"/>
+                                          </p:stCondLst>
+                                        </p:cTn>
+                                        <p:tgtEl>
+                                          <p:spTgt spid="3">
+                                            <p:txEl>
+                                              <p:pRg st="3" end="3"/>
+                                            </p:txEl>
+                                          </p:spTgt>
+                                        </p:tgtEl>
+                                        <p:attrNameLst>
+                                          <p:attrName>style.visibility</p:attrName>
+                                        </p:attrNameLst>
+                                      </p:cBhvr>
+                                      <p:to>
+                                        <p:strVal val="visible"/>
+                                      </p:to>
+                                    </p:set>
+                                  </p:childTnLst>
+                                </p:cTn>
+                              </p:par>
+                              <p:par>
+                                <p:cTn id="13" presetID="1" presetClass="entr" presetSubtype="0" fill="hold" grpId="0" nodeType="withEffect">
+                                  <p:stCondLst>
+                                    <p:cond delay="0"/>
+                                  </p:stCondLst>
+                                  <p:childTnLst>
+                                    <p:set>
+                                      <p:cBhvr>
+                                        <p:cTn id="14" dur="1" fill="hold">
+                                          <p:stCondLst>
+                                            <p:cond delay="0"/>
+                                          </p:stCondLst>
+                                        </p:cTn>
+                                        <p:tgtEl>
+                                          <p:spTgt spid="3">
+                                            <p:txEl>
+                                              <p:pRg st="4" end="4"/>
+                                            </p:txEl>
+                                          </p:spTgt>
+                                        </p:tgtEl>
+                                        <p:attrNameLst>
+                                          <p:attrName>style.visibility</p:attrName>
+                                        </p:attrNameLst>
+                                      </p:cBhvr>
+                                      <p:to>
+                                        <p:strVal val="visible"/>
+                                      </p:to>
+                                    </p:set>
+                                  </p:childTnLst>
+                                </p:cTn>
+                              </p:par>
+                              <p:par>
+                                <p:cTn id="15" presetID="1" presetClass="entr" presetSubtype="0" fill="hold" grpId="0" nodeType="withEffect">
+                                  <p:stCondLst>
+                                    <p:cond delay="0"/>
+                                  </p:stCondLst>
+                                  <p:childTnLst>
+                                    <p:set>
+                                      <p:cBhvr>
+                                        <p:cTn id="16" dur="1" fill="hold">
+                                          <p:stCondLst>
+                                            <p:cond delay="0"/>
+                                          </p:stCondLst>
+                                        </p:cTn>
+                                        <p:tgtEl>
+                                          <p:spTgt spid="3">
+                                            <p:txEl>
+                                              <p:pRg st="5" end="5"/>
+                                            </p:txEl>
+                                          </p:spTgt>
+                                        </p:tgtEl>
+                                        <p:attrNameLst>
+                                          <p:attrName>style.visibility</p:attrName>
+                                        </p:attrNameLst>
+                                      </p:cBhvr>
+                                      <p:to>
+                                        <p:strVal val="visible"/>
+                                      </p:to>
+                                    </p:set>
+                                  </p:childTnLst>
+                                </p:cTn>
+                              </p:par>
+                              <p:par>
+                                <p:cTn id="17" presetID="1" presetClass="entr" presetSubtype="0" fill="hold" grpId="0" nodeType="withEffect">
+                                  <p:stCondLst>
+                                    <p:cond delay="0"/>
+                                  </p:stCondLst>
+                                  <p:childTnLst>
+                                    <p:set>
+                                      <p:cBhvr>
+                                        <p:cTn id="18" dur="1" fill="hold">
+                                          <p:stCondLst>
+                                            <p:cond delay="0"/>
+                                          </p:stCondLst>
+                                        </p:cTn>
+                                        <p:tgtEl>
+                                          <p:spTgt spid="3">
+                                            <p:txEl>
+                                              <p:pRg st="6" end="6"/>
+                                            </p:txEl>
+                                          </p:spTgt>
+                                        </p:tgtEl>
+                                        <p:attrNameLst>
+                                          <p:attrName>style.visibility</p:attrName>
+                                        </p:attrNameLst>
+                                      </p:cBhvr>
+                                      <p:to>
+                                        <p:strVal val="visible"/>
+                                      </p:to>
+                                    </p:set>
+                                  </p:childTnLst>
+                                </p:cTn>
+                              </p:par>
+                            </p:childTnLst>
+                          </p:cTn>
+                        </p:par>
+                      </p:childTnLst>
+                    </p:cTn>
+                  </p:par>
+                  <p:par>
+                    <p:cTn id="19" fill="hold">
+                      <p:stCondLst>
+                        <p:cond delay="indefinite"/>
+                      </p:stCondLst>
+                      <p:childTnLst>
+                        <p:par>
+                          <p:cTn id="20" fill="hold">
+                            <p:stCondLst>
+                              <p:cond delay="0"/>
+                            </p:stCondLst>
+                            <p:childTnLst>
+                              <p:par>
+                                <p:cTn id="21" presetID="1" presetClass="entr" presetSubtype="0" fill="hold" grpId="0" nodeType="clickEffect">
+                                  <p:stCondLst>
+                                    <p:cond delay="0"/>
+                                  </p:stCondLst>
+                                  <p:childTnLst>
+                                    <p:set>
+                                      <p:cBhvr>
+                                        <p:cTn id="22" dur="1" fill="hold">
+                                          <p:stCondLst>
+                                            <p:cond delay="0"/>
+                                          </p:stCondLst>
+                                        </p:cTn>
+                                        <p:tgtEl>
+                                          <p:spTgt spid="5"/>
+                                        </p:tgtEl>
+                                        <p:attrNameLst>
+                                          <p:attrName>style.visibility</p:attrName>
+                                        </p:attrNameLst>
+                                      </p:cBhvr>
+                                      <p:to>
+                                        <p:strVal val="visible"/>
+                                      </p:to>
+                                    </p:set>
+                                  </p:childTnLst>
+                                </p:cTn>
+                              </p:par>
+                            </p:childTnLst>
+                          </p:cTn>
+                        </p:par>
+                      </p:childTnLst>
+                    </p:cTn>
+                  </p:par>
+                </p:childTnLst>
+              </p:cTn>
+              <p:prevCondLst>
+                <p:cond evt="onPrev" delay="0">
+                  <p:tgtEl>
+                    <p:sldTgt/>
+                  </p:tgtEl>
+                </p:cond>
+              </p:prevCondLst>
+              <p:nextCondLst>
+                <p:cond evt="onNext" delay="0">
+                  <p:tgtEl>
+                    <p:sldTgt/>
+                  </p:tgtEl>
+                </p:cond>
+              </p:nextCondLst>
+            </p:seq>
+          </p:childTnLst>
+        </p:cTn>
+      </p:par>
+    </p:tnLst>
+    <p:bldLst>
+      <p:bldP spid="3" grpId="0" build="p"/>
+      <p:bldP spid="5" grpId="0"/>
+    </p:bldLst>
+  </p:timing>
 </p:sld>
 </file>
 
-<file path=ppt/slides/slide3.xml><?xml version="1.0" encoding="utf-8"?>
+<file path=ppt/slides/slide4.xml><?xml version="1.0" encoding="utf-8"?>
 <p:sld xmlns:a="http://schemas.openxmlformats.org/drawingml/2006/main" xmlns:r="http://schemas.openxmlformats.org/officeDocument/2006/relationships" xmlns:p="http://schemas.openxmlformats.org/presentationml/2006/main">
   <p:cSld>
     <p:spTree>
@@ -15765,477 +19330,7 @@
 </p:sld>
 </file>
 
-<file path=ppt/slides/slide30.xml><?xml version="1.0" encoding="utf-8"?>
-<p:sld xmlns:a="http://schemas.openxmlformats.org/drawingml/2006/main" xmlns:r="http://schemas.openxmlformats.org/officeDocument/2006/relationships" xmlns:p="http://schemas.openxmlformats.org/presentationml/2006/main" show="0">
-  <p:cSld>
-    <p:spTree>
-      <p:nvGrpSpPr>
-        <p:cNvPr id="1" name=""/>
-        <p:cNvGrpSpPr/>
-        <p:nvPr/>
-      </p:nvGrpSpPr>
-      <p:grpSpPr>
-        <a:xfrm>
-          <a:off x="0" y="0"/>
-          <a:ext cx="0" cy="0"/>
-          <a:chOff x="0" y="0"/>
-          <a:chExt cx="0" cy="0"/>
-        </a:xfrm>
-      </p:grpSpPr>
-      <p:sp>
-        <p:nvSpPr>
-          <p:cNvPr id="2" name="Title 1">
-            <a:extLst>
-              <a:ext uri="{FF2B5EF4-FFF2-40B4-BE49-F238E27FC236}">
-                <a16:creationId xmlns:a16="http://schemas.microsoft.com/office/drawing/2014/main" id="{0BA75FA4-E434-23A9-7B99-775F67F02828}"/>
-              </a:ext>
-            </a:extLst>
-          </p:cNvPr>
-          <p:cNvSpPr>
-            <a:spLocks noGrp="1"/>
-          </p:cNvSpPr>
-          <p:nvPr>
-            <p:ph type="title"/>
-          </p:nvPr>
-        </p:nvSpPr>
-        <p:spPr/>
-        <p:txBody>
-          <a:bodyPr/>
-          <a:lstStyle/>
-          <a:p>
-            <a:r>
-              <a:rPr lang="en-GB" dirty="0"/>
-              <a:t>Analytics Chain Group Activity</a:t>
-            </a:r>
-            <a:endParaRPr lang="en-US" dirty="0"/>
-          </a:p>
-        </p:txBody>
-      </p:sp>
-      <p:sp>
-        <p:nvSpPr>
-          <p:cNvPr id="3" name="Content Placeholder 2">
-            <a:extLst>
-              <a:ext uri="{FF2B5EF4-FFF2-40B4-BE49-F238E27FC236}">
-                <a16:creationId xmlns:a16="http://schemas.microsoft.com/office/drawing/2014/main" id="{AA6FD731-E03D-15A3-6104-3691E3E5E0BE}"/>
-              </a:ext>
-            </a:extLst>
-          </p:cNvPr>
-          <p:cNvSpPr>
-            <a:spLocks noGrp="1"/>
-          </p:cNvSpPr>
-          <p:nvPr>
-            <p:ph idx="1"/>
-          </p:nvPr>
-        </p:nvSpPr>
-        <p:spPr/>
-        <p:txBody>
-          <a:bodyPr/>
-          <a:lstStyle/>
-          <a:p>
-            <a:r>
-              <a:rPr lang="en-GB" dirty="0"/>
-              <a:t>Working with your group, read the assigned scenario and create a four-step analytics chain:</a:t>
-            </a:r>
-          </a:p>
-          <a:p>
-            <a:pPr lvl="1"/>
-            <a:r>
-              <a:rPr lang="en-GB" dirty="0"/>
-              <a:t>Descriptive: State what happened.</a:t>
-            </a:r>
-          </a:p>
-          <a:p>
-            <a:pPr lvl="1"/>
-            <a:r>
-              <a:rPr lang="en-GB" dirty="0"/>
-              <a:t>Diagnostic: Identify the most likely reason it happened.</a:t>
-            </a:r>
-          </a:p>
-          <a:p>
-            <a:pPr lvl="1"/>
-            <a:r>
-              <a:rPr lang="en-GB" dirty="0"/>
-              <a:t>Predictive: Explain what could happen next if nothing changes.</a:t>
-            </a:r>
-          </a:p>
-          <a:p>
-            <a:pPr lvl="1"/>
-            <a:r>
-              <a:rPr lang="en-GB" dirty="0"/>
-              <a:t>Prescriptive: Recommend what the team should do.</a:t>
-            </a:r>
-          </a:p>
-          <a:p>
-            <a:r>
-              <a:rPr lang="en-GB" dirty="0"/>
-              <a:t>Write one clear sentence for each step.</a:t>
-            </a:r>
-          </a:p>
-          <a:p>
-            <a:endParaRPr lang="en-US" dirty="0"/>
-          </a:p>
-        </p:txBody>
-      </p:sp>
-    </p:spTree>
-    <p:extLst>
-      <p:ext uri="{BB962C8B-B14F-4D97-AF65-F5344CB8AC3E}">
-        <p14:creationId xmlns:p14="http://schemas.microsoft.com/office/powerpoint/2010/main" val="3785304175"/>
-      </p:ext>
-    </p:extLst>
-  </p:cSld>
-  <p:clrMapOvr>
-    <a:masterClrMapping/>
-  </p:clrMapOvr>
-</p:sld>
-</file>
-
-<file path=ppt/slides/slide31.xml><?xml version="1.0" encoding="utf-8"?>
-<p:sld xmlns:a="http://schemas.openxmlformats.org/drawingml/2006/main" xmlns:r="http://schemas.openxmlformats.org/officeDocument/2006/relationships" xmlns:p="http://schemas.openxmlformats.org/presentationml/2006/main" show="0">
-  <p:cSld>
-    <p:spTree>
-      <p:nvGrpSpPr>
-        <p:cNvPr id="1" name=""/>
-        <p:cNvGrpSpPr/>
-        <p:nvPr/>
-      </p:nvGrpSpPr>
-      <p:grpSpPr>
-        <a:xfrm>
-          <a:off x="0" y="0"/>
-          <a:ext cx="0" cy="0"/>
-          <a:chOff x="0" y="0"/>
-          <a:chExt cx="0" cy="0"/>
-        </a:xfrm>
-      </p:grpSpPr>
-      <p:sp>
-        <p:nvSpPr>
-          <p:cNvPr id="2" name="Title 1">
-            <a:extLst>
-              <a:ext uri="{FF2B5EF4-FFF2-40B4-BE49-F238E27FC236}">
-                <a16:creationId xmlns:a16="http://schemas.microsoft.com/office/drawing/2014/main" id="{403F4149-77C5-51D6-6364-A5DC1666CA69}"/>
-              </a:ext>
-            </a:extLst>
-          </p:cNvPr>
-          <p:cNvSpPr>
-            <a:spLocks noGrp="1"/>
-          </p:cNvSpPr>
-          <p:nvPr>
-            <p:ph type="title"/>
-          </p:nvPr>
-        </p:nvSpPr>
-        <p:spPr/>
-        <p:txBody>
-          <a:bodyPr/>
-          <a:lstStyle/>
-          <a:p>
-            <a:r>
-              <a:rPr lang="en-US" dirty="0"/>
-              <a:t>Example </a:t>
-            </a:r>
-          </a:p>
-        </p:txBody>
-      </p:sp>
-      <p:sp>
-        <p:nvSpPr>
-          <p:cNvPr id="3" name="Content Placeholder 2">
-            <a:extLst>
-              <a:ext uri="{FF2B5EF4-FFF2-40B4-BE49-F238E27FC236}">
-                <a16:creationId xmlns:a16="http://schemas.microsoft.com/office/drawing/2014/main" id="{F4AC8398-083C-ED0D-65C7-FA16DBE6BCED}"/>
-              </a:ext>
-            </a:extLst>
-          </p:cNvPr>
-          <p:cNvSpPr>
-            <a:spLocks noGrp="1"/>
-          </p:cNvSpPr>
-          <p:nvPr>
-            <p:ph idx="1"/>
-          </p:nvPr>
-        </p:nvSpPr>
-        <p:spPr/>
-        <p:txBody>
-          <a:bodyPr/>
-          <a:lstStyle/>
-          <a:p>
-            <a:r>
-              <a:rPr lang="en-GB" b="1" dirty="0"/>
-              <a:t>Domain:</a:t>
-            </a:r>
-            <a:r>
-              <a:rPr lang="en-GB" dirty="0"/>
-              <a:t> Athlete monitoring</a:t>
-            </a:r>
-          </a:p>
-          <a:p>
-            <a:r>
-              <a:rPr lang="en-GB" b="1" dirty="0"/>
-              <a:t>Decision:</a:t>
-            </a:r>
-            <a:r>
-              <a:rPr lang="en-GB" dirty="0"/>
-              <a:t> Should a player’s training load be reduced today?</a:t>
-            </a:r>
-          </a:p>
-          <a:p>
-            <a:pPr lvl="1"/>
-            <a:r>
-              <a:rPr lang="en-GB" b="1" dirty="0"/>
-              <a:t>Descriptive:</a:t>
-            </a:r>
-            <a:r>
-              <a:rPr lang="en-GB" dirty="0"/>
-              <a:t> The player completed substantially more high-intensity work than usual during the previous three days. </a:t>
-            </a:r>
-          </a:p>
-          <a:p>
-            <a:pPr lvl="1"/>
-            <a:r>
-              <a:rPr lang="en-GB" b="1" dirty="0"/>
-              <a:t>Diagnostic:</a:t>
-            </a:r>
-            <a:r>
-              <a:rPr lang="en-GB" dirty="0"/>
-              <a:t> The increase resulted from additional drill repetitions and reduced recovery time. </a:t>
-            </a:r>
-          </a:p>
-          <a:p>
-            <a:pPr lvl="1"/>
-            <a:r>
-              <a:rPr lang="en-GB" b="1" dirty="0"/>
-              <a:t>Predictive:</a:t>
-            </a:r>
-            <a:r>
-              <a:rPr lang="en-GB" dirty="0"/>
-              <a:t> Maintaining the planned load may increase the probability of poor performance or incomplete recovery tomorrow. </a:t>
-            </a:r>
-          </a:p>
-          <a:p>
-            <a:pPr lvl="1"/>
-            <a:r>
-              <a:rPr lang="en-GB" b="1" dirty="0"/>
-              <a:t>Prescriptive:</a:t>
-            </a:r>
-            <a:r>
-              <a:rPr lang="en-GB" dirty="0"/>
-              <a:t> Reduce today’s high-intensity volume while maintaining lower-intensity tactical participation.</a:t>
-            </a:r>
-          </a:p>
-          <a:p>
-            <a:endParaRPr lang="en-US" dirty="0"/>
-          </a:p>
-        </p:txBody>
-      </p:sp>
-    </p:spTree>
-    <p:extLst>
-      <p:ext uri="{BB962C8B-B14F-4D97-AF65-F5344CB8AC3E}">
-        <p14:creationId xmlns:p14="http://schemas.microsoft.com/office/powerpoint/2010/main" val="1069047801"/>
-      </p:ext>
-    </p:extLst>
-  </p:cSld>
-  <p:clrMapOvr>
-    <a:masterClrMapping/>
-  </p:clrMapOvr>
-</p:sld>
-</file>
-
-<file path=ppt/slides/slide32.xml><?xml version="1.0" encoding="utf-8"?>
-<p:sld xmlns:a="http://schemas.openxmlformats.org/drawingml/2006/main" xmlns:r="http://schemas.openxmlformats.org/officeDocument/2006/relationships" xmlns:p="http://schemas.openxmlformats.org/presentationml/2006/main" show="0">
-  <p:cSld>
-    <p:spTree>
-      <p:nvGrpSpPr>
-        <p:cNvPr id="1" name=""/>
-        <p:cNvGrpSpPr/>
-        <p:nvPr/>
-      </p:nvGrpSpPr>
-      <p:grpSpPr>
-        <a:xfrm>
-          <a:off x="0" y="0"/>
-          <a:ext cx="0" cy="0"/>
-          <a:chOff x="0" y="0"/>
-          <a:chExt cx="0" cy="0"/>
-        </a:xfrm>
-      </p:grpSpPr>
-      <p:sp>
-        <p:nvSpPr>
-          <p:cNvPr id="2" name="Title 1">
-            <a:extLst>
-              <a:ext uri="{FF2B5EF4-FFF2-40B4-BE49-F238E27FC236}">
-                <a16:creationId xmlns:a16="http://schemas.microsoft.com/office/drawing/2014/main" id="{6CE6F538-931D-AD45-9EA7-DADA26B90B42}"/>
-              </a:ext>
-            </a:extLst>
-          </p:cNvPr>
-          <p:cNvSpPr>
-            <a:spLocks noGrp="1"/>
-          </p:cNvSpPr>
-          <p:nvPr>
-            <p:ph type="title"/>
-          </p:nvPr>
-        </p:nvSpPr>
-        <p:spPr/>
-        <p:txBody>
-          <a:bodyPr>
-            <a:noAutofit/>
-          </a:bodyPr>
-          <a:lstStyle/>
-          <a:p>
-            <a:r>
-              <a:rPr lang="en-GB" sz="3600" dirty="0"/>
-              <a:t>A basketball team has lost four of its last five games.</a:t>
-            </a:r>
-            <a:endParaRPr lang="en-US" sz="3600" dirty="0"/>
-          </a:p>
-        </p:txBody>
-      </p:sp>
-      <p:sp>
-        <p:nvSpPr>
-          <p:cNvPr id="3" name="Content Placeholder 2">
-            <a:extLst>
-              <a:ext uri="{FF2B5EF4-FFF2-40B4-BE49-F238E27FC236}">
-                <a16:creationId xmlns:a16="http://schemas.microsoft.com/office/drawing/2014/main" id="{8B9E355C-4F74-80F1-6425-3FB7EAE6B2E6}"/>
-              </a:ext>
-            </a:extLst>
-          </p:cNvPr>
-          <p:cNvSpPr>
-            <a:spLocks noGrp="1"/>
-          </p:cNvSpPr>
-          <p:nvPr>
-            <p:ph idx="1"/>
-          </p:nvPr>
-        </p:nvSpPr>
-        <p:spPr/>
-        <p:txBody>
-          <a:bodyPr/>
-          <a:lstStyle/>
-          <a:p>
-            <a:pPr marL="0" indent="0" algn="ctr">
-              <a:buNone/>
-            </a:pPr>
-            <a:r>
-              <a:rPr lang="en-US" dirty="0"/>
-              <a:t>Coach asks, “what is going on??”. How do we tackle this as the analyst?</a:t>
-            </a:r>
-          </a:p>
-        </p:txBody>
-      </p:sp>
-    </p:spTree>
-    <p:extLst>
-      <p:ext uri="{BB962C8B-B14F-4D97-AF65-F5344CB8AC3E}">
-        <p14:creationId xmlns:p14="http://schemas.microsoft.com/office/powerpoint/2010/main" val="425644854"/>
-      </p:ext>
-    </p:extLst>
-  </p:cSld>
-  <p:clrMapOvr>
-    <a:masterClrMapping/>
-  </p:clrMapOvr>
-</p:sld>
-</file>
-
-<file path=ppt/slides/slide33.xml><?xml version="1.0" encoding="utf-8"?>
-<p:sld xmlns:a="http://schemas.openxmlformats.org/drawingml/2006/main" xmlns:r="http://schemas.openxmlformats.org/officeDocument/2006/relationships" xmlns:p="http://schemas.openxmlformats.org/presentationml/2006/main" show="0">
-  <p:cSld>
-    <p:spTree>
-      <p:nvGrpSpPr>
-        <p:cNvPr id="1" name="">
-          <a:extLst>
-            <a:ext uri="{FF2B5EF4-FFF2-40B4-BE49-F238E27FC236}">
-              <a16:creationId xmlns:a16="http://schemas.microsoft.com/office/drawing/2014/main" id="{40AF3649-84EF-73B3-DB78-3A8C58E5C26C}"/>
-            </a:ext>
-          </a:extLst>
-        </p:cNvPr>
-        <p:cNvGrpSpPr/>
-        <p:nvPr/>
-      </p:nvGrpSpPr>
-      <p:grpSpPr>
-        <a:xfrm>
-          <a:off x="0" y="0"/>
-          <a:ext cx="0" cy="0"/>
-          <a:chOff x="0" y="0"/>
-          <a:chExt cx="0" cy="0"/>
-        </a:xfrm>
-      </p:grpSpPr>
-      <p:sp>
-        <p:nvSpPr>
-          <p:cNvPr id="2" name="Title 1">
-            <a:extLst>
-              <a:ext uri="{FF2B5EF4-FFF2-40B4-BE49-F238E27FC236}">
-                <a16:creationId xmlns:a16="http://schemas.microsoft.com/office/drawing/2014/main" id="{14013837-791B-5F03-753D-2E5EA52C17EF}"/>
-              </a:ext>
-            </a:extLst>
-          </p:cNvPr>
-          <p:cNvSpPr>
-            <a:spLocks noGrp="1"/>
-          </p:cNvSpPr>
-          <p:nvPr>
-            <p:ph type="title"/>
-          </p:nvPr>
-        </p:nvSpPr>
-        <p:spPr/>
-        <p:txBody>
-          <a:bodyPr/>
-          <a:lstStyle/>
-          <a:p>
-            <a:r>
-              <a:rPr lang="en-US" dirty="0"/>
-              <a:t>Scenarios </a:t>
-            </a:r>
-          </a:p>
-        </p:txBody>
-      </p:sp>
-      <p:sp>
-        <p:nvSpPr>
-          <p:cNvPr id="3" name="Content Placeholder 2">
-            <a:extLst>
-              <a:ext uri="{FF2B5EF4-FFF2-40B4-BE49-F238E27FC236}">
-                <a16:creationId xmlns:a16="http://schemas.microsoft.com/office/drawing/2014/main" id="{B4D682D1-FE5C-EC9F-1DA5-C852D5D53B85}"/>
-              </a:ext>
-            </a:extLst>
-          </p:cNvPr>
-          <p:cNvSpPr>
-            <a:spLocks noGrp="1"/>
-          </p:cNvSpPr>
-          <p:nvPr>
-            <p:ph idx="1"/>
-          </p:nvPr>
-        </p:nvSpPr>
-        <p:spPr/>
-        <p:txBody>
-          <a:bodyPr>
-            <a:normAutofit fontScale="92500" lnSpcReduction="10000"/>
-          </a:bodyPr>
-          <a:lstStyle/>
-          <a:p>
-            <a:r>
-              <a:rPr lang="en-GB" dirty="0"/>
-              <a:t>A basketball player completed considerably more high-intensity work than usual during the previous three days. The coaching staff added extra drill repetitions and shortened the recovery periods between drills. The player has an important game tomorrow.</a:t>
-            </a:r>
-          </a:p>
-          <a:p>
-            <a:r>
-              <a:rPr lang="en-GB" dirty="0"/>
-              <a:t>A basketball prospect scores 22 points per game, but most of those points come against weaker opponents. Against highly ranked teams, the player’s scoring efficiency and assists decrease while turnovers increase. Your team is deciding whether to select the player in the first round of the draft.</a:t>
-            </a:r>
-          </a:p>
-          <a:p>
-            <a:r>
-              <a:rPr lang="en-GB" dirty="0"/>
-              <a:t>A soccer team has allowed five goals during its last four matches. Four of the goals occurred after the team lost possession while its fullbacks were positioned high up the field. The team is preparing to play an opponent with fast attacking players.</a:t>
-            </a:r>
-            <a:endParaRPr lang="en-US" dirty="0"/>
-          </a:p>
-        </p:txBody>
-      </p:sp>
-    </p:spTree>
-    <p:extLst>
-      <p:ext uri="{BB962C8B-B14F-4D97-AF65-F5344CB8AC3E}">
-        <p14:creationId xmlns:p14="http://schemas.microsoft.com/office/powerpoint/2010/main" val="2264337334"/>
-      </p:ext>
-    </p:extLst>
-  </p:cSld>
-  <p:clrMapOvr>
-    <a:masterClrMapping/>
-  </p:clrMapOvr>
-</p:sld>
-</file>
-
-<file path=ppt/slides/slide4.xml><?xml version="1.0" encoding="utf-8"?>
+<file path=ppt/slides/slide5.xml><?xml version="1.0" encoding="utf-8"?>
 <p:sld xmlns:a="http://schemas.openxmlformats.org/drawingml/2006/main" xmlns:r="http://schemas.openxmlformats.org/officeDocument/2006/relationships" xmlns:p="http://schemas.openxmlformats.org/presentationml/2006/main">
   <p:cSld>
     <p:spTree>
@@ -16421,150 +19516,279 @@
   <p:clrMapOvr>
     <a:masterClrMapping/>
   </p:clrMapOvr>
-</p:sld>
-</file>
-
-<file path=ppt/slides/slide5.xml><?xml version="1.0" encoding="utf-8"?>
-<p:sld xmlns:a="http://schemas.openxmlformats.org/drawingml/2006/main" xmlns:r="http://schemas.openxmlformats.org/officeDocument/2006/relationships" xmlns:p="http://schemas.openxmlformats.org/presentationml/2006/main">
-  <p:cSld>
-    <p:spTree>
-      <p:nvGrpSpPr>
-        <p:cNvPr id="1" name=""/>
-        <p:cNvGrpSpPr/>
-        <p:nvPr/>
-      </p:nvGrpSpPr>
-      <p:grpSpPr>
-        <a:xfrm>
-          <a:off x="0" y="0"/>
-          <a:ext cx="0" cy="0"/>
-          <a:chOff x="0" y="0"/>
-          <a:chExt cx="0" cy="0"/>
-        </a:xfrm>
-      </p:grpSpPr>
-      <p:sp>
-        <p:nvSpPr>
-          <p:cNvPr id="2" name="Title 1">
-            <a:extLst>
-              <a:ext uri="{FF2B5EF4-FFF2-40B4-BE49-F238E27FC236}">
-                <a16:creationId xmlns:a16="http://schemas.microsoft.com/office/drawing/2014/main" id="{E6104B99-C0BE-C514-46EC-CAE531CB329A}"/>
-              </a:ext>
-            </a:extLst>
-          </p:cNvPr>
-          <p:cNvSpPr>
-            <a:spLocks noGrp="1"/>
-          </p:cNvSpPr>
-          <p:nvPr>
-            <p:ph type="title"/>
-          </p:nvPr>
-        </p:nvSpPr>
-        <p:spPr/>
-        <p:txBody>
-          <a:bodyPr>
-            <a:normAutofit/>
-          </a:bodyPr>
-          <a:lstStyle/>
-          <a:p>
-            <a:r>
-              <a:rPr lang="en-GB" dirty="0"/>
-              <a:t>Sport Analytics Begins With a Decision</a:t>
-            </a:r>
-            <a:endParaRPr lang="en-US" dirty="0"/>
-          </a:p>
-        </p:txBody>
-      </p:sp>
-      <p:sp>
-        <p:nvSpPr>
-          <p:cNvPr id="3" name="Content Placeholder 2">
-            <a:extLst>
-              <a:ext uri="{FF2B5EF4-FFF2-40B4-BE49-F238E27FC236}">
-                <a16:creationId xmlns:a16="http://schemas.microsoft.com/office/drawing/2014/main" id="{35EC063E-392D-93CE-404B-5B2C5A5F6B12}"/>
-              </a:ext>
-            </a:extLst>
-          </p:cNvPr>
-          <p:cNvSpPr>
-            <a:spLocks noGrp="1"/>
-          </p:cNvSpPr>
-          <p:nvPr>
-            <p:ph idx="1"/>
-          </p:nvPr>
-        </p:nvSpPr>
-        <p:spPr/>
-        <p:txBody>
-          <a:bodyPr>
-            <a:normAutofit/>
-          </a:bodyPr>
-          <a:lstStyle/>
-          <a:p>
-            <a:pPr marL="0" indent="0">
-              <a:buNone/>
-            </a:pPr>
-            <a:r>
-              <a:rPr lang="en-GB" dirty="0"/>
-              <a:t>For any sport analytics problem, ask:</a:t>
-            </a:r>
-          </a:p>
-          <a:p>
-            <a:pPr marL="971550" lvl="1" indent="-514350">
-              <a:buFont typeface="+mj-lt"/>
-              <a:buAutoNum type="arabicPeriod"/>
-            </a:pPr>
-            <a:r>
-              <a:rPr lang="en-GB" dirty="0"/>
-              <a:t>Who will use the analysis? </a:t>
-            </a:r>
-          </a:p>
-          <a:p>
-            <a:pPr marL="971550" lvl="1" indent="-514350">
-              <a:buFont typeface="+mj-lt"/>
-              <a:buAutoNum type="arabicPeriod"/>
-            </a:pPr>
-            <a:r>
-              <a:rPr lang="en-GB" dirty="0"/>
-              <a:t>What decision are they trying to make? </a:t>
-            </a:r>
-          </a:p>
-          <a:p>
-            <a:pPr marL="971550" lvl="1" indent="-514350">
-              <a:buFont typeface="+mj-lt"/>
-              <a:buAutoNum type="arabicPeriod"/>
-            </a:pPr>
-            <a:r>
-              <a:rPr lang="en-GB" dirty="0"/>
-              <a:t>What information could improve that decision? </a:t>
-            </a:r>
-          </a:p>
-          <a:p>
-            <a:pPr marL="971550" lvl="1" indent="-514350">
-              <a:buFont typeface="+mj-lt"/>
-              <a:buAutoNum type="arabicPeriod"/>
-            </a:pPr>
-            <a:r>
-              <a:rPr lang="en-GB" dirty="0"/>
-              <a:t>What are the consequences of being wrong? </a:t>
-            </a:r>
-          </a:p>
-          <a:p>
-            <a:pPr marL="971550" lvl="1" indent="-514350">
-              <a:buFont typeface="+mj-lt"/>
-              <a:buAutoNum type="arabicPeriod"/>
-            </a:pPr>
-            <a:r>
-              <a:rPr lang="en-GB" dirty="0"/>
-              <a:t>What data might provide that information?</a:t>
-            </a:r>
-          </a:p>
-        </p:txBody>
-      </p:sp>
-    </p:spTree>
-    <p:extLst>
-      <p:ext uri="{BB962C8B-B14F-4D97-AF65-F5344CB8AC3E}">
-        <p14:creationId xmlns:p14="http://schemas.microsoft.com/office/powerpoint/2010/main" val="2477808522"/>
-      </p:ext>
-    </p:extLst>
-  </p:cSld>
-  <p:clrMapOvr>
-    <a:masterClrMapping/>
-  </p:clrMapOvr>
+  <p:timing>
+    <p:tnLst>
+      <p:par>
+        <p:cTn id="1" dur="indefinite" restart="never" nodeType="tmRoot">
+          <p:childTnLst>
+            <p:seq concurrent="1" nextAc="seek">
+              <p:cTn id="2" dur="indefinite" nodeType="mainSeq">
+                <p:childTnLst>
+                  <p:par>
+                    <p:cTn id="3" fill="hold">
+                      <p:stCondLst>
+                        <p:cond delay="indefinite"/>
+                      </p:stCondLst>
+                      <p:childTnLst>
+                        <p:par>
+                          <p:cTn id="4" fill="hold">
+                            <p:stCondLst>
+                              <p:cond delay="0"/>
+                            </p:stCondLst>
+                            <p:childTnLst>
+                              <p:par>
+                                <p:cTn id="5" presetID="1" presetClass="entr" presetSubtype="0" fill="hold" grpId="0" nodeType="clickEffect">
+                                  <p:stCondLst>
+                                    <p:cond delay="0"/>
+                                  </p:stCondLst>
+                                  <p:childTnLst>
+                                    <p:set>
+                                      <p:cBhvr>
+                                        <p:cTn id="6" dur="1" fill="hold">
+                                          <p:stCondLst>
+                                            <p:cond delay="0"/>
+                                          </p:stCondLst>
+                                        </p:cTn>
+                                        <p:tgtEl>
+                                          <p:spTgt spid="3">
+                                            <p:txEl>
+                                              <p:pRg st="0" end="0"/>
+                                            </p:txEl>
+                                          </p:spTgt>
+                                        </p:tgtEl>
+                                        <p:attrNameLst>
+                                          <p:attrName>style.visibility</p:attrName>
+                                        </p:attrNameLst>
+                                      </p:cBhvr>
+                                      <p:to>
+                                        <p:strVal val="visible"/>
+                                      </p:to>
+                                    </p:set>
+                                  </p:childTnLst>
+                                </p:cTn>
+                              </p:par>
+                              <p:par>
+                                <p:cTn id="7" presetID="1" presetClass="entr" presetSubtype="0" fill="hold" grpId="0" nodeType="withEffect">
+                                  <p:stCondLst>
+                                    <p:cond delay="0"/>
+                                  </p:stCondLst>
+                                  <p:childTnLst>
+                                    <p:set>
+                                      <p:cBhvr>
+                                        <p:cTn id="8" dur="1" fill="hold">
+                                          <p:stCondLst>
+                                            <p:cond delay="0"/>
+                                          </p:stCondLst>
+                                        </p:cTn>
+                                        <p:tgtEl>
+                                          <p:spTgt spid="3">
+                                            <p:txEl>
+                                              <p:pRg st="1" end="1"/>
+                                            </p:txEl>
+                                          </p:spTgt>
+                                        </p:tgtEl>
+                                        <p:attrNameLst>
+                                          <p:attrName>style.visibility</p:attrName>
+                                        </p:attrNameLst>
+                                      </p:cBhvr>
+                                      <p:to>
+                                        <p:strVal val="visible"/>
+                                      </p:to>
+                                    </p:set>
+                                  </p:childTnLst>
+                                </p:cTn>
+                              </p:par>
+                            </p:childTnLst>
+                          </p:cTn>
+                        </p:par>
+                      </p:childTnLst>
+                    </p:cTn>
+                  </p:par>
+                  <p:par>
+                    <p:cTn id="9" fill="hold">
+                      <p:stCondLst>
+                        <p:cond delay="indefinite"/>
+                      </p:stCondLst>
+                      <p:childTnLst>
+                        <p:par>
+                          <p:cTn id="10" fill="hold">
+                            <p:stCondLst>
+                              <p:cond delay="0"/>
+                            </p:stCondLst>
+                            <p:childTnLst>
+                              <p:par>
+                                <p:cTn id="11" presetID="1" presetClass="entr" presetSubtype="0" fill="hold" grpId="0" nodeType="clickEffect">
+                                  <p:stCondLst>
+                                    <p:cond delay="0"/>
+                                  </p:stCondLst>
+                                  <p:childTnLst>
+                                    <p:set>
+                                      <p:cBhvr>
+                                        <p:cTn id="12" dur="1" fill="hold">
+                                          <p:stCondLst>
+                                            <p:cond delay="0"/>
+                                          </p:stCondLst>
+                                        </p:cTn>
+                                        <p:tgtEl>
+                                          <p:spTgt spid="3">
+                                            <p:txEl>
+                                              <p:pRg st="2" end="2"/>
+                                            </p:txEl>
+                                          </p:spTgt>
+                                        </p:tgtEl>
+                                        <p:attrNameLst>
+                                          <p:attrName>style.visibility</p:attrName>
+                                        </p:attrNameLst>
+                                      </p:cBhvr>
+                                      <p:to>
+                                        <p:strVal val="visible"/>
+                                      </p:to>
+                                    </p:set>
+                                  </p:childTnLst>
+                                </p:cTn>
+                              </p:par>
+                              <p:par>
+                                <p:cTn id="13" presetID="1" presetClass="entr" presetSubtype="0" fill="hold" grpId="0" nodeType="withEffect">
+                                  <p:stCondLst>
+                                    <p:cond delay="0"/>
+                                  </p:stCondLst>
+                                  <p:childTnLst>
+                                    <p:set>
+                                      <p:cBhvr>
+                                        <p:cTn id="14" dur="1" fill="hold">
+                                          <p:stCondLst>
+                                            <p:cond delay="0"/>
+                                          </p:stCondLst>
+                                        </p:cTn>
+                                        <p:tgtEl>
+                                          <p:spTgt spid="3">
+                                            <p:txEl>
+                                              <p:pRg st="3" end="3"/>
+                                            </p:txEl>
+                                          </p:spTgt>
+                                        </p:tgtEl>
+                                        <p:attrNameLst>
+                                          <p:attrName>style.visibility</p:attrName>
+                                        </p:attrNameLst>
+                                      </p:cBhvr>
+                                      <p:to>
+                                        <p:strVal val="visible"/>
+                                      </p:to>
+                                    </p:set>
+                                  </p:childTnLst>
+                                </p:cTn>
+                              </p:par>
+                            </p:childTnLst>
+                          </p:cTn>
+                        </p:par>
+                      </p:childTnLst>
+                    </p:cTn>
+                  </p:par>
+                  <p:par>
+                    <p:cTn id="15" fill="hold">
+                      <p:stCondLst>
+                        <p:cond delay="indefinite"/>
+                      </p:stCondLst>
+                      <p:childTnLst>
+                        <p:par>
+                          <p:cTn id="16" fill="hold">
+                            <p:stCondLst>
+                              <p:cond delay="0"/>
+                            </p:stCondLst>
+                            <p:childTnLst>
+                              <p:par>
+                                <p:cTn id="17" presetID="1" presetClass="entr" presetSubtype="0" fill="hold" grpId="0" nodeType="clickEffect">
+                                  <p:stCondLst>
+                                    <p:cond delay="0"/>
+                                  </p:stCondLst>
+                                  <p:childTnLst>
+                                    <p:set>
+                                      <p:cBhvr>
+                                        <p:cTn id="18" dur="1" fill="hold">
+                                          <p:stCondLst>
+                                            <p:cond delay="0"/>
+                                          </p:stCondLst>
+                                        </p:cTn>
+                                        <p:tgtEl>
+                                          <p:spTgt spid="3">
+                                            <p:txEl>
+                                              <p:pRg st="4" end="4"/>
+                                            </p:txEl>
+                                          </p:spTgt>
+                                        </p:tgtEl>
+                                        <p:attrNameLst>
+                                          <p:attrName>style.visibility</p:attrName>
+                                        </p:attrNameLst>
+                                      </p:cBhvr>
+                                      <p:to>
+                                        <p:strVal val="visible"/>
+                                      </p:to>
+                                    </p:set>
+                                  </p:childTnLst>
+                                </p:cTn>
+                              </p:par>
+                              <p:par>
+                                <p:cTn id="19" presetID="1" presetClass="entr" presetSubtype="0" fill="hold" grpId="0" nodeType="withEffect">
+                                  <p:stCondLst>
+                                    <p:cond delay="0"/>
+                                  </p:stCondLst>
+                                  <p:childTnLst>
+                                    <p:set>
+                                      <p:cBhvr>
+                                        <p:cTn id="20" dur="1" fill="hold">
+                                          <p:stCondLst>
+                                            <p:cond delay="0"/>
+                                          </p:stCondLst>
+                                        </p:cTn>
+                                        <p:tgtEl>
+                                          <p:spTgt spid="3">
+                                            <p:txEl>
+                                              <p:pRg st="5" end="5"/>
+                                            </p:txEl>
+                                          </p:spTgt>
+                                        </p:tgtEl>
+                                        <p:attrNameLst>
+                                          <p:attrName>style.visibility</p:attrName>
+                                        </p:attrNameLst>
+                                      </p:cBhvr>
+                                      <p:to>
+                                        <p:strVal val="visible"/>
+                                      </p:to>
+                                    </p:set>
+                                  </p:childTnLst>
+                                </p:cTn>
+                              </p:par>
+                            </p:childTnLst>
+                          </p:cTn>
+                        </p:par>
+                      </p:childTnLst>
+                    </p:cTn>
+                  </p:par>
+                </p:childTnLst>
+              </p:cTn>
+              <p:prevCondLst>
+                <p:cond evt="onPrev" delay="0">
+                  <p:tgtEl>
+                    <p:sldTgt/>
+                  </p:tgtEl>
+                </p:cond>
+              </p:prevCondLst>
+              <p:nextCondLst>
+                <p:cond evt="onNext" delay="0">
+                  <p:tgtEl>
+                    <p:sldTgt/>
+                  </p:tgtEl>
+                </p:cond>
+              </p:nextCondLst>
+            </p:seq>
+          </p:childTnLst>
+        </p:cTn>
+      </p:par>
+    </p:tnLst>
+    <p:bldLst>
+      <p:bldP spid="3" grpId="0" build="p"/>
+    </p:bldLst>
+  </p:timing>
 </p:sld>
 </file>
 
@@ -16849,6 +20073,130 @@
   <p:clrMapOvr>
     <a:masterClrMapping/>
   </p:clrMapOvr>
+  <p:timing>
+    <p:tnLst>
+      <p:par>
+        <p:cTn id="1" dur="indefinite" restart="never" nodeType="tmRoot">
+          <p:childTnLst>
+            <p:seq concurrent="1" nextAc="seek">
+              <p:cTn id="2" dur="indefinite" nodeType="mainSeq">
+                <p:childTnLst>
+                  <p:par>
+                    <p:cTn id="3" fill="hold">
+                      <p:stCondLst>
+                        <p:cond delay="indefinite"/>
+                      </p:stCondLst>
+                      <p:childTnLst>
+                        <p:par>
+                          <p:cTn id="4" fill="hold">
+                            <p:stCondLst>
+                              <p:cond delay="0"/>
+                            </p:stCondLst>
+                            <p:childTnLst>
+                              <p:par>
+                                <p:cTn id="5" presetID="1" presetClass="entr" presetSubtype="0" fill="hold" grpId="0" nodeType="clickEffect">
+                                  <p:stCondLst>
+                                    <p:cond delay="0"/>
+                                  </p:stCondLst>
+                                  <p:childTnLst>
+                                    <p:set>
+                                      <p:cBhvr>
+                                        <p:cTn id="6" dur="1" fill="hold">
+                                          <p:stCondLst>
+                                            <p:cond delay="0"/>
+                                          </p:stCondLst>
+                                        </p:cTn>
+                                        <p:tgtEl>
+                                          <p:spTgt spid="5"/>
+                                        </p:tgtEl>
+                                        <p:attrNameLst>
+                                          <p:attrName>style.visibility</p:attrName>
+                                        </p:attrNameLst>
+                                      </p:cBhvr>
+                                      <p:to>
+                                        <p:strVal val="visible"/>
+                                      </p:to>
+                                    </p:set>
+                                  </p:childTnLst>
+                                </p:cTn>
+                              </p:par>
+                            </p:childTnLst>
+                          </p:cTn>
+                        </p:par>
+                      </p:childTnLst>
+                    </p:cTn>
+                  </p:par>
+                  <p:par>
+                    <p:cTn id="7" fill="hold">
+                      <p:stCondLst>
+                        <p:cond delay="indefinite"/>
+                      </p:stCondLst>
+                      <p:childTnLst>
+                        <p:par>
+                          <p:cTn id="8" fill="hold">
+                            <p:stCondLst>
+                              <p:cond delay="0"/>
+                            </p:stCondLst>
+                            <p:childTnLst>
+                              <p:par>
+                                <p:cTn id="9" presetID="1" presetClass="entr" presetSubtype="0" fill="hold" grpId="0" nodeType="clickEffect">
+                                  <p:stCondLst>
+                                    <p:cond delay="0"/>
+                                  </p:stCondLst>
+                                  <p:childTnLst>
+                                    <p:set>
+                                      <p:cBhvr>
+                                        <p:cTn id="10" dur="1" fill="hold">
+                                          <p:stCondLst>
+                                            <p:cond delay="0"/>
+                                          </p:stCondLst>
+                                        </p:cTn>
+                                        <p:tgtEl>
+                                          <p:spTgt spid="4"/>
+                                        </p:tgtEl>
+                                        <p:attrNameLst>
+                                          <p:attrName>style.visibility</p:attrName>
+                                        </p:attrNameLst>
+                                      </p:cBhvr>
+                                      <p:to>
+                                        <p:strVal val="visible"/>
+                                      </p:to>
+                                    </p:set>
+                                  </p:childTnLst>
+                                </p:cTn>
+                              </p:par>
+                            </p:childTnLst>
+                          </p:cTn>
+                        </p:par>
+                      </p:childTnLst>
+                    </p:cTn>
+                  </p:par>
+                </p:childTnLst>
+              </p:cTn>
+              <p:prevCondLst>
+                <p:cond evt="onPrev" delay="0">
+                  <p:tgtEl>
+                    <p:sldTgt/>
+                  </p:tgtEl>
+                </p:cond>
+              </p:prevCondLst>
+              <p:nextCondLst>
+                <p:cond evt="onNext" delay="0">
+                  <p:tgtEl>
+                    <p:sldTgt/>
+                  </p:tgtEl>
+                </p:cond>
+              </p:nextCondLst>
+            </p:seq>
+          </p:childTnLst>
+        </p:cTn>
+      </p:par>
+    </p:tnLst>
+    <p:bldLst>
+      <p:bldP spid="4" grpId="0" animBg="1"/>
+      <p:bldP spid="5" grpId="0" animBg="1"/>
+    </p:bldLst>
+  </p:timing>
 </p:sld>
 </file>
 
@@ -17032,6 +20380,307 @@
   <p:clrMapOvr>
     <a:masterClrMapping/>
   </p:clrMapOvr>
+  <p:timing>
+    <p:tnLst>
+      <p:par>
+        <p:cTn id="1" dur="indefinite" restart="never" nodeType="tmRoot">
+          <p:childTnLst>
+            <p:seq concurrent="1" nextAc="seek">
+              <p:cTn id="2" dur="indefinite" nodeType="mainSeq">
+                <p:childTnLst>
+                  <p:par>
+                    <p:cTn id="3" fill="hold">
+                      <p:stCondLst>
+                        <p:cond delay="indefinite"/>
+                      </p:stCondLst>
+                      <p:childTnLst>
+                        <p:par>
+                          <p:cTn id="4" fill="hold">
+                            <p:stCondLst>
+                              <p:cond delay="0"/>
+                            </p:stCondLst>
+                            <p:childTnLst>
+                              <p:par>
+                                <p:cTn id="5" presetID="1" presetClass="entr" presetSubtype="0" fill="hold" grpId="0" nodeType="clickEffect">
+                                  <p:stCondLst>
+                                    <p:cond delay="0"/>
+                                  </p:stCondLst>
+                                  <p:childTnLst>
+                                    <p:set>
+                                      <p:cBhvr>
+                                        <p:cTn id="6" dur="1" fill="hold">
+                                          <p:stCondLst>
+                                            <p:cond delay="0"/>
+                                          </p:stCondLst>
+                                        </p:cTn>
+                                        <p:tgtEl>
+                                          <p:spTgt spid="3">
+                                            <p:txEl>
+                                              <p:pRg st="1" end="1"/>
+                                            </p:txEl>
+                                          </p:spTgt>
+                                        </p:tgtEl>
+                                        <p:attrNameLst>
+                                          <p:attrName>style.visibility</p:attrName>
+                                        </p:attrNameLst>
+                                      </p:cBhvr>
+                                      <p:to>
+                                        <p:strVal val="visible"/>
+                                      </p:to>
+                                    </p:set>
+                                  </p:childTnLst>
+                                </p:cTn>
+                              </p:par>
+                            </p:childTnLst>
+                          </p:cTn>
+                        </p:par>
+                      </p:childTnLst>
+                    </p:cTn>
+                  </p:par>
+                  <p:par>
+                    <p:cTn id="7" fill="hold">
+                      <p:stCondLst>
+                        <p:cond delay="indefinite"/>
+                      </p:stCondLst>
+                      <p:childTnLst>
+                        <p:par>
+                          <p:cTn id="8" fill="hold">
+                            <p:stCondLst>
+                              <p:cond delay="0"/>
+                            </p:stCondLst>
+                            <p:childTnLst>
+                              <p:par>
+                                <p:cTn id="9" presetID="1" presetClass="entr" presetSubtype="0" fill="hold" grpId="0" nodeType="clickEffect">
+                                  <p:stCondLst>
+                                    <p:cond delay="0"/>
+                                  </p:stCondLst>
+                                  <p:childTnLst>
+                                    <p:set>
+                                      <p:cBhvr>
+                                        <p:cTn id="10" dur="1" fill="hold">
+                                          <p:stCondLst>
+                                            <p:cond delay="0"/>
+                                          </p:stCondLst>
+                                        </p:cTn>
+                                        <p:tgtEl>
+                                          <p:spTgt spid="3">
+                                            <p:txEl>
+                                              <p:pRg st="2" end="2"/>
+                                            </p:txEl>
+                                          </p:spTgt>
+                                        </p:tgtEl>
+                                        <p:attrNameLst>
+                                          <p:attrName>style.visibility</p:attrName>
+                                        </p:attrNameLst>
+                                      </p:cBhvr>
+                                      <p:to>
+                                        <p:strVal val="visible"/>
+                                      </p:to>
+                                    </p:set>
+                                  </p:childTnLst>
+                                </p:cTn>
+                              </p:par>
+                              <p:par>
+                                <p:cTn id="11" presetID="1" presetClass="entr" presetSubtype="0" fill="hold" grpId="0" nodeType="withEffect">
+                                  <p:stCondLst>
+                                    <p:cond delay="0"/>
+                                  </p:stCondLst>
+                                  <p:childTnLst>
+                                    <p:set>
+                                      <p:cBhvr>
+                                        <p:cTn id="12" dur="1" fill="hold">
+                                          <p:stCondLst>
+                                            <p:cond delay="0"/>
+                                          </p:stCondLst>
+                                        </p:cTn>
+                                        <p:tgtEl>
+                                          <p:spTgt spid="3">
+                                            <p:txEl>
+                                              <p:pRg st="3" end="3"/>
+                                            </p:txEl>
+                                          </p:spTgt>
+                                        </p:tgtEl>
+                                        <p:attrNameLst>
+                                          <p:attrName>style.visibility</p:attrName>
+                                        </p:attrNameLst>
+                                      </p:cBhvr>
+                                      <p:to>
+                                        <p:strVal val="visible"/>
+                                      </p:to>
+                                    </p:set>
+                                  </p:childTnLst>
+                                </p:cTn>
+                              </p:par>
+                              <p:par>
+                                <p:cTn id="13" presetID="1" presetClass="entr" presetSubtype="0" fill="hold" grpId="0" nodeType="withEffect">
+                                  <p:stCondLst>
+                                    <p:cond delay="0"/>
+                                  </p:stCondLst>
+                                  <p:childTnLst>
+                                    <p:set>
+                                      <p:cBhvr>
+                                        <p:cTn id="14" dur="1" fill="hold">
+                                          <p:stCondLst>
+                                            <p:cond delay="0"/>
+                                          </p:stCondLst>
+                                        </p:cTn>
+                                        <p:tgtEl>
+                                          <p:spTgt spid="3">
+                                            <p:txEl>
+                                              <p:pRg st="4" end="4"/>
+                                            </p:txEl>
+                                          </p:spTgt>
+                                        </p:tgtEl>
+                                        <p:attrNameLst>
+                                          <p:attrName>style.visibility</p:attrName>
+                                        </p:attrNameLst>
+                                      </p:cBhvr>
+                                      <p:to>
+                                        <p:strVal val="visible"/>
+                                      </p:to>
+                                    </p:set>
+                                  </p:childTnLst>
+                                </p:cTn>
+                              </p:par>
+                              <p:par>
+                                <p:cTn id="15" presetID="1" presetClass="entr" presetSubtype="0" fill="hold" grpId="0" nodeType="withEffect">
+                                  <p:stCondLst>
+                                    <p:cond delay="0"/>
+                                  </p:stCondLst>
+                                  <p:childTnLst>
+                                    <p:set>
+                                      <p:cBhvr>
+                                        <p:cTn id="16" dur="1" fill="hold">
+                                          <p:stCondLst>
+                                            <p:cond delay="0"/>
+                                          </p:stCondLst>
+                                        </p:cTn>
+                                        <p:tgtEl>
+                                          <p:spTgt spid="3">
+                                            <p:txEl>
+                                              <p:pRg st="5" end="5"/>
+                                            </p:txEl>
+                                          </p:spTgt>
+                                        </p:tgtEl>
+                                        <p:attrNameLst>
+                                          <p:attrName>style.visibility</p:attrName>
+                                        </p:attrNameLst>
+                                      </p:cBhvr>
+                                      <p:to>
+                                        <p:strVal val="visible"/>
+                                      </p:to>
+                                    </p:set>
+                                  </p:childTnLst>
+                                </p:cTn>
+                              </p:par>
+                              <p:par>
+                                <p:cTn id="17" presetID="1" presetClass="entr" presetSubtype="0" fill="hold" grpId="0" nodeType="withEffect">
+                                  <p:stCondLst>
+                                    <p:cond delay="0"/>
+                                  </p:stCondLst>
+                                  <p:childTnLst>
+                                    <p:set>
+                                      <p:cBhvr>
+                                        <p:cTn id="18" dur="1" fill="hold">
+                                          <p:stCondLst>
+                                            <p:cond delay="0"/>
+                                          </p:stCondLst>
+                                        </p:cTn>
+                                        <p:tgtEl>
+                                          <p:spTgt spid="3">
+                                            <p:txEl>
+                                              <p:pRg st="6" end="6"/>
+                                            </p:txEl>
+                                          </p:spTgt>
+                                        </p:tgtEl>
+                                        <p:attrNameLst>
+                                          <p:attrName>style.visibility</p:attrName>
+                                        </p:attrNameLst>
+                                      </p:cBhvr>
+                                      <p:to>
+                                        <p:strVal val="visible"/>
+                                      </p:to>
+                                    </p:set>
+                                  </p:childTnLst>
+                                </p:cTn>
+                              </p:par>
+                            </p:childTnLst>
+                          </p:cTn>
+                        </p:par>
+                      </p:childTnLst>
+                    </p:cTn>
+                  </p:par>
+                  <p:par>
+                    <p:cTn id="19" fill="hold">
+                      <p:stCondLst>
+                        <p:cond delay="indefinite"/>
+                      </p:stCondLst>
+                      <p:childTnLst>
+                        <p:par>
+                          <p:cTn id="20" fill="hold">
+                            <p:stCondLst>
+                              <p:cond delay="0"/>
+                            </p:stCondLst>
+                            <p:childTnLst>
+                              <p:par>
+                                <p:cTn id="21" presetID="1" presetClass="entr" presetSubtype="0" fill="hold" grpId="0" nodeType="clickEffect">
+                                  <p:stCondLst>
+                                    <p:cond delay="0"/>
+                                  </p:stCondLst>
+                                  <p:childTnLst>
+                                    <p:set>
+                                      <p:cBhvr>
+                                        <p:cTn id="22" dur="1" fill="hold">
+                                          <p:stCondLst>
+                                            <p:cond delay="0"/>
+                                          </p:stCondLst>
+                                        </p:cTn>
+                                        <p:tgtEl>
+                                          <p:spTgt spid="5"/>
+                                        </p:tgtEl>
+                                        <p:attrNameLst>
+                                          <p:attrName>style.visibility</p:attrName>
+                                        </p:attrNameLst>
+                                      </p:cBhvr>
+                                      <p:to>
+                                        <p:strVal val="visible"/>
+                                      </p:to>
+                                    </p:set>
+                                  </p:childTnLst>
+                                </p:cTn>
+                              </p:par>
+                            </p:childTnLst>
+                          </p:cTn>
+                        </p:par>
+                      </p:childTnLst>
+                    </p:cTn>
+                  </p:par>
+                </p:childTnLst>
+              </p:cTn>
+              <p:prevCondLst>
+                <p:cond evt="onPrev" delay="0">
+                  <p:tgtEl>
+                    <p:sldTgt/>
+                  </p:tgtEl>
+                </p:cond>
+              </p:prevCondLst>
+              <p:nextCondLst>
+                <p:cond evt="onNext" delay="0">
+                  <p:tgtEl>
+                    <p:sldTgt/>
+                  </p:tgtEl>
+                </p:cond>
+              </p:nextCondLst>
+            </p:seq>
+          </p:childTnLst>
+        </p:cTn>
+      </p:par>
+    </p:tnLst>
+    <p:bldLst>
+      <p:bldP spid="3" grpId="0" uiExpand="1" build="p"/>
+      <p:bldP spid="5" grpId="0"/>
+    </p:bldLst>
+  </p:timing>
 </p:sld>
 </file>
 
@@ -17161,87 +20810,6 @@
           </a:p>
         </p:txBody>
       </p:sp>
-      <p:sp>
-        <p:nvSpPr>
-          <p:cNvPr id="4" name="TextBox 3">
-            <a:extLst>
-              <a:ext uri="{FF2B5EF4-FFF2-40B4-BE49-F238E27FC236}">
-                <a16:creationId xmlns:a16="http://schemas.microsoft.com/office/drawing/2014/main" id="{B2B901C3-E3FF-43F3-077E-FDA8B95413BC}"/>
-              </a:ext>
-            </a:extLst>
-          </p:cNvPr>
-          <p:cNvSpPr txBox="1"/>
-          <p:nvPr/>
-        </p:nvSpPr>
-        <p:spPr>
-          <a:xfrm>
-            <a:off x="1653020" y="5530632"/>
-            <a:ext cx="8885960" cy="646331"/>
-          </a:xfrm>
-          <a:prstGeom prst="rect">
-            <a:avLst/>
-          </a:prstGeom>
-          <a:noFill/>
-        </p:spPr>
-        <p:txBody>
-          <a:bodyPr wrap="square" rtlCol="0">
-            <a:spAutoFit/>
-          </a:bodyPr>
-          <a:lstStyle/>
-          <a:p>
-            <a:r>
-              <a:rPr lang="en-GB" dirty="0"/>
-              <a:t>The challenge is combining evidence when each source measures something different and has different limitations.</a:t>
-            </a:r>
-            <a:endParaRPr lang="en-US" dirty="0"/>
-          </a:p>
-        </p:txBody>
-      </p:sp>
-      <p:sp>
-        <p:nvSpPr>
-          <p:cNvPr id="6" name="TextBox 5">
-            <a:extLst>
-              <a:ext uri="{FF2B5EF4-FFF2-40B4-BE49-F238E27FC236}">
-                <a16:creationId xmlns:a16="http://schemas.microsoft.com/office/drawing/2014/main" id="{C58C4524-EF60-14DA-411A-B965D6CA29A3}"/>
-              </a:ext>
-            </a:extLst>
-          </p:cNvPr>
-          <p:cNvSpPr txBox="1"/>
-          <p:nvPr/>
-        </p:nvSpPr>
-        <p:spPr>
-          <a:xfrm>
-            <a:off x="4038600" y="4894573"/>
-            <a:ext cx="4114800" cy="369332"/>
-          </a:xfrm>
-          <a:prstGeom prst="rect">
-            <a:avLst/>
-          </a:prstGeom>
-          <a:noFill/>
-        </p:spPr>
-        <p:txBody>
-          <a:bodyPr wrap="square">
-            <a:spAutoFit/>
-          </a:bodyPr>
-          <a:lstStyle/>
-          <a:p>
-            <a:pPr algn="ctr"/>
-            <a:r>
-              <a:rPr lang="en-GB" dirty="0">
-                <a:solidFill>
-                  <a:srgbClr val="FF0000"/>
-                </a:solidFill>
-              </a:rPr>
-              <a:t>Which source would you trust most?</a:t>
-            </a:r>
-            <a:endParaRPr lang="en-US" dirty="0">
-              <a:solidFill>
-                <a:srgbClr val="FF0000"/>
-              </a:solidFill>
-            </a:endParaRPr>
-          </a:p>
-        </p:txBody>
-      </p:sp>
     </p:spTree>
     <p:extLst>
       <p:ext uri="{BB962C8B-B14F-4D97-AF65-F5344CB8AC3E}">
@@ -17252,6 +20820,235 @@
   <p:clrMapOvr>
     <a:masterClrMapping/>
   </p:clrMapOvr>
+  <p:timing>
+    <p:tnLst>
+      <p:par>
+        <p:cTn id="1" dur="indefinite" restart="never" nodeType="tmRoot">
+          <p:childTnLst>
+            <p:seq concurrent="1" nextAc="seek">
+              <p:cTn id="2" dur="indefinite" nodeType="mainSeq">
+                <p:childTnLst>
+                  <p:par>
+                    <p:cTn id="3" fill="hold">
+                      <p:stCondLst>
+                        <p:cond delay="indefinite"/>
+                      </p:stCondLst>
+                      <p:childTnLst>
+                        <p:par>
+                          <p:cTn id="4" fill="hold">
+                            <p:stCondLst>
+                              <p:cond delay="0"/>
+                            </p:stCondLst>
+                            <p:childTnLst>
+                              <p:par>
+                                <p:cTn id="5" presetID="1" presetClass="entr" presetSubtype="0" fill="hold" grpId="0" nodeType="clickEffect">
+                                  <p:stCondLst>
+                                    <p:cond delay="0"/>
+                                  </p:stCondLst>
+                                  <p:childTnLst>
+                                    <p:set>
+                                      <p:cBhvr>
+                                        <p:cTn id="6" dur="1" fill="hold">
+                                          <p:stCondLst>
+                                            <p:cond delay="0"/>
+                                          </p:stCondLst>
+                                        </p:cTn>
+                                        <p:tgtEl>
+                                          <p:spTgt spid="3">
+                                            <p:txEl>
+                                              <p:pRg st="1" end="1"/>
+                                            </p:txEl>
+                                          </p:spTgt>
+                                        </p:tgtEl>
+                                        <p:attrNameLst>
+                                          <p:attrName>style.visibility</p:attrName>
+                                        </p:attrNameLst>
+                                      </p:cBhvr>
+                                      <p:to>
+                                        <p:strVal val="visible"/>
+                                      </p:to>
+                                    </p:set>
+                                  </p:childTnLst>
+                                </p:cTn>
+                              </p:par>
+                            </p:childTnLst>
+                          </p:cTn>
+                        </p:par>
+                      </p:childTnLst>
+                    </p:cTn>
+                  </p:par>
+                  <p:par>
+                    <p:cTn id="7" fill="hold">
+                      <p:stCondLst>
+                        <p:cond delay="indefinite"/>
+                      </p:stCondLst>
+                      <p:childTnLst>
+                        <p:par>
+                          <p:cTn id="8" fill="hold">
+                            <p:stCondLst>
+                              <p:cond delay="0"/>
+                            </p:stCondLst>
+                            <p:childTnLst>
+                              <p:par>
+                                <p:cTn id="9" presetID="1" presetClass="entr" presetSubtype="0" fill="hold" grpId="0" nodeType="clickEffect">
+                                  <p:stCondLst>
+                                    <p:cond delay="0"/>
+                                  </p:stCondLst>
+                                  <p:childTnLst>
+                                    <p:set>
+                                      <p:cBhvr>
+                                        <p:cTn id="10" dur="1" fill="hold">
+                                          <p:stCondLst>
+                                            <p:cond delay="0"/>
+                                          </p:stCondLst>
+                                        </p:cTn>
+                                        <p:tgtEl>
+                                          <p:spTgt spid="3">
+                                            <p:txEl>
+                                              <p:pRg st="2" end="2"/>
+                                            </p:txEl>
+                                          </p:spTgt>
+                                        </p:tgtEl>
+                                        <p:attrNameLst>
+                                          <p:attrName>style.visibility</p:attrName>
+                                        </p:attrNameLst>
+                                      </p:cBhvr>
+                                      <p:to>
+                                        <p:strVal val="visible"/>
+                                      </p:to>
+                                    </p:set>
+                                  </p:childTnLst>
+                                </p:cTn>
+                              </p:par>
+                            </p:childTnLst>
+                          </p:cTn>
+                        </p:par>
+                      </p:childTnLst>
+                    </p:cTn>
+                  </p:par>
+                  <p:par>
+                    <p:cTn id="11" fill="hold">
+                      <p:stCondLst>
+                        <p:cond delay="indefinite"/>
+                      </p:stCondLst>
+                      <p:childTnLst>
+                        <p:par>
+                          <p:cTn id="12" fill="hold">
+                            <p:stCondLst>
+                              <p:cond delay="0"/>
+                            </p:stCondLst>
+                            <p:childTnLst>
+                              <p:par>
+                                <p:cTn id="13" presetID="1" presetClass="entr" presetSubtype="0" fill="hold" grpId="0" nodeType="clickEffect">
+                                  <p:stCondLst>
+                                    <p:cond delay="0"/>
+                                  </p:stCondLst>
+                                  <p:childTnLst>
+                                    <p:set>
+                                      <p:cBhvr>
+                                        <p:cTn id="14" dur="1" fill="hold">
+                                          <p:stCondLst>
+                                            <p:cond delay="0"/>
+                                          </p:stCondLst>
+                                        </p:cTn>
+                                        <p:tgtEl>
+                                          <p:spTgt spid="3">
+                                            <p:txEl>
+                                              <p:pRg st="3" end="3"/>
+                                            </p:txEl>
+                                          </p:spTgt>
+                                        </p:tgtEl>
+                                        <p:attrNameLst>
+                                          <p:attrName>style.visibility</p:attrName>
+                                        </p:attrNameLst>
+                                      </p:cBhvr>
+                                      <p:to>
+                                        <p:strVal val="visible"/>
+                                      </p:to>
+                                    </p:set>
+                                  </p:childTnLst>
+                                </p:cTn>
+                              </p:par>
+                            </p:childTnLst>
+                          </p:cTn>
+                        </p:par>
+                      </p:childTnLst>
+                    </p:cTn>
+                  </p:par>
+                  <p:par>
+                    <p:cTn id="15" fill="hold">
+                      <p:stCondLst>
+                        <p:cond delay="indefinite"/>
+                      </p:stCondLst>
+                      <p:childTnLst>
+                        <p:par>
+                          <p:cTn id="16" fill="hold">
+                            <p:stCondLst>
+                              <p:cond delay="0"/>
+                            </p:stCondLst>
+                            <p:childTnLst>
+                              <p:par>
+                                <p:cTn id="17" presetID="1" presetClass="entr" presetSubtype="0" fill="hold" grpId="0" nodeType="clickEffect">
+                                  <p:stCondLst>
+                                    <p:cond delay="0"/>
+                                  </p:stCondLst>
+                                  <p:childTnLst>
+                                    <p:set>
+                                      <p:cBhvr>
+                                        <p:cTn id="18" dur="1" fill="hold">
+                                          <p:stCondLst>
+                                            <p:cond delay="0"/>
+                                          </p:stCondLst>
+                                        </p:cTn>
+                                        <p:tgtEl>
+                                          <p:spTgt spid="3">
+                                            <p:txEl>
+                                              <p:pRg st="4" end="4"/>
+                                            </p:txEl>
+                                          </p:spTgt>
+                                        </p:tgtEl>
+                                        <p:attrNameLst>
+                                          <p:attrName>style.visibility</p:attrName>
+                                        </p:attrNameLst>
+                                      </p:cBhvr>
+                                      <p:to>
+                                        <p:strVal val="visible"/>
+                                      </p:to>
+                                    </p:set>
+                                  </p:childTnLst>
+                                </p:cTn>
+                              </p:par>
+                            </p:childTnLst>
+                          </p:cTn>
+                        </p:par>
+                      </p:childTnLst>
+                    </p:cTn>
+                  </p:par>
+                </p:childTnLst>
+              </p:cTn>
+              <p:prevCondLst>
+                <p:cond evt="onPrev" delay="0">
+                  <p:tgtEl>
+                    <p:sldTgt/>
+                  </p:tgtEl>
+                </p:cond>
+              </p:prevCondLst>
+              <p:nextCondLst>
+                <p:cond evt="onNext" delay="0">
+                  <p:tgtEl>
+                    <p:sldTgt/>
+                  </p:tgtEl>
+                </p:cond>
+              </p:nextCondLst>
+            </p:seq>
+          </p:childTnLst>
+        </p:cTn>
+      </p:par>
+    </p:tnLst>
+    <p:bldLst>
+      <p:bldP spid="3" grpId="0" uiExpand="1" build="p"/>
+    </p:bldLst>
+  </p:timing>
 </p:sld>
 </file>
 
@@ -17518,6 +21315,130 @@
   <p:clrMapOvr>
     <a:masterClrMapping/>
   </p:clrMapOvr>
+  <p:timing>
+    <p:tnLst>
+      <p:par>
+        <p:cTn id="1" dur="indefinite" restart="never" nodeType="tmRoot">
+          <p:childTnLst>
+            <p:seq concurrent="1" nextAc="seek">
+              <p:cTn id="2" dur="indefinite" nodeType="mainSeq">
+                <p:childTnLst>
+                  <p:par>
+                    <p:cTn id="3" fill="hold">
+                      <p:stCondLst>
+                        <p:cond delay="indefinite"/>
+                      </p:stCondLst>
+                      <p:childTnLst>
+                        <p:par>
+                          <p:cTn id="4" fill="hold">
+                            <p:stCondLst>
+                              <p:cond delay="0"/>
+                            </p:stCondLst>
+                            <p:childTnLst>
+                              <p:par>
+                                <p:cTn id="5" presetID="1" presetClass="entr" presetSubtype="0" fill="hold" grpId="0" nodeType="clickEffect">
+                                  <p:stCondLst>
+                                    <p:cond delay="0"/>
+                                  </p:stCondLst>
+                                  <p:childTnLst>
+                                    <p:set>
+                                      <p:cBhvr>
+                                        <p:cTn id="6" dur="1" fill="hold">
+                                          <p:stCondLst>
+                                            <p:cond delay="0"/>
+                                          </p:stCondLst>
+                                        </p:cTn>
+                                        <p:tgtEl>
+                                          <p:spTgt spid="5"/>
+                                        </p:tgtEl>
+                                        <p:attrNameLst>
+                                          <p:attrName>style.visibility</p:attrName>
+                                        </p:attrNameLst>
+                                      </p:cBhvr>
+                                      <p:to>
+                                        <p:strVal val="visible"/>
+                                      </p:to>
+                                    </p:set>
+                                  </p:childTnLst>
+                                </p:cTn>
+                              </p:par>
+                            </p:childTnLst>
+                          </p:cTn>
+                        </p:par>
+                      </p:childTnLst>
+                    </p:cTn>
+                  </p:par>
+                  <p:par>
+                    <p:cTn id="7" fill="hold">
+                      <p:stCondLst>
+                        <p:cond delay="indefinite"/>
+                      </p:stCondLst>
+                      <p:childTnLst>
+                        <p:par>
+                          <p:cTn id="8" fill="hold">
+                            <p:stCondLst>
+                              <p:cond delay="0"/>
+                            </p:stCondLst>
+                            <p:childTnLst>
+                              <p:par>
+                                <p:cTn id="9" presetID="1" presetClass="entr" presetSubtype="0" fill="hold" grpId="0" nodeType="clickEffect">
+                                  <p:stCondLst>
+                                    <p:cond delay="0"/>
+                                  </p:stCondLst>
+                                  <p:childTnLst>
+                                    <p:set>
+                                      <p:cBhvr>
+                                        <p:cTn id="10" dur="1" fill="hold">
+                                          <p:stCondLst>
+                                            <p:cond delay="0"/>
+                                          </p:stCondLst>
+                                        </p:cTn>
+                                        <p:tgtEl>
+                                          <p:spTgt spid="4"/>
+                                        </p:tgtEl>
+                                        <p:attrNameLst>
+                                          <p:attrName>style.visibility</p:attrName>
+                                        </p:attrNameLst>
+                                      </p:cBhvr>
+                                      <p:to>
+                                        <p:strVal val="visible"/>
+                                      </p:to>
+                                    </p:set>
+                                  </p:childTnLst>
+                                </p:cTn>
+                              </p:par>
+                            </p:childTnLst>
+                          </p:cTn>
+                        </p:par>
+                      </p:childTnLst>
+                    </p:cTn>
+                  </p:par>
+                </p:childTnLst>
+              </p:cTn>
+              <p:prevCondLst>
+                <p:cond evt="onPrev" delay="0">
+                  <p:tgtEl>
+                    <p:sldTgt/>
+                  </p:tgtEl>
+                </p:cond>
+              </p:prevCondLst>
+              <p:nextCondLst>
+                <p:cond evt="onNext" delay="0">
+                  <p:tgtEl>
+                    <p:sldTgt/>
+                  </p:tgtEl>
+                </p:cond>
+              </p:nextCondLst>
+            </p:seq>
+          </p:childTnLst>
+        </p:cTn>
+      </p:par>
+    </p:tnLst>
+    <p:bldLst>
+      <p:bldP spid="5" grpId="0" animBg="1"/>
+      <p:bldP spid="4" grpId="0" animBg="1"/>
+    </p:bldLst>
+  </p:timing>
 </p:sld>
 </file>
 

--- a/pptx/Lecture2.pptx
+++ b/pptx/Lecture2.pptx
@@ -2806,9 +2806,9 @@
   </dgm:ptLst>
   <dgm:cxnLst>
     <dgm:cxn modelId="{790FDC00-E3FF-4B63-887A-8ACFB0540A48}" type="presOf" srcId="{136F4BFD-0582-4579-82A5-A95C73D55870}" destId="{CAE12482-5CF7-471D-81B3-93E1D402E333}" srcOrd="0" destOrd="0" presId="urn:microsoft.com/office/officeart/2018/2/layout/IconLabelDescriptionList"/>
-    <dgm:cxn modelId="{1ADAC26C-C21D-4F5E-80D2-8F2BD6A07754}" type="presOf" srcId="{3902D11C-F772-4D98-AD43-68757266B871}" destId="{DF164D61-735C-4C87-8347-8B99FE586313}" srcOrd="0" destOrd="0" presId="urn:microsoft.com/office/officeart/2018/2/layout/IconLabelDescriptionList"/>
     <dgm:cxn modelId="{A4A1FA4D-CC62-41D9-B89B-8C82D955DCA7}" type="presOf" srcId="{BF707721-8F8B-47D7-804D-3109819BE9E5}" destId="{8E6B3E7A-9238-4392-BD23-80F64B24C815}" srcOrd="0" destOrd="0" presId="urn:microsoft.com/office/officeart/2018/2/layout/IconLabelDescriptionList"/>
     <dgm:cxn modelId="{EB4A6A4F-8117-4111-8788-25BAA3A3086B}" type="presOf" srcId="{60FFA69C-7C61-4DA1-AD1E-3AA5351D8F7B}" destId="{146C8532-5FED-4962-B4DE-1032849C3828}" srcOrd="0" destOrd="0" presId="urn:microsoft.com/office/officeart/2018/2/layout/IconLabelDescriptionList"/>
+    <dgm:cxn modelId="{1ADAC26C-C21D-4F5E-80D2-8F2BD6A07754}" type="presOf" srcId="{3902D11C-F772-4D98-AD43-68757266B871}" destId="{DF164D61-735C-4C87-8347-8B99FE586313}" srcOrd="0" destOrd="0" presId="urn:microsoft.com/office/officeart/2018/2/layout/IconLabelDescriptionList"/>
     <dgm:cxn modelId="{29660571-F26F-45B6-8E2C-167DA4BE26D0}" srcId="{136F4BFD-0582-4579-82A5-A95C73D55870}" destId="{3902D11C-F772-4D98-AD43-68757266B871}" srcOrd="0" destOrd="0" parTransId="{604A71A0-6B61-4D71-83AF-2F99DB02191E}" sibTransId="{90F04341-BC2E-414C-B73C-082CA4A032F2}"/>
     <dgm:cxn modelId="{3E5FE871-02BD-482D-BC2F-0212E6353F34}" type="presOf" srcId="{D02B5C5A-D5CF-4981-88F1-9872057F386D}" destId="{336AF011-C230-4B81-BC26-BF1B3B4EA562}" srcOrd="0" destOrd="0" presId="urn:microsoft.com/office/officeart/2018/2/layout/IconLabelDescriptionList"/>
     <dgm:cxn modelId="{B7533276-D027-4A08-AAC4-F4BA9C626469}" srcId="{83BC92FE-39A7-43AA-B371-06FC86F327F9}" destId="{BF707721-8F8B-47D7-804D-3109819BE9E5}" srcOrd="0" destOrd="0" parTransId="{0FC4F028-2679-4C1A-B02A-BBF2B9F63150}" sibTransId="{AD3A7166-8836-435B-B8AE-8C254DF1AADE}"/>
@@ -6564,7 +6564,7 @@
           <a:p>
             <a:fld id="{4995A223-E7C9-A243-9A70-FE01E1A1DD65}" type="datetimeFigureOut">
               <a:rPr lang="en-US" smtClean="0"/>
-              <a:t>9/1/2026</a:t>
+              <a:t>9/1/26</a:t>
             </a:fld>
             <a:endParaRPr lang="en-US"/>
           </a:p>
@@ -7335,6 +7335,12 @@
               <a:t>What is the context here?</a:t>
             </a:r>
           </a:p>
+          <a:p>
+            <a:r>
+              <a:rPr lang="en-US" dirty="0"/>
+              <a:t>Progression cycle example</a:t>
+            </a:r>
+          </a:p>
         </p:txBody>
       </p:sp>
       <p:sp>
@@ -7951,7 +7957,7 @@
           <a:p>
             <a:fld id="{1BF61C71-767E-B84C-BFB3-7B18856D27F4}" type="datetimeFigureOut">
               <a:rPr lang="en-US" smtClean="0"/>
-              <a:t>9/1/2026</a:t>
+              <a:t>9/1/26</a:t>
             </a:fld>
             <a:endParaRPr lang="en-US"/>
           </a:p>
@@ -8159,7 +8165,7 @@
           <a:p>
             <a:fld id="{1BF61C71-767E-B84C-BFB3-7B18856D27F4}" type="datetimeFigureOut">
               <a:rPr lang="en-US" smtClean="0"/>
-              <a:t>9/1/2026</a:t>
+              <a:t>9/1/26</a:t>
             </a:fld>
             <a:endParaRPr lang="en-US"/>
           </a:p>
@@ -8377,7 +8383,7 @@
           <a:p>
             <a:fld id="{1BF61C71-767E-B84C-BFB3-7B18856D27F4}" type="datetimeFigureOut">
               <a:rPr lang="en-US" smtClean="0"/>
-              <a:t>9/1/2026</a:t>
+              <a:t>9/1/26</a:t>
             </a:fld>
             <a:endParaRPr lang="en-US"/>
           </a:p>
@@ -8585,7 +8591,7 @@
           <a:p>
             <a:fld id="{1BF61C71-767E-B84C-BFB3-7B18856D27F4}" type="datetimeFigureOut">
               <a:rPr lang="en-US" smtClean="0"/>
-              <a:t>9/1/2026</a:t>
+              <a:t>9/1/26</a:t>
             </a:fld>
             <a:endParaRPr lang="en-US"/>
           </a:p>
@@ -8869,7 +8875,7 @@
           <a:p>
             <a:fld id="{1BF61C71-767E-B84C-BFB3-7B18856D27F4}" type="datetimeFigureOut">
               <a:rPr lang="en-US" smtClean="0"/>
-              <a:t>9/1/2026</a:t>
+              <a:t>9/1/26</a:t>
             </a:fld>
             <a:endParaRPr lang="en-US"/>
           </a:p>
@@ -9145,7 +9151,7 @@
           <a:p>
             <a:fld id="{1BF61C71-767E-B84C-BFB3-7B18856D27F4}" type="datetimeFigureOut">
               <a:rPr lang="en-US" smtClean="0"/>
-              <a:t>9/1/2026</a:t>
+              <a:t>9/1/26</a:t>
             </a:fld>
             <a:endParaRPr lang="en-US"/>
           </a:p>
@@ -9568,7 +9574,7 @@
           <a:p>
             <a:fld id="{1BF61C71-767E-B84C-BFB3-7B18856D27F4}" type="datetimeFigureOut">
               <a:rPr lang="en-US" smtClean="0"/>
-              <a:t>9/1/2026</a:t>
+              <a:t>9/1/26</a:t>
             </a:fld>
             <a:endParaRPr lang="en-US"/>
           </a:p>
@@ -9718,7 +9724,7 @@
           <a:p>
             <a:fld id="{1BF61C71-767E-B84C-BFB3-7B18856D27F4}" type="datetimeFigureOut">
               <a:rPr lang="en-US" smtClean="0"/>
-              <a:t>9/1/2026</a:t>
+              <a:t>9/1/26</a:t>
             </a:fld>
             <a:endParaRPr lang="en-US"/>
           </a:p>
@@ -9839,7 +9845,7 @@
           <a:p>
             <a:fld id="{1BF61C71-767E-B84C-BFB3-7B18856D27F4}" type="datetimeFigureOut">
               <a:rPr lang="en-US" smtClean="0"/>
-              <a:t>9/1/2026</a:t>
+              <a:t>9/1/26</a:t>
             </a:fld>
             <a:endParaRPr lang="en-US"/>
           </a:p>
@@ -10160,7 +10166,7 @@
           <a:p>
             <a:fld id="{1BF61C71-767E-B84C-BFB3-7B18856D27F4}" type="datetimeFigureOut">
               <a:rPr lang="en-US" smtClean="0"/>
-              <a:t>9/1/2026</a:t>
+              <a:t>9/1/26</a:t>
             </a:fld>
             <a:endParaRPr lang="en-US"/>
           </a:p>
@@ -10457,7 +10463,7 @@
           <a:p>
             <a:fld id="{1BF61C71-767E-B84C-BFB3-7B18856D27F4}" type="datetimeFigureOut">
               <a:rPr lang="en-US" smtClean="0"/>
-              <a:t>9/1/2026</a:t>
+              <a:t>9/1/26</a:t>
             </a:fld>
             <a:endParaRPr lang="en-US"/>
           </a:p>
@@ -10711,7 +10717,7 @@
           <a:p>
             <a:fld id="{1BF61C71-767E-B84C-BFB3-7B18856D27F4}" type="datetimeFigureOut">
               <a:rPr lang="en-US" smtClean="0"/>
-              <a:t>9/1/2026</a:t>
+              <a:t>9/1/26</a:t>
             </a:fld>
             <a:endParaRPr lang="en-US"/>
           </a:p>
@@ -11351,47 +11357,6 @@
           </a:p>
         </p:txBody>
       </p:sp>
-      <p:sp>
-        <p:nvSpPr>
-          <p:cNvPr id="4" name="TextBox 3">
-            <a:extLst>
-              <a:ext uri="{FF2B5EF4-FFF2-40B4-BE49-F238E27FC236}">
-                <a16:creationId xmlns:a16="http://schemas.microsoft.com/office/drawing/2014/main" id="{1C475B5E-C7BA-FAD6-E9CD-CB2AB1EB4ACE}"/>
-              </a:ext>
-            </a:extLst>
-          </p:cNvPr>
-          <p:cNvSpPr txBox="1"/>
-          <p:nvPr/>
-        </p:nvSpPr>
-        <p:spPr>
-          <a:xfrm>
-            <a:off x="1572491" y="5960031"/>
-            <a:ext cx="9047018" cy="369332"/>
-          </a:xfrm>
-          <a:prstGeom prst="rect">
-            <a:avLst/>
-          </a:prstGeom>
-          <a:noFill/>
-        </p:spPr>
-        <p:txBody>
-          <a:bodyPr wrap="square">
-            <a:spAutoFit/>
-          </a:bodyPr>
-          <a:lstStyle/>
-          <a:p>
-            <a:pPr lvl="1" algn="ctr"/>
-            <a:r>
-              <a:rPr lang="en-GB" dirty="0"/>
-              <a:t>Workload has meaning only when interpreted in context.</a:t>
-            </a:r>
-            <a:endParaRPr lang="en-GB" sz="2400" b="1" dirty="0">
-              <a:solidFill>
-                <a:srgbClr val="FF0000"/>
-              </a:solidFill>
-            </a:endParaRPr>
-          </a:p>
-        </p:txBody>
-      </p:sp>
     </p:spTree>
     <p:extLst>
       <p:ext uri="{BB962C8B-B14F-4D97-AF65-F5344CB8AC3E}">
@@ -11650,51 +11615,6 @@
                       </p:childTnLst>
                     </p:cTn>
                   </p:par>
-                  <p:par>
-                    <p:cTn id="21" fill="hold">
-                      <p:stCondLst>
-                        <p:cond delay="indefinite"/>
-                      </p:stCondLst>
-                      <p:childTnLst>
-                        <p:par>
-                          <p:cTn id="22" fill="hold">
-                            <p:stCondLst>
-                              <p:cond delay="0"/>
-                            </p:stCondLst>
-                            <p:childTnLst>
-                              <p:par>
-                                <p:cTn id="23" presetID="1" presetClass="entr" presetSubtype="0" fill="hold" grpId="0" nodeType="clickEffect">
-                                  <p:stCondLst>
-                                    <p:cond delay="0"/>
-                                  </p:stCondLst>
-                                  <p:childTnLst>
-                                    <p:set>
-                                      <p:cBhvr>
-                                        <p:cTn id="24" dur="1" fill="hold">
-                                          <p:stCondLst>
-                                            <p:cond delay="0"/>
-                                          </p:stCondLst>
-                                        </p:cTn>
-                                        <p:tgtEl>
-                                          <p:spTgt spid="4"/>
-                                        </p:tgtEl>
-                                        <p:attrNameLst>
-                                          <p:attrName>style.visibility</p:attrName>
-                                        </p:attrNameLst>
-                                      </p:cBhvr>
-                                      <p:to>
-                                        <p:strVal val="visible"/>
-                                      </p:to>
-                                    </p:set>
-                                  </p:childTnLst>
-                                </p:cTn>
-                              </p:par>
-                            </p:childTnLst>
-                          </p:cTn>
-                        </p:par>
-                      </p:childTnLst>
-                    </p:cTn>
-                  </p:par>
                 </p:childTnLst>
               </p:cTn>
               <p:prevCondLst>
@@ -11718,7 +11638,6 @@
     </p:tnLst>
     <p:bldLst>
       <p:bldP spid="3" grpId="0" build="p"/>
-      <p:bldP spid="4" grpId="0"/>
     </p:bldLst>
   </p:timing>
 </p:sld>
@@ -11841,6 +11760,53 @@
           </a:p>
         </p:txBody>
       </p:sp>
+      <p:pic>
+        <p:nvPicPr>
+          <p:cNvPr id="5" name="Picture 2">
+            <a:extLst>
+              <a:ext uri="{FF2B5EF4-FFF2-40B4-BE49-F238E27FC236}">
+                <a16:creationId xmlns:a16="http://schemas.microsoft.com/office/drawing/2014/main" id="{D3416F4F-CF40-8518-A306-2BEB3A3F8B24}"/>
+              </a:ext>
+            </a:extLst>
+          </p:cNvPr>
+          <p:cNvPicPr>
+            <a:picLocks noChangeAspect="1" noChangeArrowheads="1"/>
+          </p:cNvPicPr>
+          <p:nvPr/>
+        </p:nvPicPr>
+        <p:blipFill>
+          <a:blip r:embed="rId3">
+            <a:extLst>
+              <a:ext uri="{28A0092B-C50C-407E-A947-70E740481C1C}">
+                <a14:useLocalDpi xmlns:a14="http://schemas.microsoft.com/office/drawing/2010/main" val="0"/>
+              </a:ext>
+            </a:extLst>
+          </a:blip>
+          <a:srcRect/>
+          <a:stretch>
+            <a:fillRect/>
+          </a:stretch>
+        </p:blipFill>
+        <p:spPr bwMode="auto">
+          <a:xfrm>
+            <a:off x="3855720" y="4816190"/>
+            <a:ext cx="4480560" cy="1903658"/>
+          </a:xfrm>
+          <a:prstGeom prst="rect">
+            <a:avLst/>
+          </a:prstGeom>
+          <a:noFill/>
+          <a:extLst>
+            <a:ext uri="{909E8E84-426E-40DD-AFC4-6F175D3DCCD1}">
+              <a14:hiddenFill xmlns:a14="http://schemas.microsoft.com/office/drawing/2010/main">
+                <a:solidFill>
+                  <a:srgbClr val="FFFFFF"/>
+                </a:solidFill>
+              </a14:hiddenFill>
+            </a:ext>
+          </a:extLst>
+        </p:spPr>
+      </p:pic>
     </p:spTree>
     <p:extLst>
       <p:ext uri="{BB962C8B-B14F-4D97-AF65-F5344CB8AC3E}">
@@ -11988,6 +11954,96 @@
                                               <p:pRg st="4" end="4"/>
                                             </p:txEl>
                                           </p:spTgt>
+                                        </p:tgtEl>
+                                        <p:attrNameLst>
+                                          <p:attrName>style.visibility</p:attrName>
+                                        </p:attrNameLst>
+                                      </p:cBhvr>
+                                      <p:to>
+                                        <p:strVal val="visible"/>
+                                      </p:to>
+                                    </p:set>
+                                  </p:childTnLst>
+                                </p:cTn>
+                              </p:par>
+                            </p:childTnLst>
+                          </p:cTn>
+                        </p:par>
+                      </p:childTnLst>
+                    </p:cTn>
+                  </p:par>
+                  <p:par>
+                    <p:cTn id="15" fill="hold">
+                      <p:stCondLst>
+                        <p:cond delay="indefinite"/>
+                      </p:stCondLst>
+                      <p:childTnLst>
+                        <p:par>
+                          <p:cTn id="16" fill="hold">
+                            <p:stCondLst>
+                              <p:cond delay="0"/>
+                            </p:stCondLst>
+                            <p:childTnLst>
+                              <p:par>
+                                <p:cTn id="17" presetID="1" presetClass="entr" presetSubtype="0" fill="hold" nodeType="clickEffect">
+                                  <p:stCondLst>
+                                    <p:cond delay="0"/>
+                                  </p:stCondLst>
+                                  <p:childTnLst>
+                                    <p:set>
+                                      <p:cBhvr>
+                                        <p:cTn id="18" dur="1" fill="hold">
+                                          <p:stCondLst>
+                                            <p:cond delay="0"/>
+                                          </p:stCondLst>
+                                        </p:cTn>
+                                        <p:tgtEl>
+                                          <p:spTgt spid="5"/>
+                                        </p:tgtEl>
+                                        <p:attrNameLst>
+                                          <p:attrName>style.visibility</p:attrName>
+                                        </p:attrNameLst>
+                                      </p:cBhvr>
+                                      <p:to>
+                                        <p:strVal val="visible"/>
+                                      </p:to>
+                                    </p:set>
+                                  </p:childTnLst>
+                                </p:cTn>
+                              </p:par>
+                            </p:childTnLst>
+                          </p:cTn>
+                        </p:par>
+                      </p:childTnLst>
+                    </p:cTn>
+                  </p:par>
+                  <p:par>
+                    <p:cTn id="19" fill="hold">
+                      <p:stCondLst>
+                        <p:cond delay="indefinite"/>
+                      </p:stCondLst>
+                      <p:childTnLst>
+                        <p:par>
+                          <p:cTn id="20" fill="hold">
+                            <p:stCondLst>
+                              <p:cond delay="0"/>
+                            </p:stCondLst>
+                            <p:childTnLst>
+                              <p:par>
+                                <p:cTn id="21" presetID="1" presetClass="entr" presetSubtype="0" fill="hold" nodeType="clickEffect">
+                                  <p:stCondLst>
+                                    <p:cond delay="0"/>
+                                  </p:stCondLst>
+                                  <p:childTnLst>
+                                    <p:set>
+                                      <p:cBhvr>
+                                        <p:cTn id="22" dur="1" fill="hold">
+                                          <p:stCondLst>
+                                            <p:cond delay="0"/>
+                                          </p:stCondLst>
+                                        </p:cTn>
+                                        <p:tgtEl>
+                                          <p:spTgt spid="5"/>
                                         </p:tgtEl>
                                         <p:attrNameLst>
                                           <p:attrName>style.visibility</p:attrName>
@@ -14457,7 +14513,7 @@
 </file>
 
 <file path=ppt/slides/slide2.xml><?xml version="1.0" encoding="utf-8"?>
-<p:sld xmlns:a="http://schemas.openxmlformats.org/drawingml/2006/main" xmlns:r="http://schemas.openxmlformats.org/officeDocument/2006/relationships" xmlns:p="http://schemas.openxmlformats.org/presentationml/2006/main">
+<p:sld xmlns:a="http://schemas.openxmlformats.org/drawingml/2006/main" xmlns:r="http://schemas.openxmlformats.org/officeDocument/2006/relationships" xmlns:p="http://schemas.openxmlformats.org/presentationml/2006/main" show="0">
   <p:cSld>
     <p:spTree>
       <p:nvGrpSpPr>
@@ -14679,15 +14735,33 @@
                                   </p:childTnLst>
                                 </p:cTn>
                               </p:par>
+                            </p:childTnLst>
+                          </p:cTn>
+                        </p:par>
+                      </p:childTnLst>
+                    </p:cTn>
+                  </p:par>
+                  <p:par>
+                    <p:cTn id="9" fill="hold">
+                      <p:stCondLst>
+                        <p:cond delay="indefinite"/>
+                      </p:stCondLst>
+                      <p:childTnLst>
+                        <p:par>
+                          <p:cTn id="10" fill="hold">
+                            <p:stCondLst>
+                              <p:cond delay="0"/>
+                            </p:stCondLst>
+                            <p:childTnLst>
                               <p:par>
-                                <p:cTn id="9" presetID="1" presetClass="entr" presetSubtype="0" fill="hold" grpId="0" nodeType="withEffect">
+                                <p:cTn id="11" presetID="1" presetClass="entr" presetSubtype="0" fill="hold" grpId="0" nodeType="clickEffect">
                                   <p:stCondLst>
                                     <p:cond delay="0"/>
                                   </p:stCondLst>
                                   <p:childTnLst>
                                     <p:set>
                                       <p:cBhvr>
-                                        <p:cTn id="10" dur="1" fill="hold">
+                                        <p:cTn id="12" dur="1" fill="hold">
                                           <p:stCondLst>
                                             <p:cond delay="0"/>
                                           </p:stCondLst>
@@ -14710,15 +14784,33 @@
                                   </p:childTnLst>
                                 </p:cTn>
                               </p:par>
+                            </p:childTnLst>
+                          </p:cTn>
+                        </p:par>
+                      </p:childTnLst>
+                    </p:cTn>
+                  </p:par>
+                  <p:par>
+                    <p:cTn id="13" fill="hold">
+                      <p:stCondLst>
+                        <p:cond delay="indefinite"/>
+                      </p:stCondLst>
+                      <p:childTnLst>
+                        <p:par>
+                          <p:cTn id="14" fill="hold">
+                            <p:stCondLst>
+                              <p:cond delay="0"/>
+                            </p:stCondLst>
+                            <p:childTnLst>
                               <p:par>
-                                <p:cTn id="11" presetID="1" presetClass="entr" presetSubtype="0" fill="hold" grpId="0" nodeType="withEffect">
+                                <p:cTn id="15" presetID="1" presetClass="entr" presetSubtype="0" fill="hold" grpId="0" nodeType="clickEffect">
                                   <p:stCondLst>
                                     <p:cond delay="0"/>
                                   </p:stCondLst>
                                   <p:childTnLst>
                                     <p:set>
                                       <p:cBhvr>
-                                        <p:cTn id="12" dur="1" fill="hold">
+                                        <p:cTn id="16" dur="1" fill="hold">
                                           <p:stCondLst>
                                             <p:cond delay="0"/>
                                           </p:stCondLst>
@@ -14741,15 +14833,33 @@
                                   </p:childTnLst>
                                 </p:cTn>
                               </p:par>
+                            </p:childTnLst>
+                          </p:cTn>
+                        </p:par>
+                      </p:childTnLst>
+                    </p:cTn>
+                  </p:par>
+                  <p:par>
+                    <p:cTn id="17" fill="hold">
+                      <p:stCondLst>
+                        <p:cond delay="indefinite"/>
+                      </p:stCondLst>
+                      <p:childTnLst>
+                        <p:par>
+                          <p:cTn id="18" fill="hold">
+                            <p:stCondLst>
+                              <p:cond delay="0"/>
+                            </p:stCondLst>
+                            <p:childTnLst>
                               <p:par>
-                                <p:cTn id="13" presetID="1" presetClass="entr" presetSubtype="0" fill="hold" grpId="0" nodeType="withEffect">
+                                <p:cTn id="19" presetID="1" presetClass="entr" presetSubtype="0" fill="hold" grpId="0" nodeType="clickEffect">
                                   <p:stCondLst>
                                     <p:cond delay="0"/>
                                   </p:stCondLst>
                                   <p:childTnLst>
                                     <p:set>
                                       <p:cBhvr>
-                                        <p:cTn id="14" dur="1" fill="hold">
+                                        <p:cTn id="20" dur="1" fill="hold">
                                           <p:stCondLst>
                                             <p:cond delay="0"/>
                                           </p:stCondLst>
@@ -14772,15 +14882,33 @@
                                   </p:childTnLst>
                                 </p:cTn>
                               </p:par>
+                            </p:childTnLst>
+                          </p:cTn>
+                        </p:par>
+                      </p:childTnLst>
+                    </p:cTn>
+                  </p:par>
+                  <p:par>
+                    <p:cTn id="21" fill="hold">
+                      <p:stCondLst>
+                        <p:cond delay="indefinite"/>
+                      </p:stCondLst>
+                      <p:childTnLst>
+                        <p:par>
+                          <p:cTn id="22" fill="hold">
+                            <p:stCondLst>
+                              <p:cond delay="0"/>
+                            </p:stCondLst>
+                            <p:childTnLst>
                               <p:par>
-                                <p:cTn id="15" presetID="1" presetClass="entr" presetSubtype="0" fill="hold" grpId="0" nodeType="withEffect">
+                                <p:cTn id="23" presetID="1" presetClass="entr" presetSubtype="0" fill="hold" grpId="0" nodeType="clickEffect">
                                   <p:stCondLst>
                                     <p:cond delay="0"/>
                                   </p:stCondLst>
                                   <p:childTnLst>
                                     <p:set>
                                       <p:cBhvr>
-                                        <p:cTn id="16" dur="1" fill="hold">
+                                        <p:cTn id="24" dur="1" fill="hold">
                                           <p:stCondLst>
                                             <p:cond delay="0"/>
                                           </p:stCondLst>
@@ -14831,7 +14959,7 @@
       </p:par>
     </p:tnLst>
     <p:bldLst>
-      <p:bldP spid="3" grpId="0" build="p"/>
+      <p:bldP spid="3" grpId="0" uiExpand="1" build="p"/>
     </p:bldLst>
   </p:timing>
 </p:sld>
